--- a/templates/analysis-block.pptx
+++ b/templates/analysis-block.pptx
@@ -38628,7 +38628,4375 @@
 </p:sldMaster>
 </file>
 
+<file path=ppt/slides/slide1.xml><?xml version="1.0" encoding="utf-8"?>
+<p:sld xmlns:a="http://schemas.openxmlformats.org/drawingml/2006/main" xmlns:r="http://schemas.openxmlformats.org/officeDocument/2006/relationships" xmlns:p="http://schemas.openxmlformats.org/presentationml/2006/main">
+  <p:cSld>
+    <p:spTree>
+      <p:nvGrpSpPr>
+        <p:cNvPr id="1" name=""/>
+        <p:cNvGrpSpPr/>
+        <p:nvPr/>
+      </p:nvGrpSpPr>
+      <p:grpSpPr>
+        <a:xfrm>
+          <a:off x="0" y="0"/>
+          <a:ext cx="0" cy="0"/>
+          <a:chOff x="0" y="0"/>
+          <a:chExt cx="0" cy="0"/>
+        </a:xfrm>
+      </p:grpSpPr>
+      <p:sp>
+        <p:nvSpPr>
+          <p:cNvPr id="18434" name="Rectangle 2"/>
+          <p:cNvSpPr>
+            <a:spLocks noGrp="1" noChangeArrowheads="1"/>
+          </p:cNvSpPr>
+          <p:nvPr>
+            <p:ph type="title"/>
+          </p:nvPr>
+        </p:nvSpPr>
+        <p:spPr>
+          <a:xfrm>
+            <a:off x="640852" y="20320"/>
+            <a:ext cx="10711731" cy="668338"/>
+          </a:xfrm>
+        </p:spPr>
+        <p:txBody>
+          <a:bodyPr anchor="ctr"/>
+          <a:lstStyle/>
+          <a:p>
+            <a:pPr eaLnBrk="1" hangingPunct="1">
+              <a:defRPr/>
+            </a:pPr>
+            <a:r>
+              <a:rPr lang="fr-FR" dirty="0">
+                <a:solidFill>
+                  <a:schemeClr val="tx1"/>
+                </a:solidFill>
+                <a:effectLst/>
+              </a:rPr>
+              <a:t>Evaluation de la formation</a:t>
+            </a:r>
+          </a:p>
+        </p:txBody>
+      </p:sp>
+      <p:sp>
+        <p:nvSpPr>
+          <p:cNvPr id="56323" name="Rectangle 3"/>
+          <p:cNvSpPr>
+            <a:spLocks noGrp="1" noChangeArrowheads="1"/>
+          </p:cNvSpPr>
+          <p:nvPr>
+            <p:ph idx="1"/>
+          </p:nvPr>
+        </p:nvSpPr>
+        <p:spPr>
+          <a:xfrm>
+            <a:off x="640854" y="836712"/>
+            <a:ext cx="10711730" cy="4776689"/>
+          </a:xfrm>
+        </p:spPr>
+        <p:txBody>
+          <a:bodyPr/>
+          <a:lstStyle/>
+          <a:p>
+            <a:pPr marL="0" indent="355600" algn="just" eaLnBrk="1" hangingPunct="1">
+              <a:lnSpc>
+                <a:spcPct val="80000"/>
+              </a:lnSpc>
+              <a:buClr>
+                <a:srgbClr val="0070C0"/>
+              </a:buClr>
+            </a:pPr>
+            <a:r>
+              <a:rPr lang="fr-FR" sz="1600" dirty="0"/>
+              <a:t>L'évaluation de l'efficacité de l’action de formation se déclinera en trois dimensions complémentaires et hiérarchisées, appelant chacune des méthodologies différentes, et présentant chacune des difficultés spécifiques.</a:t>
+            </a:r>
+          </a:p>
+          <a:p>
+            <a:pPr marL="0" indent="355600" algn="just" eaLnBrk="1" hangingPunct="1">
+              <a:lnSpc>
+                <a:spcPct val="80000"/>
+              </a:lnSpc>
+              <a:buClr>
+                <a:srgbClr val="0070C0"/>
+              </a:buClr>
+            </a:pPr>
+            <a:endParaRPr lang="fr-FR" sz="1600" dirty="0"/>
+          </a:p>
+          <a:p>
+            <a:pPr marL="0" indent="355600" algn="just" eaLnBrk="1" hangingPunct="1">
+              <a:lnSpc>
+                <a:spcPct val="80000"/>
+              </a:lnSpc>
+              <a:buClr>
+                <a:srgbClr val="0070C0"/>
+              </a:buClr>
+            </a:pPr>
+            <a:r>
+              <a:rPr lang="fr-FR" sz="1600" dirty="0"/>
+              <a:t>Le premier niveau  concerne l'évaluation des acquis, ou encore l'efficacité pédagogique : est-ce que les objectifs ont été atteints ? En d'autres termes, " les participants ont-ils acquis à la fin de la formation les compétences qui étaient visées par les objectifs de formation ? ".</a:t>
+            </a:r>
+          </a:p>
+          <a:p>
+            <a:pPr marL="0" indent="355600" algn="just" eaLnBrk="1" hangingPunct="1">
+              <a:lnSpc>
+                <a:spcPct val="80000"/>
+              </a:lnSpc>
+              <a:buClr>
+                <a:srgbClr val="0070C0"/>
+              </a:buClr>
+            </a:pPr>
+            <a:endParaRPr lang="fr-FR" sz="1600" dirty="0"/>
+          </a:p>
+          <a:p>
+            <a:pPr marL="0" indent="355600" algn="just" eaLnBrk="1" hangingPunct="1">
+              <a:lnSpc>
+                <a:spcPct val="80000"/>
+              </a:lnSpc>
+              <a:buClr>
+                <a:srgbClr val="0070C0"/>
+              </a:buClr>
+            </a:pPr>
+            <a:r>
+              <a:rPr lang="fr-FR" sz="1600" dirty="0"/>
+              <a:t>Le deuxième niveau concerne le transfert : est-ce que les acquis de la formation sont appliqués sur le terrain ? En d'autres termes, " les participants, une fois revenus sur leur poste de travail, pensent-ils pouvoir mettre en œuvre les compétences acquises lors de la formation ? ".</a:t>
+            </a:r>
+          </a:p>
+          <a:p>
+            <a:pPr marL="0" indent="355600" algn="just" eaLnBrk="1" hangingPunct="1">
+              <a:lnSpc>
+                <a:spcPct val="80000"/>
+              </a:lnSpc>
+              <a:buClr>
+                <a:srgbClr val="0070C0"/>
+              </a:buClr>
+            </a:pPr>
+            <a:endParaRPr lang="fr-FR" sz="1600" dirty="0"/>
+          </a:p>
+          <a:p>
+            <a:pPr marL="0" indent="355600" algn="just" eaLnBrk="1" hangingPunct="1">
+              <a:lnSpc>
+                <a:spcPct val="80000"/>
+              </a:lnSpc>
+              <a:buClr>
+                <a:srgbClr val="0070C0"/>
+              </a:buClr>
+            </a:pPr>
+            <a:r>
+              <a:rPr lang="fr-FR" sz="1600" dirty="0"/>
+              <a:t>Le troisième niveau concerne l'impact de la formation : est-ce que les acquis de la formation permettent d'atteindre certains résultats sur le terrain ? En d'autres termes, " les nouvelles compétences des participants permettent-elles de faire évoluer l'organisation ? ".</a:t>
+            </a:r>
+          </a:p>
+          <a:p>
+            <a:pPr marL="0" indent="355600" algn="just" eaLnBrk="1" hangingPunct="1">
+              <a:lnSpc>
+                <a:spcPct val="80000"/>
+              </a:lnSpc>
+              <a:buClr>
+                <a:srgbClr val="0070C0"/>
+              </a:buClr>
+            </a:pPr>
+            <a:endParaRPr lang="fr-FR" sz="1600" dirty="0"/>
+          </a:p>
+          <a:p>
+            <a:pPr marL="0" indent="355600" eaLnBrk="1" hangingPunct="1">
+              <a:lnSpc>
+                <a:spcPct val="80000"/>
+              </a:lnSpc>
+              <a:buClr>
+                <a:srgbClr val="0070C0"/>
+              </a:buClr>
+            </a:pPr>
+            <a:r>
+              <a:rPr lang="fr-FR" sz="1600" dirty="0"/>
+              <a:t>Nous évaluerons également le processus de formation, qui est indispensable si on souhaite interpréter en profondeur les éventuelles difficultés rencontrées et apporter les améliorations nécessaires.</a:t>
+            </a:r>
+            <a:br>
+              <a:rPr lang="fr-FR" sz="1600" dirty="0"/>
+            </a:br>
+            <a:endParaRPr lang="fr-FR" sz="1600" dirty="0"/>
+          </a:p>
+        </p:txBody>
+      </p:sp>
+      <p:pic>
+        <p:nvPicPr>
+          <p:cNvPr id="56324" name="Picture 4" descr="Fotolia_10083216_XS"/>
+          <p:cNvPicPr>
+            <a:picLocks noChangeAspect="1" noChangeArrowheads="1"/>
+          </p:cNvPicPr>
+          <p:nvPr/>
+        </p:nvPicPr>
+        <p:blipFill>
+          <a:blip r:embed="rId3">
+            <a:extLst>
+              <a:ext uri="{28A0092B-C50C-407E-A947-70E740481C1C}">
+                <a14:useLocalDpi xmlns:a14="http://schemas.microsoft.com/office/drawing/2010/main" val="0"/>
+              </a:ext>
+            </a:extLst>
+          </a:blip>
+          <a:srcRect/>
+          <a:stretch>
+            <a:fillRect/>
+          </a:stretch>
+        </p:blipFill>
+        <p:spPr bwMode="auto">
+          <a:xfrm>
+            <a:off x="4094164" y="5500688"/>
+            <a:ext cx="1455737" cy="1092200"/>
+          </a:xfrm>
+          <a:prstGeom prst="rect">
+            <a:avLst/>
+          </a:prstGeom>
+          <a:noFill/>
+          <a:ln>
+            <a:noFill/>
+          </a:ln>
+          <a:extLst>
+            <a:ext uri="{909E8E84-426E-40DD-AFC4-6F175D3DCCD1}">
+              <a14:hiddenFill xmlns:a14="http://schemas.microsoft.com/office/drawing/2010/main">
+                <a:solidFill>
+                  <a:srgbClr val="FFFFFF"/>
+                </a:solidFill>
+              </a14:hiddenFill>
+            </a:ext>
+            <a:ext uri="{91240B29-F687-4F45-9708-019B960494DF}">
+              <a14:hiddenLine xmlns:a14="http://schemas.microsoft.com/office/drawing/2010/main" w="9525">
+                <a:solidFill>
+                  <a:srgbClr val="000000"/>
+                </a:solidFill>
+                <a:miter lim="800000"/>
+                <a:headEnd/>
+                <a:tailEnd/>
+              </a14:hiddenLine>
+            </a:ext>
+          </a:extLst>
+        </p:spPr>
+      </p:pic>
+      <p:sp>
+        <p:nvSpPr>
+          <p:cNvPr id="2" name="Espace réservé du numéro de diapositive 1"/>
+          <p:cNvSpPr>
+            <a:spLocks noGrp="1"/>
+          </p:cNvSpPr>
+          <p:nvPr>
+            <p:ph type="sldNum" sz="quarter" idx="12"/>
+          </p:nvPr>
+        </p:nvSpPr>
+        <p:spPr/>
+        <p:txBody>
+          <a:bodyPr/>
+          <a:lstStyle/>
+          <a:p>
+            <a:pPr>
+              <a:defRPr/>
+            </a:pPr>
+            <a:fld id="{C16EBFAD-7D7E-4EEE-8122-1782B4EC52E1}" type="slidenum">
+              <a:rPr lang="fr-FR" smtClean="0"/>
+              <a:pPr>
+                <a:defRPr/>
+              </a:pPr>
+              <a:t>4</a:t>
+            </a:fld>
+            <a:endParaRPr lang="fr-FR"/>
+          </a:p>
+        </p:txBody>
+      </p:sp>
+    </p:spTree>
+    <p:extLst>
+      <p:ext uri="{BB962C8B-B14F-4D97-AF65-F5344CB8AC3E}">
+        <p14:creationId xmlns:p14="http://schemas.microsoft.com/office/powerpoint/2010/main" val="753976613"/>
+      </p:ext>
+    </p:extLst>
+  </p:cSld>
+  <p:clrMapOvr>
+    <a:masterClrMapping/>
+  </p:clrMapOvr>
+</p:sld>
+</file>
+
 <file path=ppt/slides/slide10.xml><?xml version="1.0" encoding="utf-8"?>
+<p:sld xmlns:a="http://schemas.openxmlformats.org/drawingml/2006/main" xmlns:r="http://schemas.openxmlformats.org/officeDocument/2006/relationships" xmlns:p="http://schemas.openxmlformats.org/presentationml/2006/main">
+  <p:cSld>
+    <p:spTree>
+      <p:nvGrpSpPr>
+        <p:cNvPr id="1" name=""/>
+        <p:cNvGrpSpPr/>
+        <p:nvPr/>
+      </p:nvGrpSpPr>
+      <p:grpSpPr>
+        <a:xfrm>
+          <a:off x="0" y="0"/>
+          <a:ext cx="0" cy="0"/>
+          <a:chOff x="0" y="0"/>
+          <a:chExt cx="0" cy="0"/>
+        </a:xfrm>
+      </p:grpSpPr>
+      <p:sp>
+        <p:nvSpPr>
+          <p:cNvPr id="3" name="Espace réservé du numéro de diapositive 2"/>
+          <p:cNvSpPr>
+            <a:spLocks noGrp="1"/>
+          </p:cNvSpPr>
+          <p:nvPr>
+            <p:ph type="sldNum" sz="quarter" idx="12"/>
+          </p:nvPr>
+        </p:nvSpPr>
+        <p:spPr>
+          <a:xfrm>
+            <a:off x="9271000" y="6207125"/>
+            <a:ext cx="2844800" cy="457200"/>
+          </a:xfrm>
+        </p:spPr>
+        <p:txBody>
+          <a:bodyPr wrap="square" anchor="t">
+            <a:normAutofit/>
+          </a:bodyPr>
+          <a:lstStyle/>
+          <a:p>
+            <a:pPr>
+              <a:spcAft>
+                <a:spcPts val="600"/>
+              </a:spcAft>
+              <a:defRPr/>
+            </a:pPr>
+            <a:fld id="{156ABF86-EFC2-454D-AD05-896C81F76FA1}" type="slidenum">
+              <a:rPr lang="fr-FR" smtClean="0"/>
+              <a:pPr>
+                <a:spcAft>
+                  <a:spcPts val="600"/>
+                </a:spcAft>
+                <a:defRPr/>
+              </a:pPr>
+              <a:t>13</a:t>
+            </a:fld>
+            <a:endParaRPr lang="fr-FR"/>
+          </a:p>
+        </p:txBody>
+      </p:sp>
+      <p:sp>
+        <p:nvSpPr>
+          <p:cNvPr id="2" name="ZoneTexte 1">
+            <a:extLst>
+              <a:ext uri="{FF2B5EF4-FFF2-40B4-BE49-F238E27FC236}">
+                <a16:creationId xmlns:a16="http://schemas.microsoft.com/office/drawing/2014/main" id="{90D73DDF-1BFE-B63B-ACA4-3A1EA51E97F6}"/>
+              </a:ext>
+            </a:extLst>
+          </p:cNvPr>
+          <p:cNvSpPr txBox="1"/>
+          <p:nvPr/>
+        </p:nvSpPr>
+        <p:spPr>
+          <a:xfrm>
+            <a:off x="633234" y="120005"/>
+            <a:ext cx="10476482" cy="461665"/>
+          </a:xfrm>
+          <a:prstGeom prst="rect">
+            <a:avLst/>
+          </a:prstGeom>
+          <a:noFill/>
+        </p:spPr>
+        <p:txBody>
+          <a:bodyPr wrap="square" anchor="ctr">
+            <a:spAutoFit/>
+          </a:bodyPr>
+          <a:lstStyle>
+            <a:defPPr>
+              <a:defRPr lang="fr-FR"/>
+            </a:defPPr>
+            <a:lvl1pPr>
+              <a:defRPr sz="2400" b="1">
+                <a:effectLst>
+                  <a:outerShdw blurRad="38100" dist="38100" dir="2700000" algn="tl">
+                    <a:srgbClr val="000000">
+                      <a:alpha val="43137"/>
+                    </a:srgbClr>
+                  </a:outerShdw>
+                </a:effectLst>
+                <a:latin typeface="Calibri" panose="020F0502020204030204" pitchFamily="34" charset="0"/>
+                <a:ea typeface="Times New Roman" panose="02020603050405020304" pitchFamily="18" charset="0"/>
+              </a:defRPr>
+            </a:lvl1pPr>
+          </a:lstStyle>
+          <a:p>
+            <a:r>
+              <a:rPr lang="fr-FR" dirty="0" sz="2400" b="1">
+                <a:effectLst/>
+                <a:latin typeface="Calibri" panose="020F0502020204030204" pitchFamily="34" charset="0"/>
+              </a:rPr>
+              <a:t>7. Les supports étaient adaptés (photos, vidéos…)</a:t>
+            </a:r>
+          </a:p>
+        </p:txBody>
+      </p:sp>
+      <p:grpSp>
+        <p:nvGrpSpPr>
+          <p:cNvPr id="4" name="Groupe 3">
+            <a:extLst>
+              <a:ext uri="{FF2B5EF4-FFF2-40B4-BE49-F238E27FC236}">
+                <a16:creationId xmlns:a16="http://schemas.microsoft.com/office/drawing/2014/main" id="{90F130A6-9121-7D10-9071-1366376C65FD}"/>
+              </a:ext>
+            </a:extLst>
+          </p:cNvPr>
+          <p:cNvGrpSpPr/>
+          <p:nvPr/>
+        </p:nvGrpSpPr>
+        <p:grpSpPr>
+          <a:xfrm>
+            <a:off x="9232592" y="1876755"/>
+            <a:ext cx="2276869" cy="3104489"/>
+            <a:chOff x="9375619" y="1843456"/>
+            <a:chExt cx="2276869" cy="3104489"/>
+          </a:xfrm>
+        </p:grpSpPr>
+        <p:grpSp>
+          <p:nvGrpSpPr>
+            <p:cNvPr id="5" name="Groupe 4">
+              <a:extLst>
+                <a:ext uri="{FF2B5EF4-FFF2-40B4-BE49-F238E27FC236}">
+                  <a16:creationId xmlns:a16="http://schemas.microsoft.com/office/drawing/2014/main" id="{13E75F30-23C3-6D80-8025-30172A23AC7F}"/>
+                </a:ext>
+              </a:extLst>
+            </p:cNvPr>
+            <p:cNvGrpSpPr/>
+            <p:nvPr/>
+          </p:nvGrpSpPr>
+          <p:grpSpPr>
+            <a:xfrm>
+              <a:off x="9375619" y="1843456"/>
+              <a:ext cx="576051" cy="3104489"/>
+              <a:chOff x="9424517" y="1534516"/>
+              <a:chExt cx="576051" cy="3104489"/>
+            </a:xfrm>
+          </p:grpSpPr>
+          <p:pic>
+            <p:nvPicPr>
+              <p:cNvPr id="10" name="Image 9">
+                <a:extLst>
+                  <a:ext uri="{FF2B5EF4-FFF2-40B4-BE49-F238E27FC236}">
+                    <a16:creationId xmlns:a16="http://schemas.microsoft.com/office/drawing/2014/main" id="{F2251A6D-3750-1680-7638-AFCA60314A26}"/>
+                  </a:ext>
+                </a:extLst>
+              </p:cNvPr>
+              <p:cNvPicPr>
+                <a:picLocks noChangeAspect="1"/>
+              </p:cNvPicPr>
+              <p:nvPr/>
+            </p:nvPicPr>
+            <p:blipFill>
+              <a:blip r:embed="rId3"/>
+              <a:stretch>
+                <a:fillRect/>
+              </a:stretch>
+            </p:blipFill>
+            <p:spPr>
+              <a:xfrm>
+                <a:off x="9424517" y="1534516"/>
+                <a:ext cx="540000" cy="540000"/>
+              </a:xfrm>
+              <a:prstGeom prst="rect">
+                <a:avLst/>
+              </a:prstGeom>
+            </p:spPr>
+          </p:pic>
+          <p:pic>
+            <p:nvPicPr>
+              <p:cNvPr id="11" name="Image 10">
+                <a:extLst>
+                  <a:ext uri="{FF2B5EF4-FFF2-40B4-BE49-F238E27FC236}">
+                    <a16:creationId xmlns:a16="http://schemas.microsoft.com/office/drawing/2014/main" id="{3CE762DD-0F17-933D-47C9-F68418548276}"/>
+                  </a:ext>
+                </a:extLst>
+              </p:cNvPr>
+              <p:cNvPicPr>
+                <a:picLocks noChangeAspect="1"/>
+              </p:cNvPicPr>
+              <p:nvPr/>
+            </p:nvPicPr>
+            <p:blipFill>
+              <a:blip r:embed="rId4"/>
+              <a:stretch>
+                <a:fillRect/>
+              </a:stretch>
+            </p:blipFill>
+            <p:spPr>
+              <a:xfrm>
+                <a:off x="9476507" y="2350426"/>
+                <a:ext cx="488010" cy="540000"/>
+              </a:xfrm>
+              <a:prstGeom prst="rect">
+                <a:avLst/>
+              </a:prstGeom>
+            </p:spPr>
+          </p:pic>
+          <p:pic>
+            <p:nvPicPr>
+              <p:cNvPr id="12" name="Image 11">
+                <a:extLst>
+                  <a:ext uri="{FF2B5EF4-FFF2-40B4-BE49-F238E27FC236}">
+                    <a16:creationId xmlns:a16="http://schemas.microsoft.com/office/drawing/2014/main" id="{DC72C2BC-B53D-36F9-E04A-4C8F065953D7}"/>
+                  </a:ext>
+                </a:extLst>
+              </p:cNvPr>
+              <p:cNvPicPr>
+                <a:picLocks noChangeAspect="1"/>
+              </p:cNvPicPr>
+              <p:nvPr/>
+            </p:nvPicPr>
+            <p:blipFill>
+              <a:blip r:embed="rId5"/>
+              <a:stretch>
+                <a:fillRect/>
+              </a:stretch>
+            </p:blipFill>
+            <p:spPr>
+              <a:xfrm>
+                <a:off x="9449290" y="3238206"/>
+                <a:ext cx="490454" cy="468000"/>
+              </a:xfrm>
+              <a:prstGeom prst="rect">
+                <a:avLst/>
+              </a:prstGeom>
+            </p:spPr>
+          </p:pic>
+          <p:pic>
+            <p:nvPicPr>
+              <p:cNvPr id="13" name="Image 12">
+                <a:extLst>
+                  <a:ext uri="{FF2B5EF4-FFF2-40B4-BE49-F238E27FC236}">
+                    <a16:creationId xmlns:a16="http://schemas.microsoft.com/office/drawing/2014/main" id="{F437585C-0CD1-D168-12C5-6E67892EB86F}"/>
+                  </a:ext>
+                </a:extLst>
+              </p:cNvPr>
+              <p:cNvPicPr>
+                <a:picLocks noChangeAspect="1"/>
+              </p:cNvPicPr>
+              <p:nvPr/>
+            </p:nvPicPr>
+            <p:blipFill>
+              <a:blip r:embed="rId6"/>
+              <a:stretch>
+                <a:fillRect/>
+              </a:stretch>
+            </p:blipFill>
+            <p:spPr>
+              <a:xfrm>
+                <a:off x="9440455" y="4099005"/>
+                <a:ext cx="560113" cy="540000"/>
+              </a:xfrm>
+              <a:prstGeom prst="rect">
+                <a:avLst/>
+              </a:prstGeom>
+            </p:spPr>
+          </p:pic>
+        </p:grpSp>
+        <p:sp>
+          <p:nvSpPr>
+            <p:cNvPr id="6" name="ZoneTexte 5">
+              <a:extLst>
+                <a:ext uri="{FF2B5EF4-FFF2-40B4-BE49-F238E27FC236}">
+                  <a16:creationId xmlns:a16="http://schemas.microsoft.com/office/drawing/2014/main" id="{67A1B1E8-BA22-C803-8F40-F0236D96859F}"/>
+                </a:ext>
+              </a:extLst>
+            </p:cNvPr>
+            <p:cNvSpPr txBox="1"/>
+            <p:nvPr/>
+          </p:nvSpPr>
+          <p:spPr>
+            <a:xfrm>
+              <a:off x="10080404" y="1928790"/>
+              <a:ext cx="1572084" cy="369332"/>
+            </a:xfrm>
+            <a:prstGeom prst="rect">
+              <a:avLst/>
+            </a:prstGeom>
+            <a:noFill/>
+          </p:spPr>
+          <p:txBody>
+            <a:bodyPr wrap="square">
+              <a:spAutoFit/>
+            </a:bodyPr>
+            <a:lstStyle/>
+            <a:p>
+              <a:r>
+                <a:rPr lang="fr-FR"/>
+                <a:t>Très satisfait</a:t>
+              </a:r>
+            </a:p>
+          </p:txBody>
+        </p:sp>
+        <p:sp>
+          <p:nvSpPr>
+            <p:cNvPr id="7" name="ZoneTexte 6">
+              <a:extLst>
+                <a:ext uri="{FF2B5EF4-FFF2-40B4-BE49-F238E27FC236}">
+                  <a16:creationId xmlns:a16="http://schemas.microsoft.com/office/drawing/2014/main" id="{1BBFF049-99D3-AC89-23FF-FF9DE6B8BBC4}"/>
+                </a:ext>
+              </a:extLst>
+            </p:cNvPr>
+            <p:cNvSpPr txBox="1"/>
+            <p:nvPr/>
+          </p:nvSpPr>
+          <p:spPr>
+            <a:xfrm>
+              <a:off x="10105396" y="2744700"/>
+              <a:ext cx="1176007" cy="369332"/>
+            </a:xfrm>
+            <a:prstGeom prst="rect">
+              <a:avLst/>
+            </a:prstGeom>
+            <a:noFill/>
+          </p:spPr>
+          <p:txBody>
+            <a:bodyPr wrap="square">
+              <a:spAutoFit/>
+            </a:bodyPr>
+            <a:lstStyle/>
+            <a:p>
+              <a:r>
+                <a:rPr lang="fr-FR"/>
+                <a:t>Satisfait</a:t>
+              </a:r>
+            </a:p>
+          </p:txBody>
+        </p:sp>
+        <p:sp>
+          <p:nvSpPr>
+            <p:cNvPr id="8" name="ZoneTexte 7">
+              <a:extLst>
+                <a:ext uri="{FF2B5EF4-FFF2-40B4-BE49-F238E27FC236}">
+                  <a16:creationId xmlns:a16="http://schemas.microsoft.com/office/drawing/2014/main" id="{8FFD13E0-1684-8D7F-E40E-1D44E57BEA1A}"/>
+                </a:ext>
+              </a:extLst>
+            </p:cNvPr>
+            <p:cNvSpPr txBox="1"/>
+            <p:nvPr/>
+          </p:nvSpPr>
+          <p:spPr>
+            <a:xfrm>
+              <a:off x="10132291" y="3642635"/>
+              <a:ext cx="1122218" cy="369332"/>
+            </a:xfrm>
+            <a:prstGeom prst="rect">
+              <a:avLst/>
+            </a:prstGeom>
+            <a:noFill/>
+          </p:spPr>
+          <p:txBody>
+            <a:bodyPr wrap="square">
+              <a:spAutoFit/>
+            </a:bodyPr>
+            <a:lstStyle/>
+            <a:p>
+              <a:r>
+                <a:rPr lang="fr-FR"/>
+                <a:t>Déçu</a:t>
+              </a:r>
+            </a:p>
+          </p:txBody>
+        </p:sp>
+        <p:sp>
+          <p:nvSpPr>
+            <p:cNvPr id="9" name="ZoneTexte 8">
+              <a:extLst>
+                <a:ext uri="{FF2B5EF4-FFF2-40B4-BE49-F238E27FC236}">
+                  <a16:creationId xmlns:a16="http://schemas.microsoft.com/office/drawing/2014/main" id="{5730AE2E-7EF8-E0CB-8A59-02944FF59432}"/>
+                </a:ext>
+              </a:extLst>
+            </p:cNvPr>
+            <p:cNvSpPr txBox="1"/>
+            <p:nvPr/>
+          </p:nvSpPr>
+          <p:spPr>
+            <a:xfrm>
+              <a:off x="10105396" y="4540570"/>
+              <a:ext cx="1303142" cy="369332"/>
+            </a:xfrm>
+            <a:prstGeom prst="rect">
+              <a:avLst/>
+            </a:prstGeom>
+            <a:noFill/>
+          </p:spPr>
+          <p:txBody>
+            <a:bodyPr wrap="square">
+              <a:spAutoFit/>
+            </a:bodyPr>
+            <a:lstStyle/>
+            <a:p>
+              <a:r>
+                <a:rPr lang="fr-FR" sz="1800" b="0" i="0" u="none" strike="noStrike">
+                  <a:solidFill>
+                    <a:srgbClr val="000000"/>
+                  </a:solidFill>
+                  <a:effectLst/>
+                  <a:latin typeface="Calibri" panose="020F0502020204030204" pitchFamily="34" charset="0"/>
+                </a:rPr>
+                <a:t>Très déçu</a:t>
+              </a:r>
+              <a:r>
+                <a:rPr lang="fr-FR"/>
+                <a:t> </a:t>
+              </a:r>
+            </a:p>
+          </p:txBody>
+        </p:sp>
+      </p:grpSp>
+      <p:graphicFrame>
+        <p:nvGraphicFramePr>
+          <p:cNvPr id="14" name="Graphique 13">
+            <a:extLst>
+              <a:ext uri="{FF2B5EF4-FFF2-40B4-BE49-F238E27FC236}">
+                <a16:creationId xmlns:a16="http://schemas.microsoft.com/office/drawing/2014/main" id="{E3B72F12-C928-870F-EE1D-C1901EFFC06E}"/>
+              </a:ext>
+            </a:extLst>
+          </p:cNvPr>
+          <p:cNvGraphicFramePr/>
+          <p:nvPr>
+            <p:extLst>
+              <p:ext uri="{D42A27DB-BD31-4B8C-83A1-F6EECF244321}">
+                <p14:modId xmlns:p14="http://schemas.microsoft.com/office/powerpoint/2010/main" val="211513403"/>
+              </p:ext>
+            </p:extLst>
+          </p:nvPr>
+        </p:nvGraphicFramePr>
+        <p:xfrm>
+          <a:off x="633234" y="871111"/>
+          <a:ext cx="8128000" cy="5418667"/>
+        </p:xfrm>
+        <a:graphic>
+          <a:graphicData uri="http://schemas.openxmlformats.org/drawingml/2006/chart">
+            <c:chart xmlns:c="http://schemas.openxmlformats.org/drawingml/2006/chart" xmlns:r="http://schemas.openxmlformats.org/officeDocument/2006/relationships" r:id="rId7"/>
+          </a:graphicData>
+        </a:graphic>
+      </p:graphicFrame>
+    </p:spTree>
+    <p:extLst>
+      <p:ext uri="{BB962C8B-B14F-4D97-AF65-F5344CB8AC3E}">
+        <p14:creationId xmlns:p14="http://schemas.microsoft.com/office/powerpoint/2010/main" val="3961741590"/>
+      </p:ext>
+    </p:extLst>
+  </p:cSld>
+  <p:clrMapOvr>
+    <a:masterClrMapping/>
+  </p:clrMapOvr>
+</p:sld>
+</file>
+
+<file path=ppt/slides/slide11.xml><?xml version="1.0" encoding="utf-8"?>
+<p:sld xmlns:a="http://schemas.openxmlformats.org/drawingml/2006/main" xmlns:r="http://schemas.openxmlformats.org/officeDocument/2006/relationships" xmlns:p="http://schemas.openxmlformats.org/presentationml/2006/main">
+  <p:cSld>
+    <p:spTree>
+      <p:nvGrpSpPr>
+        <p:cNvPr id="1" name=""/>
+        <p:cNvGrpSpPr/>
+        <p:nvPr/>
+      </p:nvGrpSpPr>
+      <p:grpSpPr>
+        <a:xfrm>
+          <a:off x="0" y="0"/>
+          <a:ext cx="0" cy="0"/>
+          <a:chOff x="0" y="0"/>
+          <a:chExt cx="0" cy="0"/>
+        </a:xfrm>
+      </p:grpSpPr>
+      <p:sp>
+        <p:nvSpPr>
+          <p:cNvPr id="3" name="Espace réservé du numéro de diapositive 2"/>
+          <p:cNvSpPr>
+            <a:spLocks noGrp="1"/>
+          </p:cNvSpPr>
+          <p:nvPr>
+            <p:ph type="sldNum" sz="quarter" idx="12"/>
+          </p:nvPr>
+        </p:nvSpPr>
+        <p:spPr>
+          <a:xfrm>
+            <a:off x="9271000" y="6207125"/>
+            <a:ext cx="2844800" cy="457200"/>
+          </a:xfrm>
+        </p:spPr>
+        <p:txBody>
+          <a:bodyPr wrap="square" anchor="t">
+            <a:normAutofit/>
+          </a:bodyPr>
+          <a:lstStyle/>
+          <a:p>
+            <a:pPr>
+              <a:spcAft>
+                <a:spcPts val="600"/>
+              </a:spcAft>
+              <a:defRPr/>
+            </a:pPr>
+            <a:fld id="{156ABF86-EFC2-454D-AD05-896C81F76FA1}" type="slidenum">
+              <a:rPr lang="fr-FR" smtClean="0"/>
+              <a:pPr>
+                <a:spcAft>
+                  <a:spcPts val="600"/>
+                </a:spcAft>
+                <a:defRPr/>
+              </a:pPr>
+              <a:t>14</a:t>
+            </a:fld>
+            <a:endParaRPr lang="fr-FR"/>
+          </a:p>
+        </p:txBody>
+      </p:sp>
+      <p:sp>
+        <p:nvSpPr>
+          <p:cNvPr id="2" name="ZoneTexte 1">
+            <a:extLst>
+              <a:ext uri="{FF2B5EF4-FFF2-40B4-BE49-F238E27FC236}">
+                <a16:creationId xmlns:a16="http://schemas.microsoft.com/office/drawing/2014/main" id="{4AD7BE27-A40E-BBE9-339B-A85B2ECDCAAF}"/>
+              </a:ext>
+            </a:extLst>
+          </p:cNvPr>
+          <p:cNvSpPr txBox="1"/>
+          <p:nvPr/>
+        </p:nvSpPr>
+        <p:spPr>
+          <a:xfrm>
+            <a:off x="633234" y="120005"/>
+            <a:ext cx="10476482" cy="461665"/>
+          </a:xfrm>
+          <a:prstGeom prst="rect">
+            <a:avLst/>
+          </a:prstGeom>
+          <a:noFill/>
+        </p:spPr>
+        <p:txBody>
+          <a:bodyPr wrap="square" anchor="ctr">
+            <a:spAutoFit/>
+          </a:bodyPr>
+          <a:lstStyle>
+            <a:defPPr>
+              <a:defRPr lang="fr-FR"/>
+            </a:defPPr>
+            <a:lvl1pPr>
+              <a:defRPr sz="2400" b="1">
+                <a:effectLst>
+                  <a:outerShdw blurRad="38100" dist="38100" dir="2700000" algn="tl">
+                    <a:srgbClr val="000000">
+                      <a:alpha val="43137"/>
+                    </a:srgbClr>
+                  </a:outerShdw>
+                </a:effectLst>
+                <a:latin typeface="Calibri" panose="020F0502020204030204" pitchFamily="34" charset="0"/>
+                <a:ea typeface="Times New Roman" panose="02020603050405020304" pitchFamily="18" charset="0"/>
+              </a:defRPr>
+            </a:lvl1pPr>
+          </a:lstStyle>
+          <a:p>
+            <a:r>
+              <a:rPr lang="fr-FR" sz="2400" b="1">
+                <a:effectLst/>
+                <a:latin typeface="Calibri" panose="020F0502020204030204" pitchFamily="34" charset="0"/>
+              </a:rPr>
+              <a:t>8. Le formateur a pris en compte mes difficultés </a:t>
+            </a:r>
+          </a:p>
+        </p:txBody>
+      </p:sp>
+      <p:grpSp>
+        <p:nvGrpSpPr>
+          <p:cNvPr id="4" name="Groupe 3">
+            <a:extLst>
+              <a:ext uri="{FF2B5EF4-FFF2-40B4-BE49-F238E27FC236}">
+                <a16:creationId xmlns:a16="http://schemas.microsoft.com/office/drawing/2014/main" id="{FFF8D6DA-1624-031A-E64B-2136FEDAE04E}"/>
+              </a:ext>
+            </a:extLst>
+          </p:cNvPr>
+          <p:cNvGrpSpPr/>
+          <p:nvPr/>
+        </p:nvGrpSpPr>
+        <p:grpSpPr>
+          <a:xfrm>
+            <a:off x="9232592" y="1876755"/>
+            <a:ext cx="2276869" cy="3104489"/>
+            <a:chOff x="9375619" y="1843456"/>
+            <a:chExt cx="2276869" cy="3104489"/>
+          </a:xfrm>
+        </p:grpSpPr>
+        <p:grpSp>
+          <p:nvGrpSpPr>
+            <p:cNvPr id="5" name="Groupe 4">
+              <a:extLst>
+                <a:ext uri="{FF2B5EF4-FFF2-40B4-BE49-F238E27FC236}">
+                  <a16:creationId xmlns:a16="http://schemas.microsoft.com/office/drawing/2014/main" id="{0618FC8C-D3BF-CA52-8774-D7952B0A1F39}"/>
+                </a:ext>
+              </a:extLst>
+            </p:cNvPr>
+            <p:cNvGrpSpPr/>
+            <p:nvPr/>
+          </p:nvGrpSpPr>
+          <p:grpSpPr>
+            <a:xfrm>
+              <a:off x="9375619" y="1843456"/>
+              <a:ext cx="576051" cy="3104489"/>
+              <a:chOff x="9424517" y="1534516"/>
+              <a:chExt cx="576051" cy="3104489"/>
+            </a:xfrm>
+          </p:grpSpPr>
+          <p:pic>
+            <p:nvPicPr>
+              <p:cNvPr id="10" name="Image 9">
+                <a:extLst>
+                  <a:ext uri="{FF2B5EF4-FFF2-40B4-BE49-F238E27FC236}">
+                    <a16:creationId xmlns:a16="http://schemas.microsoft.com/office/drawing/2014/main" id="{AFAEECC3-413C-A3C3-4878-D0AB9BF1B979}"/>
+                  </a:ext>
+                </a:extLst>
+              </p:cNvPr>
+              <p:cNvPicPr>
+                <a:picLocks noChangeAspect="1"/>
+              </p:cNvPicPr>
+              <p:nvPr/>
+            </p:nvPicPr>
+            <p:blipFill>
+              <a:blip r:embed="rId3"/>
+              <a:stretch>
+                <a:fillRect/>
+              </a:stretch>
+            </p:blipFill>
+            <p:spPr>
+              <a:xfrm>
+                <a:off x="9424517" y="1534516"/>
+                <a:ext cx="540000" cy="540000"/>
+              </a:xfrm>
+              <a:prstGeom prst="rect">
+                <a:avLst/>
+              </a:prstGeom>
+            </p:spPr>
+          </p:pic>
+          <p:pic>
+            <p:nvPicPr>
+              <p:cNvPr id="11" name="Image 10">
+                <a:extLst>
+                  <a:ext uri="{FF2B5EF4-FFF2-40B4-BE49-F238E27FC236}">
+                    <a16:creationId xmlns:a16="http://schemas.microsoft.com/office/drawing/2014/main" id="{3532D763-5B33-AA5B-F804-3BE655342054}"/>
+                  </a:ext>
+                </a:extLst>
+              </p:cNvPr>
+              <p:cNvPicPr>
+                <a:picLocks noChangeAspect="1"/>
+              </p:cNvPicPr>
+              <p:nvPr/>
+            </p:nvPicPr>
+            <p:blipFill>
+              <a:blip r:embed="rId4"/>
+              <a:stretch>
+                <a:fillRect/>
+              </a:stretch>
+            </p:blipFill>
+            <p:spPr>
+              <a:xfrm>
+                <a:off x="9476507" y="2350426"/>
+                <a:ext cx="488010" cy="540000"/>
+              </a:xfrm>
+              <a:prstGeom prst="rect">
+                <a:avLst/>
+              </a:prstGeom>
+            </p:spPr>
+          </p:pic>
+          <p:pic>
+            <p:nvPicPr>
+              <p:cNvPr id="12" name="Image 11">
+                <a:extLst>
+                  <a:ext uri="{FF2B5EF4-FFF2-40B4-BE49-F238E27FC236}">
+                    <a16:creationId xmlns:a16="http://schemas.microsoft.com/office/drawing/2014/main" id="{F7B07820-8BAD-BC13-E349-49740940987D}"/>
+                  </a:ext>
+                </a:extLst>
+              </p:cNvPr>
+              <p:cNvPicPr>
+                <a:picLocks noChangeAspect="1"/>
+              </p:cNvPicPr>
+              <p:nvPr/>
+            </p:nvPicPr>
+            <p:blipFill>
+              <a:blip r:embed="rId5"/>
+              <a:stretch>
+                <a:fillRect/>
+              </a:stretch>
+            </p:blipFill>
+            <p:spPr>
+              <a:xfrm>
+                <a:off x="9449290" y="3238206"/>
+                <a:ext cx="490454" cy="468000"/>
+              </a:xfrm>
+              <a:prstGeom prst="rect">
+                <a:avLst/>
+              </a:prstGeom>
+            </p:spPr>
+          </p:pic>
+          <p:pic>
+            <p:nvPicPr>
+              <p:cNvPr id="13" name="Image 12">
+                <a:extLst>
+                  <a:ext uri="{FF2B5EF4-FFF2-40B4-BE49-F238E27FC236}">
+                    <a16:creationId xmlns:a16="http://schemas.microsoft.com/office/drawing/2014/main" id="{9EC7CF88-6CFD-5E26-8787-B4B77B11FECF}"/>
+                  </a:ext>
+                </a:extLst>
+              </p:cNvPr>
+              <p:cNvPicPr>
+                <a:picLocks noChangeAspect="1"/>
+              </p:cNvPicPr>
+              <p:nvPr/>
+            </p:nvPicPr>
+            <p:blipFill>
+              <a:blip r:embed="rId6"/>
+              <a:stretch>
+                <a:fillRect/>
+              </a:stretch>
+            </p:blipFill>
+            <p:spPr>
+              <a:xfrm>
+                <a:off x="9440455" y="4099005"/>
+                <a:ext cx="560113" cy="540000"/>
+              </a:xfrm>
+              <a:prstGeom prst="rect">
+                <a:avLst/>
+              </a:prstGeom>
+            </p:spPr>
+          </p:pic>
+        </p:grpSp>
+        <p:sp>
+          <p:nvSpPr>
+            <p:cNvPr id="6" name="ZoneTexte 5">
+              <a:extLst>
+                <a:ext uri="{FF2B5EF4-FFF2-40B4-BE49-F238E27FC236}">
+                  <a16:creationId xmlns:a16="http://schemas.microsoft.com/office/drawing/2014/main" id="{C79D2978-BDB6-4902-F6C8-D04EA957314F}"/>
+                </a:ext>
+              </a:extLst>
+            </p:cNvPr>
+            <p:cNvSpPr txBox="1"/>
+            <p:nvPr/>
+          </p:nvSpPr>
+          <p:spPr>
+            <a:xfrm>
+              <a:off x="10080404" y="1928790"/>
+              <a:ext cx="1572084" cy="369332"/>
+            </a:xfrm>
+            <a:prstGeom prst="rect">
+              <a:avLst/>
+            </a:prstGeom>
+            <a:noFill/>
+          </p:spPr>
+          <p:txBody>
+            <a:bodyPr wrap="square">
+              <a:spAutoFit/>
+            </a:bodyPr>
+            <a:lstStyle/>
+            <a:p>
+              <a:r>
+                <a:rPr lang="fr-FR"/>
+                <a:t>Très satisfait</a:t>
+              </a:r>
+            </a:p>
+          </p:txBody>
+        </p:sp>
+        <p:sp>
+          <p:nvSpPr>
+            <p:cNvPr id="7" name="ZoneTexte 6">
+              <a:extLst>
+                <a:ext uri="{FF2B5EF4-FFF2-40B4-BE49-F238E27FC236}">
+                  <a16:creationId xmlns:a16="http://schemas.microsoft.com/office/drawing/2014/main" id="{2EDD911E-A93D-449B-4C22-8177E7721C19}"/>
+                </a:ext>
+              </a:extLst>
+            </p:cNvPr>
+            <p:cNvSpPr txBox="1"/>
+            <p:nvPr/>
+          </p:nvSpPr>
+          <p:spPr>
+            <a:xfrm>
+              <a:off x="10105396" y="2744700"/>
+              <a:ext cx="1176007" cy="369332"/>
+            </a:xfrm>
+            <a:prstGeom prst="rect">
+              <a:avLst/>
+            </a:prstGeom>
+            <a:noFill/>
+          </p:spPr>
+          <p:txBody>
+            <a:bodyPr wrap="square">
+              <a:spAutoFit/>
+            </a:bodyPr>
+            <a:lstStyle/>
+            <a:p>
+              <a:r>
+                <a:rPr lang="fr-FR"/>
+                <a:t>Satisfait</a:t>
+              </a:r>
+            </a:p>
+          </p:txBody>
+        </p:sp>
+        <p:sp>
+          <p:nvSpPr>
+            <p:cNvPr id="8" name="ZoneTexte 7">
+              <a:extLst>
+                <a:ext uri="{FF2B5EF4-FFF2-40B4-BE49-F238E27FC236}">
+                  <a16:creationId xmlns:a16="http://schemas.microsoft.com/office/drawing/2014/main" id="{123859C9-9FB0-A114-1FDC-A9F6B111B7EE}"/>
+                </a:ext>
+              </a:extLst>
+            </p:cNvPr>
+            <p:cNvSpPr txBox="1"/>
+            <p:nvPr/>
+          </p:nvSpPr>
+          <p:spPr>
+            <a:xfrm>
+              <a:off x="10132291" y="3642635"/>
+              <a:ext cx="1122218" cy="369332"/>
+            </a:xfrm>
+            <a:prstGeom prst="rect">
+              <a:avLst/>
+            </a:prstGeom>
+            <a:noFill/>
+          </p:spPr>
+          <p:txBody>
+            <a:bodyPr wrap="square">
+              <a:spAutoFit/>
+            </a:bodyPr>
+            <a:lstStyle/>
+            <a:p>
+              <a:r>
+                <a:rPr lang="fr-FR"/>
+                <a:t>Déçu</a:t>
+              </a:r>
+            </a:p>
+          </p:txBody>
+        </p:sp>
+        <p:sp>
+          <p:nvSpPr>
+            <p:cNvPr id="9" name="ZoneTexte 8">
+              <a:extLst>
+                <a:ext uri="{FF2B5EF4-FFF2-40B4-BE49-F238E27FC236}">
+                  <a16:creationId xmlns:a16="http://schemas.microsoft.com/office/drawing/2014/main" id="{D713FC9B-13CE-BD57-A2B3-5054F7793A73}"/>
+                </a:ext>
+              </a:extLst>
+            </p:cNvPr>
+            <p:cNvSpPr txBox="1"/>
+            <p:nvPr/>
+          </p:nvSpPr>
+          <p:spPr>
+            <a:xfrm>
+              <a:off x="10105396" y="4540570"/>
+              <a:ext cx="1303142" cy="369332"/>
+            </a:xfrm>
+            <a:prstGeom prst="rect">
+              <a:avLst/>
+            </a:prstGeom>
+            <a:noFill/>
+          </p:spPr>
+          <p:txBody>
+            <a:bodyPr wrap="square">
+              <a:spAutoFit/>
+            </a:bodyPr>
+            <a:lstStyle/>
+            <a:p>
+              <a:r>
+                <a:rPr lang="fr-FR" sz="1800" b="0" i="0" u="none" strike="noStrike">
+                  <a:solidFill>
+                    <a:srgbClr val="000000"/>
+                  </a:solidFill>
+                  <a:effectLst/>
+                  <a:latin typeface="Calibri" panose="020F0502020204030204" pitchFamily="34" charset="0"/>
+                </a:rPr>
+                <a:t>Très déçu</a:t>
+              </a:r>
+              <a:r>
+                <a:rPr lang="fr-FR"/>
+                <a:t> </a:t>
+              </a:r>
+            </a:p>
+          </p:txBody>
+        </p:sp>
+      </p:grpSp>
+      <p:graphicFrame>
+        <p:nvGraphicFramePr>
+          <p:cNvPr id="14" name="Graphique 13">
+            <a:extLst>
+              <a:ext uri="{FF2B5EF4-FFF2-40B4-BE49-F238E27FC236}">
+                <a16:creationId xmlns:a16="http://schemas.microsoft.com/office/drawing/2014/main" id="{3680BA01-CF57-63CA-67AE-EC696A7D15F8}"/>
+              </a:ext>
+            </a:extLst>
+          </p:cNvPr>
+          <p:cNvGraphicFramePr/>
+          <p:nvPr>
+            <p:extLst>
+              <p:ext uri="{D42A27DB-BD31-4B8C-83A1-F6EECF244321}">
+                <p14:modId xmlns:p14="http://schemas.microsoft.com/office/powerpoint/2010/main" val="211513403"/>
+              </p:ext>
+            </p:extLst>
+          </p:nvPr>
+        </p:nvGraphicFramePr>
+        <p:xfrm>
+          <a:off x="633234" y="871111"/>
+          <a:ext cx="8128000" cy="5418667"/>
+        </p:xfrm>
+        <a:graphic>
+          <a:graphicData uri="http://schemas.openxmlformats.org/drawingml/2006/chart">
+            <c:chart xmlns:c="http://schemas.openxmlformats.org/drawingml/2006/chart" xmlns:r="http://schemas.openxmlformats.org/officeDocument/2006/relationships" r:id="rId7"/>
+          </a:graphicData>
+        </a:graphic>
+      </p:graphicFrame>
+    </p:spTree>
+    <p:extLst>
+      <p:ext uri="{BB962C8B-B14F-4D97-AF65-F5344CB8AC3E}">
+        <p14:creationId xmlns:p14="http://schemas.microsoft.com/office/powerpoint/2010/main" val="330190011"/>
+      </p:ext>
+    </p:extLst>
+  </p:cSld>
+  <p:clrMapOvr>
+    <a:masterClrMapping/>
+  </p:clrMapOvr>
+</p:sld>
+</file>
+
+<file path=ppt/slides/slide12.xml><?xml version="1.0" encoding="utf-8"?>
+<p:sld xmlns:a="http://schemas.openxmlformats.org/drawingml/2006/main" xmlns:r="http://schemas.openxmlformats.org/officeDocument/2006/relationships" xmlns:p="http://schemas.openxmlformats.org/presentationml/2006/main">
+  <p:cSld>
+    <p:spTree>
+      <p:nvGrpSpPr>
+        <p:cNvPr id="1" name=""/>
+        <p:cNvGrpSpPr/>
+        <p:nvPr/>
+      </p:nvGrpSpPr>
+      <p:grpSpPr>
+        <a:xfrm>
+          <a:off x="0" y="0"/>
+          <a:ext cx="0" cy="0"/>
+          <a:chOff x="0" y="0"/>
+          <a:chExt cx="0" cy="0"/>
+        </a:xfrm>
+      </p:grpSpPr>
+      <p:sp>
+        <p:nvSpPr>
+          <p:cNvPr id="3" name="Espace réservé du numéro de diapositive 2"/>
+          <p:cNvSpPr>
+            <a:spLocks noGrp="1"/>
+          </p:cNvSpPr>
+          <p:nvPr>
+            <p:ph type="sldNum" sz="quarter" idx="12"/>
+          </p:nvPr>
+        </p:nvSpPr>
+        <p:spPr>
+          <a:xfrm>
+            <a:off x="9271000" y="6207125"/>
+            <a:ext cx="2844800" cy="457200"/>
+          </a:xfrm>
+        </p:spPr>
+        <p:txBody>
+          <a:bodyPr wrap="square" anchor="t">
+            <a:normAutofit/>
+          </a:bodyPr>
+          <a:lstStyle/>
+          <a:p>
+            <a:pPr>
+              <a:spcAft>
+                <a:spcPts val="600"/>
+              </a:spcAft>
+              <a:defRPr/>
+            </a:pPr>
+            <a:fld id="{156ABF86-EFC2-454D-AD05-896C81F76FA1}" type="slidenum">
+              <a:rPr lang="fr-FR" smtClean="0"/>
+              <a:pPr>
+                <a:spcAft>
+                  <a:spcPts val="600"/>
+                </a:spcAft>
+                <a:defRPr/>
+              </a:pPr>
+              <a:t>15</a:t>
+            </a:fld>
+            <a:endParaRPr lang="fr-FR"/>
+          </a:p>
+        </p:txBody>
+      </p:sp>
+      <p:sp>
+        <p:nvSpPr>
+          <p:cNvPr id="2" name="ZoneTexte 1">
+            <a:extLst>
+              <a:ext uri="{FF2B5EF4-FFF2-40B4-BE49-F238E27FC236}">
+                <a16:creationId xmlns:a16="http://schemas.microsoft.com/office/drawing/2014/main" id="{352E85EA-DA80-6857-7D14-5478301429E6}"/>
+              </a:ext>
+            </a:extLst>
+          </p:cNvPr>
+          <p:cNvSpPr txBox="1"/>
+          <p:nvPr/>
+        </p:nvSpPr>
+        <p:spPr>
+          <a:xfrm>
+            <a:off x="633234" y="120005"/>
+            <a:ext cx="10476482" cy="461665"/>
+          </a:xfrm>
+          <a:prstGeom prst="rect">
+            <a:avLst/>
+          </a:prstGeom>
+          <a:noFill/>
+        </p:spPr>
+        <p:txBody>
+          <a:bodyPr wrap="square" anchor="ctr">
+            <a:spAutoFit/>
+          </a:bodyPr>
+          <a:lstStyle>
+            <a:defPPr>
+              <a:defRPr lang="fr-FR"/>
+            </a:defPPr>
+            <a:lvl1pPr>
+              <a:defRPr sz="2400" b="1">
+                <a:effectLst>
+                  <a:outerShdw blurRad="38100" dist="38100" dir="2700000" algn="tl">
+                    <a:srgbClr val="000000">
+                      <a:alpha val="43137"/>
+                    </a:srgbClr>
+                  </a:outerShdw>
+                </a:effectLst>
+                <a:latin typeface="Calibri" panose="020F0502020204030204" pitchFamily="34" charset="0"/>
+                <a:ea typeface="Times New Roman" panose="02020603050405020304" pitchFamily="18" charset="0"/>
+              </a:defRPr>
+            </a:lvl1pPr>
+          </a:lstStyle>
+          <a:p>
+            <a:r>
+              <a:rPr lang="fr-FR" dirty="0" sz="2400" b="1">
+                <a:effectLst/>
+                <a:latin typeface="Calibri" panose="020F0502020204030204" pitchFamily="34" charset="0"/>
+              </a:rPr>
+              <a:t>9. Les jeux &amp; exercices pratiques m’ont aidé à bien comprendre</a:t>
+            </a:r>
+          </a:p>
+        </p:txBody>
+      </p:sp>
+      <p:grpSp>
+        <p:nvGrpSpPr>
+          <p:cNvPr id="4" name="Groupe 3">
+            <a:extLst>
+              <a:ext uri="{FF2B5EF4-FFF2-40B4-BE49-F238E27FC236}">
+                <a16:creationId xmlns:a16="http://schemas.microsoft.com/office/drawing/2014/main" id="{8955F131-3683-D7A0-E4DF-CFF6764027F7}"/>
+              </a:ext>
+            </a:extLst>
+          </p:cNvPr>
+          <p:cNvGrpSpPr/>
+          <p:nvPr/>
+        </p:nvGrpSpPr>
+        <p:grpSpPr>
+          <a:xfrm>
+            <a:off x="9232592" y="1876755"/>
+            <a:ext cx="2276869" cy="3104489"/>
+            <a:chOff x="9375619" y="1843456"/>
+            <a:chExt cx="2276869" cy="3104489"/>
+          </a:xfrm>
+        </p:grpSpPr>
+        <p:grpSp>
+          <p:nvGrpSpPr>
+            <p:cNvPr id="5" name="Groupe 4">
+              <a:extLst>
+                <a:ext uri="{FF2B5EF4-FFF2-40B4-BE49-F238E27FC236}">
+                  <a16:creationId xmlns:a16="http://schemas.microsoft.com/office/drawing/2014/main" id="{DD75E018-AD7B-39A9-ECE9-ED7BC90F4C5E}"/>
+                </a:ext>
+              </a:extLst>
+            </p:cNvPr>
+            <p:cNvGrpSpPr/>
+            <p:nvPr/>
+          </p:nvGrpSpPr>
+          <p:grpSpPr>
+            <a:xfrm>
+              <a:off x="9375619" y="1843456"/>
+              <a:ext cx="576051" cy="3104489"/>
+              <a:chOff x="9424517" y="1534516"/>
+              <a:chExt cx="576051" cy="3104489"/>
+            </a:xfrm>
+          </p:grpSpPr>
+          <p:pic>
+            <p:nvPicPr>
+              <p:cNvPr id="10" name="Image 9">
+                <a:extLst>
+                  <a:ext uri="{FF2B5EF4-FFF2-40B4-BE49-F238E27FC236}">
+                    <a16:creationId xmlns:a16="http://schemas.microsoft.com/office/drawing/2014/main" id="{6AE31371-11D3-0FD2-539E-1EBAA9C44E46}"/>
+                  </a:ext>
+                </a:extLst>
+              </p:cNvPr>
+              <p:cNvPicPr>
+                <a:picLocks noChangeAspect="1"/>
+              </p:cNvPicPr>
+              <p:nvPr/>
+            </p:nvPicPr>
+            <p:blipFill>
+              <a:blip r:embed="rId3"/>
+              <a:stretch>
+                <a:fillRect/>
+              </a:stretch>
+            </p:blipFill>
+            <p:spPr>
+              <a:xfrm>
+                <a:off x="9424517" y="1534516"/>
+                <a:ext cx="540000" cy="540000"/>
+              </a:xfrm>
+              <a:prstGeom prst="rect">
+                <a:avLst/>
+              </a:prstGeom>
+            </p:spPr>
+          </p:pic>
+          <p:pic>
+            <p:nvPicPr>
+              <p:cNvPr id="11" name="Image 10">
+                <a:extLst>
+                  <a:ext uri="{FF2B5EF4-FFF2-40B4-BE49-F238E27FC236}">
+                    <a16:creationId xmlns:a16="http://schemas.microsoft.com/office/drawing/2014/main" id="{C057AFD4-2D38-FAFB-2DE1-A60C07218098}"/>
+                  </a:ext>
+                </a:extLst>
+              </p:cNvPr>
+              <p:cNvPicPr>
+                <a:picLocks noChangeAspect="1"/>
+              </p:cNvPicPr>
+              <p:nvPr/>
+            </p:nvPicPr>
+            <p:blipFill>
+              <a:blip r:embed="rId4"/>
+              <a:stretch>
+                <a:fillRect/>
+              </a:stretch>
+            </p:blipFill>
+            <p:spPr>
+              <a:xfrm>
+                <a:off x="9476507" y="2350426"/>
+                <a:ext cx="488010" cy="540000"/>
+              </a:xfrm>
+              <a:prstGeom prst="rect">
+                <a:avLst/>
+              </a:prstGeom>
+            </p:spPr>
+          </p:pic>
+          <p:pic>
+            <p:nvPicPr>
+              <p:cNvPr id="12" name="Image 11">
+                <a:extLst>
+                  <a:ext uri="{FF2B5EF4-FFF2-40B4-BE49-F238E27FC236}">
+                    <a16:creationId xmlns:a16="http://schemas.microsoft.com/office/drawing/2014/main" id="{8D932CFB-CE07-528F-69D2-82CF9BB00B31}"/>
+                  </a:ext>
+                </a:extLst>
+              </p:cNvPr>
+              <p:cNvPicPr>
+                <a:picLocks noChangeAspect="1"/>
+              </p:cNvPicPr>
+              <p:nvPr/>
+            </p:nvPicPr>
+            <p:blipFill>
+              <a:blip r:embed="rId5"/>
+              <a:stretch>
+                <a:fillRect/>
+              </a:stretch>
+            </p:blipFill>
+            <p:spPr>
+              <a:xfrm>
+                <a:off x="9449290" y="3238206"/>
+                <a:ext cx="490454" cy="468000"/>
+              </a:xfrm>
+              <a:prstGeom prst="rect">
+                <a:avLst/>
+              </a:prstGeom>
+            </p:spPr>
+          </p:pic>
+          <p:pic>
+            <p:nvPicPr>
+              <p:cNvPr id="13" name="Image 12">
+                <a:extLst>
+                  <a:ext uri="{FF2B5EF4-FFF2-40B4-BE49-F238E27FC236}">
+                    <a16:creationId xmlns:a16="http://schemas.microsoft.com/office/drawing/2014/main" id="{9625A3CD-AB8B-874C-6472-4E0D71AB97FD}"/>
+                  </a:ext>
+                </a:extLst>
+              </p:cNvPr>
+              <p:cNvPicPr>
+                <a:picLocks noChangeAspect="1"/>
+              </p:cNvPicPr>
+              <p:nvPr/>
+            </p:nvPicPr>
+            <p:blipFill>
+              <a:blip r:embed="rId6"/>
+              <a:stretch>
+                <a:fillRect/>
+              </a:stretch>
+            </p:blipFill>
+            <p:spPr>
+              <a:xfrm>
+                <a:off x="9440455" y="4099005"/>
+                <a:ext cx="560113" cy="540000"/>
+              </a:xfrm>
+              <a:prstGeom prst="rect">
+                <a:avLst/>
+              </a:prstGeom>
+            </p:spPr>
+          </p:pic>
+        </p:grpSp>
+        <p:sp>
+          <p:nvSpPr>
+            <p:cNvPr id="6" name="ZoneTexte 5">
+              <a:extLst>
+                <a:ext uri="{FF2B5EF4-FFF2-40B4-BE49-F238E27FC236}">
+                  <a16:creationId xmlns:a16="http://schemas.microsoft.com/office/drawing/2014/main" id="{2E59A549-B86B-4597-2EF5-82C2E876CA45}"/>
+                </a:ext>
+              </a:extLst>
+            </p:cNvPr>
+            <p:cNvSpPr txBox="1"/>
+            <p:nvPr/>
+          </p:nvSpPr>
+          <p:spPr>
+            <a:xfrm>
+              <a:off x="10080404" y="1928790"/>
+              <a:ext cx="1572084" cy="369332"/>
+            </a:xfrm>
+            <a:prstGeom prst="rect">
+              <a:avLst/>
+            </a:prstGeom>
+            <a:noFill/>
+          </p:spPr>
+          <p:txBody>
+            <a:bodyPr wrap="square">
+              <a:spAutoFit/>
+            </a:bodyPr>
+            <a:lstStyle/>
+            <a:p>
+              <a:r>
+                <a:rPr lang="fr-FR"/>
+                <a:t>Très satisfait</a:t>
+              </a:r>
+            </a:p>
+          </p:txBody>
+        </p:sp>
+        <p:sp>
+          <p:nvSpPr>
+            <p:cNvPr id="7" name="ZoneTexte 6">
+              <a:extLst>
+                <a:ext uri="{FF2B5EF4-FFF2-40B4-BE49-F238E27FC236}">
+                  <a16:creationId xmlns:a16="http://schemas.microsoft.com/office/drawing/2014/main" id="{C298A53E-91D2-C7F7-90F5-83AD766A7D9F}"/>
+                </a:ext>
+              </a:extLst>
+            </p:cNvPr>
+            <p:cNvSpPr txBox="1"/>
+            <p:nvPr/>
+          </p:nvSpPr>
+          <p:spPr>
+            <a:xfrm>
+              <a:off x="10105396" y="2744700"/>
+              <a:ext cx="1176007" cy="369332"/>
+            </a:xfrm>
+            <a:prstGeom prst="rect">
+              <a:avLst/>
+            </a:prstGeom>
+            <a:noFill/>
+          </p:spPr>
+          <p:txBody>
+            <a:bodyPr wrap="square">
+              <a:spAutoFit/>
+            </a:bodyPr>
+            <a:lstStyle/>
+            <a:p>
+              <a:r>
+                <a:rPr lang="fr-FR"/>
+                <a:t>Satisfait</a:t>
+              </a:r>
+            </a:p>
+          </p:txBody>
+        </p:sp>
+        <p:sp>
+          <p:nvSpPr>
+            <p:cNvPr id="8" name="ZoneTexte 7">
+              <a:extLst>
+                <a:ext uri="{FF2B5EF4-FFF2-40B4-BE49-F238E27FC236}">
+                  <a16:creationId xmlns:a16="http://schemas.microsoft.com/office/drawing/2014/main" id="{9E59630A-50DF-6FE6-28F5-214EAA8F9F81}"/>
+                </a:ext>
+              </a:extLst>
+            </p:cNvPr>
+            <p:cNvSpPr txBox="1"/>
+            <p:nvPr/>
+          </p:nvSpPr>
+          <p:spPr>
+            <a:xfrm>
+              <a:off x="10132291" y="3642635"/>
+              <a:ext cx="1122218" cy="369332"/>
+            </a:xfrm>
+            <a:prstGeom prst="rect">
+              <a:avLst/>
+            </a:prstGeom>
+            <a:noFill/>
+          </p:spPr>
+          <p:txBody>
+            <a:bodyPr wrap="square">
+              <a:spAutoFit/>
+            </a:bodyPr>
+            <a:lstStyle/>
+            <a:p>
+              <a:r>
+                <a:rPr lang="fr-FR"/>
+                <a:t>Déçu</a:t>
+              </a:r>
+            </a:p>
+          </p:txBody>
+        </p:sp>
+        <p:sp>
+          <p:nvSpPr>
+            <p:cNvPr id="9" name="ZoneTexte 8">
+              <a:extLst>
+                <a:ext uri="{FF2B5EF4-FFF2-40B4-BE49-F238E27FC236}">
+                  <a16:creationId xmlns:a16="http://schemas.microsoft.com/office/drawing/2014/main" id="{C27267A7-C500-E3CB-F64F-C119584A9E48}"/>
+                </a:ext>
+              </a:extLst>
+            </p:cNvPr>
+            <p:cNvSpPr txBox="1"/>
+            <p:nvPr/>
+          </p:nvSpPr>
+          <p:spPr>
+            <a:xfrm>
+              <a:off x="10105396" y="4540570"/>
+              <a:ext cx="1303142" cy="369332"/>
+            </a:xfrm>
+            <a:prstGeom prst="rect">
+              <a:avLst/>
+            </a:prstGeom>
+            <a:noFill/>
+          </p:spPr>
+          <p:txBody>
+            <a:bodyPr wrap="square">
+              <a:spAutoFit/>
+            </a:bodyPr>
+            <a:lstStyle/>
+            <a:p>
+              <a:r>
+                <a:rPr lang="fr-FR" sz="1800" b="0" i="0" u="none" strike="noStrike">
+                  <a:solidFill>
+                    <a:srgbClr val="000000"/>
+                  </a:solidFill>
+                  <a:effectLst/>
+                  <a:latin typeface="Calibri" panose="020F0502020204030204" pitchFamily="34" charset="0"/>
+                </a:rPr>
+                <a:t>Très déçu</a:t>
+              </a:r>
+              <a:r>
+                <a:rPr lang="fr-FR"/>
+                <a:t> </a:t>
+              </a:r>
+            </a:p>
+          </p:txBody>
+        </p:sp>
+      </p:grpSp>
+      <p:graphicFrame>
+        <p:nvGraphicFramePr>
+          <p:cNvPr id="14" name="Graphique 13">
+            <a:extLst>
+              <a:ext uri="{FF2B5EF4-FFF2-40B4-BE49-F238E27FC236}">
+                <a16:creationId xmlns:a16="http://schemas.microsoft.com/office/drawing/2014/main" id="{F1996229-14EA-2686-47F3-BD7626C57716}"/>
+              </a:ext>
+            </a:extLst>
+          </p:cNvPr>
+          <p:cNvGraphicFramePr/>
+          <p:nvPr>
+            <p:extLst>
+              <p:ext uri="{D42A27DB-BD31-4B8C-83A1-F6EECF244321}">
+                <p14:modId xmlns:p14="http://schemas.microsoft.com/office/powerpoint/2010/main" val="211513403"/>
+              </p:ext>
+            </p:extLst>
+          </p:nvPr>
+        </p:nvGraphicFramePr>
+        <p:xfrm>
+          <a:off x="633234" y="871111"/>
+          <a:ext cx="8128000" cy="5418667"/>
+        </p:xfrm>
+        <a:graphic>
+          <a:graphicData uri="http://schemas.openxmlformats.org/drawingml/2006/chart">
+            <c:chart xmlns:c="http://schemas.openxmlformats.org/drawingml/2006/chart" xmlns:r="http://schemas.openxmlformats.org/officeDocument/2006/relationships" r:id="rId7"/>
+          </a:graphicData>
+        </a:graphic>
+      </p:graphicFrame>
+    </p:spTree>
+    <p:extLst>
+      <p:ext uri="{BB962C8B-B14F-4D97-AF65-F5344CB8AC3E}">
+        <p14:creationId xmlns:p14="http://schemas.microsoft.com/office/powerpoint/2010/main" val="1427594894"/>
+      </p:ext>
+    </p:extLst>
+  </p:cSld>
+  <p:clrMapOvr>
+    <a:masterClrMapping/>
+  </p:clrMapOvr>
+</p:sld>
+</file>
+
+<file path=ppt/slides/slide13.xml><?xml version="1.0" encoding="utf-8"?>
+<p:sld xmlns:a="http://schemas.openxmlformats.org/drawingml/2006/main" xmlns:r="http://schemas.openxmlformats.org/officeDocument/2006/relationships" xmlns:p="http://schemas.openxmlformats.org/presentationml/2006/main">
+  <p:cSld>
+    <p:spTree>
+      <p:nvGrpSpPr>
+        <p:cNvPr id="1" name=""/>
+        <p:cNvGrpSpPr/>
+        <p:nvPr/>
+      </p:nvGrpSpPr>
+      <p:grpSpPr>
+        <a:xfrm>
+          <a:off x="0" y="0"/>
+          <a:ext cx="0" cy="0"/>
+          <a:chOff x="0" y="0"/>
+          <a:chExt cx="0" cy="0"/>
+        </a:xfrm>
+      </p:grpSpPr>
+      <p:sp>
+        <p:nvSpPr>
+          <p:cNvPr id="3" name="Espace réservé du numéro de diapositive 2"/>
+          <p:cNvSpPr>
+            <a:spLocks noGrp="1"/>
+          </p:cNvSpPr>
+          <p:nvPr>
+            <p:ph type="sldNum" sz="quarter" idx="12"/>
+          </p:nvPr>
+        </p:nvSpPr>
+        <p:spPr>
+          <a:xfrm>
+            <a:off x="9271000" y="6207125"/>
+            <a:ext cx="2844800" cy="457200"/>
+          </a:xfrm>
+        </p:spPr>
+        <p:txBody>
+          <a:bodyPr wrap="square" anchor="t">
+            <a:normAutofit/>
+          </a:bodyPr>
+          <a:lstStyle/>
+          <a:p>
+            <a:pPr>
+              <a:spcAft>
+                <a:spcPts val="600"/>
+              </a:spcAft>
+              <a:defRPr/>
+            </a:pPr>
+            <a:fld id="{156ABF86-EFC2-454D-AD05-896C81F76FA1}" type="slidenum">
+              <a:rPr lang="fr-FR" smtClean="0"/>
+              <a:pPr>
+                <a:spcAft>
+                  <a:spcPts val="600"/>
+                </a:spcAft>
+                <a:defRPr/>
+              </a:pPr>
+              <a:t>16</a:t>
+            </a:fld>
+            <a:endParaRPr lang="fr-FR"/>
+          </a:p>
+        </p:txBody>
+      </p:sp>
+      <p:sp>
+        <p:nvSpPr>
+          <p:cNvPr id="2" name="ZoneTexte 1">
+            <a:extLst>
+              <a:ext uri="{FF2B5EF4-FFF2-40B4-BE49-F238E27FC236}">
+                <a16:creationId xmlns:a16="http://schemas.microsoft.com/office/drawing/2014/main" id="{069D2643-457B-A398-A97F-CA846A51C4B5}"/>
+              </a:ext>
+            </a:extLst>
+          </p:cNvPr>
+          <p:cNvSpPr txBox="1"/>
+          <p:nvPr/>
+        </p:nvSpPr>
+        <p:spPr>
+          <a:xfrm>
+            <a:off x="633234" y="120005"/>
+            <a:ext cx="10476482" cy="461665"/>
+          </a:xfrm>
+          <a:prstGeom prst="rect">
+            <a:avLst/>
+          </a:prstGeom>
+          <a:noFill/>
+        </p:spPr>
+        <p:txBody>
+          <a:bodyPr wrap="square" anchor="ctr">
+            <a:spAutoFit/>
+          </a:bodyPr>
+          <a:lstStyle>
+            <a:defPPr>
+              <a:defRPr lang="fr-FR"/>
+            </a:defPPr>
+            <a:lvl1pPr>
+              <a:defRPr sz="2400" b="1">
+                <a:effectLst>
+                  <a:outerShdw blurRad="38100" dist="38100" dir="2700000" algn="tl">
+                    <a:srgbClr val="000000">
+                      <a:alpha val="43137"/>
+                    </a:srgbClr>
+                  </a:outerShdw>
+                </a:effectLst>
+                <a:latin typeface="Calibri" panose="020F0502020204030204" pitchFamily="34" charset="0"/>
+                <a:ea typeface="Times New Roman" panose="02020603050405020304" pitchFamily="18" charset="0"/>
+              </a:defRPr>
+            </a:lvl1pPr>
+          </a:lstStyle>
+          <a:p>
+            <a:r>
+              <a:rPr lang="fr-FR" dirty="0" sz="2400" b="1">
+                <a:effectLst/>
+                <a:latin typeface="Calibri" panose="020F0502020204030204" pitchFamily="34" charset="0"/>
+              </a:rPr>
+              <a:t>10. En conclusion, vous êtes :</a:t>
+            </a:r>
+          </a:p>
+        </p:txBody>
+      </p:sp>
+      <p:grpSp>
+        <p:nvGrpSpPr>
+          <p:cNvPr id="4" name="Groupe 3">
+            <a:extLst>
+              <a:ext uri="{FF2B5EF4-FFF2-40B4-BE49-F238E27FC236}">
+                <a16:creationId xmlns:a16="http://schemas.microsoft.com/office/drawing/2014/main" id="{00D88D20-D202-0E70-DBA8-03AC264E898A}"/>
+              </a:ext>
+            </a:extLst>
+          </p:cNvPr>
+          <p:cNvGrpSpPr/>
+          <p:nvPr/>
+        </p:nvGrpSpPr>
+        <p:grpSpPr>
+          <a:xfrm>
+            <a:off x="9232592" y="1876755"/>
+            <a:ext cx="2276869" cy="3104489"/>
+            <a:chOff x="9375619" y="1843456"/>
+            <a:chExt cx="2276869" cy="3104489"/>
+          </a:xfrm>
+        </p:grpSpPr>
+        <p:grpSp>
+          <p:nvGrpSpPr>
+            <p:cNvPr id="5" name="Groupe 4">
+              <a:extLst>
+                <a:ext uri="{FF2B5EF4-FFF2-40B4-BE49-F238E27FC236}">
+                  <a16:creationId xmlns:a16="http://schemas.microsoft.com/office/drawing/2014/main" id="{F572F1E4-F478-8C8A-667D-E5164ADEC650}"/>
+                </a:ext>
+              </a:extLst>
+            </p:cNvPr>
+            <p:cNvGrpSpPr/>
+            <p:nvPr/>
+          </p:nvGrpSpPr>
+          <p:grpSpPr>
+            <a:xfrm>
+              <a:off x="9375619" y="1843456"/>
+              <a:ext cx="576051" cy="3104489"/>
+              <a:chOff x="9424517" y="1534516"/>
+              <a:chExt cx="576051" cy="3104489"/>
+            </a:xfrm>
+          </p:grpSpPr>
+          <p:pic>
+            <p:nvPicPr>
+              <p:cNvPr id="10" name="Image 9">
+                <a:extLst>
+                  <a:ext uri="{FF2B5EF4-FFF2-40B4-BE49-F238E27FC236}">
+                    <a16:creationId xmlns:a16="http://schemas.microsoft.com/office/drawing/2014/main" id="{A1463705-43C1-1820-CB9A-140CC1198C4E}"/>
+                  </a:ext>
+                </a:extLst>
+              </p:cNvPr>
+              <p:cNvPicPr>
+                <a:picLocks noChangeAspect="1"/>
+              </p:cNvPicPr>
+              <p:nvPr/>
+            </p:nvPicPr>
+            <p:blipFill>
+              <a:blip r:embed="rId3"/>
+              <a:stretch>
+                <a:fillRect/>
+              </a:stretch>
+            </p:blipFill>
+            <p:spPr>
+              <a:xfrm>
+                <a:off x="9424517" y="1534516"/>
+                <a:ext cx="540000" cy="540000"/>
+              </a:xfrm>
+              <a:prstGeom prst="rect">
+                <a:avLst/>
+              </a:prstGeom>
+            </p:spPr>
+          </p:pic>
+          <p:pic>
+            <p:nvPicPr>
+              <p:cNvPr id="11" name="Image 10">
+                <a:extLst>
+                  <a:ext uri="{FF2B5EF4-FFF2-40B4-BE49-F238E27FC236}">
+                    <a16:creationId xmlns:a16="http://schemas.microsoft.com/office/drawing/2014/main" id="{095F630D-EF21-3364-0A76-4B2B6DE66873}"/>
+                  </a:ext>
+                </a:extLst>
+              </p:cNvPr>
+              <p:cNvPicPr>
+                <a:picLocks noChangeAspect="1"/>
+              </p:cNvPicPr>
+              <p:nvPr/>
+            </p:nvPicPr>
+            <p:blipFill>
+              <a:blip r:embed="rId4"/>
+              <a:stretch>
+                <a:fillRect/>
+              </a:stretch>
+            </p:blipFill>
+            <p:spPr>
+              <a:xfrm>
+                <a:off x="9476507" y="2350426"/>
+                <a:ext cx="488010" cy="540000"/>
+              </a:xfrm>
+              <a:prstGeom prst="rect">
+                <a:avLst/>
+              </a:prstGeom>
+            </p:spPr>
+          </p:pic>
+          <p:pic>
+            <p:nvPicPr>
+              <p:cNvPr id="12" name="Image 11">
+                <a:extLst>
+                  <a:ext uri="{FF2B5EF4-FFF2-40B4-BE49-F238E27FC236}">
+                    <a16:creationId xmlns:a16="http://schemas.microsoft.com/office/drawing/2014/main" id="{35D100A3-4BE1-8855-7F22-177BB8AE3C5D}"/>
+                  </a:ext>
+                </a:extLst>
+              </p:cNvPr>
+              <p:cNvPicPr>
+                <a:picLocks noChangeAspect="1"/>
+              </p:cNvPicPr>
+              <p:nvPr/>
+            </p:nvPicPr>
+            <p:blipFill>
+              <a:blip r:embed="rId5"/>
+              <a:stretch>
+                <a:fillRect/>
+              </a:stretch>
+            </p:blipFill>
+            <p:spPr>
+              <a:xfrm>
+                <a:off x="9449290" y="3238206"/>
+                <a:ext cx="490454" cy="468000"/>
+              </a:xfrm>
+              <a:prstGeom prst="rect">
+                <a:avLst/>
+              </a:prstGeom>
+            </p:spPr>
+          </p:pic>
+          <p:pic>
+            <p:nvPicPr>
+              <p:cNvPr id="13" name="Image 12">
+                <a:extLst>
+                  <a:ext uri="{FF2B5EF4-FFF2-40B4-BE49-F238E27FC236}">
+                    <a16:creationId xmlns:a16="http://schemas.microsoft.com/office/drawing/2014/main" id="{1339A59B-5599-295D-ABBD-822D95B4FADB}"/>
+                  </a:ext>
+                </a:extLst>
+              </p:cNvPr>
+              <p:cNvPicPr>
+                <a:picLocks noChangeAspect="1"/>
+              </p:cNvPicPr>
+              <p:nvPr/>
+            </p:nvPicPr>
+            <p:blipFill>
+              <a:blip r:embed="rId6"/>
+              <a:stretch>
+                <a:fillRect/>
+              </a:stretch>
+            </p:blipFill>
+            <p:spPr>
+              <a:xfrm>
+                <a:off x="9440455" y="4099005"/>
+                <a:ext cx="560113" cy="540000"/>
+              </a:xfrm>
+              <a:prstGeom prst="rect">
+                <a:avLst/>
+              </a:prstGeom>
+            </p:spPr>
+          </p:pic>
+        </p:grpSp>
+        <p:sp>
+          <p:nvSpPr>
+            <p:cNvPr id="6" name="ZoneTexte 5">
+              <a:extLst>
+                <a:ext uri="{FF2B5EF4-FFF2-40B4-BE49-F238E27FC236}">
+                  <a16:creationId xmlns:a16="http://schemas.microsoft.com/office/drawing/2014/main" id="{DCE2B25C-0E75-F773-32B5-22C34E1946BD}"/>
+                </a:ext>
+              </a:extLst>
+            </p:cNvPr>
+            <p:cNvSpPr txBox="1"/>
+            <p:nvPr/>
+          </p:nvSpPr>
+          <p:spPr>
+            <a:xfrm>
+              <a:off x="10080404" y="1928790"/>
+              <a:ext cx="1572084" cy="369332"/>
+            </a:xfrm>
+            <a:prstGeom prst="rect">
+              <a:avLst/>
+            </a:prstGeom>
+            <a:noFill/>
+          </p:spPr>
+          <p:txBody>
+            <a:bodyPr wrap="square">
+              <a:spAutoFit/>
+            </a:bodyPr>
+            <a:lstStyle/>
+            <a:p>
+              <a:r>
+                <a:rPr lang="fr-FR"/>
+                <a:t>Très satisfait</a:t>
+              </a:r>
+            </a:p>
+          </p:txBody>
+        </p:sp>
+        <p:sp>
+          <p:nvSpPr>
+            <p:cNvPr id="7" name="ZoneTexte 6">
+              <a:extLst>
+                <a:ext uri="{FF2B5EF4-FFF2-40B4-BE49-F238E27FC236}">
+                  <a16:creationId xmlns:a16="http://schemas.microsoft.com/office/drawing/2014/main" id="{940A942F-CDC8-EA5C-E3B4-8BEB6C750B99}"/>
+                </a:ext>
+              </a:extLst>
+            </p:cNvPr>
+            <p:cNvSpPr txBox="1"/>
+            <p:nvPr/>
+          </p:nvSpPr>
+          <p:spPr>
+            <a:xfrm>
+              <a:off x="10105396" y="2744700"/>
+              <a:ext cx="1176007" cy="369332"/>
+            </a:xfrm>
+            <a:prstGeom prst="rect">
+              <a:avLst/>
+            </a:prstGeom>
+            <a:noFill/>
+          </p:spPr>
+          <p:txBody>
+            <a:bodyPr wrap="square">
+              <a:spAutoFit/>
+            </a:bodyPr>
+            <a:lstStyle/>
+            <a:p>
+              <a:r>
+                <a:rPr lang="fr-FR"/>
+                <a:t>Satisfait</a:t>
+              </a:r>
+            </a:p>
+          </p:txBody>
+        </p:sp>
+        <p:sp>
+          <p:nvSpPr>
+            <p:cNvPr id="8" name="ZoneTexte 7">
+              <a:extLst>
+                <a:ext uri="{FF2B5EF4-FFF2-40B4-BE49-F238E27FC236}">
+                  <a16:creationId xmlns:a16="http://schemas.microsoft.com/office/drawing/2014/main" id="{C839FCEA-10B8-52F7-E97D-07DD7CBAF3EF}"/>
+                </a:ext>
+              </a:extLst>
+            </p:cNvPr>
+            <p:cNvSpPr txBox="1"/>
+            <p:nvPr/>
+          </p:nvSpPr>
+          <p:spPr>
+            <a:xfrm>
+              <a:off x="10132291" y="3642635"/>
+              <a:ext cx="1122218" cy="369332"/>
+            </a:xfrm>
+            <a:prstGeom prst="rect">
+              <a:avLst/>
+            </a:prstGeom>
+            <a:noFill/>
+          </p:spPr>
+          <p:txBody>
+            <a:bodyPr wrap="square">
+              <a:spAutoFit/>
+            </a:bodyPr>
+            <a:lstStyle/>
+            <a:p>
+              <a:r>
+                <a:rPr lang="fr-FR"/>
+                <a:t>Déçu</a:t>
+              </a:r>
+            </a:p>
+          </p:txBody>
+        </p:sp>
+        <p:sp>
+          <p:nvSpPr>
+            <p:cNvPr id="9" name="ZoneTexte 8">
+              <a:extLst>
+                <a:ext uri="{FF2B5EF4-FFF2-40B4-BE49-F238E27FC236}">
+                  <a16:creationId xmlns:a16="http://schemas.microsoft.com/office/drawing/2014/main" id="{7161C86A-2D40-0088-898B-6751600BB1EE}"/>
+                </a:ext>
+              </a:extLst>
+            </p:cNvPr>
+            <p:cNvSpPr txBox="1"/>
+            <p:nvPr/>
+          </p:nvSpPr>
+          <p:spPr>
+            <a:xfrm>
+              <a:off x="10105396" y="4540570"/>
+              <a:ext cx="1303142" cy="369332"/>
+            </a:xfrm>
+            <a:prstGeom prst="rect">
+              <a:avLst/>
+            </a:prstGeom>
+            <a:noFill/>
+          </p:spPr>
+          <p:txBody>
+            <a:bodyPr wrap="square">
+              <a:spAutoFit/>
+            </a:bodyPr>
+            <a:lstStyle/>
+            <a:p>
+              <a:r>
+                <a:rPr lang="fr-FR" sz="1800" b="0" i="0" u="none" strike="noStrike">
+                  <a:solidFill>
+                    <a:srgbClr val="000000"/>
+                  </a:solidFill>
+                  <a:effectLst/>
+                  <a:latin typeface="Calibri" panose="020F0502020204030204" pitchFamily="34" charset="0"/>
+                </a:rPr>
+                <a:t>Très déçu</a:t>
+              </a:r>
+              <a:r>
+                <a:rPr lang="fr-FR"/>
+                <a:t> </a:t>
+              </a:r>
+            </a:p>
+          </p:txBody>
+        </p:sp>
+      </p:grpSp>
+      <p:graphicFrame>
+        <p:nvGraphicFramePr>
+          <p:cNvPr id="14" name="Graphique 13">
+            <a:extLst>
+              <a:ext uri="{FF2B5EF4-FFF2-40B4-BE49-F238E27FC236}">
+                <a16:creationId xmlns:a16="http://schemas.microsoft.com/office/drawing/2014/main" id="{6598E90E-815A-E033-6250-B24265E78A4C}"/>
+              </a:ext>
+            </a:extLst>
+          </p:cNvPr>
+          <p:cNvGraphicFramePr/>
+          <p:nvPr>
+            <p:extLst>
+              <p:ext uri="{D42A27DB-BD31-4B8C-83A1-F6EECF244321}">
+                <p14:modId xmlns:p14="http://schemas.microsoft.com/office/powerpoint/2010/main" val="211513403"/>
+              </p:ext>
+            </p:extLst>
+          </p:nvPr>
+        </p:nvGraphicFramePr>
+        <p:xfrm>
+          <a:off x="633234" y="871111"/>
+          <a:ext cx="8128000" cy="5418667"/>
+        </p:xfrm>
+        <a:graphic>
+          <a:graphicData uri="http://schemas.openxmlformats.org/drawingml/2006/chart">
+            <c:chart xmlns:c="http://schemas.openxmlformats.org/drawingml/2006/chart" xmlns:r="http://schemas.openxmlformats.org/officeDocument/2006/relationships" r:id="rId7"/>
+          </a:graphicData>
+        </a:graphic>
+      </p:graphicFrame>
+    </p:spTree>
+    <p:extLst>
+      <p:ext uri="{BB962C8B-B14F-4D97-AF65-F5344CB8AC3E}">
+        <p14:creationId xmlns:p14="http://schemas.microsoft.com/office/powerpoint/2010/main" val="2635338137"/>
+      </p:ext>
+    </p:extLst>
+  </p:cSld>
+  <p:clrMapOvr>
+    <a:masterClrMapping/>
+  </p:clrMapOvr>
+</p:sld>
+</file>
+
+<file path=ppt/slides/slide14.xml><?xml version="1.0" encoding="utf-8"?>
+<p:sld xmlns:a="http://schemas.openxmlformats.org/drawingml/2006/main" xmlns:r="http://schemas.openxmlformats.org/officeDocument/2006/relationships" xmlns:p="http://schemas.openxmlformats.org/presentationml/2006/main">
+  <p:cSld>
+    <p:spTree>
+      <p:nvGrpSpPr>
+        <p:cNvPr id="1" name=""/>
+        <p:cNvGrpSpPr/>
+        <p:nvPr/>
+      </p:nvGrpSpPr>
+      <p:grpSpPr>
+        <a:xfrm>
+          <a:off x="0" y="0"/>
+          <a:ext cx="0" cy="0"/>
+          <a:chOff x="0" y="0"/>
+          <a:chExt cx="0" cy="0"/>
+        </a:xfrm>
+      </p:grpSpPr>
+      <p:sp>
+        <p:nvSpPr>
+          <p:cNvPr id="26626" name="Rectangle 2"/>
+          <p:cNvSpPr>
+            <a:spLocks noGrp="1" noChangeArrowheads="1"/>
+          </p:cNvSpPr>
+          <p:nvPr>
+            <p:ph type="title"/>
+          </p:nvPr>
+        </p:nvSpPr>
+        <p:spPr>
+          <a:xfrm>
+            <a:off x="623392" y="0"/>
+            <a:ext cx="10476544" cy="668338"/>
+          </a:xfrm>
+        </p:spPr>
+        <p:txBody>
+          <a:bodyPr anchor="ctr"/>
+          <a:lstStyle/>
+          <a:p>
+            <a:pPr eaLnBrk="1" hangingPunct="1">
+              <a:defRPr/>
+            </a:pPr>
+            <a:r>
+              <a:rPr lang="fr-FR" dirty="0"/>
+              <a:t>Vos remarques et suggestions : (ce que vous avez bien aimé / ou pas aimé…)</a:t>
+            </a:r>
+          </a:p>
+        </p:txBody>
+      </p:sp>
+      <p:sp>
+        <p:nvSpPr>
+          <p:cNvPr id="3" name="Espace réservé du numéro de diapositive 2"/>
+          <p:cNvSpPr>
+            <a:spLocks noGrp="1"/>
+          </p:cNvSpPr>
+          <p:nvPr>
+            <p:ph type="sldNum" sz="quarter" idx="12"/>
+          </p:nvPr>
+        </p:nvSpPr>
+        <p:spPr/>
+        <p:txBody>
+          <a:bodyPr/>
+          <a:lstStyle/>
+          <a:p>
+            <a:pPr>
+              <a:defRPr/>
+            </a:pPr>
+            <a:fld id="{9CB9D0F4-6BFF-4C0E-96D4-B15CA75DCB76}" type="slidenum">
+              <a:rPr lang="fr-FR" smtClean="0"/>
+              <a:pPr>
+                <a:defRPr/>
+              </a:pPr>
+              <a:t>17</a:t>
+            </a:fld>
+            <a:endParaRPr lang="fr-FR"/>
+          </a:p>
+        </p:txBody>
+      </p:sp>
+      <p:sp>
+        <p:nvSpPr>
+          <p:cNvPr id="2" name="ZoneTexte 1">
+            <a:extLst>
+              <a:ext uri="{FF2B5EF4-FFF2-40B4-BE49-F238E27FC236}">
+                <a16:creationId xmlns:a16="http://schemas.microsoft.com/office/drawing/2014/main" id="{811FD761-9C3A-4F6B-802E-35E3547E73E0}"/>
+              </a:ext>
+            </a:extLst>
+          </p:cNvPr>
+          <p:cNvSpPr txBox="1"/>
+          <p:nvPr/>
+        </p:nvSpPr>
+        <p:spPr>
+          <a:xfrm>
+            <a:off x="623392" y="713725"/>
+            <a:ext cx="10792753" cy="880369"/>
+          </a:xfrm>
+          <a:prstGeom prst="rect">
+            <a:avLst/>
+          </a:prstGeom>
+          <a:noFill/>
+        </p:spPr>
+        <p:txBody>
+          <a:bodyPr wrap="square" rtlCol="0">
+            <a:spAutoFit/>
+          </a:bodyPr>
+          <a:lstStyle/>
+          <a:p>
+            <a:pPr marL="285750" indent="-285750" algn="l">
+              <a:lnSpc>
+                <a:spcPct val="150000"/>
+              </a:lnSpc>
+              <a:buClr>
+                <a:srgbClr val="0070C0"/>
+              </a:buClr>
+              <a:buSzPct val="75000"/>
+              <a:buFont typeface="Wingdings" panose="05000000000000000000" pitchFamily="2" charset="2"/>
+              <a:buChar char="q"/>
+            </a:pPr>
+            <a:r>
+              <a:rPr lang="fr-FR" b="1" dirty="0">
+                <a:solidFill>
+                  <a:srgbClr val="202124"/>
+                </a:solidFill>
+              </a:rPr>
+              <a:t>Wassila </a:t>
+            </a:r>
+            <a:r>
+              <a:rPr lang="fr-FR" dirty="0">
+                <a:solidFill>
+                  <a:srgbClr val="202124"/>
+                </a:solidFill>
+              </a:rPr>
+              <a:t>: « J’ai bien aimé l’ambiance j’ai appris beaucoup de choses pour le CVS ça m’a bien aidé ».</a:t>
+            </a:r>
+          </a:p>
+          <a:p>
+            <a:pPr marL="285750" indent="-285750" algn="l">
+              <a:lnSpc>
+                <a:spcPct val="150000"/>
+              </a:lnSpc>
+              <a:buClr>
+                <a:srgbClr val="0070C0"/>
+              </a:buClr>
+              <a:buSzPct val="75000"/>
+              <a:buFont typeface="Wingdings" panose="05000000000000000000" pitchFamily="2" charset="2"/>
+              <a:buChar char="q"/>
+            </a:pPr>
+            <a:r>
+              <a:rPr lang="fr-FR" b="1" dirty="0">
+                <a:solidFill>
+                  <a:srgbClr val="202124"/>
+                </a:solidFill>
+              </a:rPr>
+              <a:t>Patricia</a:t>
+            </a:r>
+            <a:r>
+              <a:rPr lang="fr-FR" dirty="0">
+                <a:solidFill>
+                  <a:srgbClr val="202124"/>
+                </a:solidFill>
+              </a:rPr>
+              <a:t> : « Tous aimé ».</a:t>
+            </a:r>
+          </a:p>
+        </p:txBody>
+      </p:sp>
+    </p:spTree>
+    <p:extLst>
+      <p:ext uri="{BB962C8B-B14F-4D97-AF65-F5344CB8AC3E}">
+        <p14:creationId xmlns:p14="http://schemas.microsoft.com/office/powerpoint/2010/main" val="300758645"/>
+      </p:ext>
+    </p:extLst>
+  </p:cSld>
+  <p:clrMapOvr>
+    <a:masterClrMapping/>
+  </p:clrMapOvr>
+</p:sld>
+</file>
+
+<file path=ppt/slides/slide15.xml><?xml version="1.0" encoding="utf-8"?>
+<p:sld xmlns:a="http://schemas.openxmlformats.org/drawingml/2006/main" xmlns:r="http://schemas.openxmlformats.org/officeDocument/2006/relationships" xmlns:p="http://schemas.openxmlformats.org/presentationml/2006/main">
+  <p:cSld>
+    <p:spTree>
+      <p:nvGrpSpPr>
+        <p:cNvPr id="1" name=""/>
+        <p:cNvGrpSpPr/>
+        <p:nvPr/>
+      </p:nvGrpSpPr>
+      <p:grpSpPr>
+        <a:xfrm>
+          <a:off x="0" y="0"/>
+          <a:ext cx="0" cy="0"/>
+          <a:chOff x="0" y="0"/>
+          <a:chExt cx="0" cy="0"/>
+        </a:xfrm>
+      </p:grpSpPr>
+      <p:sp>
+        <p:nvSpPr>
+          <p:cNvPr id="26626" name="Rectangle 2"/>
+          <p:cNvSpPr>
+            <a:spLocks noGrp="1" noChangeArrowheads="1"/>
+          </p:cNvSpPr>
+          <p:nvPr>
+            <p:ph type="title"/>
+          </p:nvPr>
+        </p:nvSpPr>
+        <p:spPr>
+          <a:xfrm>
+            <a:off x="623392" y="0"/>
+            <a:ext cx="10476544" cy="684000"/>
+          </a:xfrm>
+        </p:spPr>
+        <p:txBody>
+          <a:bodyPr anchor="ctr"/>
+          <a:lstStyle/>
+          <a:p>
+            <a:pPr eaLnBrk="1" hangingPunct="1">
+              <a:defRPr/>
+            </a:pPr>
+            <a:r>
+              <a:rPr lang="fr-FR" dirty="0"/>
+              <a:t>Vos souhaits pour d’autres formations :</a:t>
+            </a:r>
+          </a:p>
+        </p:txBody>
+      </p:sp>
+      <p:sp>
+        <p:nvSpPr>
+          <p:cNvPr id="3" name="Espace réservé du numéro de diapositive 2"/>
+          <p:cNvSpPr>
+            <a:spLocks noGrp="1"/>
+          </p:cNvSpPr>
+          <p:nvPr>
+            <p:ph type="sldNum" sz="quarter" idx="12"/>
+          </p:nvPr>
+        </p:nvSpPr>
+        <p:spPr/>
+        <p:txBody>
+          <a:bodyPr/>
+          <a:lstStyle/>
+          <a:p>
+            <a:pPr>
+              <a:defRPr/>
+            </a:pPr>
+            <a:fld id="{9CB9D0F4-6BFF-4C0E-96D4-B15CA75DCB76}" type="slidenum">
+              <a:rPr lang="fr-FR" smtClean="0"/>
+              <a:pPr>
+                <a:defRPr/>
+              </a:pPr>
+              <a:t>18</a:t>
+            </a:fld>
+            <a:endParaRPr lang="fr-FR"/>
+          </a:p>
+        </p:txBody>
+      </p:sp>
+      <p:sp>
+        <p:nvSpPr>
+          <p:cNvPr id="2" name="ZoneTexte 1">
+            <a:extLst>
+              <a:ext uri="{FF2B5EF4-FFF2-40B4-BE49-F238E27FC236}">
+                <a16:creationId xmlns:a16="http://schemas.microsoft.com/office/drawing/2014/main" id="{811FD761-9C3A-4F6B-802E-35E3547E73E0}"/>
+              </a:ext>
+            </a:extLst>
+          </p:cNvPr>
+          <p:cNvSpPr txBox="1"/>
+          <p:nvPr/>
+        </p:nvSpPr>
+        <p:spPr>
+          <a:xfrm>
+            <a:off x="623392" y="684000"/>
+            <a:ext cx="10792753" cy="464871"/>
+          </a:xfrm>
+          <a:prstGeom prst="rect">
+            <a:avLst/>
+          </a:prstGeom>
+          <a:noFill/>
+        </p:spPr>
+        <p:txBody>
+          <a:bodyPr wrap="square" rtlCol="0">
+            <a:spAutoFit/>
+          </a:bodyPr>
+          <a:lstStyle/>
+          <a:p>
+            <a:pPr marL="285750" indent="-285750" algn="l">
+              <a:lnSpc>
+                <a:spcPct val="150000"/>
+              </a:lnSpc>
+              <a:buClr>
+                <a:srgbClr val="0070C0"/>
+              </a:buClr>
+              <a:buSzPct val="75000"/>
+              <a:buFont typeface="Wingdings" panose="05000000000000000000" pitchFamily="2" charset="2"/>
+              <a:buChar char="q"/>
+            </a:pPr>
+            <a:r>
+              <a:rPr lang="fr-FR" b="0">
+                <a:solidFill>
+                  <a:srgbClr val="202124"/>
+                </a:solidFill>
+                <a:effectLst/>
+              </a:rPr>
+              <a:t>RAS</a:t>
+            </a:r>
+            <a:endParaRPr lang="fr-FR" b="0" dirty="0">
+              <a:solidFill>
+                <a:srgbClr val="202124"/>
+              </a:solidFill>
+              <a:effectLst/>
+            </a:endParaRPr>
+          </a:p>
+        </p:txBody>
+      </p:sp>
+    </p:spTree>
+    <p:extLst>
+      <p:ext uri="{BB962C8B-B14F-4D97-AF65-F5344CB8AC3E}">
+        <p14:creationId xmlns:p14="http://schemas.microsoft.com/office/powerpoint/2010/main" val="2114042816"/>
+      </p:ext>
+    </p:extLst>
+  </p:cSld>
+  <p:clrMapOvr>
+    <a:masterClrMapping/>
+  </p:clrMapOvr>
+</p:sld>
+</file>
+
+<file path=ppt/slides/slide2.xml><?xml version="1.0" encoding="utf-8"?>
+<p:sld xmlns:a="http://schemas.openxmlformats.org/drawingml/2006/main" xmlns:r="http://schemas.openxmlformats.org/officeDocument/2006/relationships" xmlns:p="http://schemas.openxmlformats.org/presentationml/2006/main">
+  <p:cSld>
+    <p:spTree>
+      <p:nvGrpSpPr>
+        <p:cNvPr id="1" name=""/>
+        <p:cNvGrpSpPr/>
+        <p:nvPr/>
+      </p:nvGrpSpPr>
+      <p:grpSpPr>
+        <a:xfrm>
+          <a:off x="0" y="0"/>
+          <a:ext cx="0" cy="0"/>
+          <a:chOff x="0" y="0"/>
+          <a:chExt cx="0" cy="0"/>
+        </a:xfrm>
+      </p:grpSpPr>
+      <p:sp>
+        <p:nvSpPr>
+          <p:cNvPr id="4" name="ZoneTexte 3"/>
+          <p:cNvSpPr txBox="1"/>
+          <p:nvPr/>
+        </p:nvSpPr>
+        <p:spPr>
+          <a:xfrm>
+            <a:off x="623392" y="0"/>
+            <a:ext cx="8226921" cy="652463"/>
+          </a:xfrm>
+          <a:prstGeom prst="rect">
+            <a:avLst/>
+          </a:prstGeom>
+          <a:noFill/>
+          <a:ln>
+            <a:noFill/>
+          </a:ln>
+          <a:effectLst/>
+          <a:extLst>
+            <a:ext uri="{909E8E84-426E-40DD-AFC4-6F175D3DCCD1}">
+              <a14:hiddenFill xmlns:a14="http://schemas.microsoft.com/office/drawing/2010/main">
+                <a:solidFill>
+                  <a:schemeClr val="accent1"/>
+                </a:solidFill>
+              </a14:hiddenFill>
+            </a:ext>
+            <a:ext uri="{91240B29-F687-4F45-9708-019B960494DF}">
+              <a14:hiddenLine xmlns:a14="http://schemas.microsoft.com/office/drawing/2010/main" w="9525">
+                <a:solidFill>
+                  <a:schemeClr val="tx1"/>
+                </a:solidFill>
+                <a:miter lim="800000"/>
+                <a:headEnd/>
+                <a:tailEnd/>
+              </a14:hiddenLine>
+            </a:ext>
+            <a:ext uri="{AF507438-7753-43E0-B8FC-AC1667EBCBE1}">
+              <a14:hiddenEffects xmlns:a14="http://schemas.microsoft.com/office/drawing/2010/main">
+                <a:effectLst>
+                  <a:outerShdw dist="35921" dir="2700000" algn="ctr" rotWithShape="0">
+                    <a:schemeClr val="bg2"/>
+                  </a:outerShdw>
+                </a:effectLst>
+              </a14:hiddenEffects>
+            </a:ext>
+          </a:extLst>
+        </p:spPr>
+        <p:txBody>
+          <a:bodyPr vert="horz" wrap="square" lIns="91440" tIns="45720" rIns="91440" bIns="45720" numCol="1" anchor="ctr" anchorCtr="0" compatLnSpc="1">
+            <a:prstTxWarp prst="textNoShape">
+              <a:avLst/>
+            </a:prstTxWarp>
+          </a:bodyPr>
+          <a:lstStyle>
+            <a:lvl1pPr fontAlgn="base">
+              <a:spcBef>
+                <a:spcPct val="0"/>
+              </a:spcBef>
+              <a:spcAft>
+                <a:spcPct val="0"/>
+              </a:spcAft>
+              <a:defRPr sz="2400" b="1">
+                <a:solidFill>
+                  <a:srgbClr val="FF6600"/>
+                </a:solidFill>
+                <a:effectLst>
+                  <a:outerShdw blurRad="38100" dist="38100" dir="2700000" algn="tl">
+                    <a:srgbClr val="000000">
+                      <a:alpha val="43137"/>
+                    </a:srgbClr>
+                  </a:outerShdw>
+                </a:effectLst>
+                <a:latin typeface="+mj-lt"/>
+                <a:ea typeface="+mj-ea"/>
+                <a:cs typeface="+mj-cs"/>
+              </a:defRPr>
+            </a:lvl1pPr>
+            <a:lvl2pPr eaLnBrk="0" fontAlgn="base" hangingPunct="0">
+              <a:spcBef>
+                <a:spcPct val="0"/>
+              </a:spcBef>
+              <a:spcAft>
+                <a:spcPct val="0"/>
+              </a:spcAft>
+              <a:defRPr sz="2400" b="1">
+                <a:latin typeface="Calibri" pitchFamily="34" charset="0"/>
+                <a:cs typeface="Arial" charset="0"/>
+              </a:defRPr>
+            </a:lvl2pPr>
+            <a:lvl3pPr eaLnBrk="0" fontAlgn="base" hangingPunct="0">
+              <a:spcBef>
+                <a:spcPct val="0"/>
+              </a:spcBef>
+              <a:spcAft>
+                <a:spcPct val="0"/>
+              </a:spcAft>
+              <a:defRPr sz="2400" b="1">
+                <a:latin typeface="Calibri" pitchFamily="34" charset="0"/>
+                <a:cs typeface="Arial" charset="0"/>
+              </a:defRPr>
+            </a:lvl3pPr>
+            <a:lvl4pPr eaLnBrk="0" fontAlgn="base" hangingPunct="0">
+              <a:spcBef>
+                <a:spcPct val="0"/>
+              </a:spcBef>
+              <a:spcAft>
+                <a:spcPct val="0"/>
+              </a:spcAft>
+              <a:defRPr sz="2400" b="1">
+                <a:latin typeface="Calibri" pitchFamily="34" charset="0"/>
+                <a:cs typeface="Arial" charset="0"/>
+              </a:defRPr>
+            </a:lvl4pPr>
+            <a:lvl5pPr eaLnBrk="0" fontAlgn="base" hangingPunct="0">
+              <a:spcBef>
+                <a:spcPct val="0"/>
+              </a:spcBef>
+              <a:spcAft>
+                <a:spcPct val="0"/>
+              </a:spcAft>
+              <a:defRPr sz="2400" b="1">
+                <a:latin typeface="Calibri" pitchFamily="34" charset="0"/>
+                <a:cs typeface="Arial" charset="0"/>
+              </a:defRPr>
+            </a:lvl5pPr>
+            <a:lvl6pPr marL="457200" fontAlgn="base">
+              <a:spcBef>
+                <a:spcPct val="0"/>
+              </a:spcBef>
+              <a:spcAft>
+                <a:spcPct val="0"/>
+              </a:spcAft>
+              <a:defRPr sz="3200">
+                <a:solidFill>
+                  <a:srgbClr val="FF6600"/>
+                </a:solidFill>
+                <a:latin typeface="Calibri" pitchFamily="34" charset="0"/>
+                <a:cs typeface="Arial" charset="0"/>
+              </a:defRPr>
+            </a:lvl6pPr>
+            <a:lvl7pPr marL="914400" fontAlgn="base">
+              <a:spcBef>
+                <a:spcPct val="0"/>
+              </a:spcBef>
+              <a:spcAft>
+                <a:spcPct val="0"/>
+              </a:spcAft>
+              <a:defRPr sz="3200">
+                <a:solidFill>
+                  <a:srgbClr val="FF6600"/>
+                </a:solidFill>
+                <a:latin typeface="Calibri" pitchFamily="34" charset="0"/>
+                <a:cs typeface="Arial" charset="0"/>
+              </a:defRPr>
+            </a:lvl7pPr>
+            <a:lvl8pPr marL="1371600" fontAlgn="base">
+              <a:spcBef>
+                <a:spcPct val="0"/>
+              </a:spcBef>
+              <a:spcAft>
+                <a:spcPct val="0"/>
+              </a:spcAft>
+              <a:defRPr sz="3200">
+                <a:solidFill>
+                  <a:srgbClr val="FF6600"/>
+                </a:solidFill>
+                <a:latin typeface="Calibri" pitchFamily="34" charset="0"/>
+                <a:cs typeface="Arial" charset="0"/>
+              </a:defRPr>
+            </a:lvl8pPr>
+            <a:lvl9pPr marL="1828800" fontAlgn="base">
+              <a:spcBef>
+                <a:spcPct val="0"/>
+              </a:spcBef>
+              <a:spcAft>
+                <a:spcPct val="0"/>
+              </a:spcAft>
+              <a:defRPr sz="3200">
+                <a:solidFill>
+                  <a:srgbClr val="FF6600"/>
+                </a:solidFill>
+                <a:latin typeface="Calibri" pitchFamily="34" charset="0"/>
+                <a:cs typeface="Arial" charset="0"/>
+              </a:defRPr>
+            </a:lvl9pPr>
+          </a:lstStyle>
+          <a:p>
+            <a:r>
+              <a:rPr lang="fr-FR" dirty="0">
+                <a:solidFill>
+                  <a:schemeClr val="tx1"/>
+                </a:solidFill>
+                <a:effectLst/>
+              </a:rPr>
+              <a:t>Les questions de la fiche d’évaluation pour mémoire</a:t>
+            </a:r>
+          </a:p>
+        </p:txBody>
+      </p:sp>
+      <p:sp>
+        <p:nvSpPr>
+          <p:cNvPr id="2" name="Espace réservé du numéro de diapositive 1"/>
+          <p:cNvSpPr>
+            <a:spLocks noGrp="1"/>
+          </p:cNvSpPr>
+          <p:nvPr>
+            <p:ph type="sldNum" sz="quarter" idx="12"/>
+          </p:nvPr>
+        </p:nvSpPr>
+        <p:spPr/>
+        <p:txBody>
+          <a:bodyPr/>
+          <a:lstStyle/>
+          <a:p>
+            <a:pPr marL="0" marR="0" lvl="0" indent="0" algn="r" defTabSz="914400" rtl="0" eaLnBrk="1" fontAlgn="auto" latinLnBrk="0" hangingPunct="1">
+              <a:lnSpc>
+                <a:spcPct val="100000"/>
+              </a:lnSpc>
+              <a:spcBef>
+                <a:spcPts val="0"/>
+              </a:spcBef>
+              <a:spcAft>
+                <a:spcPts val="0"/>
+              </a:spcAft>
+              <a:buClrTx/>
+              <a:buSzTx/>
+              <a:buFontTx/>
+              <a:buNone/>
+              <a:tabLst/>
+              <a:defRPr/>
+            </a:pPr>
+            <a:fld id="{C16EBFAD-7D7E-4EEE-8122-1782B4EC52E1}" type="slidenum">
+              <a:rPr kumimoji="0" lang="fr-FR" sz="1000" b="0" i="0" u="none" strike="noStrike" kern="1200" cap="none" spc="0" normalizeH="0" baseline="0" noProof="0" smtClean="0">
+                <a:ln>
+                  <a:noFill/>
+                </a:ln>
+                <a:solidFill>
+                  <a:srgbClr val="000000"/>
+                </a:solidFill>
+                <a:effectLst/>
+                <a:uLnTx/>
+                <a:uFillTx/>
+                <a:latin typeface="Verdana" pitchFamily="34" charset="0"/>
+                <a:ea typeface="+mn-ea"/>
+                <a:cs typeface="Arial" charset="0"/>
+              </a:rPr>
+              <a:pPr marL="0" marR="0" lvl="0" indent="0" algn="r" defTabSz="914400" rtl="0" eaLnBrk="1" fontAlgn="auto" latinLnBrk="0" hangingPunct="1">
+                <a:lnSpc>
+                  <a:spcPct val="100000"/>
+                </a:lnSpc>
+                <a:spcBef>
+                  <a:spcPts val="0"/>
+                </a:spcBef>
+                <a:spcAft>
+                  <a:spcPts val="0"/>
+                </a:spcAft>
+                <a:buClrTx/>
+                <a:buSzTx/>
+                <a:buFontTx/>
+                <a:buNone/>
+                <a:tabLst/>
+                <a:defRPr/>
+              </a:pPr>
+              <a:t>5</a:t>
+            </a:fld>
+            <a:endParaRPr kumimoji="0" lang="fr-FR" sz="1000" b="0" i="0" u="none" strike="noStrike" kern="1200" cap="none" spc="0" normalizeH="0" baseline="0" noProof="0">
+              <a:ln>
+                <a:noFill/>
+              </a:ln>
+              <a:solidFill>
+                <a:srgbClr val="000000"/>
+              </a:solidFill>
+              <a:effectLst/>
+              <a:uLnTx/>
+              <a:uFillTx/>
+              <a:latin typeface="Verdana" pitchFamily="34" charset="0"/>
+              <a:ea typeface="+mn-ea"/>
+              <a:cs typeface="Arial" charset="0"/>
+            </a:endParaRPr>
+          </a:p>
+        </p:txBody>
+      </p:sp>
+      <p:pic>
+        <p:nvPicPr>
+          <p:cNvPr id="6" name="Image 5">
+            <a:extLst>
+              <a:ext uri="{FF2B5EF4-FFF2-40B4-BE49-F238E27FC236}">
+                <a16:creationId xmlns:a16="http://schemas.microsoft.com/office/drawing/2014/main" id="{F5A46E7E-C1CE-4674-3246-78DD13B8CD33}"/>
+              </a:ext>
+            </a:extLst>
+          </p:cNvPr>
+          <p:cNvPicPr>
+            <a:picLocks noChangeAspect="1"/>
+          </p:cNvPicPr>
+          <p:nvPr/>
+        </p:nvPicPr>
+        <p:blipFill>
+          <a:blip r:embed="rId3"/>
+          <a:stretch>
+            <a:fillRect/>
+          </a:stretch>
+        </p:blipFill>
+        <p:spPr>
+          <a:xfrm>
+            <a:off x="537328" y="785862"/>
+            <a:ext cx="9782125" cy="5992819"/>
+          </a:xfrm>
+          <a:prstGeom prst="rect">
+            <a:avLst/>
+          </a:prstGeom>
+        </p:spPr>
+      </p:pic>
+    </p:spTree>
+    <p:extLst>
+      <p:ext uri="{BB962C8B-B14F-4D97-AF65-F5344CB8AC3E}">
+        <p14:creationId xmlns:p14="http://schemas.microsoft.com/office/powerpoint/2010/main" val="68267618"/>
+      </p:ext>
+    </p:extLst>
+  </p:cSld>
+  <p:clrMapOvr>
+    <a:masterClrMapping/>
+  </p:clrMapOvr>
+</p:sld>
+</file>
+
+<file path=ppt/slides/slide3.xml><?xml version="1.0" encoding="utf-8"?>
+<p:sld xmlns:a="http://schemas.openxmlformats.org/drawingml/2006/main" xmlns:r="http://schemas.openxmlformats.org/officeDocument/2006/relationships" xmlns:p="http://schemas.openxmlformats.org/presentationml/2006/main">
+  <p:cSld>
+    <p:spTree>
+      <p:nvGrpSpPr>
+        <p:cNvPr id="1" name=""/>
+        <p:cNvGrpSpPr/>
+        <p:nvPr/>
+      </p:nvGrpSpPr>
+      <p:grpSpPr>
+        <a:xfrm>
+          <a:off x="0" y="0"/>
+          <a:ext cx="0" cy="0"/>
+          <a:chOff x="0" y="0"/>
+          <a:chExt cx="0" cy="0"/>
+        </a:xfrm>
+      </p:grpSpPr>
+      <p:sp>
+        <p:nvSpPr>
+          <p:cNvPr id="6" name="Titre 5"/>
+          <p:cNvSpPr>
+            <a:spLocks noGrp="1"/>
+          </p:cNvSpPr>
+          <p:nvPr>
+            <p:ph type="ctrTitle"/>
+          </p:nvPr>
+        </p:nvSpPr>
+        <p:spPr>
+          <a:xfrm>
+            <a:off x="1596000" y="2636913"/>
+            <a:ext cx="9000000" cy="1080000"/>
+          </a:xfrm>
+          <a:prstGeom prst="roundRect">
+            <a:avLst/>
+          </a:prstGeom>
+          <a:solidFill>
+            <a:srgbClr val="0070C0"/>
+          </a:solidFill>
+          <a:ln>
+            <a:noFill/>
+          </a:ln>
+          <a:effectLst>
+            <a:outerShdw blurRad="44450" dist="27940" dir="5400000" algn="ctr">
+              <a:srgbClr val="000000">
+                <a:alpha val="32000"/>
+              </a:srgbClr>
+            </a:outerShdw>
+          </a:effectLst>
+          <a:scene3d>
+            <a:camera prst="orthographicFront">
+              <a:rot lat="0" lon="0" rev="0"/>
+            </a:camera>
+            <a:lightRig rig="balanced" dir="t">
+              <a:rot lat="0" lon="0" rev="8700000"/>
+            </a:lightRig>
+          </a:scene3d>
+          <a:sp3d>
+            <a:bevelT w="190500" h="38100"/>
+          </a:sp3d>
+        </p:spPr>
+        <p:txBody>
+          <a:bodyPr rot="0" spcFirstLastPara="0" vert="horz" wrap="square" lIns="91440" tIns="45720" rIns="91440" bIns="45720" numCol="1" spcCol="0" rtlCol="0" fromWordArt="0" anchor="ctr" anchorCtr="0" forceAA="0" compatLnSpc="1">
+            <a:prstTxWarp prst="textNoShape">
+              <a:avLst/>
+            </a:prstTxWarp>
+            <a:noAutofit/>
+          </a:bodyPr>
+          <a:lstStyle/>
+          <a:p>
+            <a:pPr>
+              <a:spcBef>
+                <a:spcPts val="0"/>
+              </a:spcBef>
+            </a:pPr>
+            <a:r>
+              <a:rPr lang="fr-FR" sz="2800" dirty="0">
+                <a:solidFill>
+                  <a:schemeClr val="bg1"/>
+                </a:solidFill>
+                <a:effectLst>
+                  <a:outerShdw blurRad="38100" dist="38100" dir="2700000" algn="tl">
+                    <a:srgbClr val="C0C0C0"/>
+                  </a:outerShdw>
+                </a:effectLst>
+              </a:rPr>
+              <a:t>Évaluation globale de l’action</a:t>
+            </a:r>
+          </a:p>
+        </p:txBody>
+      </p:sp>
+      <p:sp>
+        <p:nvSpPr>
+          <p:cNvPr id="2" name="Espace réservé du numéro de diapositive 1">
+            <a:extLst>
+              <a:ext uri="{FF2B5EF4-FFF2-40B4-BE49-F238E27FC236}">
+                <a16:creationId xmlns:a16="http://schemas.microsoft.com/office/drawing/2014/main" id="{1394BFB7-BF34-498D-817B-1A99E05434DF}"/>
+              </a:ext>
+            </a:extLst>
+          </p:cNvPr>
+          <p:cNvSpPr>
+            <a:spLocks noGrp="1"/>
+          </p:cNvSpPr>
+          <p:nvPr>
+            <p:ph type="sldNum" sz="quarter" idx="12"/>
+          </p:nvPr>
+        </p:nvSpPr>
+        <p:spPr>
+          <a:xfrm>
+            <a:off x="9173600" y="6219191"/>
+            <a:ext cx="2844800" cy="365125"/>
+          </a:xfrm>
+        </p:spPr>
+        <p:txBody>
+          <a:bodyPr/>
+          <a:lstStyle/>
+          <a:p>
+            <a:fld id="{E8592F83-7405-4D71-BE15-BA2C0774FD69}" type="slidenum">
+              <a:rPr lang="fr-FR" smtClean="0">
+                <a:solidFill>
+                  <a:schemeClr val="tx1"/>
+                </a:solidFill>
+              </a:rPr>
+              <a:t>6</a:t>
+            </a:fld>
+            <a:endParaRPr lang="fr-FR">
+              <a:solidFill>
+                <a:schemeClr val="tx1"/>
+              </a:solidFill>
+            </a:endParaRPr>
+          </a:p>
+        </p:txBody>
+      </p:sp>
+      <p:pic>
+        <p:nvPicPr>
+          <p:cNvPr id="3" name="Image 2" descr="Une image contenant oiseau, plume, colibri, texte&#10;&#10;Le contenu généré par l’IA peut être incorrect.">
+            <a:extLst>
+              <a:ext uri="{FF2B5EF4-FFF2-40B4-BE49-F238E27FC236}">
+                <a16:creationId xmlns:a16="http://schemas.microsoft.com/office/drawing/2014/main" id="{13EEA51A-5A43-6543-5C36-26FD821D05BF}"/>
+              </a:ext>
+            </a:extLst>
+          </p:cNvPr>
+          <p:cNvPicPr>
+            <a:picLocks noChangeAspect="1"/>
+          </p:cNvPicPr>
+          <p:nvPr/>
+        </p:nvPicPr>
+        <p:blipFill>
+          <a:blip r:embed="rId3">
+            <a:extLst>
+              <a:ext uri="{28A0092B-C50C-407E-A947-70E740481C1C}">
+                <a14:useLocalDpi xmlns:a14="http://schemas.microsoft.com/office/drawing/2010/main" val="0"/>
+              </a:ext>
+            </a:extLst>
+          </a:blip>
+          <a:stretch>
+            <a:fillRect/>
+          </a:stretch>
+        </p:blipFill>
+        <p:spPr>
+          <a:xfrm>
+            <a:off x="5206538" y="442729"/>
+            <a:ext cx="1778924" cy="1774767"/>
+          </a:xfrm>
+          <a:prstGeom prst="rect">
+            <a:avLst/>
+          </a:prstGeom>
+        </p:spPr>
+      </p:pic>
+    </p:spTree>
+    <p:extLst>
+      <p:ext uri="{BB962C8B-B14F-4D97-AF65-F5344CB8AC3E}">
+        <p14:creationId xmlns:p14="http://schemas.microsoft.com/office/powerpoint/2010/main" val="395553819"/>
+      </p:ext>
+    </p:extLst>
+  </p:cSld>
+  <p:clrMapOvr>
+    <a:masterClrMapping/>
+  </p:clrMapOvr>
+</p:sld>
+</file>
+
+<file path=ppt/slides/slide4.xml><?xml version="1.0" encoding="utf-8"?>
+<p:sld xmlns:a="http://schemas.openxmlformats.org/drawingml/2006/main" xmlns:r="http://schemas.openxmlformats.org/officeDocument/2006/relationships" xmlns:p="http://schemas.openxmlformats.org/presentationml/2006/main">
+  <p:cSld>
+    <p:spTree>
+      <p:nvGrpSpPr>
+        <p:cNvPr id="1" name=""/>
+        <p:cNvGrpSpPr/>
+        <p:nvPr/>
+      </p:nvGrpSpPr>
+      <p:grpSpPr>
+        <a:xfrm>
+          <a:off x="0" y="0"/>
+          <a:ext cx="0" cy="0"/>
+          <a:chOff x="0" y="0"/>
+          <a:chExt cx="0" cy="0"/>
+        </a:xfrm>
+      </p:grpSpPr>
+      <p:sp>
+        <p:nvSpPr>
+          <p:cNvPr id="3" name="Espace réservé du numéro de diapositive 2"/>
+          <p:cNvSpPr>
+            <a:spLocks noGrp="1"/>
+          </p:cNvSpPr>
+          <p:nvPr>
+            <p:ph type="sldNum" sz="quarter" idx="12"/>
+          </p:nvPr>
+        </p:nvSpPr>
+        <p:spPr>
+          <a:xfrm>
+            <a:off x="9271000" y="6207125"/>
+            <a:ext cx="2844800" cy="457200"/>
+          </a:xfrm>
+        </p:spPr>
+        <p:txBody>
+          <a:bodyPr wrap="square" anchor="t">
+            <a:normAutofit/>
+          </a:bodyPr>
+          <a:lstStyle/>
+          <a:p>
+            <a:pPr>
+              <a:spcAft>
+                <a:spcPts val="600"/>
+              </a:spcAft>
+              <a:defRPr/>
+            </a:pPr>
+            <a:fld id="{156ABF86-EFC2-454D-AD05-896C81F76FA1}" type="slidenum">
+              <a:rPr lang="fr-FR" smtClean="0"/>
+              <a:pPr>
+                <a:spcAft>
+                  <a:spcPts val="600"/>
+                </a:spcAft>
+                <a:defRPr/>
+              </a:pPr>
+              <a:t>7</a:t>
+            </a:fld>
+            <a:endParaRPr lang="fr-FR"/>
+          </a:p>
+        </p:txBody>
+      </p:sp>
+      <p:sp>
+        <p:nvSpPr>
+          <p:cNvPr id="4" name="ZoneTexte 3">
+            <a:extLst>
+              <a:ext uri="{FF2B5EF4-FFF2-40B4-BE49-F238E27FC236}">
+                <a16:creationId xmlns:a16="http://schemas.microsoft.com/office/drawing/2014/main" id="{8E874541-DCD9-8062-9A46-EE920F140889}"/>
+              </a:ext>
+            </a:extLst>
+          </p:cNvPr>
+          <p:cNvSpPr txBox="1"/>
+          <p:nvPr/>
+        </p:nvSpPr>
+        <p:spPr>
+          <a:xfrm>
+            <a:off x="633234" y="122612"/>
+            <a:ext cx="10476482" cy="461665"/>
+          </a:xfrm>
+          <a:prstGeom prst="rect">
+            <a:avLst/>
+          </a:prstGeom>
+          <a:noFill/>
+        </p:spPr>
+        <p:txBody>
+          <a:bodyPr wrap="square" anchor="ctr">
+            <a:spAutoFit/>
+          </a:bodyPr>
+          <a:lstStyle/>
+          <a:p>
+            <a:r>
+              <a:rPr lang="fr-FR" sz="2400" b="1" dirty="0">
+                <a:latin typeface="Calibri" panose="020F0502020204030204" pitchFamily="34" charset="0"/>
+                <a:ea typeface="Times New Roman" panose="02020603050405020304" pitchFamily="18" charset="0"/>
+              </a:rPr>
+              <a:t>1. Cette </a:t>
+            </a:r>
+            <a:r>
+              <a:rPr lang="fr-FR" sz="2400" b="1" dirty="0">
+                <a:latin typeface="Calibri" panose="020F0502020204030204" pitchFamily="34" charset="0"/>
+                <a:ea typeface="Times New Roman" panose="02020603050405020304" pitchFamily="18" charset="0"/>
+              </a:rPr>
+              <a:t>formation</a:t>
+            </a:r>
+            <a:r>
+              <a:rPr lang="fr-FR" sz="2400" b="1" dirty="0">
+                <a:latin typeface="Calibri" panose="020F0502020204030204" pitchFamily="34" charset="0"/>
+                <a:ea typeface="Times New Roman" panose="02020603050405020304" pitchFamily="18" charset="0"/>
+              </a:rPr>
+              <a:t> m'a apporté de nouvelles compétences et connaissances</a:t>
+            </a:r>
+            <a:endParaRPr lang="fr-FR" sz="2400" b="1" dirty="0"/>
+          </a:p>
+        </p:txBody>
+      </p:sp>
+      <p:grpSp>
+        <p:nvGrpSpPr>
+          <p:cNvPr id="23" name="Groupe 22">
+            <a:extLst>
+              <a:ext uri="{FF2B5EF4-FFF2-40B4-BE49-F238E27FC236}">
+                <a16:creationId xmlns:a16="http://schemas.microsoft.com/office/drawing/2014/main" id="{980EC6F2-4971-7031-ACAC-AD05F54997DA}"/>
+              </a:ext>
+            </a:extLst>
+          </p:cNvPr>
+          <p:cNvGrpSpPr/>
+          <p:nvPr/>
+        </p:nvGrpSpPr>
+        <p:grpSpPr>
+          <a:xfrm>
+            <a:off x="9232592" y="1876755"/>
+            <a:ext cx="2276869" cy="3104489"/>
+            <a:chOff x="9375619" y="1843456"/>
+            <a:chExt cx="2276869" cy="3104489"/>
+          </a:xfrm>
+        </p:grpSpPr>
+        <p:grpSp>
+          <p:nvGrpSpPr>
+            <p:cNvPr id="14" name="Groupe 13">
+              <a:extLst>
+                <a:ext uri="{FF2B5EF4-FFF2-40B4-BE49-F238E27FC236}">
+                  <a16:creationId xmlns:a16="http://schemas.microsoft.com/office/drawing/2014/main" id="{B24DD23F-8D0C-B01B-EDDF-1F3B6B61803F}"/>
+                </a:ext>
+              </a:extLst>
+            </p:cNvPr>
+            <p:cNvGrpSpPr/>
+            <p:nvPr/>
+          </p:nvGrpSpPr>
+          <p:grpSpPr>
+            <a:xfrm>
+              <a:off x="9375619" y="1843456"/>
+              <a:ext cx="576051" cy="3104489"/>
+              <a:chOff x="9424517" y="1534516"/>
+              <a:chExt cx="576051" cy="3104489"/>
+            </a:xfrm>
+          </p:grpSpPr>
+          <p:pic>
+            <p:nvPicPr>
+              <p:cNvPr id="7" name="Image 6">
+                <a:extLst>
+                  <a:ext uri="{FF2B5EF4-FFF2-40B4-BE49-F238E27FC236}">
+                    <a16:creationId xmlns:a16="http://schemas.microsoft.com/office/drawing/2014/main" id="{743319DD-3EDB-D93A-C9AD-9F2039E7FCCC}"/>
+                  </a:ext>
+                </a:extLst>
+              </p:cNvPr>
+              <p:cNvPicPr>
+                <a:picLocks noChangeAspect="1"/>
+              </p:cNvPicPr>
+              <p:nvPr/>
+            </p:nvPicPr>
+            <p:blipFill>
+              <a:blip r:embed="rId3"/>
+              <a:stretch>
+                <a:fillRect/>
+              </a:stretch>
+            </p:blipFill>
+            <p:spPr>
+              <a:xfrm>
+                <a:off x="9424517" y="1534516"/>
+                <a:ext cx="540000" cy="540000"/>
+              </a:xfrm>
+              <a:prstGeom prst="rect">
+                <a:avLst/>
+              </a:prstGeom>
+            </p:spPr>
+          </p:pic>
+          <p:pic>
+            <p:nvPicPr>
+              <p:cNvPr id="11" name="Image 10">
+                <a:extLst>
+                  <a:ext uri="{FF2B5EF4-FFF2-40B4-BE49-F238E27FC236}">
+                    <a16:creationId xmlns:a16="http://schemas.microsoft.com/office/drawing/2014/main" id="{1246BCD9-35B2-03EF-6E8B-1F291DFD85C9}"/>
+                  </a:ext>
+                </a:extLst>
+              </p:cNvPr>
+              <p:cNvPicPr>
+                <a:picLocks noChangeAspect="1"/>
+              </p:cNvPicPr>
+              <p:nvPr/>
+            </p:nvPicPr>
+            <p:blipFill>
+              <a:blip r:embed="rId4"/>
+              <a:stretch>
+                <a:fillRect/>
+              </a:stretch>
+            </p:blipFill>
+            <p:spPr>
+              <a:xfrm>
+                <a:off x="9476507" y="2350426"/>
+                <a:ext cx="488010" cy="540000"/>
+              </a:xfrm>
+              <a:prstGeom prst="rect">
+                <a:avLst/>
+              </a:prstGeom>
+            </p:spPr>
+          </p:pic>
+          <p:pic>
+            <p:nvPicPr>
+              <p:cNvPr id="12" name="Image 11">
+                <a:extLst>
+                  <a:ext uri="{FF2B5EF4-FFF2-40B4-BE49-F238E27FC236}">
+                    <a16:creationId xmlns:a16="http://schemas.microsoft.com/office/drawing/2014/main" id="{BCB2870E-5F43-BE4B-0CA4-A60C38575F63}"/>
+                  </a:ext>
+                </a:extLst>
+              </p:cNvPr>
+              <p:cNvPicPr>
+                <a:picLocks noChangeAspect="1"/>
+              </p:cNvPicPr>
+              <p:nvPr/>
+            </p:nvPicPr>
+            <p:blipFill>
+              <a:blip r:embed="rId5"/>
+              <a:stretch>
+                <a:fillRect/>
+              </a:stretch>
+            </p:blipFill>
+            <p:spPr>
+              <a:xfrm>
+                <a:off x="9449290" y="3238206"/>
+                <a:ext cx="490454" cy="468000"/>
+              </a:xfrm>
+              <a:prstGeom prst="rect">
+                <a:avLst/>
+              </a:prstGeom>
+            </p:spPr>
+          </p:pic>
+          <p:pic>
+            <p:nvPicPr>
+              <p:cNvPr id="13" name="Image 12">
+                <a:extLst>
+                  <a:ext uri="{FF2B5EF4-FFF2-40B4-BE49-F238E27FC236}">
+                    <a16:creationId xmlns:a16="http://schemas.microsoft.com/office/drawing/2014/main" id="{CDE87796-171C-5C8A-45CE-C79C5FAEBD85}"/>
+                  </a:ext>
+                </a:extLst>
+              </p:cNvPr>
+              <p:cNvPicPr>
+                <a:picLocks noChangeAspect="1"/>
+              </p:cNvPicPr>
+              <p:nvPr/>
+            </p:nvPicPr>
+            <p:blipFill>
+              <a:blip r:embed="rId6"/>
+              <a:stretch>
+                <a:fillRect/>
+              </a:stretch>
+            </p:blipFill>
+            <p:spPr>
+              <a:xfrm>
+                <a:off x="9440455" y="4099005"/>
+                <a:ext cx="560113" cy="540000"/>
+              </a:xfrm>
+              <a:prstGeom prst="rect">
+                <a:avLst/>
+              </a:prstGeom>
+            </p:spPr>
+          </p:pic>
+        </p:grpSp>
+        <p:sp>
+          <p:nvSpPr>
+            <p:cNvPr id="16" name="ZoneTexte 15">
+              <a:extLst>
+                <a:ext uri="{FF2B5EF4-FFF2-40B4-BE49-F238E27FC236}">
+                  <a16:creationId xmlns:a16="http://schemas.microsoft.com/office/drawing/2014/main" id="{B9DAED92-7CC2-94F1-203B-6B58CCE8FE9B}"/>
+                </a:ext>
+              </a:extLst>
+            </p:cNvPr>
+            <p:cNvSpPr txBox="1"/>
+            <p:nvPr/>
+          </p:nvSpPr>
+          <p:spPr>
+            <a:xfrm>
+              <a:off x="10080404" y="1928790"/>
+              <a:ext cx="1572084" cy="369332"/>
+            </a:xfrm>
+            <a:prstGeom prst="rect">
+              <a:avLst/>
+            </a:prstGeom>
+            <a:noFill/>
+          </p:spPr>
+          <p:txBody>
+            <a:bodyPr wrap="square">
+              <a:spAutoFit/>
+            </a:bodyPr>
+            <a:lstStyle/>
+            <a:p>
+              <a:r>
+                <a:rPr lang="fr-FR"/>
+                <a:t>Très satisfait</a:t>
+              </a:r>
+            </a:p>
+          </p:txBody>
+        </p:sp>
+        <p:sp>
+          <p:nvSpPr>
+            <p:cNvPr id="18" name="ZoneTexte 17">
+              <a:extLst>
+                <a:ext uri="{FF2B5EF4-FFF2-40B4-BE49-F238E27FC236}">
+                  <a16:creationId xmlns:a16="http://schemas.microsoft.com/office/drawing/2014/main" id="{2DE30B4E-BB1F-7828-609A-B6B9A8EBCCB7}"/>
+                </a:ext>
+              </a:extLst>
+            </p:cNvPr>
+            <p:cNvSpPr txBox="1"/>
+            <p:nvPr/>
+          </p:nvSpPr>
+          <p:spPr>
+            <a:xfrm>
+              <a:off x="10105396" y="2744700"/>
+              <a:ext cx="1176007" cy="369332"/>
+            </a:xfrm>
+            <a:prstGeom prst="rect">
+              <a:avLst/>
+            </a:prstGeom>
+            <a:noFill/>
+          </p:spPr>
+          <p:txBody>
+            <a:bodyPr wrap="square">
+              <a:spAutoFit/>
+            </a:bodyPr>
+            <a:lstStyle/>
+            <a:p>
+              <a:r>
+                <a:rPr lang="fr-FR"/>
+                <a:t>Satisfait</a:t>
+              </a:r>
+            </a:p>
+          </p:txBody>
+        </p:sp>
+        <p:sp>
+          <p:nvSpPr>
+            <p:cNvPr id="20" name="ZoneTexte 19">
+              <a:extLst>
+                <a:ext uri="{FF2B5EF4-FFF2-40B4-BE49-F238E27FC236}">
+                  <a16:creationId xmlns:a16="http://schemas.microsoft.com/office/drawing/2014/main" id="{F95629AA-8965-D392-D305-537D67306950}"/>
+                </a:ext>
+              </a:extLst>
+            </p:cNvPr>
+            <p:cNvSpPr txBox="1"/>
+            <p:nvPr/>
+          </p:nvSpPr>
+          <p:spPr>
+            <a:xfrm>
+              <a:off x="10132291" y="3642635"/>
+              <a:ext cx="1122218" cy="369332"/>
+            </a:xfrm>
+            <a:prstGeom prst="rect">
+              <a:avLst/>
+            </a:prstGeom>
+            <a:noFill/>
+          </p:spPr>
+          <p:txBody>
+            <a:bodyPr wrap="square">
+              <a:spAutoFit/>
+            </a:bodyPr>
+            <a:lstStyle/>
+            <a:p>
+              <a:r>
+                <a:rPr lang="fr-FR"/>
+                <a:t>Déçu</a:t>
+              </a:r>
+            </a:p>
+          </p:txBody>
+        </p:sp>
+        <p:sp>
+          <p:nvSpPr>
+            <p:cNvPr id="22" name="ZoneTexte 21">
+              <a:extLst>
+                <a:ext uri="{FF2B5EF4-FFF2-40B4-BE49-F238E27FC236}">
+                  <a16:creationId xmlns:a16="http://schemas.microsoft.com/office/drawing/2014/main" id="{BE1DF9B2-5229-AE4C-9A24-6792BD40D1E0}"/>
+                </a:ext>
+              </a:extLst>
+            </p:cNvPr>
+            <p:cNvSpPr txBox="1"/>
+            <p:nvPr/>
+          </p:nvSpPr>
+          <p:spPr>
+            <a:xfrm>
+              <a:off x="10105396" y="4540570"/>
+              <a:ext cx="1303142" cy="369332"/>
+            </a:xfrm>
+            <a:prstGeom prst="rect">
+              <a:avLst/>
+            </a:prstGeom>
+            <a:noFill/>
+          </p:spPr>
+          <p:txBody>
+            <a:bodyPr wrap="square">
+              <a:spAutoFit/>
+            </a:bodyPr>
+            <a:lstStyle/>
+            <a:p>
+              <a:r>
+                <a:rPr lang="fr-FR" sz="1800" b="0" i="0" u="none" strike="noStrike">
+                  <a:solidFill>
+                    <a:srgbClr val="000000"/>
+                  </a:solidFill>
+                  <a:effectLst/>
+                  <a:latin typeface="Calibri" panose="020F0502020204030204" pitchFamily="34" charset="0"/>
+                </a:rPr>
+                <a:t>Très déçu</a:t>
+              </a:r>
+              <a:r>
+                <a:rPr lang="fr-FR"/>
+                <a:t> </a:t>
+              </a:r>
+            </a:p>
+          </p:txBody>
+        </p:sp>
+      </p:grpSp>
+      <p:graphicFrame>
+        <p:nvGraphicFramePr>
+          <p:cNvPr id="5" name="Graphique 4">
+            <a:extLst>
+              <a:ext uri="{FF2B5EF4-FFF2-40B4-BE49-F238E27FC236}">
+                <a16:creationId xmlns:a16="http://schemas.microsoft.com/office/drawing/2014/main" id="{0025103B-5F35-56B2-D49D-94AFD15AA384}"/>
+              </a:ext>
+            </a:extLst>
+          </p:cNvPr>
+          <p:cNvGraphicFramePr/>
+          <p:nvPr>
+            <p:extLst>
+              <p:ext uri="{D42A27DB-BD31-4B8C-83A1-F6EECF244321}">
+                <p14:modId xmlns:p14="http://schemas.microsoft.com/office/powerpoint/2010/main" val="1664346128"/>
+              </p:ext>
+            </p:extLst>
+          </p:nvPr>
+        </p:nvGraphicFramePr>
+        <p:xfrm>
+          <a:off x="633234" y="871111"/>
+          <a:ext cx="8128000" cy="5418667"/>
+        </p:xfrm>
+        <a:graphic>
+          <a:graphicData uri="http://schemas.openxmlformats.org/drawingml/2006/chart">
+            <c:chart xmlns:c="http://schemas.openxmlformats.org/drawingml/2006/chart" xmlns:r="http://schemas.openxmlformats.org/officeDocument/2006/relationships" r:id="rId7"/>
+          </a:graphicData>
+        </a:graphic>
+      </p:graphicFrame>
+    </p:spTree>
+    <p:extLst>
+      <p:ext uri="{BB962C8B-B14F-4D97-AF65-F5344CB8AC3E}">
+        <p14:creationId xmlns:p14="http://schemas.microsoft.com/office/powerpoint/2010/main" val="3920868889"/>
+      </p:ext>
+    </p:extLst>
+  </p:cSld>
+  <p:clrMapOvr>
+    <a:masterClrMapping/>
+  </p:clrMapOvr>
+</p:sld>
+</file>
+
+<file path=ppt/slides/slide5.xml><?xml version="1.0" encoding="utf-8"?>
+<p:sld xmlns:a="http://schemas.openxmlformats.org/drawingml/2006/main" xmlns:r="http://schemas.openxmlformats.org/officeDocument/2006/relationships" xmlns:p="http://schemas.openxmlformats.org/presentationml/2006/main">
+  <p:cSld>
+    <p:spTree>
+      <p:nvGrpSpPr>
+        <p:cNvPr id="1" name=""/>
+        <p:cNvGrpSpPr/>
+        <p:nvPr/>
+      </p:nvGrpSpPr>
+      <p:grpSpPr>
+        <a:xfrm>
+          <a:off x="0" y="0"/>
+          <a:ext cx="0" cy="0"/>
+          <a:chOff x="0" y="0"/>
+          <a:chExt cx="0" cy="0"/>
+        </a:xfrm>
+      </p:grpSpPr>
+      <p:sp>
+        <p:nvSpPr>
+          <p:cNvPr id="3" name="Espace réservé du numéro de diapositive 2"/>
+          <p:cNvSpPr>
+            <a:spLocks noGrp="1"/>
+          </p:cNvSpPr>
+          <p:nvPr>
+            <p:ph type="sldNum" sz="quarter" idx="12"/>
+          </p:nvPr>
+        </p:nvSpPr>
+        <p:spPr>
+          <a:xfrm>
+            <a:off x="9271000" y="6207125"/>
+            <a:ext cx="2844800" cy="457200"/>
+          </a:xfrm>
+        </p:spPr>
+        <p:txBody>
+          <a:bodyPr wrap="square" anchor="t">
+            <a:normAutofit/>
+          </a:bodyPr>
+          <a:lstStyle/>
+          <a:p>
+            <a:pPr>
+              <a:spcAft>
+                <a:spcPts val="600"/>
+              </a:spcAft>
+              <a:defRPr/>
+            </a:pPr>
+            <a:fld id="{156ABF86-EFC2-454D-AD05-896C81F76FA1}" type="slidenum">
+              <a:rPr lang="fr-FR" smtClean="0"/>
+              <a:pPr>
+                <a:spcAft>
+                  <a:spcPts val="600"/>
+                </a:spcAft>
+                <a:defRPr/>
+              </a:pPr>
+              <a:t>8</a:t>
+            </a:fld>
+            <a:endParaRPr lang="fr-FR"/>
+          </a:p>
+        </p:txBody>
+      </p:sp>
+      <p:sp>
+        <p:nvSpPr>
+          <p:cNvPr id="2" name="ZoneTexte 1">
+            <a:extLst>
+              <a:ext uri="{FF2B5EF4-FFF2-40B4-BE49-F238E27FC236}">
+                <a16:creationId xmlns:a16="http://schemas.microsoft.com/office/drawing/2014/main" id="{A56BAA16-F5FA-776A-E5AE-4B9FEAC92795}"/>
+              </a:ext>
+            </a:extLst>
+          </p:cNvPr>
+          <p:cNvSpPr txBox="1"/>
+          <p:nvPr/>
+        </p:nvSpPr>
+        <p:spPr>
+          <a:xfrm>
+            <a:off x="633234" y="116418"/>
+            <a:ext cx="10476482" cy="461665"/>
+          </a:xfrm>
+          <a:prstGeom prst="rect">
+            <a:avLst/>
+          </a:prstGeom>
+          <a:noFill/>
+        </p:spPr>
+        <p:txBody>
+          <a:bodyPr wrap="square" anchor="ctr">
+            <a:spAutoFit/>
+          </a:bodyPr>
+          <a:lstStyle/>
+          <a:p>
+            <a:r>
+              <a:rPr lang="fr-FR" sz="2400" b="1">
+                <a:latin typeface="Calibri" panose="020F0502020204030204" pitchFamily="34" charset="0"/>
+                <a:ea typeface="Times New Roman" panose="02020603050405020304" pitchFamily="18" charset="0"/>
+              </a:rPr>
+              <a:t>2. Ces compétences vont m'aider dans mon travail</a:t>
+            </a:r>
+            <a:endParaRPr lang="fr-FR" sz="2400" b="1"/>
+          </a:p>
+        </p:txBody>
+      </p:sp>
+      <p:grpSp>
+        <p:nvGrpSpPr>
+          <p:cNvPr id="4" name="Groupe 3">
+            <a:extLst>
+              <a:ext uri="{FF2B5EF4-FFF2-40B4-BE49-F238E27FC236}">
+                <a16:creationId xmlns:a16="http://schemas.microsoft.com/office/drawing/2014/main" id="{50BF517B-791D-5A28-2B4B-09015AF5C648}"/>
+              </a:ext>
+            </a:extLst>
+          </p:cNvPr>
+          <p:cNvGrpSpPr/>
+          <p:nvPr/>
+        </p:nvGrpSpPr>
+        <p:grpSpPr>
+          <a:xfrm>
+            <a:off x="9232592" y="1876755"/>
+            <a:ext cx="2276869" cy="3104489"/>
+            <a:chOff x="9375619" y="1843456"/>
+            <a:chExt cx="2276869" cy="3104489"/>
+          </a:xfrm>
+        </p:grpSpPr>
+        <p:grpSp>
+          <p:nvGrpSpPr>
+            <p:cNvPr id="5" name="Groupe 4">
+              <a:extLst>
+                <a:ext uri="{FF2B5EF4-FFF2-40B4-BE49-F238E27FC236}">
+                  <a16:creationId xmlns:a16="http://schemas.microsoft.com/office/drawing/2014/main" id="{97E83DCF-E7DF-654B-F109-55FF76891147}"/>
+                </a:ext>
+              </a:extLst>
+            </p:cNvPr>
+            <p:cNvGrpSpPr/>
+            <p:nvPr/>
+          </p:nvGrpSpPr>
+          <p:grpSpPr>
+            <a:xfrm>
+              <a:off x="9375619" y="1843456"/>
+              <a:ext cx="576051" cy="3104489"/>
+              <a:chOff x="9424517" y="1534516"/>
+              <a:chExt cx="576051" cy="3104489"/>
+            </a:xfrm>
+          </p:grpSpPr>
+          <p:pic>
+            <p:nvPicPr>
+              <p:cNvPr id="10" name="Image 9">
+                <a:extLst>
+                  <a:ext uri="{FF2B5EF4-FFF2-40B4-BE49-F238E27FC236}">
+                    <a16:creationId xmlns:a16="http://schemas.microsoft.com/office/drawing/2014/main" id="{B3EF4AD9-8C92-25DB-6C02-9416D352CFF3}"/>
+                  </a:ext>
+                </a:extLst>
+              </p:cNvPr>
+              <p:cNvPicPr>
+                <a:picLocks noChangeAspect="1"/>
+              </p:cNvPicPr>
+              <p:nvPr/>
+            </p:nvPicPr>
+            <p:blipFill>
+              <a:blip r:embed="rId3"/>
+              <a:stretch>
+                <a:fillRect/>
+              </a:stretch>
+            </p:blipFill>
+            <p:spPr>
+              <a:xfrm>
+                <a:off x="9424517" y="1534516"/>
+                <a:ext cx="540000" cy="540000"/>
+              </a:xfrm>
+              <a:prstGeom prst="rect">
+                <a:avLst/>
+              </a:prstGeom>
+            </p:spPr>
+          </p:pic>
+          <p:pic>
+            <p:nvPicPr>
+              <p:cNvPr id="11" name="Image 10">
+                <a:extLst>
+                  <a:ext uri="{FF2B5EF4-FFF2-40B4-BE49-F238E27FC236}">
+                    <a16:creationId xmlns:a16="http://schemas.microsoft.com/office/drawing/2014/main" id="{A7193D63-6693-9E2D-6096-C8F24030913C}"/>
+                  </a:ext>
+                </a:extLst>
+              </p:cNvPr>
+              <p:cNvPicPr>
+                <a:picLocks noChangeAspect="1"/>
+              </p:cNvPicPr>
+              <p:nvPr/>
+            </p:nvPicPr>
+            <p:blipFill>
+              <a:blip r:embed="rId4"/>
+              <a:stretch>
+                <a:fillRect/>
+              </a:stretch>
+            </p:blipFill>
+            <p:spPr>
+              <a:xfrm>
+                <a:off x="9476507" y="2350426"/>
+                <a:ext cx="488010" cy="540000"/>
+              </a:xfrm>
+              <a:prstGeom prst="rect">
+                <a:avLst/>
+              </a:prstGeom>
+            </p:spPr>
+          </p:pic>
+          <p:pic>
+            <p:nvPicPr>
+              <p:cNvPr id="12" name="Image 11">
+                <a:extLst>
+                  <a:ext uri="{FF2B5EF4-FFF2-40B4-BE49-F238E27FC236}">
+                    <a16:creationId xmlns:a16="http://schemas.microsoft.com/office/drawing/2014/main" id="{E82EB21C-6E19-EBC8-4F4A-34FFB1D46076}"/>
+                  </a:ext>
+                </a:extLst>
+              </p:cNvPr>
+              <p:cNvPicPr>
+                <a:picLocks noChangeAspect="1"/>
+              </p:cNvPicPr>
+              <p:nvPr/>
+            </p:nvPicPr>
+            <p:blipFill>
+              <a:blip r:embed="rId5"/>
+              <a:stretch>
+                <a:fillRect/>
+              </a:stretch>
+            </p:blipFill>
+            <p:spPr>
+              <a:xfrm>
+                <a:off x="9449290" y="3238206"/>
+                <a:ext cx="490454" cy="468000"/>
+              </a:xfrm>
+              <a:prstGeom prst="rect">
+                <a:avLst/>
+              </a:prstGeom>
+            </p:spPr>
+          </p:pic>
+          <p:pic>
+            <p:nvPicPr>
+              <p:cNvPr id="13" name="Image 12">
+                <a:extLst>
+                  <a:ext uri="{FF2B5EF4-FFF2-40B4-BE49-F238E27FC236}">
+                    <a16:creationId xmlns:a16="http://schemas.microsoft.com/office/drawing/2014/main" id="{DDAE736A-02D4-1B03-BA66-3C0649DADAB9}"/>
+                  </a:ext>
+                </a:extLst>
+              </p:cNvPr>
+              <p:cNvPicPr>
+                <a:picLocks noChangeAspect="1"/>
+              </p:cNvPicPr>
+              <p:nvPr/>
+            </p:nvPicPr>
+            <p:blipFill>
+              <a:blip r:embed="rId6"/>
+              <a:stretch>
+                <a:fillRect/>
+              </a:stretch>
+            </p:blipFill>
+            <p:spPr>
+              <a:xfrm>
+                <a:off x="9440455" y="4099005"/>
+                <a:ext cx="560113" cy="540000"/>
+              </a:xfrm>
+              <a:prstGeom prst="rect">
+                <a:avLst/>
+              </a:prstGeom>
+            </p:spPr>
+          </p:pic>
+        </p:grpSp>
+        <p:sp>
+          <p:nvSpPr>
+            <p:cNvPr id="6" name="ZoneTexte 5">
+              <a:extLst>
+                <a:ext uri="{FF2B5EF4-FFF2-40B4-BE49-F238E27FC236}">
+                  <a16:creationId xmlns:a16="http://schemas.microsoft.com/office/drawing/2014/main" id="{B217308C-7EB4-930C-3D3A-1100FB0E6EEF}"/>
+                </a:ext>
+              </a:extLst>
+            </p:cNvPr>
+            <p:cNvSpPr txBox="1"/>
+            <p:nvPr/>
+          </p:nvSpPr>
+          <p:spPr>
+            <a:xfrm>
+              <a:off x="10080404" y="1928790"/>
+              <a:ext cx="1572084" cy="369332"/>
+            </a:xfrm>
+            <a:prstGeom prst="rect">
+              <a:avLst/>
+            </a:prstGeom>
+            <a:noFill/>
+          </p:spPr>
+          <p:txBody>
+            <a:bodyPr wrap="square">
+              <a:spAutoFit/>
+            </a:bodyPr>
+            <a:lstStyle/>
+            <a:p>
+              <a:r>
+                <a:rPr lang="fr-FR"/>
+                <a:t>Très satisfait</a:t>
+              </a:r>
+            </a:p>
+          </p:txBody>
+        </p:sp>
+        <p:sp>
+          <p:nvSpPr>
+            <p:cNvPr id="7" name="ZoneTexte 6">
+              <a:extLst>
+                <a:ext uri="{FF2B5EF4-FFF2-40B4-BE49-F238E27FC236}">
+                  <a16:creationId xmlns:a16="http://schemas.microsoft.com/office/drawing/2014/main" id="{FA9C7C71-4847-BBFA-0402-B5E6B6C5779D}"/>
+                </a:ext>
+              </a:extLst>
+            </p:cNvPr>
+            <p:cNvSpPr txBox="1"/>
+            <p:nvPr/>
+          </p:nvSpPr>
+          <p:spPr>
+            <a:xfrm>
+              <a:off x="10105396" y="2744700"/>
+              <a:ext cx="1176007" cy="369332"/>
+            </a:xfrm>
+            <a:prstGeom prst="rect">
+              <a:avLst/>
+            </a:prstGeom>
+            <a:noFill/>
+          </p:spPr>
+          <p:txBody>
+            <a:bodyPr wrap="square">
+              <a:spAutoFit/>
+            </a:bodyPr>
+            <a:lstStyle/>
+            <a:p>
+              <a:r>
+                <a:rPr lang="fr-FR"/>
+                <a:t>Satisfait</a:t>
+              </a:r>
+            </a:p>
+          </p:txBody>
+        </p:sp>
+        <p:sp>
+          <p:nvSpPr>
+            <p:cNvPr id="8" name="ZoneTexte 7">
+              <a:extLst>
+                <a:ext uri="{FF2B5EF4-FFF2-40B4-BE49-F238E27FC236}">
+                  <a16:creationId xmlns:a16="http://schemas.microsoft.com/office/drawing/2014/main" id="{62EA30C1-D529-DCD8-EDFB-D2F55ABA15B2}"/>
+                </a:ext>
+              </a:extLst>
+            </p:cNvPr>
+            <p:cNvSpPr txBox="1"/>
+            <p:nvPr/>
+          </p:nvSpPr>
+          <p:spPr>
+            <a:xfrm>
+              <a:off x="10132291" y="3642635"/>
+              <a:ext cx="1122218" cy="369332"/>
+            </a:xfrm>
+            <a:prstGeom prst="rect">
+              <a:avLst/>
+            </a:prstGeom>
+            <a:noFill/>
+          </p:spPr>
+          <p:txBody>
+            <a:bodyPr wrap="square">
+              <a:spAutoFit/>
+            </a:bodyPr>
+            <a:lstStyle/>
+            <a:p>
+              <a:r>
+                <a:rPr lang="fr-FR"/>
+                <a:t>Déçu</a:t>
+              </a:r>
+            </a:p>
+          </p:txBody>
+        </p:sp>
+        <p:sp>
+          <p:nvSpPr>
+            <p:cNvPr id="9" name="ZoneTexte 8">
+              <a:extLst>
+                <a:ext uri="{FF2B5EF4-FFF2-40B4-BE49-F238E27FC236}">
+                  <a16:creationId xmlns:a16="http://schemas.microsoft.com/office/drawing/2014/main" id="{E99E9FD3-4B41-AF33-57F4-839C5C84E7F7}"/>
+                </a:ext>
+              </a:extLst>
+            </p:cNvPr>
+            <p:cNvSpPr txBox="1"/>
+            <p:nvPr/>
+          </p:nvSpPr>
+          <p:spPr>
+            <a:xfrm>
+              <a:off x="10105396" y="4540570"/>
+              <a:ext cx="1303142" cy="369332"/>
+            </a:xfrm>
+            <a:prstGeom prst="rect">
+              <a:avLst/>
+            </a:prstGeom>
+            <a:noFill/>
+          </p:spPr>
+          <p:txBody>
+            <a:bodyPr wrap="square">
+              <a:spAutoFit/>
+            </a:bodyPr>
+            <a:lstStyle/>
+            <a:p>
+              <a:r>
+                <a:rPr lang="fr-FR" sz="1800" b="0" i="0" u="none" strike="noStrike">
+                  <a:solidFill>
+                    <a:srgbClr val="000000"/>
+                  </a:solidFill>
+                  <a:effectLst/>
+                  <a:latin typeface="Calibri" panose="020F0502020204030204" pitchFamily="34" charset="0"/>
+                </a:rPr>
+                <a:t>Très déçu</a:t>
+              </a:r>
+              <a:r>
+                <a:rPr lang="fr-FR"/>
+                <a:t> </a:t>
+              </a:r>
+            </a:p>
+          </p:txBody>
+        </p:sp>
+      </p:grpSp>
+      <p:graphicFrame>
+        <p:nvGraphicFramePr>
+          <p:cNvPr id="14" name="Graphique 13">
+            <a:extLst>
+              <a:ext uri="{FF2B5EF4-FFF2-40B4-BE49-F238E27FC236}">
+                <a16:creationId xmlns:a16="http://schemas.microsoft.com/office/drawing/2014/main" id="{0A5A05F8-80D8-86AC-F56C-48C3E6C92A09}"/>
+              </a:ext>
+            </a:extLst>
+          </p:cNvPr>
+          <p:cNvGraphicFramePr/>
+          <p:nvPr>
+            <p:extLst>
+              <p:ext uri="{D42A27DB-BD31-4B8C-83A1-F6EECF244321}">
+                <p14:modId xmlns:p14="http://schemas.microsoft.com/office/powerpoint/2010/main" val="211513403"/>
+              </p:ext>
+            </p:extLst>
+          </p:nvPr>
+        </p:nvGraphicFramePr>
+        <p:xfrm>
+          <a:off x="633234" y="871111"/>
+          <a:ext cx="8128000" cy="5418667"/>
+        </p:xfrm>
+        <a:graphic>
+          <a:graphicData uri="http://schemas.openxmlformats.org/drawingml/2006/chart">
+            <c:chart xmlns:c="http://schemas.openxmlformats.org/drawingml/2006/chart" xmlns:r="http://schemas.openxmlformats.org/officeDocument/2006/relationships" r:id="rId7"/>
+          </a:graphicData>
+        </a:graphic>
+      </p:graphicFrame>
+    </p:spTree>
+    <p:extLst>
+      <p:ext uri="{BB962C8B-B14F-4D97-AF65-F5344CB8AC3E}">
+        <p14:creationId xmlns:p14="http://schemas.microsoft.com/office/powerpoint/2010/main" val="308318938"/>
+      </p:ext>
+    </p:extLst>
+  </p:cSld>
+  <p:clrMapOvr>
+    <a:masterClrMapping/>
+  </p:clrMapOvr>
+</p:sld>
+</file>
+
+<file path=ppt/slides/slide6.xml><?xml version="1.0" encoding="utf-8"?>
+<p:sld xmlns:a="http://schemas.openxmlformats.org/drawingml/2006/main" xmlns:r="http://schemas.openxmlformats.org/officeDocument/2006/relationships" xmlns:p="http://schemas.openxmlformats.org/presentationml/2006/main">
+  <p:cSld>
+    <p:spTree>
+      <p:nvGrpSpPr>
+        <p:cNvPr id="1" name=""/>
+        <p:cNvGrpSpPr/>
+        <p:nvPr/>
+      </p:nvGrpSpPr>
+      <p:grpSpPr>
+        <a:xfrm>
+          <a:off x="0" y="0"/>
+          <a:ext cx="0" cy="0"/>
+          <a:chOff x="0" y="0"/>
+          <a:chExt cx="0" cy="0"/>
+        </a:xfrm>
+      </p:grpSpPr>
+      <p:sp>
+        <p:nvSpPr>
+          <p:cNvPr id="3" name="Espace réservé du numéro de diapositive 2"/>
+          <p:cNvSpPr>
+            <a:spLocks noGrp="1"/>
+          </p:cNvSpPr>
+          <p:nvPr>
+            <p:ph type="sldNum" sz="quarter" idx="12"/>
+          </p:nvPr>
+        </p:nvSpPr>
+        <p:spPr>
+          <a:xfrm>
+            <a:off x="9271000" y="6207125"/>
+            <a:ext cx="2844800" cy="457200"/>
+          </a:xfrm>
+        </p:spPr>
+        <p:txBody>
+          <a:bodyPr wrap="square" anchor="t">
+            <a:normAutofit/>
+          </a:bodyPr>
+          <a:lstStyle/>
+          <a:p>
+            <a:pPr>
+              <a:spcAft>
+                <a:spcPts val="600"/>
+              </a:spcAft>
+              <a:defRPr/>
+            </a:pPr>
+            <a:fld id="{156ABF86-EFC2-454D-AD05-896C81F76FA1}" type="slidenum">
+              <a:rPr lang="fr-FR" smtClean="0"/>
+              <a:pPr>
+                <a:spcAft>
+                  <a:spcPts val="600"/>
+                </a:spcAft>
+                <a:defRPr/>
+              </a:pPr>
+              <a:t>9</a:t>
+            </a:fld>
+            <a:endParaRPr lang="fr-FR"/>
+          </a:p>
+        </p:txBody>
+      </p:sp>
+      <p:sp>
+        <p:nvSpPr>
+          <p:cNvPr id="2" name="ZoneTexte 1">
+            <a:extLst>
+              <a:ext uri="{FF2B5EF4-FFF2-40B4-BE49-F238E27FC236}">
+                <a16:creationId xmlns:a16="http://schemas.microsoft.com/office/drawing/2014/main" id="{CB94D363-11F2-7FD8-7529-735C580D0D94}"/>
+              </a:ext>
+            </a:extLst>
+          </p:cNvPr>
+          <p:cNvSpPr txBox="1"/>
+          <p:nvPr/>
+        </p:nvSpPr>
+        <p:spPr>
+          <a:xfrm>
+            <a:off x="633234" y="120004"/>
+            <a:ext cx="10476482" cy="461665"/>
+          </a:xfrm>
+          <a:prstGeom prst="rect">
+            <a:avLst/>
+          </a:prstGeom>
+          <a:noFill/>
+        </p:spPr>
+        <p:txBody>
+          <a:bodyPr wrap="square" anchor="ctr">
+            <a:spAutoFit/>
+          </a:bodyPr>
+          <a:lstStyle/>
+          <a:p>
+            <a:r>
+              <a:rPr lang="fr-FR" sz="2400" b="1" dirty="0">
+                <a:latin typeface="Calibri" panose="020F0502020204030204" pitchFamily="34" charset="0"/>
+                <a:ea typeface="Times New Roman" panose="02020603050405020304" pitchFamily="18" charset="0"/>
+              </a:rPr>
+              <a:t>3. L'ambiance du groupe était bonne</a:t>
+            </a:r>
+            <a:endParaRPr lang="fr-FR" sz="2400" b="1" dirty="0"/>
+          </a:p>
+        </p:txBody>
+      </p:sp>
+      <p:grpSp>
+        <p:nvGrpSpPr>
+          <p:cNvPr id="4" name="Groupe 3">
+            <a:extLst>
+              <a:ext uri="{FF2B5EF4-FFF2-40B4-BE49-F238E27FC236}">
+                <a16:creationId xmlns:a16="http://schemas.microsoft.com/office/drawing/2014/main" id="{A4B1B8D2-92F6-D08B-7613-01CA1808B50A}"/>
+              </a:ext>
+            </a:extLst>
+          </p:cNvPr>
+          <p:cNvGrpSpPr/>
+          <p:nvPr/>
+        </p:nvGrpSpPr>
+        <p:grpSpPr>
+          <a:xfrm>
+            <a:off x="9232592" y="1876755"/>
+            <a:ext cx="2276869" cy="3104489"/>
+            <a:chOff x="9375619" y="1843456"/>
+            <a:chExt cx="2276869" cy="3104489"/>
+          </a:xfrm>
+        </p:grpSpPr>
+        <p:grpSp>
+          <p:nvGrpSpPr>
+            <p:cNvPr id="5" name="Groupe 4">
+              <a:extLst>
+                <a:ext uri="{FF2B5EF4-FFF2-40B4-BE49-F238E27FC236}">
+                  <a16:creationId xmlns:a16="http://schemas.microsoft.com/office/drawing/2014/main" id="{52EC1D80-14C8-15CC-383A-D4C879C456FB}"/>
+                </a:ext>
+              </a:extLst>
+            </p:cNvPr>
+            <p:cNvGrpSpPr/>
+            <p:nvPr/>
+          </p:nvGrpSpPr>
+          <p:grpSpPr>
+            <a:xfrm>
+              <a:off x="9375619" y="1843456"/>
+              <a:ext cx="576051" cy="3104489"/>
+              <a:chOff x="9424517" y="1534516"/>
+              <a:chExt cx="576051" cy="3104489"/>
+            </a:xfrm>
+          </p:grpSpPr>
+          <p:pic>
+            <p:nvPicPr>
+              <p:cNvPr id="10" name="Image 9">
+                <a:extLst>
+                  <a:ext uri="{FF2B5EF4-FFF2-40B4-BE49-F238E27FC236}">
+                    <a16:creationId xmlns:a16="http://schemas.microsoft.com/office/drawing/2014/main" id="{51035916-3920-EA23-D6FA-EA49EB7D4439}"/>
+                  </a:ext>
+                </a:extLst>
+              </p:cNvPr>
+              <p:cNvPicPr>
+                <a:picLocks noChangeAspect="1"/>
+              </p:cNvPicPr>
+              <p:nvPr/>
+            </p:nvPicPr>
+            <p:blipFill>
+              <a:blip r:embed="rId3"/>
+              <a:stretch>
+                <a:fillRect/>
+              </a:stretch>
+            </p:blipFill>
+            <p:spPr>
+              <a:xfrm>
+                <a:off x="9424517" y="1534516"/>
+                <a:ext cx="540000" cy="540000"/>
+              </a:xfrm>
+              <a:prstGeom prst="rect">
+                <a:avLst/>
+              </a:prstGeom>
+            </p:spPr>
+          </p:pic>
+          <p:pic>
+            <p:nvPicPr>
+              <p:cNvPr id="11" name="Image 10">
+                <a:extLst>
+                  <a:ext uri="{FF2B5EF4-FFF2-40B4-BE49-F238E27FC236}">
+                    <a16:creationId xmlns:a16="http://schemas.microsoft.com/office/drawing/2014/main" id="{5F8D5FC8-62B1-7C6D-BB47-CF14841A234F}"/>
+                  </a:ext>
+                </a:extLst>
+              </p:cNvPr>
+              <p:cNvPicPr>
+                <a:picLocks noChangeAspect="1"/>
+              </p:cNvPicPr>
+              <p:nvPr/>
+            </p:nvPicPr>
+            <p:blipFill>
+              <a:blip r:embed="rId4"/>
+              <a:stretch>
+                <a:fillRect/>
+              </a:stretch>
+            </p:blipFill>
+            <p:spPr>
+              <a:xfrm>
+                <a:off x="9476507" y="2350426"/>
+                <a:ext cx="488010" cy="540000"/>
+              </a:xfrm>
+              <a:prstGeom prst="rect">
+                <a:avLst/>
+              </a:prstGeom>
+            </p:spPr>
+          </p:pic>
+          <p:pic>
+            <p:nvPicPr>
+              <p:cNvPr id="12" name="Image 11">
+                <a:extLst>
+                  <a:ext uri="{FF2B5EF4-FFF2-40B4-BE49-F238E27FC236}">
+                    <a16:creationId xmlns:a16="http://schemas.microsoft.com/office/drawing/2014/main" id="{C612A6D1-30BF-128C-0708-1E917B71B2B2}"/>
+                  </a:ext>
+                </a:extLst>
+              </p:cNvPr>
+              <p:cNvPicPr>
+                <a:picLocks noChangeAspect="1"/>
+              </p:cNvPicPr>
+              <p:nvPr/>
+            </p:nvPicPr>
+            <p:blipFill>
+              <a:blip r:embed="rId5"/>
+              <a:stretch>
+                <a:fillRect/>
+              </a:stretch>
+            </p:blipFill>
+            <p:spPr>
+              <a:xfrm>
+                <a:off x="9449290" y="3238206"/>
+                <a:ext cx="490454" cy="468000"/>
+              </a:xfrm>
+              <a:prstGeom prst="rect">
+                <a:avLst/>
+              </a:prstGeom>
+            </p:spPr>
+          </p:pic>
+          <p:pic>
+            <p:nvPicPr>
+              <p:cNvPr id="13" name="Image 12">
+                <a:extLst>
+                  <a:ext uri="{FF2B5EF4-FFF2-40B4-BE49-F238E27FC236}">
+                    <a16:creationId xmlns:a16="http://schemas.microsoft.com/office/drawing/2014/main" id="{E0614C23-8BAA-0052-F2CB-CFC66D16839B}"/>
+                  </a:ext>
+                </a:extLst>
+              </p:cNvPr>
+              <p:cNvPicPr>
+                <a:picLocks noChangeAspect="1"/>
+              </p:cNvPicPr>
+              <p:nvPr/>
+            </p:nvPicPr>
+            <p:blipFill>
+              <a:blip r:embed="rId6"/>
+              <a:stretch>
+                <a:fillRect/>
+              </a:stretch>
+            </p:blipFill>
+            <p:spPr>
+              <a:xfrm>
+                <a:off x="9440455" y="4099005"/>
+                <a:ext cx="560113" cy="540000"/>
+              </a:xfrm>
+              <a:prstGeom prst="rect">
+                <a:avLst/>
+              </a:prstGeom>
+            </p:spPr>
+          </p:pic>
+        </p:grpSp>
+        <p:sp>
+          <p:nvSpPr>
+            <p:cNvPr id="6" name="ZoneTexte 5">
+              <a:extLst>
+                <a:ext uri="{FF2B5EF4-FFF2-40B4-BE49-F238E27FC236}">
+                  <a16:creationId xmlns:a16="http://schemas.microsoft.com/office/drawing/2014/main" id="{F1F594CE-0A1B-83FE-3098-30CBD9A0C4E2}"/>
+                </a:ext>
+              </a:extLst>
+            </p:cNvPr>
+            <p:cNvSpPr txBox="1"/>
+            <p:nvPr/>
+          </p:nvSpPr>
+          <p:spPr>
+            <a:xfrm>
+              <a:off x="10080404" y="1928790"/>
+              <a:ext cx="1572084" cy="369332"/>
+            </a:xfrm>
+            <a:prstGeom prst="rect">
+              <a:avLst/>
+            </a:prstGeom>
+            <a:noFill/>
+          </p:spPr>
+          <p:txBody>
+            <a:bodyPr wrap="square">
+              <a:spAutoFit/>
+            </a:bodyPr>
+            <a:lstStyle/>
+            <a:p>
+              <a:r>
+                <a:rPr lang="fr-FR"/>
+                <a:t>Très satisfait</a:t>
+              </a:r>
+            </a:p>
+          </p:txBody>
+        </p:sp>
+        <p:sp>
+          <p:nvSpPr>
+            <p:cNvPr id="7" name="ZoneTexte 6">
+              <a:extLst>
+                <a:ext uri="{FF2B5EF4-FFF2-40B4-BE49-F238E27FC236}">
+                  <a16:creationId xmlns:a16="http://schemas.microsoft.com/office/drawing/2014/main" id="{8A06F076-EA03-41C2-E4C8-14F7E4BB59AE}"/>
+                </a:ext>
+              </a:extLst>
+            </p:cNvPr>
+            <p:cNvSpPr txBox="1"/>
+            <p:nvPr/>
+          </p:nvSpPr>
+          <p:spPr>
+            <a:xfrm>
+              <a:off x="10105396" y="2744700"/>
+              <a:ext cx="1176007" cy="369332"/>
+            </a:xfrm>
+            <a:prstGeom prst="rect">
+              <a:avLst/>
+            </a:prstGeom>
+            <a:noFill/>
+          </p:spPr>
+          <p:txBody>
+            <a:bodyPr wrap="square">
+              <a:spAutoFit/>
+            </a:bodyPr>
+            <a:lstStyle/>
+            <a:p>
+              <a:r>
+                <a:rPr lang="fr-FR"/>
+                <a:t>Satisfait</a:t>
+              </a:r>
+            </a:p>
+          </p:txBody>
+        </p:sp>
+        <p:sp>
+          <p:nvSpPr>
+            <p:cNvPr id="8" name="ZoneTexte 7">
+              <a:extLst>
+                <a:ext uri="{FF2B5EF4-FFF2-40B4-BE49-F238E27FC236}">
+                  <a16:creationId xmlns:a16="http://schemas.microsoft.com/office/drawing/2014/main" id="{67B9431D-2F98-0F30-482F-7351121A4305}"/>
+                </a:ext>
+              </a:extLst>
+            </p:cNvPr>
+            <p:cNvSpPr txBox="1"/>
+            <p:nvPr/>
+          </p:nvSpPr>
+          <p:spPr>
+            <a:xfrm>
+              <a:off x="10132291" y="3642635"/>
+              <a:ext cx="1122218" cy="369332"/>
+            </a:xfrm>
+            <a:prstGeom prst="rect">
+              <a:avLst/>
+            </a:prstGeom>
+            <a:noFill/>
+          </p:spPr>
+          <p:txBody>
+            <a:bodyPr wrap="square">
+              <a:spAutoFit/>
+            </a:bodyPr>
+            <a:lstStyle/>
+            <a:p>
+              <a:r>
+                <a:rPr lang="fr-FR"/>
+                <a:t>Déçu</a:t>
+              </a:r>
+            </a:p>
+          </p:txBody>
+        </p:sp>
+        <p:sp>
+          <p:nvSpPr>
+            <p:cNvPr id="9" name="ZoneTexte 8">
+              <a:extLst>
+                <a:ext uri="{FF2B5EF4-FFF2-40B4-BE49-F238E27FC236}">
+                  <a16:creationId xmlns:a16="http://schemas.microsoft.com/office/drawing/2014/main" id="{2433CD1D-6385-8995-B9E3-81260982589F}"/>
+                </a:ext>
+              </a:extLst>
+            </p:cNvPr>
+            <p:cNvSpPr txBox="1"/>
+            <p:nvPr/>
+          </p:nvSpPr>
+          <p:spPr>
+            <a:xfrm>
+              <a:off x="10105396" y="4540570"/>
+              <a:ext cx="1303142" cy="369332"/>
+            </a:xfrm>
+            <a:prstGeom prst="rect">
+              <a:avLst/>
+            </a:prstGeom>
+            <a:noFill/>
+          </p:spPr>
+          <p:txBody>
+            <a:bodyPr wrap="square">
+              <a:spAutoFit/>
+            </a:bodyPr>
+            <a:lstStyle/>
+            <a:p>
+              <a:r>
+                <a:rPr lang="fr-FR" sz="1800" b="0" i="0" u="none" strike="noStrike">
+                  <a:solidFill>
+                    <a:srgbClr val="000000"/>
+                  </a:solidFill>
+                  <a:effectLst/>
+                  <a:latin typeface="Calibri" panose="020F0502020204030204" pitchFamily="34" charset="0"/>
+                </a:rPr>
+                <a:t>Très déçu</a:t>
+              </a:r>
+              <a:r>
+                <a:rPr lang="fr-FR"/>
+                <a:t> </a:t>
+              </a:r>
+            </a:p>
+          </p:txBody>
+        </p:sp>
+      </p:grpSp>
+      <p:graphicFrame>
+        <p:nvGraphicFramePr>
+          <p:cNvPr id="15" name="Graphique 14">
+            <a:extLst>
+              <a:ext uri="{FF2B5EF4-FFF2-40B4-BE49-F238E27FC236}">
+                <a16:creationId xmlns:a16="http://schemas.microsoft.com/office/drawing/2014/main" id="{531DE953-D6A1-90AE-4B13-E9088DF6FC52}"/>
+              </a:ext>
+            </a:extLst>
+          </p:cNvPr>
+          <p:cNvGraphicFramePr/>
+          <p:nvPr>
+            <p:extLst>
+              <p:ext uri="{D42A27DB-BD31-4B8C-83A1-F6EECF244321}">
+                <p14:modId xmlns:p14="http://schemas.microsoft.com/office/powerpoint/2010/main" val="211513403"/>
+              </p:ext>
+            </p:extLst>
+          </p:nvPr>
+        </p:nvGraphicFramePr>
+        <p:xfrm>
+          <a:off x="633234" y="871111"/>
+          <a:ext cx="8128000" cy="5418667"/>
+        </p:xfrm>
+        <a:graphic>
+          <a:graphicData uri="http://schemas.openxmlformats.org/drawingml/2006/chart">
+            <c:chart xmlns:c="http://schemas.openxmlformats.org/drawingml/2006/chart" xmlns:r="http://schemas.openxmlformats.org/officeDocument/2006/relationships" r:id="rId7"/>
+          </a:graphicData>
+        </a:graphic>
+      </p:graphicFrame>
+    </p:spTree>
+    <p:extLst>
+      <p:ext uri="{BB962C8B-B14F-4D97-AF65-F5344CB8AC3E}">
+        <p14:creationId xmlns:p14="http://schemas.microsoft.com/office/powerpoint/2010/main" val="2270805253"/>
+      </p:ext>
+    </p:extLst>
+  </p:cSld>
+  <p:clrMapOvr>
+    <a:masterClrMapping/>
+  </p:clrMapOvr>
+</p:sld>
+</file>
+
+<file path=ppt/slides/slide7.xml><?xml version="1.0" encoding="utf-8"?>
 <p:sld xmlns:a="http://schemas.openxmlformats.org/drawingml/2006/main" xmlns:r="http://schemas.openxmlformats.org/officeDocument/2006/relationships" xmlns:p="http://schemas.openxmlformats.org/presentationml/2006/main">
   <p:cSld>
     <p:spTree>
@@ -39156,7 +43524,7 @@
 </p:sld>
 </file>
 
-<file path=ppt/slides/slide11.xml><?xml version="1.0" encoding="utf-8"?>
+<file path=ppt/slides/slide8.xml><?xml version="1.0" encoding="utf-8"?>
 <p:sld xmlns:a="http://schemas.openxmlformats.org/drawingml/2006/main" xmlns:r="http://schemas.openxmlformats.org/officeDocument/2006/relationships" xmlns:p="http://schemas.openxmlformats.org/presentationml/2006/main">
   <p:cSld>
     <p:spTree>
@@ -39261,8 +43629,9 @@
           </a:lstStyle>
           <a:p>
             <a:r>
-              <a:rPr lang="fr-FR" dirty="0">
+              <a:rPr lang="fr-FR" dirty="0" sz="2400" b="1">
                 <a:effectLst/>
+                <a:latin typeface="Calibri" panose="020F0502020204030204" pitchFamily="34" charset="0"/>
               </a:rPr>
               <a:t>5. La durée et le rythme étaient bien adaptés</a:t>
             </a:r>
@@ -39622,7 +43991,7 @@
 </p:sld>
 </file>
 
-<file path=ppt/slides/slide12.xml><?xml version="1.0" encoding="utf-8"?>
+<file path=ppt/slides/slide9.xml><?xml version="1.0" encoding="utf-8"?>
 <p:sld xmlns:a="http://schemas.openxmlformats.org/drawingml/2006/main" xmlns:r="http://schemas.openxmlformats.org/officeDocument/2006/relationships" xmlns:p="http://schemas.openxmlformats.org/presentationml/2006/main">
   <p:cSld>
     <p:spTree>
@@ -39727,8 +44096,9 @@
           </a:lstStyle>
           <a:p>
             <a:r>
-              <a:rPr lang="fr-FR" dirty="0">
+              <a:rPr lang="fr-FR" dirty="0" sz="2400" b="1">
                 <a:effectLst/>
+                <a:latin typeface="Calibri" panose="020F0502020204030204" pitchFamily="34" charset="0"/>
               </a:rPr>
               <a:t>6. Le formateur a bien expliqué (objectifs, contenus…)</a:t>
             </a:r>
@@ -40079,4370 +44449,6 @@
     <p:extLst>
       <p:ext uri="{BB962C8B-B14F-4D97-AF65-F5344CB8AC3E}">
         <p14:creationId xmlns:p14="http://schemas.microsoft.com/office/powerpoint/2010/main" val="3805820337"/>
-      </p:ext>
-    </p:extLst>
-  </p:cSld>
-  <p:clrMapOvr>
-    <a:masterClrMapping/>
-  </p:clrMapOvr>
-</p:sld>
-</file>
-
-<file path=ppt/slides/slide13.xml><?xml version="1.0" encoding="utf-8"?>
-<p:sld xmlns:a="http://schemas.openxmlformats.org/drawingml/2006/main" xmlns:r="http://schemas.openxmlformats.org/officeDocument/2006/relationships" xmlns:p="http://schemas.openxmlformats.org/presentationml/2006/main">
-  <p:cSld>
-    <p:spTree>
-      <p:nvGrpSpPr>
-        <p:cNvPr id="1" name=""/>
-        <p:cNvGrpSpPr/>
-        <p:nvPr/>
-      </p:nvGrpSpPr>
-      <p:grpSpPr>
-        <a:xfrm>
-          <a:off x="0" y="0"/>
-          <a:ext cx="0" cy="0"/>
-          <a:chOff x="0" y="0"/>
-          <a:chExt cx="0" cy="0"/>
-        </a:xfrm>
-      </p:grpSpPr>
-      <p:sp>
-        <p:nvSpPr>
-          <p:cNvPr id="3" name="Espace réservé du numéro de diapositive 2"/>
-          <p:cNvSpPr>
-            <a:spLocks noGrp="1"/>
-          </p:cNvSpPr>
-          <p:nvPr>
-            <p:ph type="sldNum" sz="quarter" idx="12"/>
-          </p:nvPr>
-        </p:nvSpPr>
-        <p:spPr>
-          <a:xfrm>
-            <a:off x="9271000" y="6207125"/>
-            <a:ext cx="2844800" cy="457200"/>
-          </a:xfrm>
-        </p:spPr>
-        <p:txBody>
-          <a:bodyPr wrap="square" anchor="t">
-            <a:normAutofit/>
-          </a:bodyPr>
-          <a:lstStyle/>
-          <a:p>
-            <a:pPr>
-              <a:spcAft>
-                <a:spcPts val="600"/>
-              </a:spcAft>
-              <a:defRPr/>
-            </a:pPr>
-            <a:fld id="{156ABF86-EFC2-454D-AD05-896C81F76FA1}" type="slidenum">
-              <a:rPr lang="fr-FR" smtClean="0"/>
-              <a:pPr>
-                <a:spcAft>
-                  <a:spcPts val="600"/>
-                </a:spcAft>
-                <a:defRPr/>
-              </a:pPr>
-              <a:t>13</a:t>
-            </a:fld>
-            <a:endParaRPr lang="fr-FR"/>
-          </a:p>
-        </p:txBody>
-      </p:sp>
-      <p:sp>
-        <p:nvSpPr>
-          <p:cNvPr id="2" name="ZoneTexte 1">
-            <a:extLst>
-              <a:ext uri="{FF2B5EF4-FFF2-40B4-BE49-F238E27FC236}">
-                <a16:creationId xmlns:a16="http://schemas.microsoft.com/office/drawing/2014/main" id="{90D73DDF-1BFE-B63B-ACA4-3A1EA51E97F6}"/>
-              </a:ext>
-            </a:extLst>
-          </p:cNvPr>
-          <p:cNvSpPr txBox="1"/>
-          <p:nvPr/>
-        </p:nvSpPr>
-        <p:spPr>
-          <a:xfrm>
-            <a:off x="633234" y="120005"/>
-            <a:ext cx="10476482" cy="461665"/>
-          </a:xfrm>
-          <a:prstGeom prst="rect">
-            <a:avLst/>
-          </a:prstGeom>
-          <a:noFill/>
-        </p:spPr>
-        <p:txBody>
-          <a:bodyPr wrap="square" anchor="ctr">
-            <a:spAutoFit/>
-          </a:bodyPr>
-          <a:lstStyle>
-            <a:defPPr>
-              <a:defRPr lang="fr-FR"/>
-            </a:defPPr>
-            <a:lvl1pPr>
-              <a:defRPr sz="2400" b="1">
-                <a:effectLst>
-                  <a:outerShdw blurRad="38100" dist="38100" dir="2700000" algn="tl">
-                    <a:srgbClr val="000000">
-                      <a:alpha val="43137"/>
-                    </a:srgbClr>
-                  </a:outerShdw>
-                </a:effectLst>
-                <a:latin typeface="Calibri" panose="020F0502020204030204" pitchFamily="34" charset="0"/>
-                <a:ea typeface="Times New Roman" panose="02020603050405020304" pitchFamily="18" charset="0"/>
-              </a:defRPr>
-            </a:lvl1pPr>
-          </a:lstStyle>
-          <a:p>
-            <a:r>
-              <a:rPr lang="fr-FR" dirty="0">
-                <a:effectLst/>
-              </a:rPr>
-              <a:t>7. Les supports étaient adaptés (photos, vidéos…)</a:t>
-            </a:r>
-          </a:p>
-        </p:txBody>
-      </p:sp>
-      <p:grpSp>
-        <p:nvGrpSpPr>
-          <p:cNvPr id="4" name="Groupe 3">
-            <a:extLst>
-              <a:ext uri="{FF2B5EF4-FFF2-40B4-BE49-F238E27FC236}">
-                <a16:creationId xmlns:a16="http://schemas.microsoft.com/office/drawing/2014/main" id="{90F130A6-9121-7D10-9071-1366376C65FD}"/>
-              </a:ext>
-            </a:extLst>
-          </p:cNvPr>
-          <p:cNvGrpSpPr/>
-          <p:nvPr/>
-        </p:nvGrpSpPr>
-        <p:grpSpPr>
-          <a:xfrm>
-            <a:off x="9232592" y="1876755"/>
-            <a:ext cx="2276869" cy="3104489"/>
-            <a:chOff x="9375619" y="1843456"/>
-            <a:chExt cx="2276869" cy="3104489"/>
-          </a:xfrm>
-        </p:grpSpPr>
-        <p:grpSp>
-          <p:nvGrpSpPr>
-            <p:cNvPr id="5" name="Groupe 4">
-              <a:extLst>
-                <a:ext uri="{FF2B5EF4-FFF2-40B4-BE49-F238E27FC236}">
-                  <a16:creationId xmlns:a16="http://schemas.microsoft.com/office/drawing/2014/main" id="{13E75F30-23C3-6D80-8025-30172A23AC7F}"/>
-                </a:ext>
-              </a:extLst>
-            </p:cNvPr>
-            <p:cNvGrpSpPr/>
-            <p:nvPr/>
-          </p:nvGrpSpPr>
-          <p:grpSpPr>
-            <a:xfrm>
-              <a:off x="9375619" y="1843456"/>
-              <a:ext cx="576051" cy="3104489"/>
-              <a:chOff x="9424517" y="1534516"/>
-              <a:chExt cx="576051" cy="3104489"/>
-            </a:xfrm>
-          </p:grpSpPr>
-          <p:pic>
-            <p:nvPicPr>
-              <p:cNvPr id="10" name="Image 9">
-                <a:extLst>
-                  <a:ext uri="{FF2B5EF4-FFF2-40B4-BE49-F238E27FC236}">
-                    <a16:creationId xmlns:a16="http://schemas.microsoft.com/office/drawing/2014/main" id="{F2251A6D-3750-1680-7638-AFCA60314A26}"/>
-                  </a:ext>
-                </a:extLst>
-              </p:cNvPr>
-              <p:cNvPicPr>
-                <a:picLocks noChangeAspect="1"/>
-              </p:cNvPicPr>
-              <p:nvPr/>
-            </p:nvPicPr>
-            <p:blipFill>
-              <a:blip r:embed="rId3"/>
-              <a:stretch>
-                <a:fillRect/>
-              </a:stretch>
-            </p:blipFill>
-            <p:spPr>
-              <a:xfrm>
-                <a:off x="9424517" y="1534516"/>
-                <a:ext cx="540000" cy="540000"/>
-              </a:xfrm>
-              <a:prstGeom prst="rect">
-                <a:avLst/>
-              </a:prstGeom>
-            </p:spPr>
-          </p:pic>
-          <p:pic>
-            <p:nvPicPr>
-              <p:cNvPr id="11" name="Image 10">
-                <a:extLst>
-                  <a:ext uri="{FF2B5EF4-FFF2-40B4-BE49-F238E27FC236}">
-                    <a16:creationId xmlns:a16="http://schemas.microsoft.com/office/drawing/2014/main" id="{3CE762DD-0F17-933D-47C9-F68418548276}"/>
-                  </a:ext>
-                </a:extLst>
-              </p:cNvPr>
-              <p:cNvPicPr>
-                <a:picLocks noChangeAspect="1"/>
-              </p:cNvPicPr>
-              <p:nvPr/>
-            </p:nvPicPr>
-            <p:blipFill>
-              <a:blip r:embed="rId4"/>
-              <a:stretch>
-                <a:fillRect/>
-              </a:stretch>
-            </p:blipFill>
-            <p:spPr>
-              <a:xfrm>
-                <a:off x="9476507" y="2350426"/>
-                <a:ext cx="488010" cy="540000"/>
-              </a:xfrm>
-              <a:prstGeom prst="rect">
-                <a:avLst/>
-              </a:prstGeom>
-            </p:spPr>
-          </p:pic>
-          <p:pic>
-            <p:nvPicPr>
-              <p:cNvPr id="12" name="Image 11">
-                <a:extLst>
-                  <a:ext uri="{FF2B5EF4-FFF2-40B4-BE49-F238E27FC236}">
-                    <a16:creationId xmlns:a16="http://schemas.microsoft.com/office/drawing/2014/main" id="{DC72C2BC-B53D-36F9-E04A-4C8F065953D7}"/>
-                  </a:ext>
-                </a:extLst>
-              </p:cNvPr>
-              <p:cNvPicPr>
-                <a:picLocks noChangeAspect="1"/>
-              </p:cNvPicPr>
-              <p:nvPr/>
-            </p:nvPicPr>
-            <p:blipFill>
-              <a:blip r:embed="rId5"/>
-              <a:stretch>
-                <a:fillRect/>
-              </a:stretch>
-            </p:blipFill>
-            <p:spPr>
-              <a:xfrm>
-                <a:off x="9449290" y="3238206"/>
-                <a:ext cx="490454" cy="468000"/>
-              </a:xfrm>
-              <a:prstGeom prst="rect">
-                <a:avLst/>
-              </a:prstGeom>
-            </p:spPr>
-          </p:pic>
-          <p:pic>
-            <p:nvPicPr>
-              <p:cNvPr id="13" name="Image 12">
-                <a:extLst>
-                  <a:ext uri="{FF2B5EF4-FFF2-40B4-BE49-F238E27FC236}">
-                    <a16:creationId xmlns:a16="http://schemas.microsoft.com/office/drawing/2014/main" id="{F437585C-0CD1-D168-12C5-6E67892EB86F}"/>
-                  </a:ext>
-                </a:extLst>
-              </p:cNvPr>
-              <p:cNvPicPr>
-                <a:picLocks noChangeAspect="1"/>
-              </p:cNvPicPr>
-              <p:nvPr/>
-            </p:nvPicPr>
-            <p:blipFill>
-              <a:blip r:embed="rId6"/>
-              <a:stretch>
-                <a:fillRect/>
-              </a:stretch>
-            </p:blipFill>
-            <p:spPr>
-              <a:xfrm>
-                <a:off x="9440455" y="4099005"/>
-                <a:ext cx="560113" cy="540000"/>
-              </a:xfrm>
-              <a:prstGeom prst="rect">
-                <a:avLst/>
-              </a:prstGeom>
-            </p:spPr>
-          </p:pic>
-        </p:grpSp>
-        <p:sp>
-          <p:nvSpPr>
-            <p:cNvPr id="6" name="ZoneTexte 5">
-              <a:extLst>
-                <a:ext uri="{FF2B5EF4-FFF2-40B4-BE49-F238E27FC236}">
-                  <a16:creationId xmlns:a16="http://schemas.microsoft.com/office/drawing/2014/main" id="{67A1B1E8-BA22-C803-8F40-F0236D96859F}"/>
-                </a:ext>
-              </a:extLst>
-            </p:cNvPr>
-            <p:cNvSpPr txBox="1"/>
-            <p:nvPr/>
-          </p:nvSpPr>
-          <p:spPr>
-            <a:xfrm>
-              <a:off x="10080404" y="1928790"/>
-              <a:ext cx="1572084" cy="369332"/>
-            </a:xfrm>
-            <a:prstGeom prst="rect">
-              <a:avLst/>
-            </a:prstGeom>
-            <a:noFill/>
-          </p:spPr>
-          <p:txBody>
-            <a:bodyPr wrap="square">
-              <a:spAutoFit/>
-            </a:bodyPr>
-            <a:lstStyle/>
-            <a:p>
-              <a:r>
-                <a:rPr lang="fr-FR"/>
-                <a:t>Très satisfait</a:t>
-              </a:r>
-            </a:p>
-          </p:txBody>
-        </p:sp>
-        <p:sp>
-          <p:nvSpPr>
-            <p:cNvPr id="7" name="ZoneTexte 6">
-              <a:extLst>
-                <a:ext uri="{FF2B5EF4-FFF2-40B4-BE49-F238E27FC236}">
-                  <a16:creationId xmlns:a16="http://schemas.microsoft.com/office/drawing/2014/main" id="{1BBFF049-99D3-AC89-23FF-FF9DE6B8BBC4}"/>
-                </a:ext>
-              </a:extLst>
-            </p:cNvPr>
-            <p:cNvSpPr txBox="1"/>
-            <p:nvPr/>
-          </p:nvSpPr>
-          <p:spPr>
-            <a:xfrm>
-              <a:off x="10105396" y="2744700"/>
-              <a:ext cx="1176007" cy="369332"/>
-            </a:xfrm>
-            <a:prstGeom prst="rect">
-              <a:avLst/>
-            </a:prstGeom>
-            <a:noFill/>
-          </p:spPr>
-          <p:txBody>
-            <a:bodyPr wrap="square">
-              <a:spAutoFit/>
-            </a:bodyPr>
-            <a:lstStyle/>
-            <a:p>
-              <a:r>
-                <a:rPr lang="fr-FR"/>
-                <a:t>Satisfait</a:t>
-              </a:r>
-            </a:p>
-          </p:txBody>
-        </p:sp>
-        <p:sp>
-          <p:nvSpPr>
-            <p:cNvPr id="8" name="ZoneTexte 7">
-              <a:extLst>
-                <a:ext uri="{FF2B5EF4-FFF2-40B4-BE49-F238E27FC236}">
-                  <a16:creationId xmlns:a16="http://schemas.microsoft.com/office/drawing/2014/main" id="{8FFD13E0-1684-8D7F-E40E-1D44E57BEA1A}"/>
-                </a:ext>
-              </a:extLst>
-            </p:cNvPr>
-            <p:cNvSpPr txBox="1"/>
-            <p:nvPr/>
-          </p:nvSpPr>
-          <p:spPr>
-            <a:xfrm>
-              <a:off x="10132291" y="3642635"/>
-              <a:ext cx="1122218" cy="369332"/>
-            </a:xfrm>
-            <a:prstGeom prst="rect">
-              <a:avLst/>
-            </a:prstGeom>
-            <a:noFill/>
-          </p:spPr>
-          <p:txBody>
-            <a:bodyPr wrap="square">
-              <a:spAutoFit/>
-            </a:bodyPr>
-            <a:lstStyle/>
-            <a:p>
-              <a:r>
-                <a:rPr lang="fr-FR"/>
-                <a:t>Déçu</a:t>
-              </a:r>
-            </a:p>
-          </p:txBody>
-        </p:sp>
-        <p:sp>
-          <p:nvSpPr>
-            <p:cNvPr id="9" name="ZoneTexte 8">
-              <a:extLst>
-                <a:ext uri="{FF2B5EF4-FFF2-40B4-BE49-F238E27FC236}">
-                  <a16:creationId xmlns:a16="http://schemas.microsoft.com/office/drawing/2014/main" id="{5730AE2E-7EF8-E0CB-8A59-02944FF59432}"/>
-                </a:ext>
-              </a:extLst>
-            </p:cNvPr>
-            <p:cNvSpPr txBox="1"/>
-            <p:nvPr/>
-          </p:nvSpPr>
-          <p:spPr>
-            <a:xfrm>
-              <a:off x="10105396" y="4540570"/>
-              <a:ext cx="1303142" cy="369332"/>
-            </a:xfrm>
-            <a:prstGeom prst="rect">
-              <a:avLst/>
-            </a:prstGeom>
-            <a:noFill/>
-          </p:spPr>
-          <p:txBody>
-            <a:bodyPr wrap="square">
-              <a:spAutoFit/>
-            </a:bodyPr>
-            <a:lstStyle/>
-            <a:p>
-              <a:r>
-                <a:rPr lang="fr-FR" sz="1800" b="0" i="0" u="none" strike="noStrike">
-                  <a:solidFill>
-                    <a:srgbClr val="000000"/>
-                  </a:solidFill>
-                  <a:effectLst/>
-                  <a:latin typeface="Calibri" panose="020F0502020204030204" pitchFamily="34" charset="0"/>
-                </a:rPr>
-                <a:t>Très déçu</a:t>
-              </a:r>
-              <a:r>
-                <a:rPr lang="fr-FR"/>
-                <a:t> </a:t>
-              </a:r>
-            </a:p>
-          </p:txBody>
-        </p:sp>
-      </p:grpSp>
-      <p:graphicFrame>
-        <p:nvGraphicFramePr>
-          <p:cNvPr id="14" name="Graphique 13">
-            <a:extLst>
-              <a:ext uri="{FF2B5EF4-FFF2-40B4-BE49-F238E27FC236}">
-                <a16:creationId xmlns:a16="http://schemas.microsoft.com/office/drawing/2014/main" id="{E3B72F12-C928-870F-EE1D-C1901EFFC06E}"/>
-              </a:ext>
-            </a:extLst>
-          </p:cNvPr>
-          <p:cNvGraphicFramePr/>
-          <p:nvPr>
-            <p:extLst>
-              <p:ext uri="{D42A27DB-BD31-4B8C-83A1-F6EECF244321}">
-                <p14:modId xmlns:p14="http://schemas.microsoft.com/office/powerpoint/2010/main" val="211513403"/>
-              </p:ext>
-            </p:extLst>
-          </p:nvPr>
-        </p:nvGraphicFramePr>
-        <p:xfrm>
-          <a:off x="633234" y="871111"/>
-          <a:ext cx="8128000" cy="5418667"/>
-        </p:xfrm>
-        <a:graphic>
-          <a:graphicData uri="http://schemas.openxmlformats.org/drawingml/2006/chart">
-            <c:chart xmlns:c="http://schemas.openxmlformats.org/drawingml/2006/chart" xmlns:r="http://schemas.openxmlformats.org/officeDocument/2006/relationships" r:id="rId7"/>
-          </a:graphicData>
-        </a:graphic>
-      </p:graphicFrame>
-    </p:spTree>
-    <p:extLst>
-      <p:ext uri="{BB962C8B-B14F-4D97-AF65-F5344CB8AC3E}">
-        <p14:creationId xmlns:p14="http://schemas.microsoft.com/office/powerpoint/2010/main" val="3961741590"/>
-      </p:ext>
-    </p:extLst>
-  </p:cSld>
-  <p:clrMapOvr>
-    <a:masterClrMapping/>
-  </p:clrMapOvr>
-</p:sld>
-</file>
-
-<file path=ppt/slides/slide14.xml><?xml version="1.0" encoding="utf-8"?>
-<p:sld xmlns:a="http://schemas.openxmlformats.org/drawingml/2006/main" xmlns:r="http://schemas.openxmlformats.org/officeDocument/2006/relationships" xmlns:p="http://schemas.openxmlformats.org/presentationml/2006/main">
-  <p:cSld>
-    <p:spTree>
-      <p:nvGrpSpPr>
-        <p:cNvPr id="1" name=""/>
-        <p:cNvGrpSpPr/>
-        <p:nvPr/>
-      </p:nvGrpSpPr>
-      <p:grpSpPr>
-        <a:xfrm>
-          <a:off x="0" y="0"/>
-          <a:ext cx="0" cy="0"/>
-          <a:chOff x="0" y="0"/>
-          <a:chExt cx="0" cy="0"/>
-        </a:xfrm>
-      </p:grpSpPr>
-      <p:sp>
-        <p:nvSpPr>
-          <p:cNvPr id="3" name="Espace réservé du numéro de diapositive 2"/>
-          <p:cNvSpPr>
-            <a:spLocks noGrp="1"/>
-          </p:cNvSpPr>
-          <p:nvPr>
-            <p:ph type="sldNum" sz="quarter" idx="12"/>
-          </p:nvPr>
-        </p:nvSpPr>
-        <p:spPr>
-          <a:xfrm>
-            <a:off x="9271000" y="6207125"/>
-            <a:ext cx="2844800" cy="457200"/>
-          </a:xfrm>
-        </p:spPr>
-        <p:txBody>
-          <a:bodyPr wrap="square" anchor="t">
-            <a:normAutofit/>
-          </a:bodyPr>
-          <a:lstStyle/>
-          <a:p>
-            <a:pPr>
-              <a:spcAft>
-                <a:spcPts val="600"/>
-              </a:spcAft>
-              <a:defRPr/>
-            </a:pPr>
-            <a:fld id="{156ABF86-EFC2-454D-AD05-896C81F76FA1}" type="slidenum">
-              <a:rPr lang="fr-FR" smtClean="0"/>
-              <a:pPr>
-                <a:spcAft>
-                  <a:spcPts val="600"/>
-                </a:spcAft>
-                <a:defRPr/>
-              </a:pPr>
-              <a:t>14</a:t>
-            </a:fld>
-            <a:endParaRPr lang="fr-FR"/>
-          </a:p>
-        </p:txBody>
-      </p:sp>
-      <p:sp>
-        <p:nvSpPr>
-          <p:cNvPr id="2" name="ZoneTexte 1">
-            <a:extLst>
-              <a:ext uri="{FF2B5EF4-FFF2-40B4-BE49-F238E27FC236}">
-                <a16:creationId xmlns:a16="http://schemas.microsoft.com/office/drawing/2014/main" id="{4AD7BE27-A40E-BBE9-339B-A85B2ECDCAAF}"/>
-              </a:ext>
-            </a:extLst>
-          </p:cNvPr>
-          <p:cNvSpPr txBox="1"/>
-          <p:nvPr/>
-        </p:nvSpPr>
-        <p:spPr>
-          <a:xfrm>
-            <a:off x="633234" y="120005"/>
-            <a:ext cx="10476482" cy="461665"/>
-          </a:xfrm>
-          <a:prstGeom prst="rect">
-            <a:avLst/>
-          </a:prstGeom>
-          <a:noFill/>
-        </p:spPr>
-        <p:txBody>
-          <a:bodyPr wrap="square" anchor="ctr">
-            <a:spAutoFit/>
-          </a:bodyPr>
-          <a:lstStyle>
-            <a:defPPr>
-              <a:defRPr lang="fr-FR"/>
-            </a:defPPr>
-            <a:lvl1pPr>
-              <a:defRPr sz="2400" b="1">
-                <a:effectLst>
-                  <a:outerShdw blurRad="38100" dist="38100" dir="2700000" algn="tl">
-                    <a:srgbClr val="000000">
-                      <a:alpha val="43137"/>
-                    </a:srgbClr>
-                  </a:outerShdw>
-                </a:effectLst>
-                <a:latin typeface="Calibri" panose="020F0502020204030204" pitchFamily="34" charset="0"/>
-                <a:ea typeface="Times New Roman" panose="02020603050405020304" pitchFamily="18" charset="0"/>
-              </a:defRPr>
-            </a:lvl1pPr>
-          </a:lstStyle>
-          <a:p>
-            <a:r>
-              <a:rPr lang="fr-FR">
-                <a:effectLst/>
-              </a:rPr>
-              <a:t>8. Le formateur a pris en compte mes difficultés </a:t>
-            </a:r>
-          </a:p>
-        </p:txBody>
-      </p:sp>
-      <p:grpSp>
-        <p:nvGrpSpPr>
-          <p:cNvPr id="4" name="Groupe 3">
-            <a:extLst>
-              <a:ext uri="{FF2B5EF4-FFF2-40B4-BE49-F238E27FC236}">
-                <a16:creationId xmlns:a16="http://schemas.microsoft.com/office/drawing/2014/main" id="{FFF8D6DA-1624-031A-E64B-2136FEDAE04E}"/>
-              </a:ext>
-            </a:extLst>
-          </p:cNvPr>
-          <p:cNvGrpSpPr/>
-          <p:nvPr/>
-        </p:nvGrpSpPr>
-        <p:grpSpPr>
-          <a:xfrm>
-            <a:off x="9232592" y="1876755"/>
-            <a:ext cx="2276869" cy="3104489"/>
-            <a:chOff x="9375619" y="1843456"/>
-            <a:chExt cx="2276869" cy="3104489"/>
-          </a:xfrm>
-        </p:grpSpPr>
-        <p:grpSp>
-          <p:nvGrpSpPr>
-            <p:cNvPr id="5" name="Groupe 4">
-              <a:extLst>
-                <a:ext uri="{FF2B5EF4-FFF2-40B4-BE49-F238E27FC236}">
-                  <a16:creationId xmlns:a16="http://schemas.microsoft.com/office/drawing/2014/main" id="{0618FC8C-D3BF-CA52-8774-D7952B0A1F39}"/>
-                </a:ext>
-              </a:extLst>
-            </p:cNvPr>
-            <p:cNvGrpSpPr/>
-            <p:nvPr/>
-          </p:nvGrpSpPr>
-          <p:grpSpPr>
-            <a:xfrm>
-              <a:off x="9375619" y="1843456"/>
-              <a:ext cx="576051" cy="3104489"/>
-              <a:chOff x="9424517" y="1534516"/>
-              <a:chExt cx="576051" cy="3104489"/>
-            </a:xfrm>
-          </p:grpSpPr>
-          <p:pic>
-            <p:nvPicPr>
-              <p:cNvPr id="10" name="Image 9">
-                <a:extLst>
-                  <a:ext uri="{FF2B5EF4-FFF2-40B4-BE49-F238E27FC236}">
-                    <a16:creationId xmlns:a16="http://schemas.microsoft.com/office/drawing/2014/main" id="{AFAEECC3-413C-A3C3-4878-D0AB9BF1B979}"/>
-                  </a:ext>
-                </a:extLst>
-              </p:cNvPr>
-              <p:cNvPicPr>
-                <a:picLocks noChangeAspect="1"/>
-              </p:cNvPicPr>
-              <p:nvPr/>
-            </p:nvPicPr>
-            <p:blipFill>
-              <a:blip r:embed="rId3"/>
-              <a:stretch>
-                <a:fillRect/>
-              </a:stretch>
-            </p:blipFill>
-            <p:spPr>
-              <a:xfrm>
-                <a:off x="9424517" y="1534516"/>
-                <a:ext cx="540000" cy="540000"/>
-              </a:xfrm>
-              <a:prstGeom prst="rect">
-                <a:avLst/>
-              </a:prstGeom>
-            </p:spPr>
-          </p:pic>
-          <p:pic>
-            <p:nvPicPr>
-              <p:cNvPr id="11" name="Image 10">
-                <a:extLst>
-                  <a:ext uri="{FF2B5EF4-FFF2-40B4-BE49-F238E27FC236}">
-                    <a16:creationId xmlns:a16="http://schemas.microsoft.com/office/drawing/2014/main" id="{3532D763-5B33-AA5B-F804-3BE655342054}"/>
-                  </a:ext>
-                </a:extLst>
-              </p:cNvPr>
-              <p:cNvPicPr>
-                <a:picLocks noChangeAspect="1"/>
-              </p:cNvPicPr>
-              <p:nvPr/>
-            </p:nvPicPr>
-            <p:blipFill>
-              <a:blip r:embed="rId4"/>
-              <a:stretch>
-                <a:fillRect/>
-              </a:stretch>
-            </p:blipFill>
-            <p:spPr>
-              <a:xfrm>
-                <a:off x="9476507" y="2350426"/>
-                <a:ext cx="488010" cy="540000"/>
-              </a:xfrm>
-              <a:prstGeom prst="rect">
-                <a:avLst/>
-              </a:prstGeom>
-            </p:spPr>
-          </p:pic>
-          <p:pic>
-            <p:nvPicPr>
-              <p:cNvPr id="12" name="Image 11">
-                <a:extLst>
-                  <a:ext uri="{FF2B5EF4-FFF2-40B4-BE49-F238E27FC236}">
-                    <a16:creationId xmlns:a16="http://schemas.microsoft.com/office/drawing/2014/main" id="{F7B07820-8BAD-BC13-E349-49740940987D}"/>
-                  </a:ext>
-                </a:extLst>
-              </p:cNvPr>
-              <p:cNvPicPr>
-                <a:picLocks noChangeAspect="1"/>
-              </p:cNvPicPr>
-              <p:nvPr/>
-            </p:nvPicPr>
-            <p:blipFill>
-              <a:blip r:embed="rId5"/>
-              <a:stretch>
-                <a:fillRect/>
-              </a:stretch>
-            </p:blipFill>
-            <p:spPr>
-              <a:xfrm>
-                <a:off x="9449290" y="3238206"/>
-                <a:ext cx="490454" cy="468000"/>
-              </a:xfrm>
-              <a:prstGeom prst="rect">
-                <a:avLst/>
-              </a:prstGeom>
-            </p:spPr>
-          </p:pic>
-          <p:pic>
-            <p:nvPicPr>
-              <p:cNvPr id="13" name="Image 12">
-                <a:extLst>
-                  <a:ext uri="{FF2B5EF4-FFF2-40B4-BE49-F238E27FC236}">
-                    <a16:creationId xmlns:a16="http://schemas.microsoft.com/office/drawing/2014/main" id="{9EC7CF88-6CFD-5E26-8787-B4B77B11FECF}"/>
-                  </a:ext>
-                </a:extLst>
-              </p:cNvPr>
-              <p:cNvPicPr>
-                <a:picLocks noChangeAspect="1"/>
-              </p:cNvPicPr>
-              <p:nvPr/>
-            </p:nvPicPr>
-            <p:blipFill>
-              <a:blip r:embed="rId6"/>
-              <a:stretch>
-                <a:fillRect/>
-              </a:stretch>
-            </p:blipFill>
-            <p:spPr>
-              <a:xfrm>
-                <a:off x="9440455" y="4099005"/>
-                <a:ext cx="560113" cy="540000"/>
-              </a:xfrm>
-              <a:prstGeom prst="rect">
-                <a:avLst/>
-              </a:prstGeom>
-            </p:spPr>
-          </p:pic>
-        </p:grpSp>
-        <p:sp>
-          <p:nvSpPr>
-            <p:cNvPr id="6" name="ZoneTexte 5">
-              <a:extLst>
-                <a:ext uri="{FF2B5EF4-FFF2-40B4-BE49-F238E27FC236}">
-                  <a16:creationId xmlns:a16="http://schemas.microsoft.com/office/drawing/2014/main" id="{C79D2978-BDB6-4902-F6C8-D04EA957314F}"/>
-                </a:ext>
-              </a:extLst>
-            </p:cNvPr>
-            <p:cNvSpPr txBox="1"/>
-            <p:nvPr/>
-          </p:nvSpPr>
-          <p:spPr>
-            <a:xfrm>
-              <a:off x="10080404" y="1928790"/>
-              <a:ext cx="1572084" cy="369332"/>
-            </a:xfrm>
-            <a:prstGeom prst="rect">
-              <a:avLst/>
-            </a:prstGeom>
-            <a:noFill/>
-          </p:spPr>
-          <p:txBody>
-            <a:bodyPr wrap="square">
-              <a:spAutoFit/>
-            </a:bodyPr>
-            <a:lstStyle/>
-            <a:p>
-              <a:r>
-                <a:rPr lang="fr-FR"/>
-                <a:t>Très satisfait</a:t>
-              </a:r>
-            </a:p>
-          </p:txBody>
-        </p:sp>
-        <p:sp>
-          <p:nvSpPr>
-            <p:cNvPr id="7" name="ZoneTexte 6">
-              <a:extLst>
-                <a:ext uri="{FF2B5EF4-FFF2-40B4-BE49-F238E27FC236}">
-                  <a16:creationId xmlns:a16="http://schemas.microsoft.com/office/drawing/2014/main" id="{2EDD911E-A93D-449B-4C22-8177E7721C19}"/>
-                </a:ext>
-              </a:extLst>
-            </p:cNvPr>
-            <p:cNvSpPr txBox="1"/>
-            <p:nvPr/>
-          </p:nvSpPr>
-          <p:spPr>
-            <a:xfrm>
-              <a:off x="10105396" y="2744700"/>
-              <a:ext cx="1176007" cy="369332"/>
-            </a:xfrm>
-            <a:prstGeom prst="rect">
-              <a:avLst/>
-            </a:prstGeom>
-            <a:noFill/>
-          </p:spPr>
-          <p:txBody>
-            <a:bodyPr wrap="square">
-              <a:spAutoFit/>
-            </a:bodyPr>
-            <a:lstStyle/>
-            <a:p>
-              <a:r>
-                <a:rPr lang="fr-FR"/>
-                <a:t>Satisfait</a:t>
-              </a:r>
-            </a:p>
-          </p:txBody>
-        </p:sp>
-        <p:sp>
-          <p:nvSpPr>
-            <p:cNvPr id="8" name="ZoneTexte 7">
-              <a:extLst>
-                <a:ext uri="{FF2B5EF4-FFF2-40B4-BE49-F238E27FC236}">
-                  <a16:creationId xmlns:a16="http://schemas.microsoft.com/office/drawing/2014/main" id="{123859C9-9FB0-A114-1FDC-A9F6B111B7EE}"/>
-                </a:ext>
-              </a:extLst>
-            </p:cNvPr>
-            <p:cNvSpPr txBox="1"/>
-            <p:nvPr/>
-          </p:nvSpPr>
-          <p:spPr>
-            <a:xfrm>
-              <a:off x="10132291" y="3642635"/>
-              <a:ext cx="1122218" cy="369332"/>
-            </a:xfrm>
-            <a:prstGeom prst="rect">
-              <a:avLst/>
-            </a:prstGeom>
-            <a:noFill/>
-          </p:spPr>
-          <p:txBody>
-            <a:bodyPr wrap="square">
-              <a:spAutoFit/>
-            </a:bodyPr>
-            <a:lstStyle/>
-            <a:p>
-              <a:r>
-                <a:rPr lang="fr-FR"/>
-                <a:t>Déçu</a:t>
-              </a:r>
-            </a:p>
-          </p:txBody>
-        </p:sp>
-        <p:sp>
-          <p:nvSpPr>
-            <p:cNvPr id="9" name="ZoneTexte 8">
-              <a:extLst>
-                <a:ext uri="{FF2B5EF4-FFF2-40B4-BE49-F238E27FC236}">
-                  <a16:creationId xmlns:a16="http://schemas.microsoft.com/office/drawing/2014/main" id="{D713FC9B-13CE-BD57-A2B3-5054F7793A73}"/>
-                </a:ext>
-              </a:extLst>
-            </p:cNvPr>
-            <p:cNvSpPr txBox="1"/>
-            <p:nvPr/>
-          </p:nvSpPr>
-          <p:spPr>
-            <a:xfrm>
-              <a:off x="10105396" y="4540570"/>
-              <a:ext cx="1303142" cy="369332"/>
-            </a:xfrm>
-            <a:prstGeom prst="rect">
-              <a:avLst/>
-            </a:prstGeom>
-            <a:noFill/>
-          </p:spPr>
-          <p:txBody>
-            <a:bodyPr wrap="square">
-              <a:spAutoFit/>
-            </a:bodyPr>
-            <a:lstStyle/>
-            <a:p>
-              <a:r>
-                <a:rPr lang="fr-FR" sz="1800" b="0" i="0" u="none" strike="noStrike">
-                  <a:solidFill>
-                    <a:srgbClr val="000000"/>
-                  </a:solidFill>
-                  <a:effectLst/>
-                  <a:latin typeface="Calibri" panose="020F0502020204030204" pitchFamily="34" charset="0"/>
-                </a:rPr>
-                <a:t>Très déçu</a:t>
-              </a:r>
-              <a:r>
-                <a:rPr lang="fr-FR"/>
-                <a:t> </a:t>
-              </a:r>
-            </a:p>
-          </p:txBody>
-        </p:sp>
-      </p:grpSp>
-      <p:graphicFrame>
-        <p:nvGraphicFramePr>
-          <p:cNvPr id="14" name="Graphique 13">
-            <a:extLst>
-              <a:ext uri="{FF2B5EF4-FFF2-40B4-BE49-F238E27FC236}">
-                <a16:creationId xmlns:a16="http://schemas.microsoft.com/office/drawing/2014/main" id="{3680BA01-CF57-63CA-67AE-EC696A7D15F8}"/>
-              </a:ext>
-            </a:extLst>
-          </p:cNvPr>
-          <p:cNvGraphicFramePr/>
-          <p:nvPr>
-            <p:extLst>
-              <p:ext uri="{D42A27DB-BD31-4B8C-83A1-F6EECF244321}">
-                <p14:modId xmlns:p14="http://schemas.microsoft.com/office/powerpoint/2010/main" val="211513403"/>
-              </p:ext>
-            </p:extLst>
-          </p:nvPr>
-        </p:nvGraphicFramePr>
-        <p:xfrm>
-          <a:off x="633234" y="871111"/>
-          <a:ext cx="8128000" cy="5418667"/>
-        </p:xfrm>
-        <a:graphic>
-          <a:graphicData uri="http://schemas.openxmlformats.org/drawingml/2006/chart">
-            <c:chart xmlns:c="http://schemas.openxmlformats.org/drawingml/2006/chart" xmlns:r="http://schemas.openxmlformats.org/officeDocument/2006/relationships" r:id="rId7"/>
-          </a:graphicData>
-        </a:graphic>
-      </p:graphicFrame>
-    </p:spTree>
-    <p:extLst>
-      <p:ext uri="{BB962C8B-B14F-4D97-AF65-F5344CB8AC3E}">
-        <p14:creationId xmlns:p14="http://schemas.microsoft.com/office/powerpoint/2010/main" val="330190011"/>
-      </p:ext>
-    </p:extLst>
-  </p:cSld>
-  <p:clrMapOvr>
-    <a:masterClrMapping/>
-  </p:clrMapOvr>
-</p:sld>
-</file>
-
-<file path=ppt/slides/slide15.xml><?xml version="1.0" encoding="utf-8"?>
-<p:sld xmlns:a="http://schemas.openxmlformats.org/drawingml/2006/main" xmlns:r="http://schemas.openxmlformats.org/officeDocument/2006/relationships" xmlns:p="http://schemas.openxmlformats.org/presentationml/2006/main">
-  <p:cSld>
-    <p:spTree>
-      <p:nvGrpSpPr>
-        <p:cNvPr id="1" name=""/>
-        <p:cNvGrpSpPr/>
-        <p:nvPr/>
-      </p:nvGrpSpPr>
-      <p:grpSpPr>
-        <a:xfrm>
-          <a:off x="0" y="0"/>
-          <a:ext cx="0" cy="0"/>
-          <a:chOff x="0" y="0"/>
-          <a:chExt cx="0" cy="0"/>
-        </a:xfrm>
-      </p:grpSpPr>
-      <p:sp>
-        <p:nvSpPr>
-          <p:cNvPr id="3" name="Espace réservé du numéro de diapositive 2"/>
-          <p:cNvSpPr>
-            <a:spLocks noGrp="1"/>
-          </p:cNvSpPr>
-          <p:nvPr>
-            <p:ph type="sldNum" sz="quarter" idx="12"/>
-          </p:nvPr>
-        </p:nvSpPr>
-        <p:spPr>
-          <a:xfrm>
-            <a:off x="9271000" y="6207125"/>
-            <a:ext cx="2844800" cy="457200"/>
-          </a:xfrm>
-        </p:spPr>
-        <p:txBody>
-          <a:bodyPr wrap="square" anchor="t">
-            <a:normAutofit/>
-          </a:bodyPr>
-          <a:lstStyle/>
-          <a:p>
-            <a:pPr>
-              <a:spcAft>
-                <a:spcPts val="600"/>
-              </a:spcAft>
-              <a:defRPr/>
-            </a:pPr>
-            <a:fld id="{156ABF86-EFC2-454D-AD05-896C81F76FA1}" type="slidenum">
-              <a:rPr lang="fr-FR" smtClean="0"/>
-              <a:pPr>
-                <a:spcAft>
-                  <a:spcPts val="600"/>
-                </a:spcAft>
-                <a:defRPr/>
-              </a:pPr>
-              <a:t>15</a:t>
-            </a:fld>
-            <a:endParaRPr lang="fr-FR"/>
-          </a:p>
-        </p:txBody>
-      </p:sp>
-      <p:sp>
-        <p:nvSpPr>
-          <p:cNvPr id="2" name="ZoneTexte 1">
-            <a:extLst>
-              <a:ext uri="{FF2B5EF4-FFF2-40B4-BE49-F238E27FC236}">
-                <a16:creationId xmlns:a16="http://schemas.microsoft.com/office/drawing/2014/main" id="{352E85EA-DA80-6857-7D14-5478301429E6}"/>
-              </a:ext>
-            </a:extLst>
-          </p:cNvPr>
-          <p:cNvSpPr txBox="1"/>
-          <p:nvPr/>
-        </p:nvSpPr>
-        <p:spPr>
-          <a:xfrm>
-            <a:off x="633234" y="120005"/>
-            <a:ext cx="10476482" cy="461665"/>
-          </a:xfrm>
-          <a:prstGeom prst="rect">
-            <a:avLst/>
-          </a:prstGeom>
-          <a:noFill/>
-        </p:spPr>
-        <p:txBody>
-          <a:bodyPr wrap="square" anchor="ctr">
-            <a:spAutoFit/>
-          </a:bodyPr>
-          <a:lstStyle>
-            <a:defPPr>
-              <a:defRPr lang="fr-FR"/>
-            </a:defPPr>
-            <a:lvl1pPr>
-              <a:defRPr sz="2400" b="1">
-                <a:effectLst>
-                  <a:outerShdw blurRad="38100" dist="38100" dir="2700000" algn="tl">
-                    <a:srgbClr val="000000">
-                      <a:alpha val="43137"/>
-                    </a:srgbClr>
-                  </a:outerShdw>
-                </a:effectLst>
-                <a:latin typeface="Calibri" panose="020F0502020204030204" pitchFamily="34" charset="0"/>
-                <a:ea typeface="Times New Roman" panose="02020603050405020304" pitchFamily="18" charset="0"/>
-              </a:defRPr>
-            </a:lvl1pPr>
-          </a:lstStyle>
-          <a:p>
-            <a:r>
-              <a:rPr lang="fr-FR" dirty="0">
-                <a:effectLst/>
-              </a:rPr>
-              <a:t>9. Les jeux &amp; exercices pratiques m’ont aidé à bien comprendre</a:t>
-            </a:r>
-          </a:p>
-        </p:txBody>
-      </p:sp>
-      <p:grpSp>
-        <p:nvGrpSpPr>
-          <p:cNvPr id="4" name="Groupe 3">
-            <a:extLst>
-              <a:ext uri="{FF2B5EF4-FFF2-40B4-BE49-F238E27FC236}">
-                <a16:creationId xmlns:a16="http://schemas.microsoft.com/office/drawing/2014/main" id="{8955F131-3683-D7A0-E4DF-CFF6764027F7}"/>
-              </a:ext>
-            </a:extLst>
-          </p:cNvPr>
-          <p:cNvGrpSpPr/>
-          <p:nvPr/>
-        </p:nvGrpSpPr>
-        <p:grpSpPr>
-          <a:xfrm>
-            <a:off x="9232592" y="1876755"/>
-            <a:ext cx="2276869" cy="3104489"/>
-            <a:chOff x="9375619" y="1843456"/>
-            <a:chExt cx="2276869" cy="3104489"/>
-          </a:xfrm>
-        </p:grpSpPr>
-        <p:grpSp>
-          <p:nvGrpSpPr>
-            <p:cNvPr id="5" name="Groupe 4">
-              <a:extLst>
-                <a:ext uri="{FF2B5EF4-FFF2-40B4-BE49-F238E27FC236}">
-                  <a16:creationId xmlns:a16="http://schemas.microsoft.com/office/drawing/2014/main" id="{DD75E018-AD7B-39A9-ECE9-ED7BC90F4C5E}"/>
-                </a:ext>
-              </a:extLst>
-            </p:cNvPr>
-            <p:cNvGrpSpPr/>
-            <p:nvPr/>
-          </p:nvGrpSpPr>
-          <p:grpSpPr>
-            <a:xfrm>
-              <a:off x="9375619" y="1843456"/>
-              <a:ext cx="576051" cy="3104489"/>
-              <a:chOff x="9424517" y="1534516"/>
-              <a:chExt cx="576051" cy="3104489"/>
-            </a:xfrm>
-          </p:grpSpPr>
-          <p:pic>
-            <p:nvPicPr>
-              <p:cNvPr id="10" name="Image 9">
-                <a:extLst>
-                  <a:ext uri="{FF2B5EF4-FFF2-40B4-BE49-F238E27FC236}">
-                    <a16:creationId xmlns:a16="http://schemas.microsoft.com/office/drawing/2014/main" id="{6AE31371-11D3-0FD2-539E-1EBAA9C44E46}"/>
-                  </a:ext>
-                </a:extLst>
-              </p:cNvPr>
-              <p:cNvPicPr>
-                <a:picLocks noChangeAspect="1"/>
-              </p:cNvPicPr>
-              <p:nvPr/>
-            </p:nvPicPr>
-            <p:blipFill>
-              <a:blip r:embed="rId3"/>
-              <a:stretch>
-                <a:fillRect/>
-              </a:stretch>
-            </p:blipFill>
-            <p:spPr>
-              <a:xfrm>
-                <a:off x="9424517" y="1534516"/>
-                <a:ext cx="540000" cy="540000"/>
-              </a:xfrm>
-              <a:prstGeom prst="rect">
-                <a:avLst/>
-              </a:prstGeom>
-            </p:spPr>
-          </p:pic>
-          <p:pic>
-            <p:nvPicPr>
-              <p:cNvPr id="11" name="Image 10">
-                <a:extLst>
-                  <a:ext uri="{FF2B5EF4-FFF2-40B4-BE49-F238E27FC236}">
-                    <a16:creationId xmlns:a16="http://schemas.microsoft.com/office/drawing/2014/main" id="{C057AFD4-2D38-FAFB-2DE1-A60C07218098}"/>
-                  </a:ext>
-                </a:extLst>
-              </p:cNvPr>
-              <p:cNvPicPr>
-                <a:picLocks noChangeAspect="1"/>
-              </p:cNvPicPr>
-              <p:nvPr/>
-            </p:nvPicPr>
-            <p:blipFill>
-              <a:blip r:embed="rId4"/>
-              <a:stretch>
-                <a:fillRect/>
-              </a:stretch>
-            </p:blipFill>
-            <p:spPr>
-              <a:xfrm>
-                <a:off x="9476507" y="2350426"/>
-                <a:ext cx="488010" cy="540000"/>
-              </a:xfrm>
-              <a:prstGeom prst="rect">
-                <a:avLst/>
-              </a:prstGeom>
-            </p:spPr>
-          </p:pic>
-          <p:pic>
-            <p:nvPicPr>
-              <p:cNvPr id="12" name="Image 11">
-                <a:extLst>
-                  <a:ext uri="{FF2B5EF4-FFF2-40B4-BE49-F238E27FC236}">
-                    <a16:creationId xmlns:a16="http://schemas.microsoft.com/office/drawing/2014/main" id="{8D932CFB-CE07-528F-69D2-82CF9BB00B31}"/>
-                  </a:ext>
-                </a:extLst>
-              </p:cNvPr>
-              <p:cNvPicPr>
-                <a:picLocks noChangeAspect="1"/>
-              </p:cNvPicPr>
-              <p:nvPr/>
-            </p:nvPicPr>
-            <p:blipFill>
-              <a:blip r:embed="rId5"/>
-              <a:stretch>
-                <a:fillRect/>
-              </a:stretch>
-            </p:blipFill>
-            <p:spPr>
-              <a:xfrm>
-                <a:off x="9449290" y="3238206"/>
-                <a:ext cx="490454" cy="468000"/>
-              </a:xfrm>
-              <a:prstGeom prst="rect">
-                <a:avLst/>
-              </a:prstGeom>
-            </p:spPr>
-          </p:pic>
-          <p:pic>
-            <p:nvPicPr>
-              <p:cNvPr id="13" name="Image 12">
-                <a:extLst>
-                  <a:ext uri="{FF2B5EF4-FFF2-40B4-BE49-F238E27FC236}">
-                    <a16:creationId xmlns:a16="http://schemas.microsoft.com/office/drawing/2014/main" id="{9625A3CD-AB8B-874C-6472-4E0D71AB97FD}"/>
-                  </a:ext>
-                </a:extLst>
-              </p:cNvPr>
-              <p:cNvPicPr>
-                <a:picLocks noChangeAspect="1"/>
-              </p:cNvPicPr>
-              <p:nvPr/>
-            </p:nvPicPr>
-            <p:blipFill>
-              <a:blip r:embed="rId6"/>
-              <a:stretch>
-                <a:fillRect/>
-              </a:stretch>
-            </p:blipFill>
-            <p:spPr>
-              <a:xfrm>
-                <a:off x="9440455" y="4099005"/>
-                <a:ext cx="560113" cy="540000"/>
-              </a:xfrm>
-              <a:prstGeom prst="rect">
-                <a:avLst/>
-              </a:prstGeom>
-            </p:spPr>
-          </p:pic>
-        </p:grpSp>
-        <p:sp>
-          <p:nvSpPr>
-            <p:cNvPr id="6" name="ZoneTexte 5">
-              <a:extLst>
-                <a:ext uri="{FF2B5EF4-FFF2-40B4-BE49-F238E27FC236}">
-                  <a16:creationId xmlns:a16="http://schemas.microsoft.com/office/drawing/2014/main" id="{2E59A549-B86B-4597-2EF5-82C2E876CA45}"/>
-                </a:ext>
-              </a:extLst>
-            </p:cNvPr>
-            <p:cNvSpPr txBox="1"/>
-            <p:nvPr/>
-          </p:nvSpPr>
-          <p:spPr>
-            <a:xfrm>
-              <a:off x="10080404" y="1928790"/>
-              <a:ext cx="1572084" cy="369332"/>
-            </a:xfrm>
-            <a:prstGeom prst="rect">
-              <a:avLst/>
-            </a:prstGeom>
-            <a:noFill/>
-          </p:spPr>
-          <p:txBody>
-            <a:bodyPr wrap="square">
-              <a:spAutoFit/>
-            </a:bodyPr>
-            <a:lstStyle/>
-            <a:p>
-              <a:r>
-                <a:rPr lang="fr-FR"/>
-                <a:t>Très satisfait</a:t>
-              </a:r>
-            </a:p>
-          </p:txBody>
-        </p:sp>
-        <p:sp>
-          <p:nvSpPr>
-            <p:cNvPr id="7" name="ZoneTexte 6">
-              <a:extLst>
-                <a:ext uri="{FF2B5EF4-FFF2-40B4-BE49-F238E27FC236}">
-                  <a16:creationId xmlns:a16="http://schemas.microsoft.com/office/drawing/2014/main" id="{C298A53E-91D2-C7F7-90F5-83AD766A7D9F}"/>
-                </a:ext>
-              </a:extLst>
-            </p:cNvPr>
-            <p:cNvSpPr txBox="1"/>
-            <p:nvPr/>
-          </p:nvSpPr>
-          <p:spPr>
-            <a:xfrm>
-              <a:off x="10105396" y="2744700"/>
-              <a:ext cx="1176007" cy="369332"/>
-            </a:xfrm>
-            <a:prstGeom prst="rect">
-              <a:avLst/>
-            </a:prstGeom>
-            <a:noFill/>
-          </p:spPr>
-          <p:txBody>
-            <a:bodyPr wrap="square">
-              <a:spAutoFit/>
-            </a:bodyPr>
-            <a:lstStyle/>
-            <a:p>
-              <a:r>
-                <a:rPr lang="fr-FR"/>
-                <a:t>Satisfait</a:t>
-              </a:r>
-            </a:p>
-          </p:txBody>
-        </p:sp>
-        <p:sp>
-          <p:nvSpPr>
-            <p:cNvPr id="8" name="ZoneTexte 7">
-              <a:extLst>
-                <a:ext uri="{FF2B5EF4-FFF2-40B4-BE49-F238E27FC236}">
-                  <a16:creationId xmlns:a16="http://schemas.microsoft.com/office/drawing/2014/main" id="{9E59630A-50DF-6FE6-28F5-214EAA8F9F81}"/>
-                </a:ext>
-              </a:extLst>
-            </p:cNvPr>
-            <p:cNvSpPr txBox="1"/>
-            <p:nvPr/>
-          </p:nvSpPr>
-          <p:spPr>
-            <a:xfrm>
-              <a:off x="10132291" y="3642635"/>
-              <a:ext cx="1122218" cy="369332"/>
-            </a:xfrm>
-            <a:prstGeom prst="rect">
-              <a:avLst/>
-            </a:prstGeom>
-            <a:noFill/>
-          </p:spPr>
-          <p:txBody>
-            <a:bodyPr wrap="square">
-              <a:spAutoFit/>
-            </a:bodyPr>
-            <a:lstStyle/>
-            <a:p>
-              <a:r>
-                <a:rPr lang="fr-FR"/>
-                <a:t>Déçu</a:t>
-              </a:r>
-            </a:p>
-          </p:txBody>
-        </p:sp>
-        <p:sp>
-          <p:nvSpPr>
-            <p:cNvPr id="9" name="ZoneTexte 8">
-              <a:extLst>
-                <a:ext uri="{FF2B5EF4-FFF2-40B4-BE49-F238E27FC236}">
-                  <a16:creationId xmlns:a16="http://schemas.microsoft.com/office/drawing/2014/main" id="{C27267A7-C500-E3CB-F64F-C119584A9E48}"/>
-                </a:ext>
-              </a:extLst>
-            </p:cNvPr>
-            <p:cNvSpPr txBox="1"/>
-            <p:nvPr/>
-          </p:nvSpPr>
-          <p:spPr>
-            <a:xfrm>
-              <a:off x="10105396" y="4540570"/>
-              <a:ext cx="1303142" cy="369332"/>
-            </a:xfrm>
-            <a:prstGeom prst="rect">
-              <a:avLst/>
-            </a:prstGeom>
-            <a:noFill/>
-          </p:spPr>
-          <p:txBody>
-            <a:bodyPr wrap="square">
-              <a:spAutoFit/>
-            </a:bodyPr>
-            <a:lstStyle/>
-            <a:p>
-              <a:r>
-                <a:rPr lang="fr-FR" sz="1800" b="0" i="0" u="none" strike="noStrike">
-                  <a:solidFill>
-                    <a:srgbClr val="000000"/>
-                  </a:solidFill>
-                  <a:effectLst/>
-                  <a:latin typeface="Calibri" panose="020F0502020204030204" pitchFamily="34" charset="0"/>
-                </a:rPr>
-                <a:t>Très déçu</a:t>
-              </a:r>
-              <a:r>
-                <a:rPr lang="fr-FR"/>
-                <a:t> </a:t>
-              </a:r>
-            </a:p>
-          </p:txBody>
-        </p:sp>
-      </p:grpSp>
-      <p:graphicFrame>
-        <p:nvGraphicFramePr>
-          <p:cNvPr id="14" name="Graphique 13">
-            <a:extLst>
-              <a:ext uri="{FF2B5EF4-FFF2-40B4-BE49-F238E27FC236}">
-                <a16:creationId xmlns:a16="http://schemas.microsoft.com/office/drawing/2014/main" id="{F1996229-14EA-2686-47F3-BD7626C57716}"/>
-              </a:ext>
-            </a:extLst>
-          </p:cNvPr>
-          <p:cNvGraphicFramePr/>
-          <p:nvPr>
-            <p:extLst>
-              <p:ext uri="{D42A27DB-BD31-4B8C-83A1-F6EECF244321}">
-                <p14:modId xmlns:p14="http://schemas.microsoft.com/office/powerpoint/2010/main" val="211513403"/>
-              </p:ext>
-            </p:extLst>
-          </p:nvPr>
-        </p:nvGraphicFramePr>
-        <p:xfrm>
-          <a:off x="633234" y="871111"/>
-          <a:ext cx="8128000" cy="5418667"/>
-        </p:xfrm>
-        <a:graphic>
-          <a:graphicData uri="http://schemas.openxmlformats.org/drawingml/2006/chart">
-            <c:chart xmlns:c="http://schemas.openxmlformats.org/drawingml/2006/chart" xmlns:r="http://schemas.openxmlformats.org/officeDocument/2006/relationships" r:id="rId7"/>
-          </a:graphicData>
-        </a:graphic>
-      </p:graphicFrame>
-    </p:spTree>
-    <p:extLst>
-      <p:ext uri="{BB962C8B-B14F-4D97-AF65-F5344CB8AC3E}">
-        <p14:creationId xmlns:p14="http://schemas.microsoft.com/office/powerpoint/2010/main" val="1427594894"/>
-      </p:ext>
-    </p:extLst>
-  </p:cSld>
-  <p:clrMapOvr>
-    <a:masterClrMapping/>
-  </p:clrMapOvr>
-</p:sld>
-</file>
-
-<file path=ppt/slides/slide16.xml><?xml version="1.0" encoding="utf-8"?>
-<p:sld xmlns:a="http://schemas.openxmlformats.org/drawingml/2006/main" xmlns:r="http://schemas.openxmlformats.org/officeDocument/2006/relationships" xmlns:p="http://schemas.openxmlformats.org/presentationml/2006/main">
-  <p:cSld>
-    <p:spTree>
-      <p:nvGrpSpPr>
-        <p:cNvPr id="1" name=""/>
-        <p:cNvGrpSpPr/>
-        <p:nvPr/>
-      </p:nvGrpSpPr>
-      <p:grpSpPr>
-        <a:xfrm>
-          <a:off x="0" y="0"/>
-          <a:ext cx="0" cy="0"/>
-          <a:chOff x="0" y="0"/>
-          <a:chExt cx="0" cy="0"/>
-        </a:xfrm>
-      </p:grpSpPr>
-      <p:sp>
-        <p:nvSpPr>
-          <p:cNvPr id="3" name="Espace réservé du numéro de diapositive 2"/>
-          <p:cNvSpPr>
-            <a:spLocks noGrp="1"/>
-          </p:cNvSpPr>
-          <p:nvPr>
-            <p:ph type="sldNum" sz="quarter" idx="12"/>
-          </p:nvPr>
-        </p:nvSpPr>
-        <p:spPr>
-          <a:xfrm>
-            <a:off x="9271000" y="6207125"/>
-            <a:ext cx="2844800" cy="457200"/>
-          </a:xfrm>
-        </p:spPr>
-        <p:txBody>
-          <a:bodyPr wrap="square" anchor="t">
-            <a:normAutofit/>
-          </a:bodyPr>
-          <a:lstStyle/>
-          <a:p>
-            <a:pPr>
-              <a:spcAft>
-                <a:spcPts val="600"/>
-              </a:spcAft>
-              <a:defRPr/>
-            </a:pPr>
-            <a:fld id="{156ABF86-EFC2-454D-AD05-896C81F76FA1}" type="slidenum">
-              <a:rPr lang="fr-FR" smtClean="0"/>
-              <a:pPr>
-                <a:spcAft>
-                  <a:spcPts val="600"/>
-                </a:spcAft>
-                <a:defRPr/>
-              </a:pPr>
-              <a:t>16</a:t>
-            </a:fld>
-            <a:endParaRPr lang="fr-FR"/>
-          </a:p>
-        </p:txBody>
-      </p:sp>
-      <p:sp>
-        <p:nvSpPr>
-          <p:cNvPr id="2" name="ZoneTexte 1">
-            <a:extLst>
-              <a:ext uri="{FF2B5EF4-FFF2-40B4-BE49-F238E27FC236}">
-                <a16:creationId xmlns:a16="http://schemas.microsoft.com/office/drawing/2014/main" id="{069D2643-457B-A398-A97F-CA846A51C4B5}"/>
-              </a:ext>
-            </a:extLst>
-          </p:cNvPr>
-          <p:cNvSpPr txBox="1"/>
-          <p:nvPr/>
-        </p:nvSpPr>
-        <p:spPr>
-          <a:xfrm>
-            <a:off x="633234" y="120005"/>
-            <a:ext cx="10476482" cy="461665"/>
-          </a:xfrm>
-          <a:prstGeom prst="rect">
-            <a:avLst/>
-          </a:prstGeom>
-          <a:noFill/>
-        </p:spPr>
-        <p:txBody>
-          <a:bodyPr wrap="square" anchor="ctr">
-            <a:spAutoFit/>
-          </a:bodyPr>
-          <a:lstStyle>
-            <a:defPPr>
-              <a:defRPr lang="fr-FR"/>
-            </a:defPPr>
-            <a:lvl1pPr>
-              <a:defRPr sz="2400" b="1">
-                <a:effectLst>
-                  <a:outerShdw blurRad="38100" dist="38100" dir="2700000" algn="tl">
-                    <a:srgbClr val="000000">
-                      <a:alpha val="43137"/>
-                    </a:srgbClr>
-                  </a:outerShdw>
-                </a:effectLst>
-                <a:latin typeface="Calibri" panose="020F0502020204030204" pitchFamily="34" charset="0"/>
-                <a:ea typeface="Times New Roman" panose="02020603050405020304" pitchFamily="18" charset="0"/>
-              </a:defRPr>
-            </a:lvl1pPr>
-          </a:lstStyle>
-          <a:p>
-            <a:r>
-              <a:rPr lang="fr-FR" dirty="0">
-                <a:effectLst/>
-              </a:rPr>
-              <a:t>10. En conclusion, vous êtes :</a:t>
-            </a:r>
-          </a:p>
-        </p:txBody>
-      </p:sp>
-      <p:grpSp>
-        <p:nvGrpSpPr>
-          <p:cNvPr id="4" name="Groupe 3">
-            <a:extLst>
-              <a:ext uri="{FF2B5EF4-FFF2-40B4-BE49-F238E27FC236}">
-                <a16:creationId xmlns:a16="http://schemas.microsoft.com/office/drawing/2014/main" id="{00D88D20-D202-0E70-DBA8-03AC264E898A}"/>
-              </a:ext>
-            </a:extLst>
-          </p:cNvPr>
-          <p:cNvGrpSpPr/>
-          <p:nvPr/>
-        </p:nvGrpSpPr>
-        <p:grpSpPr>
-          <a:xfrm>
-            <a:off x="9232592" y="1876755"/>
-            <a:ext cx="2276869" cy="3104489"/>
-            <a:chOff x="9375619" y="1843456"/>
-            <a:chExt cx="2276869" cy="3104489"/>
-          </a:xfrm>
-        </p:grpSpPr>
-        <p:grpSp>
-          <p:nvGrpSpPr>
-            <p:cNvPr id="5" name="Groupe 4">
-              <a:extLst>
-                <a:ext uri="{FF2B5EF4-FFF2-40B4-BE49-F238E27FC236}">
-                  <a16:creationId xmlns:a16="http://schemas.microsoft.com/office/drawing/2014/main" id="{F572F1E4-F478-8C8A-667D-E5164ADEC650}"/>
-                </a:ext>
-              </a:extLst>
-            </p:cNvPr>
-            <p:cNvGrpSpPr/>
-            <p:nvPr/>
-          </p:nvGrpSpPr>
-          <p:grpSpPr>
-            <a:xfrm>
-              <a:off x="9375619" y="1843456"/>
-              <a:ext cx="576051" cy="3104489"/>
-              <a:chOff x="9424517" y="1534516"/>
-              <a:chExt cx="576051" cy="3104489"/>
-            </a:xfrm>
-          </p:grpSpPr>
-          <p:pic>
-            <p:nvPicPr>
-              <p:cNvPr id="10" name="Image 9">
-                <a:extLst>
-                  <a:ext uri="{FF2B5EF4-FFF2-40B4-BE49-F238E27FC236}">
-                    <a16:creationId xmlns:a16="http://schemas.microsoft.com/office/drawing/2014/main" id="{A1463705-43C1-1820-CB9A-140CC1198C4E}"/>
-                  </a:ext>
-                </a:extLst>
-              </p:cNvPr>
-              <p:cNvPicPr>
-                <a:picLocks noChangeAspect="1"/>
-              </p:cNvPicPr>
-              <p:nvPr/>
-            </p:nvPicPr>
-            <p:blipFill>
-              <a:blip r:embed="rId3"/>
-              <a:stretch>
-                <a:fillRect/>
-              </a:stretch>
-            </p:blipFill>
-            <p:spPr>
-              <a:xfrm>
-                <a:off x="9424517" y="1534516"/>
-                <a:ext cx="540000" cy="540000"/>
-              </a:xfrm>
-              <a:prstGeom prst="rect">
-                <a:avLst/>
-              </a:prstGeom>
-            </p:spPr>
-          </p:pic>
-          <p:pic>
-            <p:nvPicPr>
-              <p:cNvPr id="11" name="Image 10">
-                <a:extLst>
-                  <a:ext uri="{FF2B5EF4-FFF2-40B4-BE49-F238E27FC236}">
-                    <a16:creationId xmlns:a16="http://schemas.microsoft.com/office/drawing/2014/main" id="{095F630D-EF21-3364-0A76-4B2B6DE66873}"/>
-                  </a:ext>
-                </a:extLst>
-              </p:cNvPr>
-              <p:cNvPicPr>
-                <a:picLocks noChangeAspect="1"/>
-              </p:cNvPicPr>
-              <p:nvPr/>
-            </p:nvPicPr>
-            <p:blipFill>
-              <a:blip r:embed="rId4"/>
-              <a:stretch>
-                <a:fillRect/>
-              </a:stretch>
-            </p:blipFill>
-            <p:spPr>
-              <a:xfrm>
-                <a:off x="9476507" y="2350426"/>
-                <a:ext cx="488010" cy="540000"/>
-              </a:xfrm>
-              <a:prstGeom prst="rect">
-                <a:avLst/>
-              </a:prstGeom>
-            </p:spPr>
-          </p:pic>
-          <p:pic>
-            <p:nvPicPr>
-              <p:cNvPr id="12" name="Image 11">
-                <a:extLst>
-                  <a:ext uri="{FF2B5EF4-FFF2-40B4-BE49-F238E27FC236}">
-                    <a16:creationId xmlns:a16="http://schemas.microsoft.com/office/drawing/2014/main" id="{35D100A3-4BE1-8855-7F22-177BB8AE3C5D}"/>
-                  </a:ext>
-                </a:extLst>
-              </p:cNvPr>
-              <p:cNvPicPr>
-                <a:picLocks noChangeAspect="1"/>
-              </p:cNvPicPr>
-              <p:nvPr/>
-            </p:nvPicPr>
-            <p:blipFill>
-              <a:blip r:embed="rId5"/>
-              <a:stretch>
-                <a:fillRect/>
-              </a:stretch>
-            </p:blipFill>
-            <p:spPr>
-              <a:xfrm>
-                <a:off x="9449290" y="3238206"/>
-                <a:ext cx="490454" cy="468000"/>
-              </a:xfrm>
-              <a:prstGeom prst="rect">
-                <a:avLst/>
-              </a:prstGeom>
-            </p:spPr>
-          </p:pic>
-          <p:pic>
-            <p:nvPicPr>
-              <p:cNvPr id="13" name="Image 12">
-                <a:extLst>
-                  <a:ext uri="{FF2B5EF4-FFF2-40B4-BE49-F238E27FC236}">
-                    <a16:creationId xmlns:a16="http://schemas.microsoft.com/office/drawing/2014/main" id="{1339A59B-5599-295D-ABBD-822D95B4FADB}"/>
-                  </a:ext>
-                </a:extLst>
-              </p:cNvPr>
-              <p:cNvPicPr>
-                <a:picLocks noChangeAspect="1"/>
-              </p:cNvPicPr>
-              <p:nvPr/>
-            </p:nvPicPr>
-            <p:blipFill>
-              <a:blip r:embed="rId6"/>
-              <a:stretch>
-                <a:fillRect/>
-              </a:stretch>
-            </p:blipFill>
-            <p:spPr>
-              <a:xfrm>
-                <a:off x="9440455" y="4099005"/>
-                <a:ext cx="560113" cy="540000"/>
-              </a:xfrm>
-              <a:prstGeom prst="rect">
-                <a:avLst/>
-              </a:prstGeom>
-            </p:spPr>
-          </p:pic>
-        </p:grpSp>
-        <p:sp>
-          <p:nvSpPr>
-            <p:cNvPr id="6" name="ZoneTexte 5">
-              <a:extLst>
-                <a:ext uri="{FF2B5EF4-FFF2-40B4-BE49-F238E27FC236}">
-                  <a16:creationId xmlns:a16="http://schemas.microsoft.com/office/drawing/2014/main" id="{DCE2B25C-0E75-F773-32B5-22C34E1946BD}"/>
-                </a:ext>
-              </a:extLst>
-            </p:cNvPr>
-            <p:cNvSpPr txBox="1"/>
-            <p:nvPr/>
-          </p:nvSpPr>
-          <p:spPr>
-            <a:xfrm>
-              <a:off x="10080404" y="1928790"/>
-              <a:ext cx="1572084" cy="369332"/>
-            </a:xfrm>
-            <a:prstGeom prst="rect">
-              <a:avLst/>
-            </a:prstGeom>
-            <a:noFill/>
-          </p:spPr>
-          <p:txBody>
-            <a:bodyPr wrap="square">
-              <a:spAutoFit/>
-            </a:bodyPr>
-            <a:lstStyle/>
-            <a:p>
-              <a:r>
-                <a:rPr lang="fr-FR"/>
-                <a:t>Très satisfait</a:t>
-              </a:r>
-            </a:p>
-          </p:txBody>
-        </p:sp>
-        <p:sp>
-          <p:nvSpPr>
-            <p:cNvPr id="7" name="ZoneTexte 6">
-              <a:extLst>
-                <a:ext uri="{FF2B5EF4-FFF2-40B4-BE49-F238E27FC236}">
-                  <a16:creationId xmlns:a16="http://schemas.microsoft.com/office/drawing/2014/main" id="{940A942F-CDC8-EA5C-E3B4-8BEB6C750B99}"/>
-                </a:ext>
-              </a:extLst>
-            </p:cNvPr>
-            <p:cNvSpPr txBox="1"/>
-            <p:nvPr/>
-          </p:nvSpPr>
-          <p:spPr>
-            <a:xfrm>
-              <a:off x="10105396" y="2744700"/>
-              <a:ext cx="1176007" cy="369332"/>
-            </a:xfrm>
-            <a:prstGeom prst="rect">
-              <a:avLst/>
-            </a:prstGeom>
-            <a:noFill/>
-          </p:spPr>
-          <p:txBody>
-            <a:bodyPr wrap="square">
-              <a:spAutoFit/>
-            </a:bodyPr>
-            <a:lstStyle/>
-            <a:p>
-              <a:r>
-                <a:rPr lang="fr-FR"/>
-                <a:t>Satisfait</a:t>
-              </a:r>
-            </a:p>
-          </p:txBody>
-        </p:sp>
-        <p:sp>
-          <p:nvSpPr>
-            <p:cNvPr id="8" name="ZoneTexte 7">
-              <a:extLst>
-                <a:ext uri="{FF2B5EF4-FFF2-40B4-BE49-F238E27FC236}">
-                  <a16:creationId xmlns:a16="http://schemas.microsoft.com/office/drawing/2014/main" id="{C839FCEA-10B8-52F7-E97D-07DD7CBAF3EF}"/>
-                </a:ext>
-              </a:extLst>
-            </p:cNvPr>
-            <p:cNvSpPr txBox="1"/>
-            <p:nvPr/>
-          </p:nvSpPr>
-          <p:spPr>
-            <a:xfrm>
-              <a:off x="10132291" y="3642635"/>
-              <a:ext cx="1122218" cy="369332"/>
-            </a:xfrm>
-            <a:prstGeom prst="rect">
-              <a:avLst/>
-            </a:prstGeom>
-            <a:noFill/>
-          </p:spPr>
-          <p:txBody>
-            <a:bodyPr wrap="square">
-              <a:spAutoFit/>
-            </a:bodyPr>
-            <a:lstStyle/>
-            <a:p>
-              <a:r>
-                <a:rPr lang="fr-FR"/>
-                <a:t>Déçu</a:t>
-              </a:r>
-            </a:p>
-          </p:txBody>
-        </p:sp>
-        <p:sp>
-          <p:nvSpPr>
-            <p:cNvPr id="9" name="ZoneTexte 8">
-              <a:extLst>
-                <a:ext uri="{FF2B5EF4-FFF2-40B4-BE49-F238E27FC236}">
-                  <a16:creationId xmlns:a16="http://schemas.microsoft.com/office/drawing/2014/main" id="{7161C86A-2D40-0088-898B-6751600BB1EE}"/>
-                </a:ext>
-              </a:extLst>
-            </p:cNvPr>
-            <p:cNvSpPr txBox="1"/>
-            <p:nvPr/>
-          </p:nvSpPr>
-          <p:spPr>
-            <a:xfrm>
-              <a:off x="10105396" y="4540570"/>
-              <a:ext cx="1303142" cy="369332"/>
-            </a:xfrm>
-            <a:prstGeom prst="rect">
-              <a:avLst/>
-            </a:prstGeom>
-            <a:noFill/>
-          </p:spPr>
-          <p:txBody>
-            <a:bodyPr wrap="square">
-              <a:spAutoFit/>
-            </a:bodyPr>
-            <a:lstStyle/>
-            <a:p>
-              <a:r>
-                <a:rPr lang="fr-FR" sz="1800" b="0" i="0" u="none" strike="noStrike">
-                  <a:solidFill>
-                    <a:srgbClr val="000000"/>
-                  </a:solidFill>
-                  <a:effectLst/>
-                  <a:latin typeface="Calibri" panose="020F0502020204030204" pitchFamily="34" charset="0"/>
-                </a:rPr>
-                <a:t>Très déçu</a:t>
-              </a:r>
-              <a:r>
-                <a:rPr lang="fr-FR"/>
-                <a:t> </a:t>
-              </a:r>
-            </a:p>
-          </p:txBody>
-        </p:sp>
-      </p:grpSp>
-      <p:graphicFrame>
-        <p:nvGraphicFramePr>
-          <p:cNvPr id="14" name="Graphique 13">
-            <a:extLst>
-              <a:ext uri="{FF2B5EF4-FFF2-40B4-BE49-F238E27FC236}">
-                <a16:creationId xmlns:a16="http://schemas.microsoft.com/office/drawing/2014/main" id="{6598E90E-815A-E033-6250-B24265E78A4C}"/>
-              </a:ext>
-            </a:extLst>
-          </p:cNvPr>
-          <p:cNvGraphicFramePr/>
-          <p:nvPr>
-            <p:extLst>
-              <p:ext uri="{D42A27DB-BD31-4B8C-83A1-F6EECF244321}">
-                <p14:modId xmlns:p14="http://schemas.microsoft.com/office/powerpoint/2010/main" val="211513403"/>
-              </p:ext>
-            </p:extLst>
-          </p:nvPr>
-        </p:nvGraphicFramePr>
-        <p:xfrm>
-          <a:off x="633234" y="871111"/>
-          <a:ext cx="8128000" cy="5418667"/>
-        </p:xfrm>
-        <a:graphic>
-          <a:graphicData uri="http://schemas.openxmlformats.org/drawingml/2006/chart">
-            <c:chart xmlns:c="http://schemas.openxmlformats.org/drawingml/2006/chart" xmlns:r="http://schemas.openxmlformats.org/officeDocument/2006/relationships" r:id="rId7"/>
-          </a:graphicData>
-        </a:graphic>
-      </p:graphicFrame>
-    </p:spTree>
-    <p:extLst>
-      <p:ext uri="{BB962C8B-B14F-4D97-AF65-F5344CB8AC3E}">
-        <p14:creationId xmlns:p14="http://schemas.microsoft.com/office/powerpoint/2010/main" val="2635338137"/>
-      </p:ext>
-    </p:extLst>
-  </p:cSld>
-  <p:clrMapOvr>
-    <a:masterClrMapping/>
-  </p:clrMapOvr>
-</p:sld>
-</file>
-
-<file path=ppt/slides/slide17.xml><?xml version="1.0" encoding="utf-8"?>
-<p:sld xmlns:a="http://schemas.openxmlformats.org/drawingml/2006/main" xmlns:r="http://schemas.openxmlformats.org/officeDocument/2006/relationships" xmlns:p="http://schemas.openxmlformats.org/presentationml/2006/main">
-  <p:cSld>
-    <p:spTree>
-      <p:nvGrpSpPr>
-        <p:cNvPr id="1" name=""/>
-        <p:cNvGrpSpPr/>
-        <p:nvPr/>
-      </p:nvGrpSpPr>
-      <p:grpSpPr>
-        <a:xfrm>
-          <a:off x="0" y="0"/>
-          <a:ext cx="0" cy="0"/>
-          <a:chOff x="0" y="0"/>
-          <a:chExt cx="0" cy="0"/>
-        </a:xfrm>
-      </p:grpSpPr>
-      <p:sp>
-        <p:nvSpPr>
-          <p:cNvPr id="26626" name="Rectangle 2"/>
-          <p:cNvSpPr>
-            <a:spLocks noGrp="1" noChangeArrowheads="1"/>
-          </p:cNvSpPr>
-          <p:nvPr>
-            <p:ph type="title"/>
-          </p:nvPr>
-        </p:nvSpPr>
-        <p:spPr>
-          <a:xfrm>
-            <a:off x="623392" y="0"/>
-            <a:ext cx="10476544" cy="668338"/>
-          </a:xfrm>
-        </p:spPr>
-        <p:txBody>
-          <a:bodyPr anchor="ctr"/>
-          <a:lstStyle/>
-          <a:p>
-            <a:pPr eaLnBrk="1" hangingPunct="1">
-              <a:defRPr/>
-            </a:pPr>
-            <a:r>
-              <a:rPr lang="fr-FR" dirty="0"/>
-              <a:t>Vos remarques et suggestions : (ce que vous avez bien aimé / ou pas aimé…)</a:t>
-            </a:r>
-          </a:p>
-        </p:txBody>
-      </p:sp>
-      <p:sp>
-        <p:nvSpPr>
-          <p:cNvPr id="3" name="Espace réservé du numéro de diapositive 2"/>
-          <p:cNvSpPr>
-            <a:spLocks noGrp="1"/>
-          </p:cNvSpPr>
-          <p:nvPr>
-            <p:ph type="sldNum" sz="quarter" idx="12"/>
-          </p:nvPr>
-        </p:nvSpPr>
-        <p:spPr/>
-        <p:txBody>
-          <a:bodyPr/>
-          <a:lstStyle/>
-          <a:p>
-            <a:pPr>
-              <a:defRPr/>
-            </a:pPr>
-            <a:fld id="{9CB9D0F4-6BFF-4C0E-96D4-B15CA75DCB76}" type="slidenum">
-              <a:rPr lang="fr-FR" smtClean="0"/>
-              <a:pPr>
-                <a:defRPr/>
-              </a:pPr>
-              <a:t>17</a:t>
-            </a:fld>
-            <a:endParaRPr lang="fr-FR"/>
-          </a:p>
-        </p:txBody>
-      </p:sp>
-      <p:sp>
-        <p:nvSpPr>
-          <p:cNvPr id="2" name="ZoneTexte 1">
-            <a:extLst>
-              <a:ext uri="{FF2B5EF4-FFF2-40B4-BE49-F238E27FC236}">
-                <a16:creationId xmlns:a16="http://schemas.microsoft.com/office/drawing/2014/main" id="{811FD761-9C3A-4F6B-802E-35E3547E73E0}"/>
-              </a:ext>
-            </a:extLst>
-          </p:cNvPr>
-          <p:cNvSpPr txBox="1"/>
-          <p:nvPr/>
-        </p:nvSpPr>
-        <p:spPr>
-          <a:xfrm>
-            <a:off x="623392" y="713725"/>
-            <a:ext cx="10792753" cy="880369"/>
-          </a:xfrm>
-          <a:prstGeom prst="rect">
-            <a:avLst/>
-          </a:prstGeom>
-          <a:noFill/>
-        </p:spPr>
-        <p:txBody>
-          <a:bodyPr wrap="square" rtlCol="0">
-            <a:spAutoFit/>
-          </a:bodyPr>
-          <a:lstStyle/>
-          <a:p>
-            <a:pPr marL="285750" indent="-285750" algn="l">
-              <a:lnSpc>
-                <a:spcPct val="150000"/>
-              </a:lnSpc>
-              <a:buClr>
-                <a:srgbClr val="0070C0"/>
-              </a:buClr>
-              <a:buSzPct val="75000"/>
-              <a:buFont typeface="Wingdings" panose="05000000000000000000" pitchFamily="2" charset="2"/>
-              <a:buChar char="q"/>
-            </a:pPr>
-            <a:r>
-              <a:rPr lang="fr-FR" b="1" dirty="0">
-                <a:solidFill>
-                  <a:srgbClr val="202124"/>
-                </a:solidFill>
-              </a:rPr>
-              <a:t>Wassila </a:t>
-            </a:r>
-            <a:r>
-              <a:rPr lang="fr-FR" dirty="0">
-                <a:solidFill>
-                  <a:srgbClr val="202124"/>
-                </a:solidFill>
-              </a:rPr>
-              <a:t>: « J’ai bien aimé l’ambiance j’ai appris beaucoup de choses pour le CVS ça m’a bien aidé ».</a:t>
-            </a:r>
-          </a:p>
-          <a:p>
-            <a:pPr marL="285750" indent="-285750" algn="l">
-              <a:lnSpc>
-                <a:spcPct val="150000"/>
-              </a:lnSpc>
-              <a:buClr>
-                <a:srgbClr val="0070C0"/>
-              </a:buClr>
-              <a:buSzPct val="75000"/>
-              <a:buFont typeface="Wingdings" panose="05000000000000000000" pitchFamily="2" charset="2"/>
-              <a:buChar char="q"/>
-            </a:pPr>
-            <a:r>
-              <a:rPr lang="fr-FR" b="1" dirty="0">
-                <a:solidFill>
-                  <a:srgbClr val="202124"/>
-                </a:solidFill>
-              </a:rPr>
-              <a:t>Patricia</a:t>
-            </a:r>
-            <a:r>
-              <a:rPr lang="fr-FR" dirty="0">
-                <a:solidFill>
-                  <a:srgbClr val="202124"/>
-                </a:solidFill>
-              </a:rPr>
-              <a:t> : « Tous aimé ».</a:t>
-            </a:r>
-          </a:p>
-        </p:txBody>
-      </p:sp>
-    </p:spTree>
-    <p:extLst>
-      <p:ext uri="{BB962C8B-B14F-4D97-AF65-F5344CB8AC3E}">
-        <p14:creationId xmlns:p14="http://schemas.microsoft.com/office/powerpoint/2010/main" val="300758645"/>
-      </p:ext>
-    </p:extLst>
-  </p:cSld>
-  <p:clrMapOvr>
-    <a:masterClrMapping/>
-  </p:clrMapOvr>
-</p:sld>
-</file>
-
-<file path=ppt/slides/slide18.xml><?xml version="1.0" encoding="utf-8"?>
-<p:sld xmlns:a="http://schemas.openxmlformats.org/drawingml/2006/main" xmlns:r="http://schemas.openxmlformats.org/officeDocument/2006/relationships" xmlns:p="http://schemas.openxmlformats.org/presentationml/2006/main">
-  <p:cSld>
-    <p:spTree>
-      <p:nvGrpSpPr>
-        <p:cNvPr id="1" name=""/>
-        <p:cNvGrpSpPr/>
-        <p:nvPr/>
-      </p:nvGrpSpPr>
-      <p:grpSpPr>
-        <a:xfrm>
-          <a:off x="0" y="0"/>
-          <a:ext cx="0" cy="0"/>
-          <a:chOff x="0" y="0"/>
-          <a:chExt cx="0" cy="0"/>
-        </a:xfrm>
-      </p:grpSpPr>
-      <p:sp>
-        <p:nvSpPr>
-          <p:cNvPr id="26626" name="Rectangle 2"/>
-          <p:cNvSpPr>
-            <a:spLocks noGrp="1" noChangeArrowheads="1"/>
-          </p:cNvSpPr>
-          <p:nvPr>
-            <p:ph type="title"/>
-          </p:nvPr>
-        </p:nvSpPr>
-        <p:spPr>
-          <a:xfrm>
-            <a:off x="623392" y="0"/>
-            <a:ext cx="10476544" cy="684000"/>
-          </a:xfrm>
-        </p:spPr>
-        <p:txBody>
-          <a:bodyPr anchor="ctr"/>
-          <a:lstStyle/>
-          <a:p>
-            <a:pPr eaLnBrk="1" hangingPunct="1">
-              <a:defRPr/>
-            </a:pPr>
-            <a:r>
-              <a:rPr lang="fr-FR" dirty="0"/>
-              <a:t>Vos souhaits pour d’autres formations :</a:t>
-            </a:r>
-          </a:p>
-        </p:txBody>
-      </p:sp>
-      <p:sp>
-        <p:nvSpPr>
-          <p:cNvPr id="3" name="Espace réservé du numéro de diapositive 2"/>
-          <p:cNvSpPr>
-            <a:spLocks noGrp="1"/>
-          </p:cNvSpPr>
-          <p:nvPr>
-            <p:ph type="sldNum" sz="quarter" idx="12"/>
-          </p:nvPr>
-        </p:nvSpPr>
-        <p:spPr/>
-        <p:txBody>
-          <a:bodyPr/>
-          <a:lstStyle/>
-          <a:p>
-            <a:pPr>
-              <a:defRPr/>
-            </a:pPr>
-            <a:fld id="{9CB9D0F4-6BFF-4C0E-96D4-B15CA75DCB76}" type="slidenum">
-              <a:rPr lang="fr-FR" smtClean="0"/>
-              <a:pPr>
-                <a:defRPr/>
-              </a:pPr>
-              <a:t>18</a:t>
-            </a:fld>
-            <a:endParaRPr lang="fr-FR"/>
-          </a:p>
-        </p:txBody>
-      </p:sp>
-      <p:sp>
-        <p:nvSpPr>
-          <p:cNvPr id="2" name="ZoneTexte 1">
-            <a:extLst>
-              <a:ext uri="{FF2B5EF4-FFF2-40B4-BE49-F238E27FC236}">
-                <a16:creationId xmlns:a16="http://schemas.microsoft.com/office/drawing/2014/main" id="{811FD761-9C3A-4F6B-802E-35E3547E73E0}"/>
-              </a:ext>
-            </a:extLst>
-          </p:cNvPr>
-          <p:cNvSpPr txBox="1"/>
-          <p:nvPr/>
-        </p:nvSpPr>
-        <p:spPr>
-          <a:xfrm>
-            <a:off x="623392" y="684000"/>
-            <a:ext cx="10792753" cy="464871"/>
-          </a:xfrm>
-          <a:prstGeom prst="rect">
-            <a:avLst/>
-          </a:prstGeom>
-          <a:noFill/>
-        </p:spPr>
-        <p:txBody>
-          <a:bodyPr wrap="square" rtlCol="0">
-            <a:spAutoFit/>
-          </a:bodyPr>
-          <a:lstStyle/>
-          <a:p>
-            <a:pPr marL="285750" indent="-285750" algn="l">
-              <a:lnSpc>
-                <a:spcPct val="150000"/>
-              </a:lnSpc>
-              <a:buClr>
-                <a:srgbClr val="0070C0"/>
-              </a:buClr>
-              <a:buSzPct val="75000"/>
-              <a:buFont typeface="Wingdings" panose="05000000000000000000" pitchFamily="2" charset="2"/>
-              <a:buChar char="q"/>
-            </a:pPr>
-            <a:r>
-              <a:rPr lang="fr-FR" b="0">
-                <a:solidFill>
-                  <a:srgbClr val="202124"/>
-                </a:solidFill>
-                <a:effectLst/>
-              </a:rPr>
-              <a:t>RAS</a:t>
-            </a:r>
-            <a:endParaRPr lang="fr-FR" b="0" dirty="0">
-              <a:solidFill>
-                <a:srgbClr val="202124"/>
-              </a:solidFill>
-              <a:effectLst/>
-            </a:endParaRPr>
-          </a:p>
-        </p:txBody>
-      </p:sp>
-    </p:spTree>
-    <p:extLst>
-      <p:ext uri="{BB962C8B-B14F-4D97-AF65-F5344CB8AC3E}">
-        <p14:creationId xmlns:p14="http://schemas.microsoft.com/office/powerpoint/2010/main" val="2114042816"/>
-      </p:ext>
-    </p:extLst>
-  </p:cSld>
-  <p:clrMapOvr>
-    <a:masterClrMapping/>
-  </p:clrMapOvr>
-</p:sld>
-</file>
-
-<file path=ppt/slides/slide4.xml><?xml version="1.0" encoding="utf-8"?>
-<p:sld xmlns:a="http://schemas.openxmlformats.org/drawingml/2006/main" xmlns:r="http://schemas.openxmlformats.org/officeDocument/2006/relationships" xmlns:p="http://schemas.openxmlformats.org/presentationml/2006/main">
-  <p:cSld>
-    <p:spTree>
-      <p:nvGrpSpPr>
-        <p:cNvPr id="1" name=""/>
-        <p:cNvGrpSpPr/>
-        <p:nvPr/>
-      </p:nvGrpSpPr>
-      <p:grpSpPr>
-        <a:xfrm>
-          <a:off x="0" y="0"/>
-          <a:ext cx="0" cy="0"/>
-          <a:chOff x="0" y="0"/>
-          <a:chExt cx="0" cy="0"/>
-        </a:xfrm>
-      </p:grpSpPr>
-      <p:sp>
-        <p:nvSpPr>
-          <p:cNvPr id="18434" name="Rectangle 2"/>
-          <p:cNvSpPr>
-            <a:spLocks noGrp="1" noChangeArrowheads="1"/>
-          </p:cNvSpPr>
-          <p:nvPr>
-            <p:ph type="title"/>
-          </p:nvPr>
-        </p:nvSpPr>
-        <p:spPr>
-          <a:xfrm>
-            <a:off x="640852" y="20320"/>
-            <a:ext cx="10711731" cy="668338"/>
-          </a:xfrm>
-        </p:spPr>
-        <p:txBody>
-          <a:bodyPr anchor="ctr"/>
-          <a:lstStyle/>
-          <a:p>
-            <a:pPr eaLnBrk="1" hangingPunct="1">
-              <a:defRPr/>
-            </a:pPr>
-            <a:r>
-              <a:rPr lang="fr-FR" dirty="0">
-                <a:solidFill>
-                  <a:schemeClr val="tx1"/>
-                </a:solidFill>
-                <a:effectLst/>
-              </a:rPr>
-              <a:t>Evaluation de la formation</a:t>
-            </a:r>
-          </a:p>
-        </p:txBody>
-      </p:sp>
-      <p:sp>
-        <p:nvSpPr>
-          <p:cNvPr id="56323" name="Rectangle 3"/>
-          <p:cNvSpPr>
-            <a:spLocks noGrp="1" noChangeArrowheads="1"/>
-          </p:cNvSpPr>
-          <p:nvPr>
-            <p:ph idx="1"/>
-          </p:nvPr>
-        </p:nvSpPr>
-        <p:spPr>
-          <a:xfrm>
-            <a:off x="640854" y="836712"/>
-            <a:ext cx="10711730" cy="4776689"/>
-          </a:xfrm>
-        </p:spPr>
-        <p:txBody>
-          <a:bodyPr/>
-          <a:lstStyle/>
-          <a:p>
-            <a:pPr marL="0" indent="355600" algn="just" eaLnBrk="1" hangingPunct="1">
-              <a:lnSpc>
-                <a:spcPct val="80000"/>
-              </a:lnSpc>
-              <a:buClr>
-                <a:srgbClr val="0070C0"/>
-              </a:buClr>
-            </a:pPr>
-            <a:r>
-              <a:rPr lang="fr-FR" sz="1600" dirty="0"/>
-              <a:t>L'évaluation de l'efficacité de l’action de formation se déclinera en trois dimensions complémentaires et hiérarchisées, appelant chacune des méthodologies différentes, et présentant chacune des difficultés spécifiques.</a:t>
-            </a:r>
-          </a:p>
-          <a:p>
-            <a:pPr marL="0" indent="355600" algn="just" eaLnBrk="1" hangingPunct="1">
-              <a:lnSpc>
-                <a:spcPct val="80000"/>
-              </a:lnSpc>
-              <a:buClr>
-                <a:srgbClr val="0070C0"/>
-              </a:buClr>
-            </a:pPr>
-            <a:endParaRPr lang="fr-FR" sz="1600" dirty="0"/>
-          </a:p>
-          <a:p>
-            <a:pPr marL="0" indent="355600" algn="just" eaLnBrk="1" hangingPunct="1">
-              <a:lnSpc>
-                <a:spcPct val="80000"/>
-              </a:lnSpc>
-              <a:buClr>
-                <a:srgbClr val="0070C0"/>
-              </a:buClr>
-            </a:pPr>
-            <a:r>
-              <a:rPr lang="fr-FR" sz="1600" dirty="0"/>
-              <a:t>Le premier niveau  concerne l'évaluation des acquis, ou encore l'efficacité pédagogique : est-ce que les objectifs ont été atteints ? En d'autres termes, " les participants ont-ils acquis à la fin de la formation les compétences qui étaient visées par les objectifs de formation ? ".</a:t>
-            </a:r>
-          </a:p>
-          <a:p>
-            <a:pPr marL="0" indent="355600" algn="just" eaLnBrk="1" hangingPunct="1">
-              <a:lnSpc>
-                <a:spcPct val="80000"/>
-              </a:lnSpc>
-              <a:buClr>
-                <a:srgbClr val="0070C0"/>
-              </a:buClr>
-            </a:pPr>
-            <a:endParaRPr lang="fr-FR" sz="1600" dirty="0"/>
-          </a:p>
-          <a:p>
-            <a:pPr marL="0" indent="355600" algn="just" eaLnBrk="1" hangingPunct="1">
-              <a:lnSpc>
-                <a:spcPct val="80000"/>
-              </a:lnSpc>
-              <a:buClr>
-                <a:srgbClr val="0070C0"/>
-              </a:buClr>
-            </a:pPr>
-            <a:r>
-              <a:rPr lang="fr-FR" sz="1600" dirty="0"/>
-              <a:t>Le deuxième niveau concerne le transfert : est-ce que les acquis de la formation sont appliqués sur le terrain ? En d'autres termes, " les participants, une fois revenus sur leur poste de travail, pensent-ils pouvoir mettre en œuvre les compétences acquises lors de la formation ? ".</a:t>
-            </a:r>
-          </a:p>
-          <a:p>
-            <a:pPr marL="0" indent="355600" algn="just" eaLnBrk="1" hangingPunct="1">
-              <a:lnSpc>
-                <a:spcPct val="80000"/>
-              </a:lnSpc>
-              <a:buClr>
-                <a:srgbClr val="0070C0"/>
-              </a:buClr>
-            </a:pPr>
-            <a:endParaRPr lang="fr-FR" sz="1600" dirty="0"/>
-          </a:p>
-          <a:p>
-            <a:pPr marL="0" indent="355600" algn="just" eaLnBrk="1" hangingPunct="1">
-              <a:lnSpc>
-                <a:spcPct val="80000"/>
-              </a:lnSpc>
-              <a:buClr>
-                <a:srgbClr val="0070C0"/>
-              </a:buClr>
-            </a:pPr>
-            <a:r>
-              <a:rPr lang="fr-FR" sz="1600" dirty="0"/>
-              <a:t>Le troisième niveau concerne l'impact de la formation : est-ce que les acquis de la formation permettent d'atteindre certains résultats sur le terrain ? En d'autres termes, " les nouvelles compétences des participants permettent-elles de faire évoluer l'organisation ? ".</a:t>
-            </a:r>
-          </a:p>
-          <a:p>
-            <a:pPr marL="0" indent="355600" algn="just" eaLnBrk="1" hangingPunct="1">
-              <a:lnSpc>
-                <a:spcPct val="80000"/>
-              </a:lnSpc>
-              <a:buClr>
-                <a:srgbClr val="0070C0"/>
-              </a:buClr>
-            </a:pPr>
-            <a:endParaRPr lang="fr-FR" sz="1600" dirty="0"/>
-          </a:p>
-          <a:p>
-            <a:pPr marL="0" indent="355600" eaLnBrk="1" hangingPunct="1">
-              <a:lnSpc>
-                <a:spcPct val="80000"/>
-              </a:lnSpc>
-              <a:buClr>
-                <a:srgbClr val="0070C0"/>
-              </a:buClr>
-            </a:pPr>
-            <a:r>
-              <a:rPr lang="fr-FR" sz="1600" dirty="0"/>
-              <a:t>Nous évaluerons également le processus de formation, qui est indispensable si on souhaite interpréter en profondeur les éventuelles difficultés rencontrées et apporter les améliorations nécessaires.</a:t>
-            </a:r>
-            <a:br>
-              <a:rPr lang="fr-FR" sz="1600" dirty="0"/>
-            </a:br>
-            <a:endParaRPr lang="fr-FR" sz="1600" dirty="0"/>
-          </a:p>
-        </p:txBody>
-      </p:sp>
-      <p:pic>
-        <p:nvPicPr>
-          <p:cNvPr id="56324" name="Picture 4" descr="Fotolia_10083216_XS"/>
-          <p:cNvPicPr>
-            <a:picLocks noChangeAspect="1" noChangeArrowheads="1"/>
-          </p:cNvPicPr>
-          <p:nvPr/>
-        </p:nvPicPr>
-        <p:blipFill>
-          <a:blip r:embed="rId3">
-            <a:extLst>
-              <a:ext uri="{28A0092B-C50C-407E-A947-70E740481C1C}">
-                <a14:useLocalDpi xmlns:a14="http://schemas.microsoft.com/office/drawing/2010/main" val="0"/>
-              </a:ext>
-            </a:extLst>
-          </a:blip>
-          <a:srcRect/>
-          <a:stretch>
-            <a:fillRect/>
-          </a:stretch>
-        </p:blipFill>
-        <p:spPr bwMode="auto">
-          <a:xfrm>
-            <a:off x="4094164" y="5500688"/>
-            <a:ext cx="1455737" cy="1092200"/>
-          </a:xfrm>
-          <a:prstGeom prst="rect">
-            <a:avLst/>
-          </a:prstGeom>
-          <a:noFill/>
-          <a:ln>
-            <a:noFill/>
-          </a:ln>
-          <a:extLst>
-            <a:ext uri="{909E8E84-426E-40DD-AFC4-6F175D3DCCD1}">
-              <a14:hiddenFill xmlns:a14="http://schemas.microsoft.com/office/drawing/2010/main">
-                <a:solidFill>
-                  <a:srgbClr val="FFFFFF"/>
-                </a:solidFill>
-              </a14:hiddenFill>
-            </a:ext>
-            <a:ext uri="{91240B29-F687-4F45-9708-019B960494DF}">
-              <a14:hiddenLine xmlns:a14="http://schemas.microsoft.com/office/drawing/2010/main" w="9525">
-                <a:solidFill>
-                  <a:srgbClr val="000000"/>
-                </a:solidFill>
-                <a:miter lim="800000"/>
-                <a:headEnd/>
-                <a:tailEnd/>
-              </a14:hiddenLine>
-            </a:ext>
-          </a:extLst>
-        </p:spPr>
-      </p:pic>
-      <p:sp>
-        <p:nvSpPr>
-          <p:cNvPr id="2" name="Espace réservé du numéro de diapositive 1"/>
-          <p:cNvSpPr>
-            <a:spLocks noGrp="1"/>
-          </p:cNvSpPr>
-          <p:nvPr>
-            <p:ph type="sldNum" sz="quarter" idx="12"/>
-          </p:nvPr>
-        </p:nvSpPr>
-        <p:spPr/>
-        <p:txBody>
-          <a:bodyPr/>
-          <a:lstStyle/>
-          <a:p>
-            <a:pPr>
-              <a:defRPr/>
-            </a:pPr>
-            <a:fld id="{C16EBFAD-7D7E-4EEE-8122-1782B4EC52E1}" type="slidenum">
-              <a:rPr lang="fr-FR" smtClean="0"/>
-              <a:pPr>
-                <a:defRPr/>
-              </a:pPr>
-              <a:t>4</a:t>
-            </a:fld>
-            <a:endParaRPr lang="fr-FR"/>
-          </a:p>
-        </p:txBody>
-      </p:sp>
-    </p:spTree>
-    <p:extLst>
-      <p:ext uri="{BB962C8B-B14F-4D97-AF65-F5344CB8AC3E}">
-        <p14:creationId xmlns:p14="http://schemas.microsoft.com/office/powerpoint/2010/main" val="753976613"/>
-      </p:ext>
-    </p:extLst>
-  </p:cSld>
-  <p:clrMapOvr>
-    <a:masterClrMapping/>
-  </p:clrMapOvr>
-</p:sld>
-</file>
-
-<file path=ppt/slides/slide5.xml><?xml version="1.0" encoding="utf-8"?>
-<p:sld xmlns:a="http://schemas.openxmlformats.org/drawingml/2006/main" xmlns:r="http://schemas.openxmlformats.org/officeDocument/2006/relationships" xmlns:p="http://schemas.openxmlformats.org/presentationml/2006/main">
-  <p:cSld>
-    <p:spTree>
-      <p:nvGrpSpPr>
-        <p:cNvPr id="1" name=""/>
-        <p:cNvGrpSpPr/>
-        <p:nvPr/>
-      </p:nvGrpSpPr>
-      <p:grpSpPr>
-        <a:xfrm>
-          <a:off x="0" y="0"/>
-          <a:ext cx="0" cy="0"/>
-          <a:chOff x="0" y="0"/>
-          <a:chExt cx="0" cy="0"/>
-        </a:xfrm>
-      </p:grpSpPr>
-      <p:sp>
-        <p:nvSpPr>
-          <p:cNvPr id="4" name="ZoneTexte 3"/>
-          <p:cNvSpPr txBox="1"/>
-          <p:nvPr/>
-        </p:nvSpPr>
-        <p:spPr>
-          <a:xfrm>
-            <a:off x="623392" y="0"/>
-            <a:ext cx="8226921" cy="652463"/>
-          </a:xfrm>
-          <a:prstGeom prst="rect">
-            <a:avLst/>
-          </a:prstGeom>
-          <a:noFill/>
-          <a:ln>
-            <a:noFill/>
-          </a:ln>
-          <a:effectLst/>
-          <a:extLst>
-            <a:ext uri="{909E8E84-426E-40DD-AFC4-6F175D3DCCD1}">
-              <a14:hiddenFill xmlns:a14="http://schemas.microsoft.com/office/drawing/2010/main">
-                <a:solidFill>
-                  <a:schemeClr val="accent1"/>
-                </a:solidFill>
-              </a14:hiddenFill>
-            </a:ext>
-            <a:ext uri="{91240B29-F687-4F45-9708-019B960494DF}">
-              <a14:hiddenLine xmlns:a14="http://schemas.microsoft.com/office/drawing/2010/main" w="9525">
-                <a:solidFill>
-                  <a:schemeClr val="tx1"/>
-                </a:solidFill>
-                <a:miter lim="800000"/>
-                <a:headEnd/>
-                <a:tailEnd/>
-              </a14:hiddenLine>
-            </a:ext>
-            <a:ext uri="{AF507438-7753-43E0-B8FC-AC1667EBCBE1}">
-              <a14:hiddenEffects xmlns:a14="http://schemas.microsoft.com/office/drawing/2010/main">
-                <a:effectLst>
-                  <a:outerShdw dist="35921" dir="2700000" algn="ctr" rotWithShape="0">
-                    <a:schemeClr val="bg2"/>
-                  </a:outerShdw>
-                </a:effectLst>
-              </a14:hiddenEffects>
-            </a:ext>
-          </a:extLst>
-        </p:spPr>
-        <p:txBody>
-          <a:bodyPr vert="horz" wrap="square" lIns="91440" tIns="45720" rIns="91440" bIns="45720" numCol="1" anchor="ctr" anchorCtr="0" compatLnSpc="1">
-            <a:prstTxWarp prst="textNoShape">
-              <a:avLst/>
-            </a:prstTxWarp>
-          </a:bodyPr>
-          <a:lstStyle>
-            <a:lvl1pPr fontAlgn="base">
-              <a:spcBef>
-                <a:spcPct val="0"/>
-              </a:spcBef>
-              <a:spcAft>
-                <a:spcPct val="0"/>
-              </a:spcAft>
-              <a:defRPr sz="2400" b="1">
-                <a:solidFill>
-                  <a:srgbClr val="FF6600"/>
-                </a:solidFill>
-                <a:effectLst>
-                  <a:outerShdw blurRad="38100" dist="38100" dir="2700000" algn="tl">
-                    <a:srgbClr val="000000">
-                      <a:alpha val="43137"/>
-                    </a:srgbClr>
-                  </a:outerShdw>
-                </a:effectLst>
-                <a:latin typeface="+mj-lt"/>
-                <a:ea typeface="+mj-ea"/>
-                <a:cs typeface="+mj-cs"/>
-              </a:defRPr>
-            </a:lvl1pPr>
-            <a:lvl2pPr eaLnBrk="0" fontAlgn="base" hangingPunct="0">
-              <a:spcBef>
-                <a:spcPct val="0"/>
-              </a:spcBef>
-              <a:spcAft>
-                <a:spcPct val="0"/>
-              </a:spcAft>
-              <a:defRPr sz="2400" b="1">
-                <a:latin typeface="Calibri" pitchFamily="34" charset="0"/>
-                <a:cs typeface="Arial" charset="0"/>
-              </a:defRPr>
-            </a:lvl2pPr>
-            <a:lvl3pPr eaLnBrk="0" fontAlgn="base" hangingPunct="0">
-              <a:spcBef>
-                <a:spcPct val="0"/>
-              </a:spcBef>
-              <a:spcAft>
-                <a:spcPct val="0"/>
-              </a:spcAft>
-              <a:defRPr sz="2400" b="1">
-                <a:latin typeface="Calibri" pitchFamily="34" charset="0"/>
-                <a:cs typeface="Arial" charset="0"/>
-              </a:defRPr>
-            </a:lvl3pPr>
-            <a:lvl4pPr eaLnBrk="0" fontAlgn="base" hangingPunct="0">
-              <a:spcBef>
-                <a:spcPct val="0"/>
-              </a:spcBef>
-              <a:spcAft>
-                <a:spcPct val="0"/>
-              </a:spcAft>
-              <a:defRPr sz="2400" b="1">
-                <a:latin typeface="Calibri" pitchFamily="34" charset="0"/>
-                <a:cs typeface="Arial" charset="0"/>
-              </a:defRPr>
-            </a:lvl4pPr>
-            <a:lvl5pPr eaLnBrk="0" fontAlgn="base" hangingPunct="0">
-              <a:spcBef>
-                <a:spcPct val="0"/>
-              </a:spcBef>
-              <a:spcAft>
-                <a:spcPct val="0"/>
-              </a:spcAft>
-              <a:defRPr sz="2400" b="1">
-                <a:latin typeface="Calibri" pitchFamily="34" charset="0"/>
-                <a:cs typeface="Arial" charset="0"/>
-              </a:defRPr>
-            </a:lvl5pPr>
-            <a:lvl6pPr marL="457200" fontAlgn="base">
-              <a:spcBef>
-                <a:spcPct val="0"/>
-              </a:spcBef>
-              <a:spcAft>
-                <a:spcPct val="0"/>
-              </a:spcAft>
-              <a:defRPr sz="3200">
-                <a:solidFill>
-                  <a:srgbClr val="FF6600"/>
-                </a:solidFill>
-                <a:latin typeface="Calibri" pitchFamily="34" charset="0"/>
-                <a:cs typeface="Arial" charset="0"/>
-              </a:defRPr>
-            </a:lvl6pPr>
-            <a:lvl7pPr marL="914400" fontAlgn="base">
-              <a:spcBef>
-                <a:spcPct val="0"/>
-              </a:spcBef>
-              <a:spcAft>
-                <a:spcPct val="0"/>
-              </a:spcAft>
-              <a:defRPr sz="3200">
-                <a:solidFill>
-                  <a:srgbClr val="FF6600"/>
-                </a:solidFill>
-                <a:latin typeface="Calibri" pitchFamily="34" charset="0"/>
-                <a:cs typeface="Arial" charset="0"/>
-              </a:defRPr>
-            </a:lvl7pPr>
-            <a:lvl8pPr marL="1371600" fontAlgn="base">
-              <a:spcBef>
-                <a:spcPct val="0"/>
-              </a:spcBef>
-              <a:spcAft>
-                <a:spcPct val="0"/>
-              </a:spcAft>
-              <a:defRPr sz="3200">
-                <a:solidFill>
-                  <a:srgbClr val="FF6600"/>
-                </a:solidFill>
-                <a:latin typeface="Calibri" pitchFamily="34" charset="0"/>
-                <a:cs typeface="Arial" charset="0"/>
-              </a:defRPr>
-            </a:lvl8pPr>
-            <a:lvl9pPr marL="1828800" fontAlgn="base">
-              <a:spcBef>
-                <a:spcPct val="0"/>
-              </a:spcBef>
-              <a:spcAft>
-                <a:spcPct val="0"/>
-              </a:spcAft>
-              <a:defRPr sz="3200">
-                <a:solidFill>
-                  <a:srgbClr val="FF6600"/>
-                </a:solidFill>
-                <a:latin typeface="Calibri" pitchFamily="34" charset="0"/>
-                <a:cs typeface="Arial" charset="0"/>
-              </a:defRPr>
-            </a:lvl9pPr>
-          </a:lstStyle>
-          <a:p>
-            <a:r>
-              <a:rPr lang="fr-FR" dirty="0">
-                <a:solidFill>
-                  <a:schemeClr val="tx1"/>
-                </a:solidFill>
-                <a:effectLst/>
-              </a:rPr>
-              <a:t>Les questions de la fiche d’évaluation pour mémoire</a:t>
-            </a:r>
-          </a:p>
-        </p:txBody>
-      </p:sp>
-      <p:sp>
-        <p:nvSpPr>
-          <p:cNvPr id="2" name="Espace réservé du numéro de diapositive 1"/>
-          <p:cNvSpPr>
-            <a:spLocks noGrp="1"/>
-          </p:cNvSpPr>
-          <p:nvPr>
-            <p:ph type="sldNum" sz="quarter" idx="12"/>
-          </p:nvPr>
-        </p:nvSpPr>
-        <p:spPr/>
-        <p:txBody>
-          <a:bodyPr/>
-          <a:lstStyle/>
-          <a:p>
-            <a:pPr marL="0" marR="0" lvl="0" indent="0" algn="r" defTabSz="914400" rtl="0" eaLnBrk="1" fontAlgn="auto" latinLnBrk="0" hangingPunct="1">
-              <a:lnSpc>
-                <a:spcPct val="100000"/>
-              </a:lnSpc>
-              <a:spcBef>
-                <a:spcPts val="0"/>
-              </a:spcBef>
-              <a:spcAft>
-                <a:spcPts val="0"/>
-              </a:spcAft>
-              <a:buClrTx/>
-              <a:buSzTx/>
-              <a:buFontTx/>
-              <a:buNone/>
-              <a:tabLst/>
-              <a:defRPr/>
-            </a:pPr>
-            <a:fld id="{C16EBFAD-7D7E-4EEE-8122-1782B4EC52E1}" type="slidenum">
-              <a:rPr kumimoji="0" lang="fr-FR" sz="1000" b="0" i="0" u="none" strike="noStrike" kern="1200" cap="none" spc="0" normalizeH="0" baseline="0" noProof="0" smtClean="0">
-                <a:ln>
-                  <a:noFill/>
-                </a:ln>
-                <a:solidFill>
-                  <a:srgbClr val="000000"/>
-                </a:solidFill>
-                <a:effectLst/>
-                <a:uLnTx/>
-                <a:uFillTx/>
-                <a:latin typeface="Verdana" pitchFamily="34" charset="0"/>
-                <a:ea typeface="+mn-ea"/>
-                <a:cs typeface="Arial" charset="0"/>
-              </a:rPr>
-              <a:pPr marL="0" marR="0" lvl="0" indent="0" algn="r" defTabSz="914400" rtl="0" eaLnBrk="1" fontAlgn="auto" latinLnBrk="0" hangingPunct="1">
-                <a:lnSpc>
-                  <a:spcPct val="100000"/>
-                </a:lnSpc>
-                <a:spcBef>
-                  <a:spcPts val="0"/>
-                </a:spcBef>
-                <a:spcAft>
-                  <a:spcPts val="0"/>
-                </a:spcAft>
-                <a:buClrTx/>
-                <a:buSzTx/>
-                <a:buFontTx/>
-                <a:buNone/>
-                <a:tabLst/>
-                <a:defRPr/>
-              </a:pPr>
-              <a:t>5</a:t>
-            </a:fld>
-            <a:endParaRPr kumimoji="0" lang="fr-FR" sz="1000" b="0" i="0" u="none" strike="noStrike" kern="1200" cap="none" spc="0" normalizeH="0" baseline="0" noProof="0">
-              <a:ln>
-                <a:noFill/>
-              </a:ln>
-              <a:solidFill>
-                <a:srgbClr val="000000"/>
-              </a:solidFill>
-              <a:effectLst/>
-              <a:uLnTx/>
-              <a:uFillTx/>
-              <a:latin typeface="Verdana" pitchFamily="34" charset="0"/>
-              <a:ea typeface="+mn-ea"/>
-              <a:cs typeface="Arial" charset="0"/>
-            </a:endParaRPr>
-          </a:p>
-        </p:txBody>
-      </p:sp>
-      <p:pic>
-        <p:nvPicPr>
-          <p:cNvPr id="6" name="Image 5">
-            <a:extLst>
-              <a:ext uri="{FF2B5EF4-FFF2-40B4-BE49-F238E27FC236}">
-                <a16:creationId xmlns:a16="http://schemas.microsoft.com/office/drawing/2014/main" id="{F5A46E7E-C1CE-4674-3246-78DD13B8CD33}"/>
-              </a:ext>
-            </a:extLst>
-          </p:cNvPr>
-          <p:cNvPicPr>
-            <a:picLocks noChangeAspect="1"/>
-          </p:cNvPicPr>
-          <p:nvPr/>
-        </p:nvPicPr>
-        <p:blipFill>
-          <a:blip r:embed="rId3"/>
-          <a:stretch>
-            <a:fillRect/>
-          </a:stretch>
-        </p:blipFill>
-        <p:spPr>
-          <a:xfrm>
-            <a:off x="537328" y="785862"/>
-            <a:ext cx="9782125" cy="5992819"/>
-          </a:xfrm>
-          <a:prstGeom prst="rect">
-            <a:avLst/>
-          </a:prstGeom>
-        </p:spPr>
-      </p:pic>
-    </p:spTree>
-    <p:extLst>
-      <p:ext uri="{BB962C8B-B14F-4D97-AF65-F5344CB8AC3E}">
-        <p14:creationId xmlns:p14="http://schemas.microsoft.com/office/powerpoint/2010/main" val="68267618"/>
-      </p:ext>
-    </p:extLst>
-  </p:cSld>
-  <p:clrMapOvr>
-    <a:masterClrMapping/>
-  </p:clrMapOvr>
-</p:sld>
-</file>
-
-<file path=ppt/slides/slide6.xml><?xml version="1.0" encoding="utf-8"?>
-<p:sld xmlns:a="http://schemas.openxmlformats.org/drawingml/2006/main" xmlns:r="http://schemas.openxmlformats.org/officeDocument/2006/relationships" xmlns:p="http://schemas.openxmlformats.org/presentationml/2006/main">
-  <p:cSld>
-    <p:spTree>
-      <p:nvGrpSpPr>
-        <p:cNvPr id="1" name=""/>
-        <p:cNvGrpSpPr/>
-        <p:nvPr/>
-      </p:nvGrpSpPr>
-      <p:grpSpPr>
-        <a:xfrm>
-          <a:off x="0" y="0"/>
-          <a:ext cx="0" cy="0"/>
-          <a:chOff x="0" y="0"/>
-          <a:chExt cx="0" cy="0"/>
-        </a:xfrm>
-      </p:grpSpPr>
-      <p:sp>
-        <p:nvSpPr>
-          <p:cNvPr id="6" name="Titre 5"/>
-          <p:cNvSpPr>
-            <a:spLocks noGrp="1"/>
-          </p:cNvSpPr>
-          <p:nvPr>
-            <p:ph type="ctrTitle"/>
-          </p:nvPr>
-        </p:nvSpPr>
-        <p:spPr>
-          <a:xfrm>
-            <a:off x="1596000" y="2636913"/>
-            <a:ext cx="9000000" cy="1080000"/>
-          </a:xfrm>
-          <a:prstGeom prst="roundRect">
-            <a:avLst/>
-          </a:prstGeom>
-          <a:solidFill>
-            <a:srgbClr val="0070C0"/>
-          </a:solidFill>
-          <a:ln>
-            <a:noFill/>
-          </a:ln>
-          <a:effectLst>
-            <a:outerShdw blurRad="44450" dist="27940" dir="5400000" algn="ctr">
-              <a:srgbClr val="000000">
-                <a:alpha val="32000"/>
-              </a:srgbClr>
-            </a:outerShdw>
-          </a:effectLst>
-          <a:scene3d>
-            <a:camera prst="orthographicFront">
-              <a:rot lat="0" lon="0" rev="0"/>
-            </a:camera>
-            <a:lightRig rig="balanced" dir="t">
-              <a:rot lat="0" lon="0" rev="8700000"/>
-            </a:lightRig>
-          </a:scene3d>
-          <a:sp3d>
-            <a:bevelT w="190500" h="38100"/>
-          </a:sp3d>
-        </p:spPr>
-        <p:txBody>
-          <a:bodyPr rot="0" spcFirstLastPara="0" vert="horz" wrap="square" lIns="91440" tIns="45720" rIns="91440" bIns="45720" numCol="1" spcCol="0" rtlCol="0" fromWordArt="0" anchor="ctr" anchorCtr="0" forceAA="0" compatLnSpc="1">
-            <a:prstTxWarp prst="textNoShape">
-              <a:avLst/>
-            </a:prstTxWarp>
-            <a:noAutofit/>
-          </a:bodyPr>
-          <a:lstStyle/>
-          <a:p>
-            <a:pPr>
-              <a:spcBef>
-                <a:spcPts val="0"/>
-              </a:spcBef>
-            </a:pPr>
-            <a:r>
-              <a:rPr lang="fr-FR" sz="2800" dirty="0">
-                <a:solidFill>
-                  <a:schemeClr val="bg1"/>
-                </a:solidFill>
-                <a:effectLst>
-                  <a:outerShdw blurRad="38100" dist="38100" dir="2700000" algn="tl">
-                    <a:srgbClr val="C0C0C0"/>
-                  </a:outerShdw>
-                </a:effectLst>
-              </a:rPr>
-              <a:t>Évaluation globale de l’action</a:t>
-            </a:r>
-          </a:p>
-        </p:txBody>
-      </p:sp>
-      <p:sp>
-        <p:nvSpPr>
-          <p:cNvPr id="2" name="Espace réservé du numéro de diapositive 1">
-            <a:extLst>
-              <a:ext uri="{FF2B5EF4-FFF2-40B4-BE49-F238E27FC236}">
-                <a16:creationId xmlns:a16="http://schemas.microsoft.com/office/drawing/2014/main" id="{1394BFB7-BF34-498D-817B-1A99E05434DF}"/>
-              </a:ext>
-            </a:extLst>
-          </p:cNvPr>
-          <p:cNvSpPr>
-            <a:spLocks noGrp="1"/>
-          </p:cNvSpPr>
-          <p:nvPr>
-            <p:ph type="sldNum" sz="quarter" idx="12"/>
-          </p:nvPr>
-        </p:nvSpPr>
-        <p:spPr>
-          <a:xfrm>
-            <a:off x="9173600" y="6219191"/>
-            <a:ext cx="2844800" cy="365125"/>
-          </a:xfrm>
-        </p:spPr>
-        <p:txBody>
-          <a:bodyPr/>
-          <a:lstStyle/>
-          <a:p>
-            <a:fld id="{E8592F83-7405-4D71-BE15-BA2C0774FD69}" type="slidenum">
-              <a:rPr lang="fr-FR" smtClean="0">
-                <a:solidFill>
-                  <a:schemeClr val="tx1"/>
-                </a:solidFill>
-              </a:rPr>
-              <a:t>6</a:t>
-            </a:fld>
-            <a:endParaRPr lang="fr-FR">
-              <a:solidFill>
-                <a:schemeClr val="tx1"/>
-              </a:solidFill>
-            </a:endParaRPr>
-          </a:p>
-        </p:txBody>
-      </p:sp>
-      <p:pic>
-        <p:nvPicPr>
-          <p:cNvPr id="3" name="Image 2" descr="Une image contenant oiseau, plume, colibri, texte&#10;&#10;Le contenu généré par l’IA peut être incorrect.">
-            <a:extLst>
-              <a:ext uri="{FF2B5EF4-FFF2-40B4-BE49-F238E27FC236}">
-                <a16:creationId xmlns:a16="http://schemas.microsoft.com/office/drawing/2014/main" id="{13EEA51A-5A43-6543-5C36-26FD821D05BF}"/>
-              </a:ext>
-            </a:extLst>
-          </p:cNvPr>
-          <p:cNvPicPr>
-            <a:picLocks noChangeAspect="1"/>
-          </p:cNvPicPr>
-          <p:nvPr/>
-        </p:nvPicPr>
-        <p:blipFill>
-          <a:blip r:embed="rId3">
-            <a:extLst>
-              <a:ext uri="{28A0092B-C50C-407E-A947-70E740481C1C}">
-                <a14:useLocalDpi xmlns:a14="http://schemas.microsoft.com/office/drawing/2010/main" val="0"/>
-              </a:ext>
-            </a:extLst>
-          </a:blip>
-          <a:stretch>
-            <a:fillRect/>
-          </a:stretch>
-        </p:blipFill>
-        <p:spPr>
-          <a:xfrm>
-            <a:off x="5206538" y="442729"/>
-            <a:ext cx="1778924" cy="1774767"/>
-          </a:xfrm>
-          <a:prstGeom prst="rect">
-            <a:avLst/>
-          </a:prstGeom>
-        </p:spPr>
-      </p:pic>
-    </p:spTree>
-    <p:extLst>
-      <p:ext uri="{BB962C8B-B14F-4D97-AF65-F5344CB8AC3E}">
-        <p14:creationId xmlns:p14="http://schemas.microsoft.com/office/powerpoint/2010/main" val="395553819"/>
-      </p:ext>
-    </p:extLst>
-  </p:cSld>
-  <p:clrMapOvr>
-    <a:masterClrMapping/>
-  </p:clrMapOvr>
-</p:sld>
-</file>
-
-<file path=ppt/slides/slide7.xml><?xml version="1.0" encoding="utf-8"?>
-<p:sld xmlns:a="http://schemas.openxmlformats.org/drawingml/2006/main" xmlns:r="http://schemas.openxmlformats.org/officeDocument/2006/relationships" xmlns:p="http://schemas.openxmlformats.org/presentationml/2006/main">
-  <p:cSld>
-    <p:spTree>
-      <p:nvGrpSpPr>
-        <p:cNvPr id="1" name=""/>
-        <p:cNvGrpSpPr/>
-        <p:nvPr/>
-      </p:nvGrpSpPr>
-      <p:grpSpPr>
-        <a:xfrm>
-          <a:off x="0" y="0"/>
-          <a:ext cx="0" cy="0"/>
-          <a:chOff x="0" y="0"/>
-          <a:chExt cx="0" cy="0"/>
-        </a:xfrm>
-      </p:grpSpPr>
-      <p:sp>
-        <p:nvSpPr>
-          <p:cNvPr id="3" name="Espace réservé du numéro de diapositive 2"/>
-          <p:cNvSpPr>
-            <a:spLocks noGrp="1"/>
-          </p:cNvSpPr>
-          <p:nvPr>
-            <p:ph type="sldNum" sz="quarter" idx="12"/>
-          </p:nvPr>
-        </p:nvSpPr>
-        <p:spPr>
-          <a:xfrm>
-            <a:off x="9271000" y="6207125"/>
-            <a:ext cx="2844800" cy="457200"/>
-          </a:xfrm>
-        </p:spPr>
-        <p:txBody>
-          <a:bodyPr wrap="square" anchor="t">
-            <a:normAutofit/>
-          </a:bodyPr>
-          <a:lstStyle/>
-          <a:p>
-            <a:pPr>
-              <a:spcAft>
-                <a:spcPts val="600"/>
-              </a:spcAft>
-              <a:defRPr/>
-            </a:pPr>
-            <a:fld id="{156ABF86-EFC2-454D-AD05-896C81F76FA1}" type="slidenum">
-              <a:rPr lang="fr-FR" smtClean="0"/>
-              <a:pPr>
-                <a:spcAft>
-                  <a:spcPts val="600"/>
-                </a:spcAft>
-                <a:defRPr/>
-              </a:pPr>
-              <a:t>7</a:t>
-            </a:fld>
-            <a:endParaRPr lang="fr-FR"/>
-          </a:p>
-        </p:txBody>
-      </p:sp>
-      <p:sp>
-        <p:nvSpPr>
-          <p:cNvPr id="4" name="ZoneTexte 3">
-            <a:extLst>
-              <a:ext uri="{FF2B5EF4-FFF2-40B4-BE49-F238E27FC236}">
-                <a16:creationId xmlns:a16="http://schemas.microsoft.com/office/drawing/2014/main" id="{8E874541-DCD9-8062-9A46-EE920F140889}"/>
-              </a:ext>
-            </a:extLst>
-          </p:cNvPr>
-          <p:cNvSpPr txBox="1"/>
-          <p:nvPr/>
-        </p:nvSpPr>
-        <p:spPr>
-          <a:xfrm>
-            <a:off x="633234" y="122612"/>
-            <a:ext cx="10476482" cy="461665"/>
-          </a:xfrm>
-          <a:prstGeom prst="rect">
-            <a:avLst/>
-          </a:prstGeom>
-          <a:noFill/>
-        </p:spPr>
-        <p:txBody>
-          <a:bodyPr wrap="square" anchor="ctr">
-            <a:spAutoFit/>
-          </a:bodyPr>
-          <a:lstStyle/>
-          <a:p>
-            <a:r>
-              <a:rPr lang="fr-FR" sz="2400" b="1" dirty="0">
-                <a:latin typeface="Calibri" panose="020F0502020204030204" pitchFamily="34" charset="0"/>
-                <a:ea typeface="Times New Roman" panose="02020603050405020304" pitchFamily="18" charset="0"/>
-              </a:rPr>
-              <a:t>1. Cette </a:t>
-            </a:r>
-            <a:r>
-              <a:rPr lang="fr-FR" sz="2400" b="1" dirty="0">
-                <a:latin typeface="+mj-lt"/>
-                <a:ea typeface="Times New Roman" panose="02020603050405020304" pitchFamily="18" charset="0"/>
-              </a:rPr>
-              <a:t>formation</a:t>
-            </a:r>
-            <a:r>
-              <a:rPr lang="fr-FR" sz="2400" b="1" dirty="0">
-                <a:latin typeface="Calibri" panose="020F0502020204030204" pitchFamily="34" charset="0"/>
-                <a:ea typeface="Times New Roman" panose="02020603050405020304" pitchFamily="18" charset="0"/>
-              </a:rPr>
-              <a:t> m'a apporté de nouvelles compétences et connaissances</a:t>
-            </a:r>
-            <a:endParaRPr lang="fr-FR" sz="2400" b="1" dirty="0"/>
-          </a:p>
-        </p:txBody>
-      </p:sp>
-      <p:grpSp>
-        <p:nvGrpSpPr>
-          <p:cNvPr id="23" name="Groupe 22">
-            <a:extLst>
-              <a:ext uri="{FF2B5EF4-FFF2-40B4-BE49-F238E27FC236}">
-                <a16:creationId xmlns:a16="http://schemas.microsoft.com/office/drawing/2014/main" id="{980EC6F2-4971-7031-ACAC-AD05F54997DA}"/>
-              </a:ext>
-            </a:extLst>
-          </p:cNvPr>
-          <p:cNvGrpSpPr/>
-          <p:nvPr/>
-        </p:nvGrpSpPr>
-        <p:grpSpPr>
-          <a:xfrm>
-            <a:off x="9232592" y="1876755"/>
-            <a:ext cx="2276869" cy="3104489"/>
-            <a:chOff x="9375619" y="1843456"/>
-            <a:chExt cx="2276869" cy="3104489"/>
-          </a:xfrm>
-        </p:grpSpPr>
-        <p:grpSp>
-          <p:nvGrpSpPr>
-            <p:cNvPr id="14" name="Groupe 13">
-              <a:extLst>
-                <a:ext uri="{FF2B5EF4-FFF2-40B4-BE49-F238E27FC236}">
-                  <a16:creationId xmlns:a16="http://schemas.microsoft.com/office/drawing/2014/main" id="{B24DD23F-8D0C-B01B-EDDF-1F3B6B61803F}"/>
-                </a:ext>
-              </a:extLst>
-            </p:cNvPr>
-            <p:cNvGrpSpPr/>
-            <p:nvPr/>
-          </p:nvGrpSpPr>
-          <p:grpSpPr>
-            <a:xfrm>
-              <a:off x="9375619" y="1843456"/>
-              <a:ext cx="576051" cy="3104489"/>
-              <a:chOff x="9424517" y="1534516"/>
-              <a:chExt cx="576051" cy="3104489"/>
-            </a:xfrm>
-          </p:grpSpPr>
-          <p:pic>
-            <p:nvPicPr>
-              <p:cNvPr id="7" name="Image 6">
-                <a:extLst>
-                  <a:ext uri="{FF2B5EF4-FFF2-40B4-BE49-F238E27FC236}">
-                    <a16:creationId xmlns:a16="http://schemas.microsoft.com/office/drawing/2014/main" id="{743319DD-3EDB-D93A-C9AD-9F2039E7FCCC}"/>
-                  </a:ext>
-                </a:extLst>
-              </p:cNvPr>
-              <p:cNvPicPr>
-                <a:picLocks noChangeAspect="1"/>
-              </p:cNvPicPr>
-              <p:nvPr/>
-            </p:nvPicPr>
-            <p:blipFill>
-              <a:blip r:embed="rId3"/>
-              <a:stretch>
-                <a:fillRect/>
-              </a:stretch>
-            </p:blipFill>
-            <p:spPr>
-              <a:xfrm>
-                <a:off x="9424517" y="1534516"/>
-                <a:ext cx="540000" cy="540000"/>
-              </a:xfrm>
-              <a:prstGeom prst="rect">
-                <a:avLst/>
-              </a:prstGeom>
-            </p:spPr>
-          </p:pic>
-          <p:pic>
-            <p:nvPicPr>
-              <p:cNvPr id="11" name="Image 10">
-                <a:extLst>
-                  <a:ext uri="{FF2B5EF4-FFF2-40B4-BE49-F238E27FC236}">
-                    <a16:creationId xmlns:a16="http://schemas.microsoft.com/office/drawing/2014/main" id="{1246BCD9-35B2-03EF-6E8B-1F291DFD85C9}"/>
-                  </a:ext>
-                </a:extLst>
-              </p:cNvPr>
-              <p:cNvPicPr>
-                <a:picLocks noChangeAspect="1"/>
-              </p:cNvPicPr>
-              <p:nvPr/>
-            </p:nvPicPr>
-            <p:blipFill>
-              <a:blip r:embed="rId4"/>
-              <a:stretch>
-                <a:fillRect/>
-              </a:stretch>
-            </p:blipFill>
-            <p:spPr>
-              <a:xfrm>
-                <a:off x="9476507" y="2350426"/>
-                <a:ext cx="488010" cy="540000"/>
-              </a:xfrm>
-              <a:prstGeom prst="rect">
-                <a:avLst/>
-              </a:prstGeom>
-            </p:spPr>
-          </p:pic>
-          <p:pic>
-            <p:nvPicPr>
-              <p:cNvPr id="12" name="Image 11">
-                <a:extLst>
-                  <a:ext uri="{FF2B5EF4-FFF2-40B4-BE49-F238E27FC236}">
-                    <a16:creationId xmlns:a16="http://schemas.microsoft.com/office/drawing/2014/main" id="{BCB2870E-5F43-BE4B-0CA4-A60C38575F63}"/>
-                  </a:ext>
-                </a:extLst>
-              </p:cNvPr>
-              <p:cNvPicPr>
-                <a:picLocks noChangeAspect="1"/>
-              </p:cNvPicPr>
-              <p:nvPr/>
-            </p:nvPicPr>
-            <p:blipFill>
-              <a:blip r:embed="rId5"/>
-              <a:stretch>
-                <a:fillRect/>
-              </a:stretch>
-            </p:blipFill>
-            <p:spPr>
-              <a:xfrm>
-                <a:off x="9449290" y="3238206"/>
-                <a:ext cx="490454" cy="468000"/>
-              </a:xfrm>
-              <a:prstGeom prst="rect">
-                <a:avLst/>
-              </a:prstGeom>
-            </p:spPr>
-          </p:pic>
-          <p:pic>
-            <p:nvPicPr>
-              <p:cNvPr id="13" name="Image 12">
-                <a:extLst>
-                  <a:ext uri="{FF2B5EF4-FFF2-40B4-BE49-F238E27FC236}">
-                    <a16:creationId xmlns:a16="http://schemas.microsoft.com/office/drawing/2014/main" id="{CDE87796-171C-5C8A-45CE-C79C5FAEBD85}"/>
-                  </a:ext>
-                </a:extLst>
-              </p:cNvPr>
-              <p:cNvPicPr>
-                <a:picLocks noChangeAspect="1"/>
-              </p:cNvPicPr>
-              <p:nvPr/>
-            </p:nvPicPr>
-            <p:blipFill>
-              <a:blip r:embed="rId6"/>
-              <a:stretch>
-                <a:fillRect/>
-              </a:stretch>
-            </p:blipFill>
-            <p:spPr>
-              <a:xfrm>
-                <a:off x="9440455" y="4099005"/>
-                <a:ext cx="560113" cy="540000"/>
-              </a:xfrm>
-              <a:prstGeom prst="rect">
-                <a:avLst/>
-              </a:prstGeom>
-            </p:spPr>
-          </p:pic>
-        </p:grpSp>
-        <p:sp>
-          <p:nvSpPr>
-            <p:cNvPr id="16" name="ZoneTexte 15">
-              <a:extLst>
-                <a:ext uri="{FF2B5EF4-FFF2-40B4-BE49-F238E27FC236}">
-                  <a16:creationId xmlns:a16="http://schemas.microsoft.com/office/drawing/2014/main" id="{B9DAED92-7CC2-94F1-203B-6B58CCE8FE9B}"/>
-                </a:ext>
-              </a:extLst>
-            </p:cNvPr>
-            <p:cNvSpPr txBox="1"/>
-            <p:nvPr/>
-          </p:nvSpPr>
-          <p:spPr>
-            <a:xfrm>
-              <a:off x="10080404" y="1928790"/>
-              <a:ext cx="1572084" cy="369332"/>
-            </a:xfrm>
-            <a:prstGeom prst="rect">
-              <a:avLst/>
-            </a:prstGeom>
-            <a:noFill/>
-          </p:spPr>
-          <p:txBody>
-            <a:bodyPr wrap="square">
-              <a:spAutoFit/>
-            </a:bodyPr>
-            <a:lstStyle/>
-            <a:p>
-              <a:r>
-                <a:rPr lang="fr-FR"/>
-                <a:t>Très satisfait</a:t>
-              </a:r>
-            </a:p>
-          </p:txBody>
-        </p:sp>
-        <p:sp>
-          <p:nvSpPr>
-            <p:cNvPr id="18" name="ZoneTexte 17">
-              <a:extLst>
-                <a:ext uri="{FF2B5EF4-FFF2-40B4-BE49-F238E27FC236}">
-                  <a16:creationId xmlns:a16="http://schemas.microsoft.com/office/drawing/2014/main" id="{2DE30B4E-BB1F-7828-609A-B6B9A8EBCCB7}"/>
-                </a:ext>
-              </a:extLst>
-            </p:cNvPr>
-            <p:cNvSpPr txBox="1"/>
-            <p:nvPr/>
-          </p:nvSpPr>
-          <p:spPr>
-            <a:xfrm>
-              <a:off x="10105396" y="2744700"/>
-              <a:ext cx="1176007" cy="369332"/>
-            </a:xfrm>
-            <a:prstGeom prst="rect">
-              <a:avLst/>
-            </a:prstGeom>
-            <a:noFill/>
-          </p:spPr>
-          <p:txBody>
-            <a:bodyPr wrap="square">
-              <a:spAutoFit/>
-            </a:bodyPr>
-            <a:lstStyle/>
-            <a:p>
-              <a:r>
-                <a:rPr lang="fr-FR"/>
-                <a:t>Satisfait</a:t>
-              </a:r>
-            </a:p>
-          </p:txBody>
-        </p:sp>
-        <p:sp>
-          <p:nvSpPr>
-            <p:cNvPr id="20" name="ZoneTexte 19">
-              <a:extLst>
-                <a:ext uri="{FF2B5EF4-FFF2-40B4-BE49-F238E27FC236}">
-                  <a16:creationId xmlns:a16="http://schemas.microsoft.com/office/drawing/2014/main" id="{F95629AA-8965-D392-D305-537D67306950}"/>
-                </a:ext>
-              </a:extLst>
-            </p:cNvPr>
-            <p:cNvSpPr txBox="1"/>
-            <p:nvPr/>
-          </p:nvSpPr>
-          <p:spPr>
-            <a:xfrm>
-              <a:off x="10132291" y="3642635"/>
-              <a:ext cx="1122218" cy="369332"/>
-            </a:xfrm>
-            <a:prstGeom prst="rect">
-              <a:avLst/>
-            </a:prstGeom>
-            <a:noFill/>
-          </p:spPr>
-          <p:txBody>
-            <a:bodyPr wrap="square">
-              <a:spAutoFit/>
-            </a:bodyPr>
-            <a:lstStyle/>
-            <a:p>
-              <a:r>
-                <a:rPr lang="fr-FR"/>
-                <a:t>Déçu</a:t>
-              </a:r>
-            </a:p>
-          </p:txBody>
-        </p:sp>
-        <p:sp>
-          <p:nvSpPr>
-            <p:cNvPr id="22" name="ZoneTexte 21">
-              <a:extLst>
-                <a:ext uri="{FF2B5EF4-FFF2-40B4-BE49-F238E27FC236}">
-                  <a16:creationId xmlns:a16="http://schemas.microsoft.com/office/drawing/2014/main" id="{BE1DF9B2-5229-AE4C-9A24-6792BD40D1E0}"/>
-                </a:ext>
-              </a:extLst>
-            </p:cNvPr>
-            <p:cNvSpPr txBox="1"/>
-            <p:nvPr/>
-          </p:nvSpPr>
-          <p:spPr>
-            <a:xfrm>
-              <a:off x="10105396" y="4540570"/>
-              <a:ext cx="1303142" cy="369332"/>
-            </a:xfrm>
-            <a:prstGeom prst="rect">
-              <a:avLst/>
-            </a:prstGeom>
-            <a:noFill/>
-          </p:spPr>
-          <p:txBody>
-            <a:bodyPr wrap="square">
-              <a:spAutoFit/>
-            </a:bodyPr>
-            <a:lstStyle/>
-            <a:p>
-              <a:r>
-                <a:rPr lang="fr-FR" sz="1800" b="0" i="0" u="none" strike="noStrike">
-                  <a:solidFill>
-                    <a:srgbClr val="000000"/>
-                  </a:solidFill>
-                  <a:effectLst/>
-                  <a:latin typeface="Calibri" panose="020F0502020204030204" pitchFamily="34" charset="0"/>
-                </a:rPr>
-                <a:t>Très déçu</a:t>
-              </a:r>
-              <a:r>
-                <a:rPr lang="fr-FR"/>
-                <a:t> </a:t>
-              </a:r>
-            </a:p>
-          </p:txBody>
-        </p:sp>
-      </p:grpSp>
-      <p:graphicFrame>
-        <p:nvGraphicFramePr>
-          <p:cNvPr id="5" name="Graphique 4">
-            <a:extLst>
-              <a:ext uri="{FF2B5EF4-FFF2-40B4-BE49-F238E27FC236}">
-                <a16:creationId xmlns:a16="http://schemas.microsoft.com/office/drawing/2014/main" id="{0025103B-5F35-56B2-D49D-94AFD15AA384}"/>
-              </a:ext>
-            </a:extLst>
-          </p:cNvPr>
-          <p:cNvGraphicFramePr/>
-          <p:nvPr>
-            <p:extLst>
-              <p:ext uri="{D42A27DB-BD31-4B8C-83A1-F6EECF244321}">
-                <p14:modId xmlns:p14="http://schemas.microsoft.com/office/powerpoint/2010/main" val="1664346128"/>
-              </p:ext>
-            </p:extLst>
-          </p:nvPr>
-        </p:nvGraphicFramePr>
-        <p:xfrm>
-          <a:off x="633234" y="871111"/>
-          <a:ext cx="8128000" cy="5418667"/>
-        </p:xfrm>
-        <a:graphic>
-          <a:graphicData uri="http://schemas.openxmlformats.org/drawingml/2006/chart">
-            <c:chart xmlns:c="http://schemas.openxmlformats.org/drawingml/2006/chart" xmlns:r="http://schemas.openxmlformats.org/officeDocument/2006/relationships" r:id="rId7"/>
-          </a:graphicData>
-        </a:graphic>
-      </p:graphicFrame>
-    </p:spTree>
-    <p:extLst>
-      <p:ext uri="{BB962C8B-B14F-4D97-AF65-F5344CB8AC3E}">
-        <p14:creationId xmlns:p14="http://schemas.microsoft.com/office/powerpoint/2010/main" val="3920868889"/>
-      </p:ext>
-    </p:extLst>
-  </p:cSld>
-  <p:clrMapOvr>
-    <a:masterClrMapping/>
-  </p:clrMapOvr>
-</p:sld>
-</file>
-
-<file path=ppt/slides/slide8.xml><?xml version="1.0" encoding="utf-8"?>
-<p:sld xmlns:a="http://schemas.openxmlformats.org/drawingml/2006/main" xmlns:r="http://schemas.openxmlformats.org/officeDocument/2006/relationships" xmlns:p="http://schemas.openxmlformats.org/presentationml/2006/main">
-  <p:cSld>
-    <p:spTree>
-      <p:nvGrpSpPr>
-        <p:cNvPr id="1" name=""/>
-        <p:cNvGrpSpPr/>
-        <p:nvPr/>
-      </p:nvGrpSpPr>
-      <p:grpSpPr>
-        <a:xfrm>
-          <a:off x="0" y="0"/>
-          <a:ext cx="0" cy="0"/>
-          <a:chOff x="0" y="0"/>
-          <a:chExt cx="0" cy="0"/>
-        </a:xfrm>
-      </p:grpSpPr>
-      <p:sp>
-        <p:nvSpPr>
-          <p:cNvPr id="3" name="Espace réservé du numéro de diapositive 2"/>
-          <p:cNvSpPr>
-            <a:spLocks noGrp="1"/>
-          </p:cNvSpPr>
-          <p:nvPr>
-            <p:ph type="sldNum" sz="quarter" idx="12"/>
-          </p:nvPr>
-        </p:nvSpPr>
-        <p:spPr>
-          <a:xfrm>
-            <a:off x="9271000" y="6207125"/>
-            <a:ext cx="2844800" cy="457200"/>
-          </a:xfrm>
-        </p:spPr>
-        <p:txBody>
-          <a:bodyPr wrap="square" anchor="t">
-            <a:normAutofit/>
-          </a:bodyPr>
-          <a:lstStyle/>
-          <a:p>
-            <a:pPr>
-              <a:spcAft>
-                <a:spcPts val="600"/>
-              </a:spcAft>
-              <a:defRPr/>
-            </a:pPr>
-            <a:fld id="{156ABF86-EFC2-454D-AD05-896C81F76FA1}" type="slidenum">
-              <a:rPr lang="fr-FR" smtClean="0"/>
-              <a:pPr>
-                <a:spcAft>
-                  <a:spcPts val="600"/>
-                </a:spcAft>
-                <a:defRPr/>
-              </a:pPr>
-              <a:t>8</a:t>
-            </a:fld>
-            <a:endParaRPr lang="fr-FR"/>
-          </a:p>
-        </p:txBody>
-      </p:sp>
-      <p:sp>
-        <p:nvSpPr>
-          <p:cNvPr id="2" name="ZoneTexte 1">
-            <a:extLst>
-              <a:ext uri="{FF2B5EF4-FFF2-40B4-BE49-F238E27FC236}">
-                <a16:creationId xmlns:a16="http://schemas.microsoft.com/office/drawing/2014/main" id="{A56BAA16-F5FA-776A-E5AE-4B9FEAC92795}"/>
-              </a:ext>
-            </a:extLst>
-          </p:cNvPr>
-          <p:cNvSpPr txBox="1"/>
-          <p:nvPr/>
-        </p:nvSpPr>
-        <p:spPr>
-          <a:xfrm>
-            <a:off x="633234" y="116418"/>
-            <a:ext cx="10476482" cy="461665"/>
-          </a:xfrm>
-          <a:prstGeom prst="rect">
-            <a:avLst/>
-          </a:prstGeom>
-          <a:noFill/>
-        </p:spPr>
-        <p:txBody>
-          <a:bodyPr wrap="square" anchor="ctr">
-            <a:spAutoFit/>
-          </a:bodyPr>
-          <a:lstStyle/>
-          <a:p>
-            <a:r>
-              <a:rPr lang="fr-FR" sz="2400" b="1">
-                <a:latin typeface="Calibri" panose="020F0502020204030204" pitchFamily="34" charset="0"/>
-                <a:ea typeface="Times New Roman" panose="02020603050405020304" pitchFamily="18" charset="0"/>
-              </a:rPr>
-              <a:t>2. Ces compétences vont m'aider dans mon travail</a:t>
-            </a:r>
-            <a:endParaRPr lang="fr-FR" sz="2400" b="1"/>
-          </a:p>
-        </p:txBody>
-      </p:sp>
-      <p:grpSp>
-        <p:nvGrpSpPr>
-          <p:cNvPr id="4" name="Groupe 3">
-            <a:extLst>
-              <a:ext uri="{FF2B5EF4-FFF2-40B4-BE49-F238E27FC236}">
-                <a16:creationId xmlns:a16="http://schemas.microsoft.com/office/drawing/2014/main" id="{50BF517B-791D-5A28-2B4B-09015AF5C648}"/>
-              </a:ext>
-            </a:extLst>
-          </p:cNvPr>
-          <p:cNvGrpSpPr/>
-          <p:nvPr/>
-        </p:nvGrpSpPr>
-        <p:grpSpPr>
-          <a:xfrm>
-            <a:off x="9232592" y="1876755"/>
-            <a:ext cx="2276869" cy="3104489"/>
-            <a:chOff x="9375619" y="1843456"/>
-            <a:chExt cx="2276869" cy="3104489"/>
-          </a:xfrm>
-        </p:grpSpPr>
-        <p:grpSp>
-          <p:nvGrpSpPr>
-            <p:cNvPr id="5" name="Groupe 4">
-              <a:extLst>
-                <a:ext uri="{FF2B5EF4-FFF2-40B4-BE49-F238E27FC236}">
-                  <a16:creationId xmlns:a16="http://schemas.microsoft.com/office/drawing/2014/main" id="{97E83DCF-E7DF-654B-F109-55FF76891147}"/>
-                </a:ext>
-              </a:extLst>
-            </p:cNvPr>
-            <p:cNvGrpSpPr/>
-            <p:nvPr/>
-          </p:nvGrpSpPr>
-          <p:grpSpPr>
-            <a:xfrm>
-              <a:off x="9375619" y="1843456"/>
-              <a:ext cx="576051" cy="3104489"/>
-              <a:chOff x="9424517" y="1534516"/>
-              <a:chExt cx="576051" cy="3104489"/>
-            </a:xfrm>
-          </p:grpSpPr>
-          <p:pic>
-            <p:nvPicPr>
-              <p:cNvPr id="10" name="Image 9">
-                <a:extLst>
-                  <a:ext uri="{FF2B5EF4-FFF2-40B4-BE49-F238E27FC236}">
-                    <a16:creationId xmlns:a16="http://schemas.microsoft.com/office/drawing/2014/main" id="{B3EF4AD9-8C92-25DB-6C02-9416D352CFF3}"/>
-                  </a:ext>
-                </a:extLst>
-              </p:cNvPr>
-              <p:cNvPicPr>
-                <a:picLocks noChangeAspect="1"/>
-              </p:cNvPicPr>
-              <p:nvPr/>
-            </p:nvPicPr>
-            <p:blipFill>
-              <a:blip r:embed="rId3"/>
-              <a:stretch>
-                <a:fillRect/>
-              </a:stretch>
-            </p:blipFill>
-            <p:spPr>
-              <a:xfrm>
-                <a:off x="9424517" y="1534516"/>
-                <a:ext cx="540000" cy="540000"/>
-              </a:xfrm>
-              <a:prstGeom prst="rect">
-                <a:avLst/>
-              </a:prstGeom>
-            </p:spPr>
-          </p:pic>
-          <p:pic>
-            <p:nvPicPr>
-              <p:cNvPr id="11" name="Image 10">
-                <a:extLst>
-                  <a:ext uri="{FF2B5EF4-FFF2-40B4-BE49-F238E27FC236}">
-                    <a16:creationId xmlns:a16="http://schemas.microsoft.com/office/drawing/2014/main" id="{A7193D63-6693-9E2D-6096-C8F24030913C}"/>
-                  </a:ext>
-                </a:extLst>
-              </p:cNvPr>
-              <p:cNvPicPr>
-                <a:picLocks noChangeAspect="1"/>
-              </p:cNvPicPr>
-              <p:nvPr/>
-            </p:nvPicPr>
-            <p:blipFill>
-              <a:blip r:embed="rId4"/>
-              <a:stretch>
-                <a:fillRect/>
-              </a:stretch>
-            </p:blipFill>
-            <p:spPr>
-              <a:xfrm>
-                <a:off x="9476507" y="2350426"/>
-                <a:ext cx="488010" cy="540000"/>
-              </a:xfrm>
-              <a:prstGeom prst="rect">
-                <a:avLst/>
-              </a:prstGeom>
-            </p:spPr>
-          </p:pic>
-          <p:pic>
-            <p:nvPicPr>
-              <p:cNvPr id="12" name="Image 11">
-                <a:extLst>
-                  <a:ext uri="{FF2B5EF4-FFF2-40B4-BE49-F238E27FC236}">
-                    <a16:creationId xmlns:a16="http://schemas.microsoft.com/office/drawing/2014/main" id="{E82EB21C-6E19-EBC8-4F4A-34FFB1D46076}"/>
-                  </a:ext>
-                </a:extLst>
-              </p:cNvPr>
-              <p:cNvPicPr>
-                <a:picLocks noChangeAspect="1"/>
-              </p:cNvPicPr>
-              <p:nvPr/>
-            </p:nvPicPr>
-            <p:blipFill>
-              <a:blip r:embed="rId5"/>
-              <a:stretch>
-                <a:fillRect/>
-              </a:stretch>
-            </p:blipFill>
-            <p:spPr>
-              <a:xfrm>
-                <a:off x="9449290" y="3238206"/>
-                <a:ext cx="490454" cy="468000"/>
-              </a:xfrm>
-              <a:prstGeom prst="rect">
-                <a:avLst/>
-              </a:prstGeom>
-            </p:spPr>
-          </p:pic>
-          <p:pic>
-            <p:nvPicPr>
-              <p:cNvPr id="13" name="Image 12">
-                <a:extLst>
-                  <a:ext uri="{FF2B5EF4-FFF2-40B4-BE49-F238E27FC236}">
-                    <a16:creationId xmlns:a16="http://schemas.microsoft.com/office/drawing/2014/main" id="{DDAE736A-02D4-1B03-BA66-3C0649DADAB9}"/>
-                  </a:ext>
-                </a:extLst>
-              </p:cNvPr>
-              <p:cNvPicPr>
-                <a:picLocks noChangeAspect="1"/>
-              </p:cNvPicPr>
-              <p:nvPr/>
-            </p:nvPicPr>
-            <p:blipFill>
-              <a:blip r:embed="rId6"/>
-              <a:stretch>
-                <a:fillRect/>
-              </a:stretch>
-            </p:blipFill>
-            <p:spPr>
-              <a:xfrm>
-                <a:off x="9440455" y="4099005"/>
-                <a:ext cx="560113" cy="540000"/>
-              </a:xfrm>
-              <a:prstGeom prst="rect">
-                <a:avLst/>
-              </a:prstGeom>
-            </p:spPr>
-          </p:pic>
-        </p:grpSp>
-        <p:sp>
-          <p:nvSpPr>
-            <p:cNvPr id="6" name="ZoneTexte 5">
-              <a:extLst>
-                <a:ext uri="{FF2B5EF4-FFF2-40B4-BE49-F238E27FC236}">
-                  <a16:creationId xmlns:a16="http://schemas.microsoft.com/office/drawing/2014/main" id="{B217308C-7EB4-930C-3D3A-1100FB0E6EEF}"/>
-                </a:ext>
-              </a:extLst>
-            </p:cNvPr>
-            <p:cNvSpPr txBox="1"/>
-            <p:nvPr/>
-          </p:nvSpPr>
-          <p:spPr>
-            <a:xfrm>
-              <a:off x="10080404" y="1928790"/>
-              <a:ext cx="1572084" cy="369332"/>
-            </a:xfrm>
-            <a:prstGeom prst="rect">
-              <a:avLst/>
-            </a:prstGeom>
-            <a:noFill/>
-          </p:spPr>
-          <p:txBody>
-            <a:bodyPr wrap="square">
-              <a:spAutoFit/>
-            </a:bodyPr>
-            <a:lstStyle/>
-            <a:p>
-              <a:r>
-                <a:rPr lang="fr-FR"/>
-                <a:t>Très satisfait</a:t>
-              </a:r>
-            </a:p>
-          </p:txBody>
-        </p:sp>
-        <p:sp>
-          <p:nvSpPr>
-            <p:cNvPr id="7" name="ZoneTexte 6">
-              <a:extLst>
-                <a:ext uri="{FF2B5EF4-FFF2-40B4-BE49-F238E27FC236}">
-                  <a16:creationId xmlns:a16="http://schemas.microsoft.com/office/drawing/2014/main" id="{FA9C7C71-4847-BBFA-0402-B5E6B6C5779D}"/>
-                </a:ext>
-              </a:extLst>
-            </p:cNvPr>
-            <p:cNvSpPr txBox="1"/>
-            <p:nvPr/>
-          </p:nvSpPr>
-          <p:spPr>
-            <a:xfrm>
-              <a:off x="10105396" y="2744700"/>
-              <a:ext cx="1176007" cy="369332"/>
-            </a:xfrm>
-            <a:prstGeom prst="rect">
-              <a:avLst/>
-            </a:prstGeom>
-            <a:noFill/>
-          </p:spPr>
-          <p:txBody>
-            <a:bodyPr wrap="square">
-              <a:spAutoFit/>
-            </a:bodyPr>
-            <a:lstStyle/>
-            <a:p>
-              <a:r>
-                <a:rPr lang="fr-FR"/>
-                <a:t>Satisfait</a:t>
-              </a:r>
-            </a:p>
-          </p:txBody>
-        </p:sp>
-        <p:sp>
-          <p:nvSpPr>
-            <p:cNvPr id="8" name="ZoneTexte 7">
-              <a:extLst>
-                <a:ext uri="{FF2B5EF4-FFF2-40B4-BE49-F238E27FC236}">
-                  <a16:creationId xmlns:a16="http://schemas.microsoft.com/office/drawing/2014/main" id="{62EA30C1-D529-DCD8-EDFB-D2F55ABA15B2}"/>
-                </a:ext>
-              </a:extLst>
-            </p:cNvPr>
-            <p:cNvSpPr txBox="1"/>
-            <p:nvPr/>
-          </p:nvSpPr>
-          <p:spPr>
-            <a:xfrm>
-              <a:off x="10132291" y="3642635"/>
-              <a:ext cx="1122218" cy="369332"/>
-            </a:xfrm>
-            <a:prstGeom prst="rect">
-              <a:avLst/>
-            </a:prstGeom>
-            <a:noFill/>
-          </p:spPr>
-          <p:txBody>
-            <a:bodyPr wrap="square">
-              <a:spAutoFit/>
-            </a:bodyPr>
-            <a:lstStyle/>
-            <a:p>
-              <a:r>
-                <a:rPr lang="fr-FR"/>
-                <a:t>Déçu</a:t>
-              </a:r>
-            </a:p>
-          </p:txBody>
-        </p:sp>
-        <p:sp>
-          <p:nvSpPr>
-            <p:cNvPr id="9" name="ZoneTexte 8">
-              <a:extLst>
-                <a:ext uri="{FF2B5EF4-FFF2-40B4-BE49-F238E27FC236}">
-                  <a16:creationId xmlns:a16="http://schemas.microsoft.com/office/drawing/2014/main" id="{E99E9FD3-4B41-AF33-57F4-839C5C84E7F7}"/>
-                </a:ext>
-              </a:extLst>
-            </p:cNvPr>
-            <p:cNvSpPr txBox="1"/>
-            <p:nvPr/>
-          </p:nvSpPr>
-          <p:spPr>
-            <a:xfrm>
-              <a:off x="10105396" y="4540570"/>
-              <a:ext cx="1303142" cy="369332"/>
-            </a:xfrm>
-            <a:prstGeom prst="rect">
-              <a:avLst/>
-            </a:prstGeom>
-            <a:noFill/>
-          </p:spPr>
-          <p:txBody>
-            <a:bodyPr wrap="square">
-              <a:spAutoFit/>
-            </a:bodyPr>
-            <a:lstStyle/>
-            <a:p>
-              <a:r>
-                <a:rPr lang="fr-FR" sz="1800" b="0" i="0" u="none" strike="noStrike">
-                  <a:solidFill>
-                    <a:srgbClr val="000000"/>
-                  </a:solidFill>
-                  <a:effectLst/>
-                  <a:latin typeface="Calibri" panose="020F0502020204030204" pitchFamily="34" charset="0"/>
-                </a:rPr>
-                <a:t>Très déçu</a:t>
-              </a:r>
-              <a:r>
-                <a:rPr lang="fr-FR"/>
-                <a:t> </a:t>
-              </a:r>
-            </a:p>
-          </p:txBody>
-        </p:sp>
-      </p:grpSp>
-      <p:graphicFrame>
-        <p:nvGraphicFramePr>
-          <p:cNvPr id="14" name="Graphique 13">
-            <a:extLst>
-              <a:ext uri="{FF2B5EF4-FFF2-40B4-BE49-F238E27FC236}">
-                <a16:creationId xmlns:a16="http://schemas.microsoft.com/office/drawing/2014/main" id="{0A5A05F8-80D8-86AC-F56C-48C3E6C92A09}"/>
-              </a:ext>
-            </a:extLst>
-          </p:cNvPr>
-          <p:cNvGraphicFramePr/>
-          <p:nvPr>
-            <p:extLst>
-              <p:ext uri="{D42A27DB-BD31-4B8C-83A1-F6EECF244321}">
-                <p14:modId xmlns:p14="http://schemas.microsoft.com/office/powerpoint/2010/main" val="211513403"/>
-              </p:ext>
-            </p:extLst>
-          </p:nvPr>
-        </p:nvGraphicFramePr>
-        <p:xfrm>
-          <a:off x="633234" y="871111"/>
-          <a:ext cx="8128000" cy="5418667"/>
-        </p:xfrm>
-        <a:graphic>
-          <a:graphicData uri="http://schemas.openxmlformats.org/drawingml/2006/chart">
-            <c:chart xmlns:c="http://schemas.openxmlformats.org/drawingml/2006/chart" xmlns:r="http://schemas.openxmlformats.org/officeDocument/2006/relationships" r:id="rId7"/>
-          </a:graphicData>
-        </a:graphic>
-      </p:graphicFrame>
-    </p:spTree>
-    <p:extLst>
-      <p:ext uri="{BB962C8B-B14F-4D97-AF65-F5344CB8AC3E}">
-        <p14:creationId xmlns:p14="http://schemas.microsoft.com/office/powerpoint/2010/main" val="308318938"/>
-      </p:ext>
-    </p:extLst>
-  </p:cSld>
-  <p:clrMapOvr>
-    <a:masterClrMapping/>
-  </p:clrMapOvr>
-</p:sld>
-</file>
-
-<file path=ppt/slides/slide9.xml><?xml version="1.0" encoding="utf-8"?>
-<p:sld xmlns:a="http://schemas.openxmlformats.org/drawingml/2006/main" xmlns:r="http://schemas.openxmlformats.org/officeDocument/2006/relationships" xmlns:p="http://schemas.openxmlformats.org/presentationml/2006/main">
-  <p:cSld>
-    <p:spTree>
-      <p:nvGrpSpPr>
-        <p:cNvPr id="1" name=""/>
-        <p:cNvGrpSpPr/>
-        <p:nvPr/>
-      </p:nvGrpSpPr>
-      <p:grpSpPr>
-        <a:xfrm>
-          <a:off x="0" y="0"/>
-          <a:ext cx="0" cy="0"/>
-          <a:chOff x="0" y="0"/>
-          <a:chExt cx="0" cy="0"/>
-        </a:xfrm>
-      </p:grpSpPr>
-      <p:sp>
-        <p:nvSpPr>
-          <p:cNvPr id="3" name="Espace réservé du numéro de diapositive 2"/>
-          <p:cNvSpPr>
-            <a:spLocks noGrp="1"/>
-          </p:cNvSpPr>
-          <p:nvPr>
-            <p:ph type="sldNum" sz="quarter" idx="12"/>
-          </p:nvPr>
-        </p:nvSpPr>
-        <p:spPr>
-          <a:xfrm>
-            <a:off x="9271000" y="6207125"/>
-            <a:ext cx="2844800" cy="457200"/>
-          </a:xfrm>
-        </p:spPr>
-        <p:txBody>
-          <a:bodyPr wrap="square" anchor="t">
-            <a:normAutofit/>
-          </a:bodyPr>
-          <a:lstStyle/>
-          <a:p>
-            <a:pPr>
-              <a:spcAft>
-                <a:spcPts val="600"/>
-              </a:spcAft>
-              <a:defRPr/>
-            </a:pPr>
-            <a:fld id="{156ABF86-EFC2-454D-AD05-896C81F76FA1}" type="slidenum">
-              <a:rPr lang="fr-FR" smtClean="0"/>
-              <a:pPr>
-                <a:spcAft>
-                  <a:spcPts val="600"/>
-                </a:spcAft>
-                <a:defRPr/>
-              </a:pPr>
-              <a:t>9</a:t>
-            </a:fld>
-            <a:endParaRPr lang="fr-FR"/>
-          </a:p>
-        </p:txBody>
-      </p:sp>
-      <p:sp>
-        <p:nvSpPr>
-          <p:cNvPr id="2" name="ZoneTexte 1">
-            <a:extLst>
-              <a:ext uri="{FF2B5EF4-FFF2-40B4-BE49-F238E27FC236}">
-                <a16:creationId xmlns:a16="http://schemas.microsoft.com/office/drawing/2014/main" id="{CB94D363-11F2-7FD8-7529-735C580D0D94}"/>
-              </a:ext>
-            </a:extLst>
-          </p:cNvPr>
-          <p:cNvSpPr txBox="1"/>
-          <p:nvPr/>
-        </p:nvSpPr>
-        <p:spPr>
-          <a:xfrm>
-            <a:off x="633234" y="120004"/>
-            <a:ext cx="10476482" cy="461665"/>
-          </a:xfrm>
-          <a:prstGeom prst="rect">
-            <a:avLst/>
-          </a:prstGeom>
-          <a:noFill/>
-        </p:spPr>
-        <p:txBody>
-          <a:bodyPr wrap="square" anchor="ctr">
-            <a:spAutoFit/>
-          </a:bodyPr>
-          <a:lstStyle/>
-          <a:p>
-            <a:r>
-              <a:rPr lang="fr-FR" sz="2400" b="1" dirty="0">
-                <a:latin typeface="Calibri" panose="020F0502020204030204" pitchFamily="34" charset="0"/>
-                <a:ea typeface="Times New Roman" panose="02020603050405020304" pitchFamily="18" charset="0"/>
-              </a:rPr>
-              <a:t>3. L'ambiance du groupe était bonne</a:t>
-            </a:r>
-            <a:endParaRPr lang="fr-FR" sz="2400" b="1" dirty="0"/>
-          </a:p>
-        </p:txBody>
-      </p:sp>
-      <p:grpSp>
-        <p:nvGrpSpPr>
-          <p:cNvPr id="4" name="Groupe 3">
-            <a:extLst>
-              <a:ext uri="{FF2B5EF4-FFF2-40B4-BE49-F238E27FC236}">
-                <a16:creationId xmlns:a16="http://schemas.microsoft.com/office/drawing/2014/main" id="{A4B1B8D2-92F6-D08B-7613-01CA1808B50A}"/>
-              </a:ext>
-            </a:extLst>
-          </p:cNvPr>
-          <p:cNvGrpSpPr/>
-          <p:nvPr/>
-        </p:nvGrpSpPr>
-        <p:grpSpPr>
-          <a:xfrm>
-            <a:off x="9232592" y="1876755"/>
-            <a:ext cx="2276869" cy="3104489"/>
-            <a:chOff x="9375619" y="1843456"/>
-            <a:chExt cx="2276869" cy="3104489"/>
-          </a:xfrm>
-        </p:grpSpPr>
-        <p:grpSp>
-          <p:nvGrpSpPr>
-            <p:cNvPr id="5" name="Groupe 4">
-              <a:extLst>
-                <a:ext uri="{FF2B5EF4-FFF2-40B4-BE49-F238E27FC236}">
-                  <a16:creationId xmlns:a16="http://schemas.microsoft.com/office/drawing/2014/main" id="{52EC1D80-14C8-15CC-383A-D4C879C456FB}"/>
-                </a:ext>
-              </a:extLst>
-            </p:cNvPr>
-            <p:cNvGrpSpPr/>
-            <p:nvPr/>
-          </p:nvGrpSpPr>
-          <p:grpSpPr>
-            <a:xfrm>
-              <a:off x="9375619" y="1843456"/>
-              <a:ext cx="576051" cy="3104489"/>
-              <a:chOff x="9424517" y="1534516"/>
-              <a:chExt cx="576051" cy="3104489"/>
-            </a:xfrm>
-          </p:grpSpPr>
-          <p:pic>
-            <p:nvPicPr>
-              <p:cNvPr id="10" name="Image 9">
-                <a:extLst>
-                  <a:ext uri="{FF2B5EF4-FFF2-40B4-BE49-F238E27FC236}">
-                    <a16:creationId xmlns:a16="http://schemas.microsoft.com/office/drawing/2014/main" id="{51035916-3920-EA23-D6FA-EA49EB7D4439}"/>
-                  </a:ext>
-                </a:extLst>
-              </p:cNvPr>
-              <p:cNvPicPr>
-                <a:picLocks noChangeAspect="1"/>
-              </p:cNvPicPr>
-              <p:nvPr/>
-            </p:nvPicPr>
-            <p:blipFill>
-              <a:blip r:embed="rId3"/>
-              <a:stretch>
-                <a:fillRect/>
-              </a:stretch>
-            </p:blipFill>
-            <p:spPr>
-              <a:xfrm>
-                <a:off x="9424517" y="1534516"/>
-                <a:ext cx="540000" cy="540000"/>
-              </a:xfrm>
-              <a:prstGeom prst="rect">
-                <a:avLst/>
-              </a:prstGeom>
-            </p:spPr>
-          </p:pic>
-          <p:pic>
-            <p:nvPicPr>
-              <p:cNvPr id="11" name="Image 10">
-                <a:extLst>
-                  <a:ext uri="{FF2B5EF4-FFF2-40B4-BE49-F238E27FC236}">
-                    <a16:creationId xmlns:a16="http://schemas.microsoft.com/office/drawing/2014/main" id="{5F8D5FC8-62B1-7C6D-BB47-CF14841A234F}"/>
-                  </a:ext>
-                </a:extLst>
-              </p:cNvPr>
-              <p:cNvPicPr>
-                <a:picLocks noChangeAspect="1"/>
-              </p:cNvPicPr>
-              <p:nvPr/>
-            </p:nvPicPr>
-            <p:blipFill>
-              <a:blip r:embed="rId4"/>
-              <a:stretch>
-                <a:fillRect/>
-              </a:stretch>
-            </p:blipFill>
-            <p:spPr>
-              <a:xfrm>
-                <a:off x="9476507" y="2350426"/>
-                <a:ext cx="488010" cy="540000"/>
-              </a:xfrm>
-              <a:prstGeom prst="rect">
-                <a:avLst/>
-              </a:prstGeom>
-            </p:spPr>
-          </p:pic>
-          <p:pic>
-            <p:nvPicPr>
-              <p:cNvPr id="12" name="Image 11">
-                <a:extLst>
-                  <a:ext uri="{FF2B5EF4-FFF2-40B4-BE49-F238E27FC236}">
-                    <a16:creationId xmlns:a16="http://schemas.microsoft.com/office/drawing/2014/main" id="{C612A6D1-30BF-128C-0708-1E917B71B2B2}"/>
-                  </a:ext>
-                </a:extLst>
-              </p:cNvPr>
-              <p:cNvPicPr>
-                <a:picLocks noChangeAspect="1"/>
-              </p:cNvPicPr>
-              <p:nvPr/>
-            </p:nvPicPr>
-            <p:blipFill>
-              <a:blip r:embed="rId5"/>
-              <a:stretch>
-                <a:fillRect/>
-              </a:stretch>
-            </p:blipFill>
-            <p:spPr>
-              <a:xfrm>
-                <a:off x="9449290" y="3238206"/>
-                <a:ext cx="490454" cy="468000"/>
-              </a:xfrm>
-              <a:prstGeom prst="rect">
-                <a:avLst/>
-              </a:prstGeom>
-            </p:spPr>
-          </p:pic>
-          <p:pic>
-            <p:nvPicPr>
-              <p:cNvPr id="13" name="Image 12">
-                <a:extLst>
-                  <a:ext uri="{FF2B5EF4-FFF2-40B4-BE49-F238E27FC236}">
-                    <a16:creationId xmlns:a16="http://schemas.microsoft.com/office/drawing/2014/main" id="{E0614C23-8BAA-0052-F2CB-CFC66D16839B}"/>
-                  </a:ext>
-                </a:extLst>
-              </p:cNvPr>
-              <p:cNvPicPr>
-                <a:picLocks noChangeAspect="1"/>
-              </p:cNvPicPr>
-              <p:nvPr/>
-            </p:nvPicPr>
-            <p:blipFill>
-              <a:blip r:embed="rId6"/>
-              <a:stretch>
-                <a:fillRect/>
-              </a:stretch>
-            </p:blipFill>
-            <p:spPr>
-              <a:xfrm>
-                <a:off x="9440455" y="4099005"/>
-                <a:ext cx="560113" cy="540000"/>
-              </a:xfrm>
-              <a:prstGeom prst="rect">
-                <a:avLst/>
-              </a:prstGeom>
-            </p:spPr>
-          </p:pic>
-        </p:grpSp>
-        <p:sp>
-          <p:nvSpPr>
-            <p:cNvPr id="6" name="ZoneTexte 5">
-              <a:extLst>
-                <a:ext uri="{FF2B5EF4-FFF2-40B4-BE49-F238E27FC236}">
-                  <a16:creationId xmlns:a16="http://schemas.microsoft.com/office/drawing/2014/main" id="{F1F594CE-0A1B-83FE-3098-30CBD9A0C4E2}"/>
-                </a:ext>
-              </a:extLst>
-            </p:cNvPr>
-            <p:cNvSpPr txBox="1"/>
-            <p:nvPr/>
-          </p:nvSpPr>
-          <p:spPr>
-            <a:xfrm>
-              <a:off x="10080404" y="1928790"/>
-              <a:ext cx="1572084" cy="369332"/>
-            </a:xfrm>
-            <a:prstGeom prst="rect">
-              <a:avLst/>
-            </a:prstGeom>
-            <a:noFill/>
-          </p:spPr>
-          <p:txBody>
-            <a:bodyPr wrap="square">
-              <a:spAutoFit/>
-            </a:bodyPr>
-            <a:lstStyle/>
-            <a:p>
-              <a:r>
-                <a:rPr lang="fr-FR"/>
-                <a:t>Très satisfait</a:t>
-              </a:r>
-            </a:p>
-          </p:txBody>
-        </p:sp>
-        <p:sp>
-          <p:nvSpPr>
-            <p:cNvPr id="7" name="ZoneTexte 6">
-              <a:extLst>
-                <a:ext uri="{FF2B5EF4-FFF2-40B4-BE49-F238E27FC236}">
-                  <a16:creationId xmlns:a16="http://schemas.microsoft.com/office/drawing/2014/main" id="{8A06F076-EA03-41C2-E4C8-14F7E4BB59AE}"/>
-                </a:ext>
-              </a:extLst>
-            </p:cNvPr>
-            <p:cNvSpPr txBox="1"/>
-            <p:nvPr/>
-          </p:nvSpPr>
-          <p:spPr>
-            <a:xfrm>
-              <a:off x="10105396" y="2744700"/>
-              <a:ext cx="1176007" cy="369332"/>
-            </a:xfrm>
-            <a:prstGeom prst="rect">
-              <a:avLst/>
-            </a:prstGeom>
-            <a:noFill/>
-          </p:spPr>
-          <p:txBody>
-            <a:bodyPr wrap="square">
-              <a:spAutoFit/>
-            </a:bodyPr>
-            <a:lstStyle/>
-            <a:p>
-              <a:r>
-                <a:rPr lang="fr-FR"/>
-                <a:t>Satisfait</a:t>
-              </a:r>
-            </a:p>
-          </p:txBody>
-        </p:sp>
-        <p:sp>
-          <p:nvSpPr>
-            <p:cNvPr id="8" name="ZoneTexte 7">
-              <a:extLst>
-                <a:ext uri="{FF2B5EF4-FFF2-40B4-BE49-F238E27FC236}">
-                  <a16:creationId xmlns:a16="http://schemas.microsoft.com/office/drawing/2014/main" id="{67B9431D-2F98-0F30-482F-7351121A4305}"/>
-                </a:ext>
-              </a:extLst>
-            </p:cNvPr>
-            <p:cNvSpPr txBox="1"/>
-            <p:nvPr/>
-          </p:nvSpPr>
-          <p:spPr>
-            <a:xfrm>
-              <a:off x="10132291" y="3642635"/>
-              <a:ext cx="1122218" cy="369332"/>
-            </a:xfrm>
-            <a:prstGeom prst="rect">
-              <a:avLst/>
-            </a:prstGeom>
-            <a:noFill/>
-          </p:spPr>
-          <p:txBody>
-            <a:bodyPr wrap="square">
-              <a:spAutoFit/>
-            </a:bodyPr>
-            <a:lstStyle/>
-            <a:p>
-              <a:r>
-                <a:rPr lang="fr-FR"/>
-                <a:t>Déçu</a:t>
-              </a:r>
-            </a:p>
-          </p:txBody>
-        </p:sp>
-        <p:sp>
-          <p:nvSpPr>
-            <p:cNvPr id="9" name="ZoneTexte 8">
-              <a:extLst>
-                <a:ext uri="{FF2B5EF4-FFF2-40B4-BE49-F238E27FC236}">
-                  <a16:creationId xmlns:a16="http://schemas.microsoft.com/office/drawing/2014/main" id="{2433CD1D-6385-8995-B9E3-81260982589F}"/>
-                </a:ext>
-              </a:extLst>
-            </p:cNvPr>
-            <p:cNvSpPr txBox="1"/>
-            <p:nvPr/>
-          </p:nvSpPr>
-          <p:spPr>
-            <a:xfrm>
-              <a:off x="10105396" y="4540570"/>
-              <a:ext cx="1303142" cy="369332"/>
-            </a:xfrm>
-            <a:prstGeom prst="rect">
-              <a:avLst/>
-            </a:prstGeom>
-            <a:noFill/>
-          </p:spPr>
-          <p:txBody>
-            <a:bodyPr wrap="square">
-              <a:spAutoFit/>
-            </a:bodyPr>
-            <a:lstStyle/>
-            <a:p>
-              <a:r>
-                <a:rPr lang="fr-FR" sz="1800" b="0" i="0" u="none" strike="noStrike">
-                  <a:solidFill>
-                    <a:srgbClr val="000000"/>
-                  </a:solidFill>
-                  <a:effectLst/>
-                  <a:latin typeface="Calibri" panose="020F0502020204030204" pitchFamily="34" charset="0"/>
-                </a:rPr>
-                <a:t>Très déçu</a:t>
-              </a:r>
-              <a:r>
-                <a:rPr lang="fr-FR"/>
-                <a:t> </a:t>
-              </a:r>
-            </a:p>
-          </p:txBody>
-        </p:sp>
-      </p:grpSp>
-      <p:graphicFrame>
-        <p:nvGraphicFramePr>
-          <p:cNvPr id="15" name="Graphique 14">
-            <a:extLst>
-              <a:ext uri="{FF2B5EF4-FFF2-40B4-BE49-F238E27FC236}">
-                <a16:creationId xmlns:a16="http://schemas.microsoft.com/office/drawing/2014/main" id="{531DE953-D6A1-90AE-4B13-E9088DF6FC52}"/>
-              </a:ext>
-            </a:extLst>
-          </p:cNvPr>
-          <p:cNvGraphicFramePr/>
-          <p:nvPr>
-            <p:extLst>
-              <p:ext uri="{D42A27DB-BD31-4B8C-83A1-F6EECF244321}">
-                <p14:modId xmlns:p14="http://schemas.microsoft.com/office/powerpoint/2010/main" val="211513403"/>
-              </p:ext>
-            </p:extLst>
-          </p:nvPr>
-        </p:nvGraphicFramePr>
-        <p:xfrm>
-          <a:off x="633234" y="871111"/>
-          <a:ext cx="8128000" cy="5418667"/>
-        </p:xfrm>
-        <a:graphic>
-          <a:graphicData uri="http://schemas.openxmlformats.org/drawingml/2006/chart">
-            <c:chart xmlns:c="http://schemas.openxmlformats.org/drawingml/2006/chart" xmlns:r="http://schemas.openxmlformats.org/officeDocument/2006/relationships" r:id="rId7"/>
-          </a:graphicData>
-        </a:graphic>
-      </p:graphicFrame>
-    </p:spTree>
-    <p:extLst>
-      <p:ext uri="{BB962C8B-B14F-4D97-AF65-F5344CB8AC3E}">
-        <p14:creationId xmlns:p14="http://schemas.microsoft.com/office/powerpoint/2010/main" val="2270805253"/>
       </p:ext>
     </p:extLst>
   </p:cSld>

--- a/templates/analysis-block.pptx
+++ b/templates/analysis-block.pptx
@@ -40824,7 +40824,12 @@
               <a:defRPr/>
             </a:pPr>
             <a:r>
-              <a:rPr lang="fr-FR" dirty="0"/>
+              <a:rPr lang="fr-FR" dirty="0" sz="2400" b="1">
+                <a:solidFill>
+                  <a:srgbClr val="000000"/>
+                </a:solidFill>
+                <a:latin typeface="Calibri"/>
+              </a:rPr>
               <a:t>Vos remarques et suggestions : (ce que vous avez bien aimé / ou pas aimé…)</a:t>
             </a:r>
           </a:p>
@@ -41000,7 +41005,12 @@
               <a:defRPr/>
             </a:pPr>
             <a:r>
-              <a:rPr lang="fr-FR" dirty="0"/>
+              <a:rPr lang="fr-FR" dirty="0" sz="2400" b="1">
+                <a:solidFill>
+                  <a:srgbClr val="000000"/>
+                </a:solidFill>
+                <a:latin typeface="Calibri"/>
+              </a:rPr>
               <a:t>Vos souhaits pour d’autres formations :</a:t>
             </a:r>
           </a:p>

--- a/templates/analysis-block.pptx
+++ b/templates/analysis-block.pptx
@@ -39369,6 +39369,157 @@
           </a:graphicData>
         </a:graphic>
       </p:graphicFrame>
+      <p:sp>
+        <p:nvSpPr>
+          <p:cNvPr id="15" name="PIC_Bandeau_Line"/>
+          <p:cNvSpPr>
+            <a:spLocks noChangeShapeType="1"/>
+          </p:cNvSpPr>
+          <p:nvPr/>
+        </p:nvSpPr>
+        <p:spPr bwMode="auto">
+          <a:xfrm>
+            <a:off x="622300" y="687388"/>
+            <a:ext cx="10769600" cy="0"/>
+          </a:xfrm>
+          <a:prstGeom prst="line">
+            <a:avLst/>
+          </a:prstGeom>
+          <a:noFill/>
+          <a:ln w="19050">
+            <a:solidFill>
+              <a:srgbClr val="0070C0"/>
+            </a:solidFill>
+            <a:round/>
+            <a:headEnd/>
+            <a:tailEnd/>
+          </a:ln>
+        </p:spPr>
+        <p:txBody>
+          <a:bodyPr/>
+          <a:lstStyle/>
+          <a:p>
+            <a:endParaRPr lang="fr-FR"/>
+          </a:p>
+        </p:txBody>
+      </p:sp>
+      <p:sp>
+        <p:nvSpPr>
+          <p:cNvPr id="16" name="PIC_Bandeau_Rect_Top"/>
+          <p:cNvSpPr>
+            <a:spLocks noChangeArrowheads="1"/>
+          </p:cNvSpPr>
+          <p:nvPr/>
+        </p:nvSpPr>
+        <p:spPr bwMode="auto">
+          <a:xfrm>
+            <a:off x="0" y="-9128"/>
+            <a:ext cx="152400" cy="2295128"/>
+          </a:xfrm>
+          <a:prstGeom prst="rect">
+            <a:avLst/>
+          </a:prstGeom>
+          <a:solidFill>
+            <a:srgbClr val="FF6600"/>
+          </a:solidFill>
+          <a:ln>
+            <a:noFill/>
+          </a:ln>
+        </p:spPr>
+        <p:txBody>
+          <a:bodyPr wrap="none" anchor="ctr"/>
+          <a:lstStyle/>
+          <a:p>
+            <a:endParaRPr lang="fr-FR"/>
+          </a:p>
+        </p:txBody>
+      </p:sp>
+      <p:sp>
+        <p:nvSpPr>
+          <p:cNvPr id="17" name="PIC_Bandeau_Rect_Mid"/>
+          <p:cNvSpPr>
+            <a:spLocks noChangeArrowheads="1"/>
+          </p:cNvSpPr>
+          <p:nvPr/>
+        </p:nvSpPr>
+        <p:spPr bwMode="auto">
+          <a:xfrm>
+            <a:off x="0" y="2286000"/>
+            <a:ext cx="152400" cy="2286000"/>
+          </a:xfrm>
+          <a:prstGeom prst="rect">
+            <a:avLst/>
+          </a:prstGeom>
+          <a:solidFill>
+            <a:srgbClr val="0070C0"/>
+          </a:solidFill>
+          <a:ln>
+            <a:noFill/>
+          </a:ln>
+        </p:spPr>
+        <p:txBody>
+          <a:bodyPr wrap="none" anchor="ctr"/>
+          <a:lstStyle/>
+          <a:p>
+            <a:endParaRPr lang="fr-FR"/>
+          </a:p>
+        </p:txBody>
+      </p:sp>
+      <p:sp>
+        <p:nvSpPr>
+          <p:cNvPr id="18" name="PIC_Bandeau_Rect_Bot"/>
+          <p:cNvSpPr>
+            <a:spLocks noChangeArrowheads="1"/>
+          </p:cNvSpPr>
+          <p:nvPr/>
+        </p:nvSpPr>
+        <p:spPr bwMode="auto">
+          <a:xfrm>
+            <a:off x="0" y="4560886"/>
+            <a:ext cx="152400" cy="2286000"/>
+          </a:xfrm>
+          <a:prstGeom prst="rect">
+            <a:avLst/>
+          </a:prstGeom>
+          <a:solidFill>
+            <a:srgbClr val="FF6600"/>
+          </a:solidFill>
+          <a:ln>
+            <a:noFill/>
+          </a:ln>
+        </p:spPr>
+        <p:txBody>
+          <a:bodyPr wrap="none" anchor="ctr"/>
+          <a:lstStyle/>
+          <a:p>
+            <a:endParaRPr lang="fr-FR"/>
+          </a:p>
+        </p:txBody>
+      </p:sp>
+      <p:pic>
+        <p:nvPicPr>
+          <p:cNvPr id="19" name="PIC_Bandeau_Logo" descr="image.jpeg"/>
+          <p:cNvPicPr>
+            <a:picLocks noChangeAspect="1"/>
+          </p:cNvPicPr>
+          <p:nvPr/>
+        </p:nvPicPr>
+        <p:blipFill>
+          <a:blip r:embed="rId8"/>
+          <a:stretch>
+            <a:fillRect/>
+          </a:stretch>
+        </p:blipFill>
+        <p:spPr>
+          <a:xfrm>
+            <a:off x="11470314" y="20203"/>
+            <a:ext cx="721686" cy="720000"/>
+          </a:xfrm>
+          <a:prstGeom prst="rect">
+            <a:avLst/>
+          </a:prstGeom>
+        </p:spPr>
+      </p:pic>
     </p:spTree>
     <p:extLst>
       <p:ext uri="{BB962C8B-B14F-4D97-AF65-F5344CB8AC3E}">
@@ -39836,6 +39987,157 @@
           </a:graphicData>
         </a:graphic>
       </p:graphicFrame>
+      <p:sp>
+        <p:nvSpPr>
+          <p:cNvPr id="15" name="PIC_Bandeau_Line"/>
+          <p:cNvSpPr>
+            <a:spLocks noChangeShapeType="1"/>
+          </p:cNvSpPr>
+          <p:nvPr/>
+        </p:nvSpPr>
+        <p:spPr bwMode="auto">
+          <a:xfrm>
+            <a:off x="622300" y="687388"/>
+            <a:ext cx="10769600" cy="0"/>
+          </a:xfrm>
+          <a:prstGeom prst="line">
+            <a:avLst/>
+          </a:prstGeom>
+          <a:noFill/>
+          <a:ln w="19050">
+            <a:solidFill>
+              <a:srgbClr val="0070C0"/>
+            </a:solidFill>
+            <a:round/>
+            <a:headEnd/>
+            <a:tailEnd/>
+          </a:ln>
+        </p:spPr>
+        <p:txBody>
+          <a:bodyPr/>
+          <a:lstStyle/>
+          <a:p>
+            <a:endParaRPr lang="fr-FR"/>
+          </a:p>
+        </p:txBody>
+      </p:sp>
+      <p:sp>
+        <p:nvSpPr>
+          <p:cNvPr id="16" name="PIC_Bandeau_Rect_Top"/>
+          <p:cNvSpPr>
+            <a:spLocks noChangeArrowheads="1"/>
+          </p:cNvSpPr>
+          <p:nvPr/>
+        </p:nvSpPr>
+        <p:spPr bwMode="auto">
+          <a:xfrm>
+            <a:off x="0" y="-9128"/>
+            <a:ext cx="152400" cy="2295128"/>
+          </a:xfrm>
+          <a:prstGeom prst="rect">
+            <a:avLst/>
+          </a:prstGeom>
+          <a:solidFill>
+            <a:srgbClr val="FF6600"/>
+          </a:solidFill>
+          <a:ln>
+            <a:noFill/>
+          </a:ln>
+        </p:spPr>
+        <p:txBody>
+          <a:bodyPr wrap="none" anchor="ctr"/>
+          <a:lstStyle/>
+          <a:p>
+            <a:endParaRPr lang="fr-FR"/>
+          </a:p>
+        </p:txBody>
+      </p:sp>
+      <p:sp>
+        <p:nvSpPr>
+          <p:cNvPr id="17" name="PIC_Bandeau_Rect_Mid"/>
+          <p:cNvSpPr>
+            <a:spLocks noChangeArrowheads="1"/>
+          </p:cNvSpPr>
+          <p:nvPr/>
+        </p:nvSpPr>
+        <p:spPr bwMode="auto">
+          <a:xfrm>
+            <a:off x="0" y="2286000"/>
+            <a:ext cx="152400" cy="2286000"/>
+          </a:xfrm>
+          <a:prstGeom prst="rect">
+            <a:avLst/>
+          </a:prstGeom>
+          <a:solidFill>
+            <a:srgbClr val="0070C0"/>
+          </a:solidFill>
+          <a:ln>
+            <a:noFill/>
+          </a:ln>
+        </p:spPr>
+        <p:txBody>
+          <a:bodyPr wrap="none" anchor="ctr"/>
+          <a:lstStyle/>
+          <a:p>
+            <a:endParaRPr lang="fr-FR"/>
+          </a:p>
+        </p:txBody>
+      </p:sp>
+      <p:sp>
+        <p:nvSpPr>
+          <p:cNvPr id="18" name="PIC_Bandeau_Rect_Bot"/>
+          <p:cNvSpPr>
+            <a:spLocks noChangeArrowheads="1"/>
+          </p:cNvSpPr>
+          <p:nvPr/>
+        </p:nvSpPr>
+        <p:spPr bwMode="auto">
+          <a:xfrm>
+            <a:off x="0" y="4560886"/>
+            <a:ext cx="152400" cy="2286000"/>
+          </a:xfrm>
+          <a:prstGeom prst="rect">
+            <a:avLst/>
+          </a:prstGeom>
+          <a:solidFill>
+            <a:srgbClr val="FF6600"/>
+          </a:solidFill>
+          <a:ln>
+            <a:noFill/>
+          </a:ln>
+        </p:spPr>
+        <p:txBody>
+          <a:bodyPr wrap="none" anchor="ctr"/>
+          <a:lstStyle/>
+          <a:p>
+            <a:endParaRPr lang="fr-FR"/>
+          </a:p>
+        </p:txBody>
+      </p:sp>
+      <p:pic>
+        <p:nvPicPr>
+          <p:cNvPr id="19" name="PIC_Bandeau_Logo" descr="image.jpeg"/>
+          <p:cNvPicPr>
+            <a:picLocks noChangeAspect="1"/>
+          </p:cNvPicPr>
+          <p:nvPr/>
+        </p:nvPicPr>
+        <p:blipFill>
+          <a:blip r:embed="rId8"/>
+          <a:stretch>
+            <a:fillRect/>
+          </a:stretch>
+        </p:blipFill>
+        <p:spPr>
+          <a:xfrm>
+            <a:off x="11470314" y="20203"/>
+            <a:ext cx="721686" cy="720000"/>
+          </a:xfrm>
+          <a:prstGeom prst="rect">
+            <a:avLst/>
+          </a:prstGeom>
+        </p:spPr>
+      </p:pic>
     </p:spTree>
     <p:extLst>
       <p:ext uri="{BB962C8B-B14F-4D97-AF65-F5344CB8AC3E}">
@@ -40303,6 +40605,157 @@
           </a:graphicData>
         </a:graphic>
       </p:graphicFrame>
+      <p:sp>
+        <p:nvSpPr>
+          <p:cNvPr id="15" name="PIC_Bandeau_Line"/>
+          <p:cNvSpPr>
+            <a:spLocks noChangeShapeType="1"/>
+          </p:cNvSpPr>
+          <p:nvPr/>
+        </p:nvSpPr>
+        <p:spPr bwMode="auto">
+          <a:xfrm>
+            <a:off x="622300" y="687388"/>
+            <a:ext cx="10769600" cy="0"/>
+          </a:xfrm>
+          <a:prstGeom prst="line">
+            <a:avLst/>
+          </a:prstGeom>
+          <a:noFill/>
+          <a:ln w="19050">
+            <a:solidFill>
+              <a:srgbClr val="0070C0"/>
+            </a:solidFill>
+            <a:round/>
+            <a:headEnd/>
+            <a:tailEnd/>
+          </a:ln>
+        </p:spPr>
+        <p:txBody>
+          <a:bodyPr/>
+          <a:lstStyle/>
+          <a:p>
+            <a:endParaRPr lang="fr-FR"/>
+          </a:p>
+        </p:txBody>
+      </p:sp>
+      <p:sp>
+        <p:nvSpPr>
+          <p:cNvPr id="16" name="PIC_Bandeau_Rect_Top"/>
+          <p:cNvSpPr>
+            <a:spLocks noChangeArrowheads="1"/>
+          </p:cNvSpPr>
+          <p:nvPr/>
+        </p:nvSpPr>
+        <p:spPr bwMode="auto">
+          <a:xfrm>
+            <a:off x="0" y="-9128"/>
+            <a:ext cx="152400" cy="2295128"/>
+          </a:xfrm>
+          <a:prstGeom prst="rect">
+            <a:avLst/>
+          </a:prstGeom>
+          <a:solidFill>
+            <a:srgbClr val="FF6600"/>
+          </a:solidFill>
+          <a:ln>
+            <a:noFill/>
+          </a:ln>
+        </p:spPr>
+        <p:txBody>
+          <a:bodyPr wrap="none" anchor="ctr"/>
+          <a:lstStyle/>
+          <a:p>
+            <a:endParaRPr lang="fr-FR"/>
+          </a:p>
+        </p:txBody>
+      </p:sp>
+      <p:sp>
+        <p:nvSpPr>
+          <p:cNvPr id="17" name="PIC_Bandeau_Rect_Mid"/>
+          <p:cNvSpPr>
+            <a:spLocks noChangeArrowheads="1"/>
+          </p:cNvSpPr>
+          <p:nvPr/>
+        </p:nvSpPr>
+        <p:spPr bwMode="auto">
+          <a:xfrm>
+            <a:off x="0" y="2286000"/>
+            <a:ext cx="152400" cy="2286000"/>
+          </a:xfrm>
+          <a:prstGeom prst="rect">
+            <a:avLst/>
+          </a:prstGeom>
+          <a:solidFill>
+            <a:srgbClr val="0070C0"/>
+          </a:solidFill>
+          <a:ln>
+            <a:noFill/>
+          </a:ln>
+        </p:spPr>
+        <p:txBody>
+          <a:bodyPr wrap="none" anchor="ctr"/>
+          <a:lstStyle/>
+          <a:p>
+            <a:endParaRPr lang="fr-FR"/>
+          </a:p>
+        </p:txBody>
+      </p:sp>
+      <p:sp>
+        <p:nvSpPr>
+          <p:cNvPr id="18" name="PIC_Bandeau_Rect_Bot"/>
+          <p:cNvSpPr>
+            <a:spLocks noChangeArrowheads="1"/>
+          </p:cNvSpPr>
+          <p:nvPr/>
+        </p:nvSpPr>
+        <p:spPr bwMode="auto">
+          <a:xfrm>
+            <a:off x="0" y="4560886"/>
+            <a:ext cx="152400" cy="2286000"/>
+          </a:xfrm>
+          <a:prstGeom prst="rect">
+            <a:avLst/>
+          </a:prstGeom>
+          <a:solidFill>
+            <a:srgbClr val="FF6600"/>
+          </a:solidFill>
+          <a:ln>
+            <a:noFill/>
+          </a:ln>
+        </p:spPr>
+        <p:txBody>
+          <a:bodyPr wrap="none" anchor="ctr"/>
+          <a:lstStyle/>
+          <a:p>
+            <a:endParaRPr lang="fr-FR"/>
+          </a:p>
+        </p:txBody>
+      </p:sp>
+      <p:pic>
+        <p:nvPicPr>
+          <p:cNvPr id="19" name="PIC_Bandeau_Logo" descr="image.jpeg"/>
+          <p:cNvPicPr>
+            <a:picLocks noChangeAspect="1"/>
+          </p:cNvPicPr>
+          <p:nvPr/>
+        </p:nvPicPr>
+        <p:blipFill>
+          <a:blip r:embed="rId8"/>
+          <a:stretch>
+            <a:fillRect/>
+          </a:stretch>
+        </p:blipFill>
+        <p:spPr>
+          <a:xfrm>
+            <a:off x="11470314" y="20203"/>
+            <a:ext cx="721686" cy="720000"/>
+          </a:xfrm>
+          <a:prstGeom prst="rect">
+            <a:avLst/>
+          </a:prstGeom>
+        </p:spPr>
+      </p:pic>
     </p:spTree>
     <p:extLst>
       <p:ext uri="{BB962C8B-B14F-4D97-AF65-F5344CB8AC3E}">
@@ -40770,6 +41223,157 @@
           </a:graphicData>
         </a:graphic>
       </p:graphicFrame>
+      <p:sp>
+        <p:nvSpPr>
+          <p:cNvPr id="15" name="PIC_Bandeau_Line"/>
+          <p:cNvSpPr>
+            <a:spLocks noChangeShapeType="1"/>
+          </p:cNvSpPr>
+          <p:nvPr/>
+        </p:nvSpPr>
+        <p:spPr bwMode="auto">
+          <a:xfrm>
+            <a:off x="622300" y="687388"/>
+            <a:ext cx="10769600" cy="0"/>
+          </a:xfrm>
+          <a:prstGeom prst="line">
+            <a:avLst/>
+          </a:prstGeom>
+          <a:noFill/>
+          <a:ln w="19050">
+            <a:solidFill>
+              <a:srgbClr val="0070C0"/>
+            </a:solidFill>
+            <a:round/>
+            <a:headEnd/>
+            <a:tailEnd/>
+          </a:ln>
+        </p:spPr>
+        <p:txBody>
+          <a:bodyPr/>
+          <a:lstStyle/>
+          <a:p>
+            <a:endParaRPr lang="fr-FR"/>
+          </a:p>
+        </p:txBody>
+      </p:sp>
+      <p:sp>
+        <p:nvSpPr>
+          <p:cNvPr id="16" name="PIC_Bandeau_Rect_Top"/>
+          <p:cNvSpPr>
+            <a:spLocks noChangeArrowheads="1"/>
+          </p:cNvSpPr>
+          <p:nvPr/>
+        </p:nvSpPr>
+        <p:spPr bwMode="auto">
+          <a:xfrm>
+            <a:off x="0" y="-9128"/>
+            <a:ext cx="152400" cy="2295128"/>
+          </a:xfrm>
+          <a:prstGeom prst="rect">
+            <a:avLst/>
+          </a:prstGeom>
+          <a:solidFill>
+            <a:srgbClr val="FF6600"/>
+          </a:solidFill>
+          <a:ln>
+            <a:noFill/>
+          </a:ln>
+        </p:spPr>
+        <p:txBody>
+          <a:bodyPr wrap="none" anchor="ctr"/>
+          <a:lstStyle/>
+          <a:p>
+            <a:endParaRPr lang="fr-FR"/>
+          </a:p>
+        </p:txBody>
+      </p:sp>
+      <p:sp>
+        <p:nvSpPr>
+          <p:cNvPr id="17" name="PIC_Bandeau_Rect_Mid"/>
+          <p:cNvSpPr>
+            <a:spLocks noChangeArrowheads="1"/>
+          </p:cNvSpPr>
+          <p:nvPr/>
+        </p:nvSpPr>
+        <p:spPr bwMode="auto">
+          <a:xfrm>
+            <a:off x="0" y="2286000"/>
+            <a:ext cx="152400" cy="2286000"/>
+          </a:xfrm>
+          <a:prstGeom prst="rect">
+            <a:avLst/>
+          </a:prstGeom>
+          <a:solidFill>
+            <a:srgbClr val="0070C0"/>
+          </a:solidFill>
+          <a:ln>
+            <a:noFill/>
+          </a:ln>
+        </p:spPr>
+        <p:txBody>
+          <a:bodyPr wrap="none" anchor="ctr"/>
+          <a:lstStyle/>
+          <a:p>
+            <a:endParaRPr lang="fr-FR"/>
+          </a:p>
+        </p:txBody>
+      </p:sp>
+      <p:sp>
+        <p:nvSpPr>
+          <p:cNvPr id="18" name="PIC_Bandeau_Rect_Bot"/>
+          <p:cNvSpPr>
+            <a:spLocks noChangeArrowheads="1"/>
+          </p:cNvSpPr>
+          <p:nvPr/>
+        </p:nvSpPr>
+        <p:spPr bwMode="auto">
+          <a:xfrm>
+            <a:off x="0" y="4560886"/>
+            <a:ext cx="152400" cy="2286000"/>
+          </a:xfrm>
+          <a:prstGeom prst="rect">
+            <a:avLst/>
+          </a:prstGeom>
+          <a:solidFill>
+            <a:srgbClr val="FF6600"/>
+          </a:solidFill>
+          <a:ln>
+            <a:noFill/>
+          </a:ln>
+        </p:spPr>
+        <p:txBody>
+          <a:bodyPr wrap="none" anchor="ctr"/>
+          <a:lstStyle/>
+          <a:p>
+            <a:endParaRPr lang="fr-FR"/>
+          </a:p>
+        </p:txBody>
+      </p:sp>
+      <p:pic>
+        <p:nvPicPr>
+          <p:cNvPr id="19" name="PIC_Bandeau_Logo" descr="image.jpeg"/>
+          <p:cNvPicPr>
+            <a:picLocks noChangeAspect="1"/>
+          </p:cNvPicPr>
+          <p:nvPr/>
+        </p:nvPicPr>
+        <p:blipFill>
+          <a:blip r:embed="rId8"/>
+          <a:stretch>
+            <a:fillRect/>
+          </a:stretch>
+        </p:blipFill>
+        <p:spPr>
+          <a:xfrm>
+            <a:off x="11470314" y="20203"/>
+            <a:ext cx="721686" cy="720000"/>
+          </a:xfrm>
+          <a:prstGeom prst="rect">
+            <a:avLst/>
+          </a:prstGeom>
+        </p:spPr>
+      </p:pic>
     </p:spTree>
     <p:extLst>
       <p:ext uri="{BB962C8B-B14F-4D97-AF65-F5344CB8AC3E}">
@@ -40951,6 +41555,157 @@
           </a:p>
         </p:txBody>
       </p:sp>
+      <p:sp>
+        <p:nvSpPr>
+          <p:cNvPr id="26627" name="PIC_Bandeau_Line"/>
+          <p:cNvSpPr>
+            <a:spLocks noChangeShapeType="1"/>
+          </p:cNvSpPr>
+          <p:nvPr/>
+        </p:nvSpPr>
+        <p:spPr bwMode="auto">
+          <a:xfrm>
+            <a:off x="622300" y="687388"/>
+            <a:ext cx="10769600" cy="0"/>
+          </a:xfrm>
+          <a:prstGeom prst="line">
+            <a:avLst/>
+          </a:prstGeom>
+          <a:noFill/>
+          <a:ln w="19050">
+            <a:solidFill>
+              <a:srgbClr val="0070C0"/>
+            </a:solidFill>
+            <a:round/>
+            <a:headEnd/>
+            <a:tailEnd/>
+          </a:ln>
+        </p:spPr>
+        <p:txBody>
+          <a:bodyPr/>
+          <a:lstStyle/>
+          <a:p>
+            <a:endParaRPr lang="fr-FR"/>
+          </a:p>
+        </p:txBody>
+      </p:sp>
+      <p:sp>
+        <p:nvSpPr>
+          <p:cNvPr id="26628" name="PIC_Bandeau_Rect_Top"/>
+          <p:cNvSpPr>
+            <a:spLocks noChangeArrowheads="1"/>
+          </p:cNvSpPr>
+          <p:nvPr/>
+        </p:nvSpPr>
+        <p:spPr bwMode="auto">
+          <a:xfrm>
+            <a:off x="0" y="-9128"/>
+            <a:ext cx="152400" cy="2295128"/>
+          </a:xfrm>
+          <a:prstGeom prst="rect">
+            <a:avLst/>
+          </a:prstGeom>
+          <a:solidFill>
+            <a:srgbClr val="FF6600"/>
+          </a:solidFill>
+          <a:ln>
+            <a:noFill/>
+          </a:ln>
+        </p:spPr>
+        <p:txBody>
+          <a:bodyPr wrap="none" anchor="ctr"/>
+          <a:lstStyle/>
+          <a:p>
+            <a:endParaRPr lang="fr-FR"/>
+          </a:p>
+        </p:txBody>
+      </p:sp>
+      <p:sp>
+        <p:nvSpPr>
+          <p:cNvPr id="26629" name="PIC_Bandeau_Rect_Mid"/>
+          <p:cNvSpPr>
+            <a:spLocks noChangeArrowheads="1"/>
+          </p:cNvSpPr>
+          <p:nvPr/>
+        </p:nvSpPr>
+        <p:spPr bwMode="auto">
+          <a:xfrm>
+            <a:off x="0" y="2286000"/>
+            <a:ext cx="152400" cy="2286000"/>
+          </a:xfrm>
+          <a:prstGeom prst="rect">
+            <a:avLst/>
+          </a:prstGeom>
+          <a:solidFill>
+            <a:srgbClr val="0070C0"/>
+          </a:solidFill>
+          <a:ln>
+            <a:noFill/>
+          </a:ln>
+        </p:spPr>
+        <p:txBody>
+          <a:bodyPr wrap="none" anchor="ctr"/>
+          <a:lstStyle/>
+          <a:p>
+            <a:endParaRPr lang="fr-FR"/>
+          </a:p>
+        </p:txBody>
+      </p:sp>
+      <p:sp>
+        <p:nvSpPr>
+          <p:cNvPr id="26630" name="PIC_Bandeau_Rect_Bot"/>
+          <p:cNvSpPr>
+            <a:spLocks noChangeArrowheads="1"/>
+          </p:cNvSpPr>
+          <p:nvPr/>
+        </p:nvSpPr>
+        <p:spPr bwMode="auto">
+          <a:xfrm>
+            <a:off x="0" y="4560886"/>
+            <a:ext cx="152400" cy="2286000"/>
+          </a:xfrm>
+          <a:prstGeom prst="rect">
+            <a:avLst/>
+          </a:prstGeom>
+          <a:solidFill>
+            <a:srgbClr val="FF6600"/>
+          </a:solidFill>
+          <a:ln>
+            <a:noFill/>
+          </a:ln>
+        </p:spPr>
+        <p:txBody>
+          <a:bodyPr wrap="none" anchor="ctr"/>
+          <a:lstStyle/>
+          <a:p>
+            <a:endParaRPr lang="fr-FR"/>
+          </a:p>
+        </p:txBody>
+      </p:sp>
+      <p:pic>
+        <p:nvPicPr>
+          <p:cNvPr id="26631" name="PIC_Bandeau_Logo" descr="image.jpeg"/>
+          <p:cNvPicPr>
+            <a:picLocks noChangeAspect="1"/>
+          </p:cNvPicPr>
+          <p:nvPr/>
+        </p:nvPicPr>
+        <p:blipFill>
+          <a:blip r:embed="rId3"/>
+          <a:stretch>
+            <a:fillRect/>
+          </a:stretch>
+        </p:blipFill>
+        <p:spPr>
+          <a:xfrm>
+            <a:off x="11470314" y="20203"/>
+            <a:ext cx="721686" cy="720000"/>
+          </a:xfrm>
+          <a:prstGeom prst="rect">
+            <a:avLst/>
+          </a:prstGeom>
+        </p:spPr>
+      </p:pic>
     </p:spTree>
     <p:extLst>
       <p:ext uri="{BB962C8B-B14F-4D97-AF65-F5344CB8AC3E}">
@@ -41102,6 +41857,157 @@
           </a:p>
         </p:txBody>
       </p:sp>
+      <p:sp>
+        <p:nvSpPr>
+          <p:cNvPr id="26627" name="PIC_Bandeau_Line"/>
+          <p:cNvSpPr>
+            <a:spLocks noChangeShapeType="1"/>
+          </p:cNvSpPr>
+          <p:nvPr/>
+        </p:nvSpPr>
+        <p:spPr bwMode="auto">
+          <a:xfrm>
+            <a:off x="622300" y="687388"/>
+            <a:ext cx="10769600" cy="0"/>
+          </a:xfrm>
+          <a:prstGeom prst="line">
+            <a:avLst/>
+          </a:prstGeom>
+          <a:noFill/>
+          <a:ln w="19050">
+            <a:solidFill>
+              <a:srgbClr val="0070C0"/>
+            </a:solidFill>
+            <a:round/>
+            <a:headEnd/>
+            <a:tailEnd/>
+          </a:ln>
+        </p:spPr>
+        <p:txBody>
+          <a:bodyPr/>
+          <a:lstStyle/>
+          <a:p>
+            <a:endParaRPr lang="fr-FR"/>
+          </a:p>
+        </p:txBody>
+      </p:sp>
+      <p:sp>
+        <p:nvSpPr>
+          <p:cNvPr id="26628" name="PIC_Bandeau_Rect_Top"/>
+          <p:cNvSpPr>
+            <a:spLocks noChangeArrowheads="1"/>
+          </p:cNvSpPr>
+          <p:nvPr/>
+        </p:nvSpPr>
+        <p:spPr bwMode="auto">
+          <a:xfrm>
+            <a:off x="0" y="-9128"/>
+            <a:ext cx="152400" cy="2295128"/>
+          </a:xfrm>
+          <a:prstGeom prst="rect">
+            <a:avLst/>
+          </a:prstGeom>
+          <a:solidFill>
+            <a:srgbClr val="FF6600"/>
+          </a:solidFill>
+          <a:ln>
+            <a:noFill/>
+          </a:ln>
+        </p:spPr>
+        <p:txBody>
+          <a:bodyPr wrap="none" anchor="ctr"/>
+          <a:lstStyle/>
+          <a:p>
+            <a:endParaRPr lang="fr-FR"/>
+          </a:p>
+        </p:txBody>
+      </p:sp>
+      <p:sp>
+        <p:nvSpPr>
+          <p:cNvPr id="26629" name="PIC_Bandeau_Rect_Mid"/>
+          <p:cNvSpPr>
+            <a:spLocks noChangeArrowheads="1"/>
+          </p:cNvSpPr>
+          <p:nvPr/>
+        </p:nvSpPr>
+        <p:spPr bwMode="auto">
+          <a:xfrm>
+            <a:off x="0" y="2286000"/>
+            <a:ext cx="152400" cy="2286000"/>
+          </a:xfrm>
+          <a:prstGeom prst="rect">
+            <a:avLst/>
+          </a:prstGeom>
+          <a:solidFill>
+            <a:srgbClr val="0070C0"/>
+          </a:solidFill>
+          <a:ln>
+            <a:noFill/>
+          </a:ln>
+        </p:spPr>
+        <p:txBody>
+          <a:bodyPr wrap="none" anchor="ctr"/>
+          <a:lstStyle/>
+          <a:p>
+            <a:endParaRPr lang="fr-FR"/>
+          </a:p>
+        </p:txBody>
+      </p:sp>
+      <p:sp>
+        <p:nvSpPr>
+          <p:cNvPr id="26630" name="PIC_Bandeau_Rect_Bot"/>
+          <p:cNvSpPr>
+            <a:spLocks noChangeArrowheads="1"/>
+          </p:cNvSpPr>
+          <p:nvPr/>
+        </p:nvSpPr>
+        <p:spPr bwMode="auto">
+          <a:xfrm>
+            <a:off x="0" y="4560886"/>
+            <a:ext cx="152400" cy="2286000"/>
+          </a:xfrm>
+          <a:prstGeom prst="rect">
+            <a:avLst/>
+          </a:prstGeom>
+          <a:solidFill>
+            <a:srgbClr val="FF6600"/>
+          </a:solidFill>
+          <a:ln>
+            <a:noFill/>
+          </a:ln>
+        </p:spPr>
+        <p:txBody>
+          <a:bodyPr wrap="none" anchor="ctr"/>
+          <a:lstStyle/>
+          <a:p>
+            <a:endParaRPr lang="fr-FR"/>
+          </a:p>
+        </p:txBody>
+      </p:sp>
+      <p:pic>
+        <p:nvPicPr>
+          <p:cNvPr id="26631" name="PIC_Bandeau_Logo" descr="image.jpeg"/>
+          <p:cNvPicPr>
+            <a:picLocks noChangeAspect="1"/>
+          </p:cNvPicPr>
+          <p:nvPr/>
+        </p:nvPicPr>
+        <p:blipFill>
+          <a:blip r:embed="rId3"/>
+          <a:stretch>
+            <a:fillRect/>
+          </a:stretch>
+        </p:blipFill>
+        <p:spPr>
+          <a:xfrm>
+            <a:off x="11470314" y="20203"/>
+            <a:ext cx="721686" cy="720000"/>
+          </a:xfrm>
+          <a:prstGeom prst="rect">
+            <a:avLst/>
+          </a:prstGeom>
+        </p:spPr>
+      </p:pic>
     </p:spTree>
     <p:extLst>
       <p:ext uri="{BB962C8B-B14F-4D97-AF65-F5344CB8AC3E}">
@@ -42091,6 +42997,157 @@
           </a:graphicData>
         </a:graphic>
       </p:graphicFrame>
+      <p:sp>
+        <p:nvSpPr>
+          <p:cNvPr id="24" name="PIC_Bandeau_Line"/>
+          <p:cNvSpPr>
+            <a:spLocks noChangeShapeType="1"/>
+          </p:cNvSpPr>
+          <p:nvPr/>
+        </p:nvSpPr>
+        <p:spPr bwMode="auto">
+          <a:xfrm>
+            <a:off x="622300" y="687388"/>
+            <a:ext cx="10769600" cy="0"/>
+          </a:xfrm>
+          <a:prstGeom prst="line">
+            <a:avLst/>
+          </a:prstGeom>
+          <a:noFill/>
+          <a:ln w="19050">
+            <a:solidFill>
+              <a:srgbClr val="0070C0"/>
+            </a:solidFill>
+            <a:round/>
+            <a:headEnd/>
+            <a:tailEnd/>
+          </a:ln>
+        </p:spPr>
+        <p:txBody>
+          <a:bodyPr/>
+          <a:lstStyle/>
+          <a:p>
+            <a:endParaRPr lang="fr-FR"/>
+          </a:p>
+        </p:txBody>
+      </p:sp>
+      <p:sp>
+        <p:nvSpPr>
+          <p:cNvPr id="25" name="PIC_Bandeau_Rect_Top"/>
+          <p:cNvSpPr>
+            <a:spLocks noChangeArrowheads="1"/>
+          </p:cNvSpPr>
+          <p:nvPr/>
+        </p:nvSpPr>
+        <p:spPr bwMode="auto">
+          <a:xfrm>
+            <a:off x="0" y="-9128"/>
+            <a:ext cx="152400" cy="2295128"/>
+          </a:xfrm>
+          <a:prstGeom prst="rect">
+            <a:avLst/>
+          </a:prstGeom>
+          <a:solidFill>
+            <a:srgbClr val="FF6600"/>
+          </a:solidFill>
+          <a:ln>
+            <a:noFill/>
+          </a:ln>
+        </p:spPr>
+        <p:txBody>
+          <a:bodyPr wrap="none" anchor="ctr"/>
+          <a:lstStyle/>
+          <a:p>
+            <a:endParaRPr lang="fr-FR"/>
+          </a:p>
+        </p:txBody>
+      </p:sp>
+      <p:sp>
+        <p:nvSpPr>
+          <p:cNvPr id="26" name="PIC_Bandeau_Rect_Mid"/>
+          <p:cNvSpPr>
+            <a:spLocks noChangeArrowheads="1"/>
+          </p:cNvSpPr>
+          <p:nvPr/>
+        </p:nvSpPr>
+        <p:spPr bwMode="auto">
+          <a:xfrm>
+            <a:off x="0" y="2286000"/>
+            <a:ext cx="152400" cy="2286000"/>
+          </a:xfrm>
+          <a:prstGeom prst="rect">
+            <a:avLst/>
+          </a:prstGeom>
+          <a:solidFill>
+            <a:srgbClr val="0070C0"/>
+          </a:solidFill>
+          <a:ln>
+            <a:noFill/>
+          </a:ln>
+        </p:spPr>
+        <p:txBody>
+          <a:bodyPr wrap="none" anchor="ctr"/>
+          <a:lstStyle/>
+          <a:p>
+            <a:endParaRPr lang="fr-FR"/>
+          </a:p>
+        </p:txBody>
+      </p:sp>
+      <p:sp>
+        <p:nvSpPr>
+          <p:cNvPr id="27" name="PIC_Bandeau_Rect_Bot"/>
+          <p:cNvSpPr>
+            <a:spLocks noChangeArrowheads="1"/>
+          </p:cNvSpPr>
+          <p:nvPr/>
+        </p:nvSpPr>
+        <p:spPr bwMode="auto">
+          <a:xfrm>
+            <a:off x="0" y="4560886"/>
+            <a:ext cx="152400" cy="2286000"/>
+          </a:xfrm>
+          <a:prstGeom prst="rect">
+            <a:avLst/>
+          </a:prstGeom>
+          <a:solidFill>
+            <a:srgbClr val="FF6600"/>
+          </a:solidFill>
+          <a:ln>
+            <a:noFill/>
+          </a:ln>
+        </p:spPr>
+        <p:txBody>
+          <a:bodyPr wrap="none" anchor="ctr"/>
+          <a:lstStyle/>
+          <a:p>
+            <a:endParaRPr lang="fr-FR"/>
+          </a:p>
+        </p:txBody>
+      </p:sp>
+      <p:pic>
+        <p:nvPicPr>
+          <p:cNvPr id="28" name="PIC_Bandeau_Logo" descr="image.jpeg"/>
+          <p:cNvPicPr>
+            <a:picLocks noChangeAspect="1"/>
+          </p:cNvPicPr>
+          <p:nvPr/>
+        </p:nvPicPr>
+        <p:blipFill>
+          <a:blip r:embed="rId8"/>
+          <a:stretch>
+            <a:fillRect/>
+          </a:stretch>
+        </p:blipFill>
+        <p:spPr>
+          <a:xfrm>
+            <a:off x="11470314" y="20203"/>
+            <a:ext cx="721686" cy="720000"/>
+          </a:xfrm>
+          <a:prstGeom prst="rect">
+            <a:avLst/>
+          </a:prstGeom>
+        </p:spPr>
+      </p:pic>
     </p:spTree>
     <p:extLst>
       <p:ext uri="{BB962C8B-B14F-4D97-AF65-F5344CB8AC3E}">
@@ -42542,6 +43599,157 @@
           </a:graphicData>
         </a:graphic>
       </p:graphicFrame>
+      <p:sp>
+        <p:nvSpPr>
+          <p:cNvPr id="15" name="PIC_Bandeau_Line"/>
+          <p:cNvSpPr>
+            <a:spLocks noChangeShapeType="1"/>
+          </p:cNvSpPr>
+          <p:nvPr/>
+        </p:nvSpPr>
+        <p:spPr bwMode="auto">
+          <a:xfrm>
+            <a:off x="622300" y="687388"/>
+            <a:ext cx="10769600" cy="0"/>
+          </a:xfrm>
+          <a:prstGeom prst="line">
+            <a:avLst/>
+          </a:prstGeom>
+          <a:noFill/>
+          <a:ln w="19050">
+            <a:solidFill>
+              <a:srgbClr val="0070C0"/>
+            </a:solidFill>
+            <a:round/>
+            <a:headEnd/>
+            <a:tailEnd/>
+          </a:ln>
+        </p:spPr>
+        <p:txBody>
+          <a:bodyPr/>
+          <a:lstStyle/>
+          <a:p>
+            <a:endParaRPr lang="fr-FR"/>
+          </a:p>
+        </p:txBody>
+      </p:sp>
+      <p:sp>
+        <p:nvSpPr>
+          <p:cNvPr id="16" name="PIC_Bandeau_Rect_Top"/>
+          <p:cNvSpPr>
+            <a:spLocks noChangeArrowheads="1"/>
+          </p:cNvSpPr>
+          <p:nvPr/>
+        </p:nvSpPr>
+        <p:spPr bwMode="auto">
+          <a:xfrm>
+            <a:off x="0" y="-9128"/>
+            <a:ext cx="152400" cy="2295128"/>
+          </a:xfrm>
+          <a:prstGeom prst="rect">
+            <a:avLst/>
+          </a:prstGeom>
+          <a:solidFill>
+            <a:srgbClr val="FF6600"/>
+          </a:solidFill>
+          <a:ln>
+            <a:noFill/>
+          </a:ln>
+        </p:spPr>
+        <p:txBody>
+          <a:bodyPr wrap="none" anchor="ctr"/>
+          <a:lstStyle/>
+          <a:p>
+            <a:endParaRPr lang="fr-FR"/>
+          </a:p>
+        </p:txBody>
+      </p:sp>
+      <p:sp>
+        <p:nvSpPr>
+          <p:cNvPr id="17" name="PIC_Bandeau_Rect_Mid"/>
+          <p:cNvSpPr>
+            <a:spLocks noChangeArrowheads="1"/>
+          </p:cNvSpPr>
+          <p:nvPr/>
+        </p:nvSpPr>
+        <p:spPr bwMode="auto">
+          <a:xfrm>
+            <a:off x="0" y="2286000"/>
+            <a:ext cx="152400" cy="2286000"/>
+          </a:xfrm>
+          <a:prstGeom prst="rect">
+            <a:avLst/>
+          </a:prstGeom>
+          <a:solidFill>
+            <a:srgbClr val="0070C0"/>
+          </a:solidFill>
+          <a:ln>
+            <a:noFill/>
+          </a:ln>
+        </p:spPr>
+        <p:txBody>
+          <a:bodyPr wrap="none" anchor="ctr"/>
+          <a:lstStyle/>
+          <a:p>
+            <a:endParaRPr lang="fr-FR"/>
+          </a:p>
+        </p:txBody>
+      </p:sp>
+      <p:sp>
+        <p:nvSpPr>
+          <p:cNvPr id="18" name="PIC_Bandeau_Rect_Bot"/>
+          <p:cNvSpPr>
+            <a:spLocks noChangeArrowheads="1"/>
+          </p:cNvSpPr>
+          <p:nvPr/>
+        </p:nvSpPr>
+        <p:spPr bwMode="auto">
+          <a:xfrm>
+            <a:off x="0" y="4560886"/>
+            <a:ext cx="152400" cy="2286000"/>
+          </a:xfrm>
+          <a:prstGeom prst="rect">
+            <a:avLst/>
+          </a:prstGeom>
+          <a:solidFill>
+            <a:srgbClr val="FF6600"/>
+          </a:solidFill>
+          <a:ln>
+            <a:noFill/>
+          </a:ln>
+        </p:spPr>
+        <p:txBody>
+          <a:bodyPr wrap="none" anchor="ctr"/>
+          <a:lstStyle/>
+          <a:p>
+            <a:endParaRPr lang="fr-FR"/>
+          </a:p>
+        </p:txBody>
+      </p:sp>
+      <p:pic>
+        <p:nvPicPr>
+          <p:cNvPr id="19" name="PIC_Bandeau_Logo" descr="image.jpeg"/>
+          <p:cNvPicPr>
+            <a:picLocks noChangeAspect="1"/>
+          </p:cNvPicPr>
+          <p:nvPr/>
+        </p:nvPicPr>
+        <p:blipFill>
+          <a:blip r:embed="rId8"/>
+          <a:stretch>
+            <a:fillRect/>
+          </a:stretch>
+        </p:blipFill>
+        <p:spPr>
+          <a:xfrm>
+            <a:off x="11470314" y="20203"/>
+            <a:ext cx="721686" cy="720000"/>
+          </a:xfrm>
+          <a:prstGeom prst="rect">
+            <a:avLst/>
+          </a:prstGeom>
+        </p:spPr>
+      </p:pic>
     </p:spTree>
     <p:extLst>
       <p:ext uri="{BB962C8B-B14F-4D97-AF65-F5344CB8AC3E}">
@@ -42993,6 +44201,157 @@
           </a:graphicData>
         </a:graphic>
       </p:graphicFrame>
+      <p:sp>
+        <p:nvSpPr>
+          <p:cNvPr id="16" name="PIC_Bandeau_Line"/>
+          <p:cNvSpPr>
+            <a:spLocks noChangeShapeType="1"/>
+          </p:cNvSpPr>
+          <p:nvPr/>
+        </p:nvSpPr>
+        <p:spPr bwMode="auto">
+          <a:xfrm>
+            <a:off x="622300" y="687388"/>
+            <a:ext cx="10769600" cy="0"/>
+          </a:xfrm>
+          <a:prstGeom prst="line">
+            <a:avLst/>
+          </a:prstGeom>
+          <a:noFill/>
+          <a:ln w="19050">
+            <a:solidFill>
+              <a:srgbClr val="0070C0"/>
+            </a:solidFill>
+            <a:round/>
+            <a:headEnd/>
+            <a:tailEnd/>
+          </a:ln>
+        </p:spPr>
+        <p:txBody>
+          <a:bodyPr/>
+          <a:lstStyle/>
+          <a:p>
+            <a:endParaRPr lang="fr-FR"/>
+          </a:p>
+        </p:txBody>
+      </p:sp>
+      <p:sp>
+        <p:nvSpPr>
+          <p:cNvPr id="17" name="PIC_Bandeau_Rect_Top"/>
+          <p:cNvSpPr>
+            <a:spLocks noChangeArrowheads="1"/>
+          </p:cNvSpPr>
+          <p:nvPr/>
+        </p:nvSpPr>
+        <p:spPr bwMode="auto">
+          <a:xfrm>
+            <a:off x="0" y="-9128"/>
+            <a:ext cx="152400" cy="2295128"/>
+          </a:xfrm>
+          <a:prstGeom prst="rect">
+            <a:avLst/>
+          </a:prstGeom>
+          <a:solidFill>
+            <a:srgbClr val="FF6600"/>
+          </a:solidFill>
+          <a:ln>
+            <a:noFill/>
+          </a:ln>
+        </p:spPr>
+        <p:txBody>
+          <a:bodyPr wrap="none" anchor="ctr"/>
+          <a:lstStyle/>
+          <a:p>
+            <a:endParaRPr lang="fr-FR"/>
+          </a:p>
+        </p:txBody>
+      </p:sp>
+      <p:sp>
+        <p:nvSpPr>
+          <p:cNvPr id="18" name="PIC_Bandeau_Rect_Mid"/>
+          <p:cNvSpPr>
+            <a:spLocks noChangeArrowheads="1"/>
+          </p:cNvSpPr>
+          <p:nvPr/>
+        </p:nvSpPr>
+        <p:spPr bwMode="auto">
+          <a:xfrm>
+            <a:off x="0" y="2286000"/>
+            <a:ext cx="152400" cy="2286000"/>
+          </a:xfrm>
+          <a:prstGeom prst="rect">
+            <a:avLst/>
+          </a:prstGeom>
+          <a:solidFill>
+            <a:srgbClr val="0070C0"/>
+          </a:solidFill>
+          <a:ln>
+            <a:noFill/>
+          </a:ln>
+        </p:spPr>
+        <p:txBody>
+          <a:bodyPr wrap="none" anchor="ctr"/>
+          <a:lstStyle/>
+          <a:p>
+            <a:endParaRPr lang="fr-FR"/>
+          </a:p>
+        </p:txBody>
+      </p:sp>
+      <p:sp>
+        <p:nvSpPr>
+          <p:cNvPr id="19" name="PIC_Bandeau_Rect_Bot"/>
+          <p:cNvSpPr>
+            <a:spLocks noChangeArrowheads="1"/>
+          </p:cNvSpPr>
+          <p:nvPr/>
+        </p:nvSpPr>
+        <p:spPr bwMode="auto">
+          <a:xfrm>
+            <a:off x="0" y="4560886"/>
+            <a:ext cx="152400" cy="2286000"/>
+          </a:xfrm>
+          <a:prstGeom prst="rect">
+            <a:avLst/>
+          </a:prstGeom>
+          <a:solidFill>
+            <a:srgbClr val="FF6600"/>
+          </a:solidFill>
+          <a:ln>
+            <a:noFill/>
+          </a:ln>
+        </p:spPr>
+        <p:txBody>
+          <a:bodyPr wrap="none" anchor="ctr"/>
+          <a:lstStyle/>
+          <a:p>
+            <a:endParaRPr lang="fr-FR"/>
+          </a:p>
+        </p:txBody>
+      </p:sp>
+      <p:pic>
+        <p:nvPicPr>
+          <p:cNvPr id="20" name="PIC_Bandeau_Logo" descr="image.jpeg"/>
+          <p:cNvPicPr>
+            <a:picLocks noChangeAspect="1"/>
+          </p:cNvPicPr>
+          <p:nvPr/>
+        </p:nvPicPr>
+        <p:blipFill>
+          <a:blip r:embed="rId8"/>
+          <a:stretch>
+            <a:fillRect/>
+          </a:stretch>
+        </p:blipFill>
+        <p:spPr>
+          <a:xfrm>
+            <a:off x="11470314" y="20203"/>
+            <a:ext cx="721686" cy="720000"/>
+          </a:xfrm>
+          <a:prstGeom prst="rect">
+            <a:avLst/>
+          </a:prstGeom>
+        </p:spPr>
+      </p:pic>
     </p:spTree>
     <p:extLst>
       <p:ext uri="{BB962C8B-B14F-4D97-AF65-F5344CB8AC3E}">
@@ -43521,6 +44880,157 @@
           </a:graphicData>
         </a:graphic>
       </p:graphicFrame>
+      <p:sp>
+        <p:nvSpPr>
+          <p:cNvPr id="24" name="PIC_Bandeau_Line"/>
+          <p:cNvSpPr>
+            <a:spLocks noChangeShapeType="1"/>
+          </p:cNvSpPr>
+          <p:nvPr/>
+        </p:nvSpPr>
+        <p:spPr bwMode="auto">
+          <a:xfrm>
+            <a:off x="622300" y="687388"/>
+            <a:ext cx="10769600" cy="0"/>
+          </a:xfrm>
+          <a:prstGeom prst="line">
+            <a:avLst/>
+          </a:prstGeom>
+          <a:noFill/>
+          <a:ln w="19050">
+            <a:solidFill>
+              <a:srgbClr val="0070C0"/>
+            </a:solidFill>
+            <a:round/>
+            <a:headEnd/>
+            <a:tailEnd/>
+          </a:ln>
+        </p:spPr>
+        <p:txBody>
+          <a:bodyPr/>
+          <a:lstStyle/>
+          <a:p>
+            <a:endParaRPr lang="fr-FR"/>
+          </a:p>
+        </p:txBody>
+      </p:sp>
+      <p:sp>
+        <p:nvSpPr>
+          <p:cNvPr id="25" name="PIC_Bandeau_Rect_Top"/>
+          <p:cNvSpPr>
+            <a:spLocks noChangeArrowheads="1"/>
+          </p:cNvSpPr>
+          <p:nvPr/>
+        </p:nvSpPr>
+        <p:spPr bwMode="auto">
+          <a:xfrm>
+            <a:off x="0" y="-9128"/>
+            <a:ext cx="152400" cy="2295128"/>
+          </a:xfrm>
+          <a:prstGeom prst="rect">
+            <a:avLst/>
+          </a:prstGeom>
+          <a:solidFill>
+            <a:srgbClr val="FF6600"/>
+          </a:solidFill>
+          <a:ln>
+            <a:noFill/>
+          </a:ln>
+        </p:spPr>
+        <p:txBody>
+          <a:bodyPr wrap="none" anchor="ctr"/>
+          <a:lstStyle/>
+          <a:p>
+            <a:endParaRPr lang="fr-FR"/>
+          </a:p>
+        </p:txBody>
+      </p:sp>
+      <p:sp>
+        <p:nvSpPr>
+          <p:cNvPr id="26" name="PIC_Bandeau_Rect_Mid"/>
+          <p:cNvSpPr>
+            <a:spLocks noChangeArrowheads="1"/>
+          </p:cNvSpPr>
+          <p:nvPr/>
+        </p:nvSpPr>
+        <p:spPr bwMode="auto">
+          <a:xfrm>
+            <a:off x="0" y="2286000"/>
+            <a:ext cx="152400" cy="2286000"/>
+          </a:xfrm>
+          <a:prstGeom prst="rect">
+            <a:avLst/>
+          </a:prstGeom>
+          <a:solidFill>
+            <a:srgbClr val="0070C0"/>
+          </a:solidFill>
+          <a:ln>
+            <a:noFill/>
+          </a:ln>
+        </p:spPr>
+        <p:txBody>
+          <a:bodyPr wrap="none" anchor="ctr"/>
+          <a:lstStyle/>
+          <a:p>
+            <a:endParaRPr lang="fr-FR"/>
+          </a:p>
+        </p:txBody>
+      </p:sp>
+      <p:sp>
+        <p:nvSpPr>
+          <p:cNvPr id="27" name="PIC_Bandeau_Rect_Bot"/>
+          <p:cNvSpPr>
+            <a:spLocks noChangeArrowheads="1"/>
+          </p:cNvSpPr>
+          <p:nvPr/>
+        </p:nvSpPr>
+        <p:spPr bwMode="auto">
+          <a:xfrm>
+            <a:off x="0" y="4560886"/>
+            <a:ext cx="152400" cy="2286000"/>
+          </a:xfrm>
+          <a:prstGeom prst="rect">
+            <a:avLst/>
+          </a:prstGeom>
+          <a:solidFill>
+            <a:srgbClr val="FF6600"/>
+          </a:solidFill>
+          <a:ln>
+            <a:noFill/>
+          </a:ln>
+        </p:spPr>
+        <p:txBody>
+          <a:bodyPr wrap="none" anchor="ctr"/>
+          <a:lstStyle/>
+          <a:p>
+            <a:endParaRPr lang="fr-FR"/>
+          </a:p>
+        </p:txBody>
+      </p:sp>
+      <p:pic>
+        <p:nvPicPr>
+          <p:cNvPr id="28" name="PIC_Bandeau_Logo" descr="image.jpeg"/>
+          <p:cNvPicPr>
+            <a:picLocks noChangeAspect="1"/>
+          </p:cNvPicPr>
+          <p:nvPr/>
+        </p:nvPicPr>
+        <p:blipFill>
+          <a:blip r:embed="rId8"/>
+          <a:stretch>
+            <a:fillRect/>
+          </a:stretch>
+        </p:blipFill>
+        <p:spPr>
+          <a:xfrm>
+            <a:off x="11470314" y="20203"/>
+            <a:ext cx="721686" cy="720000"/>
+          </a:xfrm>
+          <a:prstGeom prst="rect">
+            <a:avLst/>
+          </a:prstGeom>
+        </p:spPr>
+      </p:pic>
     </p:spTree>
     <p:extLst>
       <p:ext uri="{BB962C8B-B14F-4D97-AF65-F5344CB8AC3E}">
@@ -43988,6 +45498,157 @@
           </a:graphicData>
         </a:graphic>
       </p:graphicFrame>
+      <p:sp>
+        <p:nvSpPr>
+          <p:cNvPr id="16" name="PIC_Bandeau_Line"/>
+          <p:cNvSpPr>
+            <a:spLocks noChangeShapeType="1"/>
+          </p:cNvSpPr>
+          <p:nvPr/>
+        </p:nvSpPr>
+        <p:spPr bwMode="auto">
+          <a:xfrm>
+            <a:off x="622300" y="687388"/>
+            <a:ext cx="10769600" cy="0"/>
+          </a:xfrm>
+          <a:prstGeom prst="line">
+            <a:avLst/>
+          </a:prstGeom>
+          <a:noFill/>
+          <a:ln w="19050">
+            <a:solidFill>
+              <a:srgbClr val="0070C0"/>
+            </a:solidFill>
+            <a:round/>
+            <a:headEnd/>
+            <a:tailEnd/>
+          </a:ln>
+        </p:spPr>
+        <p:txBody>
+          <a:bodyPr/>
+          <a:lstStyle/>
+          <a:p>
+            <a:endParaRPr lang="fr-FR"/>
+          </a:p>
+        </p:txBody>
+      </p:sp>
+      <p:sp>
+        <p:nvSpPr>
+          <p:cNvPr id="17" name="PIC_Bandeau_Rect_Top"/>
+          <p:cNvSpPr>
+            <a:spLocks noChangeArrowheads="1"/>
+          </p:cNvSpPr>
+          <p:nvPr/>
+        </p:nvSpPr>
+        <p:spPr bwMode="auto">
+          <a:xfrm>
+            <a:off x="0" y="-9128"/>
+            <a:ext cx="152400" cy="2295128"/>
+          </a:xfrm>
+          <a:prstGeom prst="rect">
+            <a:avLst/>
+          </a:prstGeom>
+          <a:solidFill>
+            <a:srgbClr val="FF6600"/>
+          </a:solidFill>
+          <a:ln>
+            <a:noFill/>
+          </a:ln>
+        </p:spPr>
+        <p:txBody>
+          <a:bodyPr wrap="none" anchor="ctr"/>
+          <a:lstStyle/>
+          <a:p>
+            <a:endParaRPr lang="fr-FR"/>
+          </a:p>
+        </p:txBody>
+      </p:sp>
+      <p:sp>
+        <p:nvSpPr>
+          <p:cNvPr id="18" name="PIC_Bandeau_Rect_Mid"/>
+          <p:cNvSpPr>
+            <a:spLocks noChangeArrowheads="1"/>
+          </p:cNvSpPr>
+          <p:nvPr/>
+        </p:nvSpPr>
+        <p:spPr bwMode="auto">
+          <a:xfrm>
+            <a:off x="0" y="2286000"/>
+            <a:ext cx="152400" cy="2286000"/>
+          </a:xfrm>
+          <a:prstGeom prst="rect">
+            <a:avLst/>
+          </a:prstGeom>
+          <a:solidFill>
+            <a:srgbClr val="0070C0"/>
+          </a:solidFill>
+          <a:ln>
+            <a:noFill/>
+          </a:ln>
+        </p:spPr>
+        <p:txBody>
+          <a:bodyPr wrap="none" anchor="ctr"/>
+          <a:lstStyle/>
+          <a:p>
+            <a:endParaRPr lang="fr-FR"/>
+          </a:p>
+        </p:txBody>
+      </p:sp>
+      <p:sp>
+        <p:nvSpPr>
+          <p:cNvPr id="19" name="PIC_Bandeau_Rect_Bot"/>
+          <p:cNvSpPr>
+            <a:spLocks noChangeArrowheads="1"/>
+          </p:cNvSpPr>
+          <p:nvPr/>
+        </p:nvSpPr>
+        <p:spPr bwMode="auto">
+          <a:xfrm>
+            <a:off x="0" y="4560886"/>
+            <a:ext cx="152400" cy="2286000"/>
+          </a:xfrm>
+          <a:prstGeom prst="rect">
+            <a:avLst/>
+          </a:prstGeom>
+          <a:solidFill>
+            <a:srgbClr val="FF6600"/>
+          </a:solidFill>
+          <a:ln>
+            <a:noFill/>
+          </a:ln>
+        </p:spPr>
+        <p:txBody>
+          <a:bodyPr wrap="none" anchor="ctr"/>
+          <a:lstStyle/>
+          <a:p>
+            <a:endParaRPr lang="fr-FR"/>
+          </a:p>
+        </p:txBody>
+      </p:sp>
+      <p:pic>
+        <p:nvPicPr>
+          <p:cNvPr id="20" name="PIC_Bandeau_Logo" descr="image.jpeg"/>
+          <p:cNvPicPr>
+            <a:picLocks noChangeAspect="1"/>
+          </p:cNvPicPr>
+          <p:nvPr/>
+        </p:nvPicPr>
+        <p:blipFill>
+          <a:blip r:embed="rId8"/>
+          <a:stretch>
+            <a:fillRect/>
+          </a:stretch>
+        </p:blipFill>
+        <p:spPr>
+          <a:xfrm>
+            <a:off x="11470314" y="20203"/>
+            <a:ext cx="721686" cy="720000"/>
+          </a:xfrm>
+          <a:prstGeom prst="rect">
+            <a:avLst/>
+          </a:prstGeom>
+        </p:spPr>
+      </p:pic>
     </p:spTree>
     <p:extLst>
       <p:ext uri="{BB962C8B-B14F-4D97-AF65-F5344CB8AC3E}">
@@ -44455,6 +46116,157 @@
           </a:graphicData>
         </a:graphic>
       </p:graphicFrame>
+      <p:sp>
+        <p:nvSpPr>
+          <p:cNvPr id="16" name="PIC_Bandeau_Line"/>
+          <p:cNvSpPr>
+            <a:spLocks noChangeShapeType="1"/>
+          </p:cNvSpPr>
+          <p:nvPr/>
+        </p:nvSpPr>
+        <p:spPr bwMode="auto">
+          <a:xfrm>
+            <a:off x="622300" y="687388"/>
+            <a:ext cx="10769600" cy="0"/>
+          </a:xfrm>
+          <a:prstGeom prst="line">
+            <a:avLst/>
+          </a:prstGeom>
+          <a:noFill/>
+          <a:ln w="19050">
+            <a:solidFill>
+              <a:srgbClr val="0070C0"/>
+            </a:solidFill>
+            <a:round/>
+            <a:headEnd/>
+            <a:tailEnd/>
+          </a:ln>
+        </p:spPr>
+        <p:txBody>
+          <a:bodyPr/>
+          <a:lstStyle/>
+          <a:p>
+            <a:endParaRPr lang="fr-FR"/>
+          </a:p>
+        </p:txBody>
+      </p:sp>
+      <p:sp>
+        <p:nvSpPr>
+          <p:cNvPr id="17" name="PIC_Bandeau_Rect_Top"/>
+          <p:cNvSpPr>
+            <a:spLocks noChangeArrowheads="1"/>
+          </p:cNvSpPr>
+          <p:nvPr/>
+        </p:nvSpPr>
+        <p:spPr bwMode="auto">
+          <a:xfrm>
+            <a:off x="0" y="-9128"/>
+            <a:ext cx="152400" cy="2295128"/>
+          </a:xfrm>
+          <a:prstGeom prst="rect">
+            <a:avLst/>
+          </a:prstGeom>
+          <a:solidFill>
+            <a:srgbClr val="FF6600"/>
+          </a:solidFill>
+          <a:ln>
+            <a:noFill/>
+          </a:ln>
+        </p:spPr>
+        <p:txBody>
+          <a:bodyPr wrap="none" anchor="ctr"/>
+          <a:lstStyle/>
+          <a:p>
+            <a:endParaRPr lang="fr-FR"/>
+          </a:p>
+        </p:txBody>
+      </p:sp>
+      <p:sp>
+        <p:nvSpPr>
+          <p:cNvPr id="18" name="PIC_Bandeau_Rect_Mid"/>
+          <p:cNvSpPr>
+            <a:spLocks noChangeArrowheads="1"/>
+          </p:cNvSpPr>
+          <p:nvPr/>
+        </p:nvSpPr>
+        <p:spPr bwMode="auto">
+          <a:xfrm>
+            <a:off x="0" y="2286000"/>
+            <a:ext cx="152400" cy="2286000"/>
+          </a:xfrm>
+          <a:prstGeom prst="rect">
+            <a:avLst/>
+          </a:prstGeom>
+          <a:solidFill>
+            <a:srgbClr val="0070C0"/>
+          </a:solidFill>
+          <a:ln>
+            <a:noFill/>
+          </a:ln>
+        </p:spPr>
+        <p:txBody>
+          <a:bodyPr wrap="none" anchor="ctr"/>
+          <a:lstStyle/>
+          <a:p>
+            <a:endParaRPr lang="fr-FR"/>
+          </a:p>
+        </p:txBody>
+      </p:sp>
+      <p:sp>
+        <p:nvSpPr>
+          <p:cNvPr id="19" name="PIC_Bandeau_Rect_Bot"/>
+          <p:cNvSpPr>
+            <a:spLocks noChangeArrowheads="1"/>
+          </p:cNvSpPr>
+          <p:nvPr/>
+        </p:nvSpPr>
+        <p:spPr bwMode="auto">
+          <a:xfrm>
+            <a:off x="0" y="4560886"/>
+            <a:ext cx="152400" cy="2286000"/>
+          </a:xfrm>
+          <a:prstGeom prst="rect">
+            <a:avLst/>
+          </a:prstGeom>
+          <a:solidFill>
+            <a:srgbClr val="FF6600"/>
+          </a:solidFill>
+          <a:ln>
+            <a:noFill/>
+          </a:ln>
+        </p:spPr>
+        <p:txBody>
+          <a:bodyPr wrap="none" anchor="ctr"/>
+          <a:lstStyle/>
+          <a:p>
+            <a:endParaRPr lang="fr-FR"/>
+          </a:p>
+        </p:txBody>
+      </p:sp>
+      <p:pic>
+        <p:nvPicPr>
+          <p:cNvPr id="20" name="PIC_Bandeau_Logo" descr="image.jpeg"/>
+          <p:cNvPicPr>
+            <a:picLocks noChangeAspect="1"/>
+          </p:cNvPicPr>
+          <p:nvPr/>
+        </p:nvPicPr>
+        <p:blipFill>
+          <a:blip r:embed="rId8"/>
+          <a:stretch>
+            <a:fillRect/>
+          </a:stretch>
+        </p:blipFill>
+        <p:spPr>
+          <a:xfrm>
+            <a:off x="11470314" y="20203"/>
+            <a:ext cx="721686" cy="720000"/>
+          </a:xfrm>
+          <a:prstGeom prst="rect">
+            <a:avLst/>
+          </a:prstGeom>
+        </p:spPr>
+      </p:pic>
     </p:spTree>
     <p:extLst>
       <p:ext uri="{BB962C8B-B14F-4D97-AF65-F5344CB8AC3E}">

--- a/templates/analysis-block.pptx
+++ b/templates/analysis-block.pptx
@@ -44469,7 +44469,7 @@
                 <a:latin typeface="Calibri" panose="020F0502020204030204" pitchFamily="34" charset="0"/>
                 <a:ea typeface="Times New Roman" panose="02020603050405020304" pitchFamily="18" charset="0"/>
               </a:rPr>
-              <a:t>4. Les conditions d’accueils étaient bien respecter </a:t>
+              <a:t>4. Les conditions d’accueil étaient bien respectées</a:t>
             </a:r>
             <a:endParaRPr lang="fr-FR" sz="2400" b="1" dirty="0"/>
           </a:p>

--- a/templates/analysis-block.pptx
+++ b/templates/analysis-block.pptx
@@ -39361,7 +39361,7 @@
         </p:nvGraphicFramePr>
         <p:xfrm>
           <a:off x="633234" y="871111"/>
-          <a:ext cx="8128000" cy="5418667"/>
+          <a:ext cx="8128799" cy="4021200"/>
         </p:xfrm>
         <a:graphic>
           <a:graphicData uri="http://schemas.openxmlformats.org/drawingml/2006/chart">
@@ -39979,7 +39979,7 @@
         </p:nvGraphicFramePr>
         <p:xfrm>
           <a:off x="633234" y="871111"/>
-          <a:ext cx="8128000" cy="5418667"/>
+          <a:ext cx="8128799" cy="4021200"/>
         </p:xfrm>
         <a:graphic>
           <a:graphicData uri="http://schemas.openxmlformats.org/drawingml/2006/chart">
@@ -40597,7 +40597,7 @@
         </p:nvGraphicFramePr>
         <p:xfrm>
           <a:off x="633234" y="871111"/>
-          <a:ext cx="8128000" cy="5418667"/>
+          <a:ext cx="8128799" cy="4021200"/>
         </p:xfrm>
         <a:graphic>
           <a:graphicData uri="http://schemas.openxmlformats.org/drawingml/2006/chart">
@@ -41215,7 +41215,7 @@
         </p:nvGraphicFramePr>
         <p:xfrm>
           <a:off x="633234" y="871111"/>
-          <a:ext cx="8128000" cy="5418667"/>
+          <a:ext cx="8128799" cy="4021200"/>
         </p:xfrm>
         <a:graphic>
           <a:graphicData uri="http://schemas.openxmlformats.org/drawingml/2006/chart">
@@ -42989,7 +42989,7 @@
         </p:nvGraphicFramePr>
         <p:xfrm>
           <a:off x="633234" y="871111"/>
-          <a:ext cx="8128000" cy="5418667"/>
+          <a:ext cx="8128799" cy="4021200"/>
         </p:xfrm>
         <a:graphic>
           <a:graphicData uri="http://schemas.openxmlformats.org/drawingml/2006/chart">
@@ -43591,7 +43591,7 @@
         </p:nvGraphicFramePr>
         <p:xfrm>
           <a:off x="633234" y="871111"/>
-          <a:ext cx="8128000" cy="5418667"/>
+          <a:ext cx="8128799" cy="4021200"/>
         </p:xfrm>
         <a:graphic>
           <a:graphicData uri="http://schemas.openxmlformats.org/drawingml/2006/chart">
@@ -44193,7 +44193,7 @@
         </p:nvGraphicFramePr>
         <p:xfrm>
           <a:off x="633234" y="871111"/>
-          <a:ext cx="8128000" cy="5418667"/>
+          <a:ext cx="8128799" cy="4021200"/>
         </p:xfrm>
         <a:graphic>
           <a:graphicData uri="http://schemas.openxmlformats.org/drawingml/2006/chart">
@@ -45490,7 +45490,7 @@
         </p:nvGraphicFramePr>
         <p:xfrm>
           <a:off x="633234" y="871111"/>
-          <a:ext cx="8128000" cy="5418667"/>
+          <a:ext cx="8128799" cy="4021200"/>
         </p:xfrm>
         <a:graphic>
           <a:graphicData uri="http://schemas.openxmlformats.org/drawingml/2006/chart">
@@ -46108,7 +46108,7 @@
         </p:nvGraphicFramePr>
         <p:xfrm>
           <a:off x="633234" y="871111"/>
-          <a:ext cx="8128000" cy="5418667"/>
+          <a:ext cx="8128799" cy="4021200"/>
         </p:xfrm>
         <a:graphic>
           <a:graphicData uri="http://schemas.openxmlformats.org/drawingml/2006/chart">

--- a/templates/analysis-block.pptx
+++ b/templates/analysis-block.pptx
@@ -929,17 +929,6 @@
       </c:spPr>
     </c:backWall>
     <c:plotArea>
-      <c:layout>
-        <c:manualLayout>
-          <c:layoutTarget val="inner"/>
-          <c:xMode val="edge"/>
-          <c:yMode val="edge"/>
-          <c:x val="5.6250000000000001E-2"/>
-          <c:y val="8.8281121537824719E-2"/>
-          <c:w val="0.84062499999999996"/>
-          <c:h val="0.82343775692435062"/>
-        </c:manualLayout>
-      </c:layout>
       <c:pie3DChart>
         <c:varyColors val="1"/>
         <c:ser>
@@ -1059,12 +1048,6 @@
           <c:dLbls>
             <c:dLbl>
               <c:idx val="0"/>
-              <c:layout>
-                <c:manualLayout>
-                  <c:x val="-7.8125000000000004E-4"/>
-                  <c:y val="-0.44531247260627022"/>
-                </c:manualLayout>
-              </c:layout>
               <c:spPr>
                 <a:noFill/>
                 <a:ln>
@@ -1504,17 +1487,6 @@
       </c:spPr>
     </c:backWall>
     <c:plotArea>
-      <c:layout>
-        <c:manualLayout>
-          <c:layoutTarget val="inner"/>
-          <c:xMode val="edge"/>
-          <c:yMode val="edge"/>
-          <c:x val="5.6250000000000001E-2"/>
-          <c:y val="8.8281121537824719E-2"/>
-          <c:w val="0.84062499999999996"/>
-          <c:h val="0.82343775692435062"/>
-        </c:manualLayout>
-      </c:layout>
       <c:pie3DChart>
         <c:varyColors val="1"/>
         <c:ser>
@@ -1634,12 +1606,6 @@
           <c:dLbls>
             <c:dLbl>
               <c:idx val="0"/>
-              <c:layout>
-                <c:manualLayout>
-                  <c:x val="-7.8125000000000004E-4"/>
-                  <c:y val="-0.44531247260627022"/>
-                </c:manualLayout>
-              </c:layout>
               <c:spPr>
                 <a:noFill/>
                 <a:ln>
@@ -2079,17 +2045,6 @@
       </c:spPr>
     </c:backWall>
     <c:plotArea>
-      <c:layout>
-        <c:manualLayout>
-          <c:layoutTarget val="inner"/>
-          <c:xMode val="edge"/>
-          <c:yMode val="edge"/>
-          <c:x val="5.6250000000000001E-2"/>
-          <c:y val="8.8281121537824719E-2"/>
-          <c:w val="0.84062499999999996"/>
-          <c:h val="0.82343775692435062"/>
-        </c:manualLayout>
-      </c:layout>
       <c:pie3DChart>
         <c:varyColors val="1"/>
         <c:ser>
@@ -2209,12 +2164,6 @@
           <c:dLbls>
             <c:dLbl>
               <c:idx val="0"/>
-              <c:layout>
-                <c:manualLayout>
-                  <c:x val="-7.8125000000000004E-4"/>
-                  <c:y val="-0.44531247260627022"/>
-                </c:manualLayout>
-              </c:layout>
               <c:spPr>
                 <a:noFill/>
                 <a:ln>
@@ -2654,17 +2603,6 @@
       </c:spPr>
     </c:backWall>
     <c:plotArea>
-      <c:layout>
-        <c:manualLayout>
-          <c:layoutTarget val="inner"/>
-          <c:xMode val="edge"/>
-          <c:yMode val="edge"/>
-          <c:x val="5.6250000000000001E-2"/>
-          <c:y val="8.8281121537824719E-2"/>
-          <c:w val="0.84062499999999996"/>
-          <c:h val="0.82343775692435062"/>
-        </c:manualLayout>
-      </c:layout>
       <c:pie3DChart>
         <c:varyColors val="1"/>
         <c:ser>
@@ -2784,12 +2722,6 @@
           <c:dLbls>
             <c:dLbl>
               <c:idx val="0"/>
-              <c:layout>
-                <c:manualLayout>
-                  <c:x val="-7.8125000000000004E-4"/>
-                  <c:y val="-0.44531247260627022"/>
-                </c:manualLayout>
-              </c:layout>
               <c:spPr>
                 <a:noFill/>
                 <a:ln>
@@ -3229,17 +3161,6 @@
       </c:spPr>
     </c:backWall>
     <c:plotArea>
-      <c:layout>
-        <c:manualLayout>
-          <c:layoutTarget val="inner"/>
-          <c:xMode val="edge"/>
-          <c:yMode val="edge"/>
-          <c:x val="5.3125307548469641E-2"/>
-          <c:y val="9.4597632547498256E-2"/>
-          <c:w val="0.84062499999999996"/>
-          <c:h val="0.82343775692435062"/>
-        </c:manualLayout>
-      </c:layout>
       <c:pie3DChart>
         <c:varyColors val="1"/>
         <c:ser>
@@ -3359,12 +3280,6 @@
           <c:dLbls>
             <c:dLbl>
               <c:idx val="0"/>
-              <c:layout>
-                <c:manualLayout>
-                  <c:x val="-0.22732149886822164"/>
-                  <c:y val="-0.35056475678901816"/>
-                </c:manualLayout>
-              </c:layout>
               <c:spPr>
                 <a:noFill/>
                 <a:ln>
@@ -3809,17 +3724,6 @@
       </c:spPr>
     </c:backWall>
     <c:plotArea>
-      <c:layout>
-        <c:manualLayout>
-          <c:layoutTarget val="inner"/>
-          <c:xMode val="edge"/>
-          <c:yMode val="edge"/>
-          <c:x val="5.6250000000000001E-2"/>
-          <c:y val="8.8281121537824719E-2"/>
-          <c:w val="0.84062499999999996"/>
-          <c:h val="0.82343775692435062"/>
-        </c:manualLayout>
-      </c:layout>
       <c:pie3DChart>
         <c:varyColors val="1"/>
         <c:ser>
@@ -3939,12 +3843,6 @@
           <c:dLbls>
             <c:dLbl>
               <c:idx val="0"/>
-              <c:layout>
-                <c:manualLayout>
-                  <c:x val="-7.8125000000000004E-4"/>
-                  <c:y val="-0.44531247260627022"/>
-                </c:manualLayout>
-              </c:layout>
               <c:spPr>
                 <a:noFill/>
                 <a:ln>
@@ -4384,17 +4282,6 @@
       </c:spPr>
     </c:backWall>
     <c:plotArea>
-      <c:layout>
-        <c:manualLayout>
-          <c:layoutTarget val="inner"/>
-          <c:xMode val="edge"/>
-          <c:yMode val="edge"/>
-          <c:x val="5.6250000000000001E-2"/>
-          <c:y val="8.8281121537824719E-2"/>
-          <c:w val="0.84062499999999996"/>
-          <c:h val="0.82343775692435062"/>
-        </c:manualLayout>
-      </c:layout>
       <c:pie3DChart>
         <c:varyColors val="1"/>
         <c:ser>
@@ -4514,12 +4401,6 @@
           <c:dLbls>
             <c:dLbl>
               <c:idx val="0"/>
-              <c:layout>
-                <c:manualLayout>
-                  <c:x val="-7.8125000000000004E-4"/>
-                  <c:y val="-0.44531247260627022"/>
-                </c:manualLayout>
-              </c:layout>
               <c:spPr>
                 <a:noFill/>
                 <a:ln>
@@ -4959,17 +4840,6 @@
       </c:spPr>
     </c:backWall>
     <c:plotArea>
-      <c:layout>
-        <c:manualLayout>
-          <c:layoutTarget val="inner"/>
-          <c:xMode val="edge"/>
-          <c:yMode val="edge"/>
-          <c:x val="5.6250000000000001E-2"/>
-          <c:y val="8.8281121537824719E-2"/>
-          <c:w val="0.84062499999999996"/>
-          <c:h val="0.82343775692435062"/>
-        </c:manualLayout>
-      </c:layout>
       <c:pie3DChart>
         <c:varyColors val="1"/>
         <c:ser>
@@ -5089,12 +4959,6 @@
           <c:dLbls>
             <c:dLbl>
               <c:idx val="0"/>
-              <c:layout>
-                <c:manualLayout>
-                  <c:x val="-7.8125000000000004E-4"/>
-                  <c:y val="-0.44531247260627022"/>
-                </c:manualLayout>
-              </c:layout>
               <c:spPr>
                 <a:noFill/>
                 <a:ln>
@@ -5534,17 +5398,6 @@
       </c:spPr>
     </c:backWall>
     <c:plotArea>
-      <c:layout>
-        <c:manualLayout>
-          <c:layoutTarget val="inner"/>
-          <c:xMode val="edge"/>
-          <c:yMode val="edge"/>
-          <c:x val="5.6250000000000001E-2"/>
-          <c:y val="8.8281121537824719E-2"/>
-          <c:w val="0.84062499999999996"/>
-          <c:h val="0.82343775692435062"/>
-        </c:manualLayout>
-      </c:layout>
       <c:pie3DChart>
         <c:varyColors val="1"/>
         <c:ser>
@@ -5664,12 +5517,6 @@
           <c:dLbls>
             <c:dLbl>
               <c:idx val="0"/>
-              <c:layout>
-                <c:manualLayout>
-                  <c:x val="-7.8125000000000004E-4"/>
-                  <c:y val="-0.44531247260627022"/>
-                </c:manualLayout>
-              </c:layout>
               <c:spPr>
                 <a:noFill/>
                 <a:ln>
@@ -6109,17 +5956,6 @@
       </c:spPr>
     </c:backWall>
     <c:plotArea>
-      <c:layout>
-        <c:manualLayout>
-          <c:layoutTarget val="inner"/>
-          <c:xMode val="edge"/>
-          <c:yMode val="edge"/>
-          <c:x val="5.6250000000000001E-2"/>
-          <c:y val="8.8281121537824719E-2"/>
-          <c:w val="0.84062499999999996"/>
-          <c:h val="0.82343775692435062"/>
-        </c:manualLayout>
-      </c:layout>
       <c:pie3DChart>
         <c:varyColors val="1"/>
         <c:ser>
@@ -6239,12 +6075,6 @@
           <c:dLbls>
             <c:dLbl>
               <c:idx val="0"/>
-              <c:layout>
-                <c:manualLayout>
-                  <c:x val="-7.8125000000000004E-4"/>
-                  <c:y val="-0.44531247260627022"/>
-                </c:manualLayout>
-              </c:layout>
               <c:spPr>
                 <a:noFill/>
                 <a:ln>

--- a/templates/analysis-block.pptx
+++ b/templates/analysis-block.pptx
@@ -1161,6 +1161,7 @@
                 <a:endParaRPr lang="fr-FR"/>
               </a:p>
             </c:txPr>
+            <c:dLblPos val="ctr"/>
             <c:showLegendKey val="0"/>
             <c:showVal val="1"/>
             <c:showCatName val="0"/>
@@ -1719,6 +1720,7 @@
                 <a:endParaRPr lang="fr-FR"/>
               </a:p>
             </c:txPr>
+            <c:dLblPos val="ctr"/>
             <c:showLegendKey val="0"/>
             <c:showVal val="1"/>
             <c:showCatName val="0"/>
@@ -2277,6 +2279,7 @@
                 <a:endParaRPr lang="fr-FR"/>
               </a:p>
             </c:txPr>
+            <c:dLblPos val="ctr"/>
             <c:showLegendKey val="0"/>
             <c:showVal val="1"/>
             <c:showCatName val="0"/>
@@ -2835,6 +2838,7 @@
                 <a:endParaRPr lang="fr-FR"/>
               </a:p>
             </c:txPr>
+            <c:dLblPos val="ctr"/>
             <c:showLegendKey val="0"/>
             <c:showVal val="1"/>
             <c:showCatName val="0"/>
@@ -3398,6 +3402,7 @@
                 <a:endParaRPr lang="fr-FR"/>
               </a:p>
             </c:txPr>
+            <c:dLblPos val="ctr"/>
             <c:showLegendKey val="0"/>
             <c:showVal val="1"/>
             <c:showCatName val="0"/>
@@ -3956,6 +3961,7 @@
                 <a:endParaRPr lang="fr-FR"/>
               </a:p>
             </c:txPr>
+            <c:dLblPos val="ctr"/>
             <c:showLegendKey val="0"/>
             <c:showVal val="1"/>
             <c:showCatName val="0"/>
@@ -4514,6 +4520,7 @@
                 <a:endParaRPr lang="fr-FR"/>
               </a:p>
             </c:txPr>
+            <c:dLblPos val="ctr"/>
             <c:showLegendKey val="0"/>
             <c:showVal val="1"/>
             <c:showCatName val="0"/>
@@ -5072,6 +5079,7 @@
                 <a:endParaRPr lang="fr-FR"/>
               </a:p>
             </c:txPr>
+            <c:dLblPos val="ctr"/>
             <c:showLegendKey val="0"/>
             <c:showVal val="1"/>
             <c:showCatName val="0"/>
@@ -5630,6 +5638,7 @@
                 <a:endParaRPr lang="fr-FR"/>
               </a:p>
             </c:txPr>
+            <c:dLblPos val="ctr"/>
             <c:showLegendKey val="0"/>
             <c:showVal val="1"/>
             <c:showCatName val="0"/>
@@ -6188,6 +6197,7 @@
                 <a:endParaRPr lang="fr-FR"/>
               </a:p>
             </c:txPr>
+            <c:dLblPos val="ctr"/>
             <c:showLegendKey val="0"/>
             <c:showVal val="1"/>
             <c:showCatName val="0"/>

--- a/templates/analysis-block.pptx
+++ b/templates/analysis-block.pptx
@@ -1161,7 +1161,6 @@
                 <a:endParaRPr lang="fr-FR"/>
               </a:p>
             </c:txPr>
-            <c:dLblPos val="ctr"/>
             <c:showLegendKey val="0"/>
             <c:showVal val="1"/>
             <c:showCatName val="0"/>
@@ -1720,7 +1719,6 @@
                 <a:endParaRPr lang="fr-FR"/>
               </a:p>
             </c:txPr>
-            <c:dLblPos val="ctr"/>
             <c:showLegendKey val="0"/>
             <c:showVal val="1"/>
             <c:showCatName val="0"/>
@@ -2279,7 +2277,6 @@
                 <a:endParaRPr lang="fr-FR"/>
               </a:p>
             </c:txPr>
-            <c:dLblPos val="ctr"/>
             <c:showLegendKey val="0"/>
             <c:showVal val="1"/>
             <c:showCatName val="0"/>
@@ -2838,7 +2835,6 @@
                 <a:endParaRPr lang="fr-FR"/>
               </a:p>
             </c:txPr>
-            <c:dLblPos val="ctr"/>
             <c:showLegendKey val="0"/>
             <c:showVal val="1"/>
             <c:showCatName val="0"/>
@@ -3402,7 +3398,6 @@
                 <a:endParaRPr lang="fr-FR"/>
               </a:p>
             </c:txPr>
-            <c:dLblPos val="ctr"/>
             <c:showLegendKey val="0"/>
             <c:showVal val="1"/>
             <c:showCatName val="0"/>
@@ -3961,7 +3956,6 @@
                 <a:endParaRPr lang="fr-FR"/>
               </a:p>
             </c:txPr>
-            <c:dLblPos val="ctr"/>
             <c:showLegendKey val="0"/>
             <c:showVal val="1"/>
             <c:showCatName val="0"/>
@@ -4520,7 +4514,6 @@
                 <a:endParaRPr lang="fr-FR"/>
               </a:p>
             </c:txPr>
-            <c:dLblPos val="ctr"/>
             <c:showLegendKey val="0"/>
             <c:showVal val="1"/>
             <c:showCatName val="0"/>
@@ -5079,7 +5072,6 @@
                 <a:endParaRPr lang="fr-FR"/>
               </a:p>
             </c:txPr>
-            <c:dLblPos val="ctr"/>
             <c:showLegendKey val="0"/>
             <c:showVal val="1"/>
             <c:showCatName val="0"/>
@@ -5638,7 +5630,6 @@
                 <a:endParaRPr lang="fr-FR"/>
               </a:p>
             </c:txPr>
-            <c:dLblPos val="ctr"/>
             <c:showLegendKey val="0"/>
             <c:showVal val="1"/>
             <c:showCatName val="0"/>
@@ -6197,7 +6188,6 @@
                 <a:endParaRPr lang="fr-FR"/>
               </a:p>
             </c:txPr>
-            <c:dLblPos val="ctr"/>
             <c:showLegendKey val="0"/>
             <c:showVal val="1"/>
             <c:showCatName val="0"/>

--- a/templates/analysis-block.pptx
+++ b/templates/analysis-block.pptx
@@ -929,6 +929,17 @@
       </c:spPr>
     </c:backWall>
     <c:plotArea>
+      <c:layout>
+        <c:manualLayout>
+          <c:layoutTarget val="inner"/>
+          <c:xMode val="edge"/>
+          <c:yMode val="edge"/>
+          <c:x val="5.6250000000000001E-2"/>
+          <c:y val="8.8281121537824719E-2"/>
+          <c:w val="0.84062499999999996"/>
+          <c:h val="0.82343775692435062"/>
+        </c:manualLayout>
+      </c:layout>
       <c:pie3DChart>
         <c:varyColors val="1"/>
         <c:ser>
@@ -1048,6 +1059,12 @@
           <c:dLbls>
             <c:dLbl>
               <c:idx val="0"/>
+              <c:layout>
+                <c:manualLayout>
+                  <c:x val="-7.8125000000000004E-4"/>
+                  <c:y val="-0.44531247260627022"/>
+                </c:manualLayout>
+              </c:layout>
               <c:spPr>
                 <a:noFill/>
                 <a:ln>
@@ -1487,6 +1504,17 @@
       </c:spPr>
     </c:backWall>
     <c:plotArea>
+      <c:layout>
+        <c:manualLayout>
+          <c:layoutTarget val="inner"/>
+          <c:xMode val="edge"/>
+          <c:yMode val="edge"/>
+          <c:x val="5.6250000000000001E-2"/>
+          <c:y val="8.8281121537824719E-2"/>
+          <c:w val="0.84062499999999996"/>
+          <c:h val="0.82343775692435062"/>
+        </c:manualLayout>
+      </c:layout>
       <c:pie3DChart>
         <c:varyColors val="1"/>
         <c:ser>
@@ -1606,6 +1634,12 @@
           <c:dLbls>
             <c:dLbl>
               <c:idx val="0"/>
+              <c:layout>
+                <c:manualLayout>
+                  <c:x val="-7.8125000000000004E-4"/>
+                  <c:y val="-0.44531247260627022"/>
+                </c:manualLayout>
+              </c:layout>
               <c:spPr>
                 <a:noFill/>
                 <a:ln>
@@ -2045,6 +2079,17 @@
       </c:spPr>
     </c:backWall>
     <c:plotArea>
+      <c:layout>
+        <c:manualLayout>
+          <c:layoutTarget val="inner"/>
+          <c:xMode val="edge"/>
+          <c:yMode val="edge"/>
+          <c:x val="5.6250000000000001E-2"/>
+          <c:y val="8.8281121537824719E-2"/>
+          <c:w val="0.84062499999999996"/>
+          <c:h val="0.82343775692435062"/>
+        </c:manualLayout>
+      </c:layout>
       <c:pie3DChart>
         <c:varyColors val="1"/>
         <c:ser>
@@ -2164,6 +2209,12 @@
           <c:dLbls>
             <c:dLbl>
               <c:idx val="0"/>
+              <c:layout>
+                <c:manualLayout>
+                  <c:x val="-7.8125000000000004E-4"/>
+                  <c:y val="-0.44531247260627022"/>
+                </c:manualLayout>
+              </c:layout>
               <c:spPr>
                 <a:noFill/>
                 <a:ln>
@@ -2603,6 +2654,17 @@
       </c:spPr>
     </c:backWall>
     <c:plotArea>
+      <c:layout>
+        <c:manualLayout>
+          <c:layoutTarget val="inner"/>
+          <c:xMode val="edge"/>
+          <c:yMode val="edge"/>
+          <c:x val="5.6250000000000001E-2"/>
+          <c:y val="8.8281121537824719E-2"/>
+          <c:w val="0.84062499999999996"/>
+          <c:h val="0.82343775692435062"/>
+        </c:manualLayout>
+      </c:layout>
       <c:pie3DChart>
         <c:varyColors val="1"/>
         <c:ser>
@@ -2722,6 +2784,12 @@
           <c:dLbls>
             <c:dLbl>
               <c:idx val="0"/>
+              <c:layout>
+                <c:manualLayout>
+                  <c:x val="-7.8125000000000004E-4"/>
+                  <c:y val="-0.44531247260627022"/>
+                </c:manualLayout>
+              </c:layout>
               <c:spPr>
                 <a:noFill/>
                 <a:ln>
@@ -3161,6 +3229,17 @@
       </c:spPr>
     </c:backWall>
     <c:plotArea>
+      <c:layout>
+        <c:manualLayout>
+          <c:layoutTarget val="inner"/>
+          <c:xMode val="edge"/>
+          <c:yMode val="edge"/>
+          <c:x val="5.3125307548469641E-2"/>
+          <c:y val="9.4597632547498256E-2"/>
+          <c:w val="0.84062499999999996"/>
+          <c:h val="0.82343775692435062"/>
+        </c:manualLayout>
+      </c:layout>
       <c:pie3DChart>
         <c:varyColors val="1"/>
         <c:ser>
@@ -3280,6 +3359,12 @@
           <c:dLbls>
             <c:dLbl>
               <c:idx val="0"/>
+              <c:layout>
+                <c:manualLayout>
+                  <c:x val="-0.22732149886822164"/>
+                  <c:y val="-0.35056475678901816"/>
+                </c:manualLayout>
+              </c:layout>
               <c:spPr>
                 <a:noFill/>
                 <a:ln>
@@ -3724,6 +3809,17 @@
       </c:spPr>
     </c:backWall>
     <c:plotArea>
+      <c:layout>
+        <c:manualLayout>
+          <c:layoutTarget val="inner"/>
+          <c:xMode val="edge"/>
+          <c:yMode val="edge"/>
+          <c:x val="5.6250000000000001E-2"/>
+          <c:y val="8.8281121537824719E-2"/>
+          <c:w val="0.84062499999999996"/>
+          <c:h val="0.82343775692435062"/>
+        </c:manualLayout>
+      </c:layout>
       <c:pie3DChart>
         <c:varyColors val="1"/>
         <c:ser>
@@ -3843,6 +3939,12 @@
           <c:dLbls>
             <c:dLbl>
               <c:idx val="0"/>
+              <c:layout>
+                <c:manualLayout>
+                  <c:x val="-7.8125000000000004E-4"/>
+                  <c:y val="-0.44531247260627022"/>
+                </c:manualLayout>
+              </c:layout>
               <c:spPr>
                 <a:noFill/>
                 <a:ln>
@@ -4282,6 +4384,17 @@
       </c:spPr>
     </c:backWall>
     <c:plotArea>
+      <c:layout>
+        <c:manualLayout>
+          <c:layoutTarget val="inner"/>
+          <c:xMode val="edge"/>
+          <c:yMode val="edge"/>
+          <c:x val="5.6250000000000001E-2"/>
+          <c:y val="8.8281121537824719E-2"/>
+          <c:w val="0.84062499999999996"/>
+          <c:h val="0.82343775692435062"/>
+        </c:manualLayout>
+      </c:layout>
       <c:pie3DChart>
         <c:varyColors val="1"/>
         <c:ser>
@@ -4401,6 +4514,12 @@
           <c:dLbls>
             <c:dLbl>
               <c:idx val="0"/>
+              <c:layout>
+                <c:manualLayout>
+                  <c:x val="-7.8125000000000004E-4"/>
+                  <c:y val="-0.44531247260627022"/>
+                </c:manualLayout>
+              </c:layout>
               <c:spPr>
                 <a:noFill/>
                 <a:ln>
@@ -4840,6 +4959,17 @@
       </c:spPr>
     </c:backWall>
     <c:plotArea>
+      <c:layout>
+        <c:manualLayout>
+          <c:layoutTarget val="inner"/>
+          <c:xMode val="edge"/>
+          <c:yMode val="edge"/>
+          <c:x val="5.6250000000000001E-2"/>
+          <c:y val="8.8281121537824719E-2"/>
+          <c:w val="0.84062499999999996"/>
+          <c:h val="0.82343775692435062"/>
+        </c:manualLayout>
+      </c:layout>
       <c:pie3DChart>
         <c:varyColors val="1"/>
         <c:ser>
@@ -4959,6 +5089,12 @@
           <c:dLbls>
             <c:dLbl>
               <c:idx val="0"/>
+              <c:layout>
+                <c:manualLayout>
+                  <c:x val="-7.8125000000000004E-4"/>
+                  <c:y val="-0.44531247260627022"/>
+                </c:manualLayout>
+              </c:layout>
               <c:spPr>
                 <a:noFill/>
                 <a:ln>
@@ -5398,6 +5534,17 @@
       </c:spPr>
     </c:backWall>
     <c:plotArea>
+      <c:layout>
+        <c:manualLayout>
+          <c:layoutTarget val="inner"/>
+          <c:xMode val="edge"/>
+          <c:yMode val="edge"/>
+          <c:x val="5.6250000000000001E-2"/>
+          <c:y val="8.8281121537824719E-2"/>
+          <c:w val="0.84062499999999996"/>
+          <c:h val="0.82343775692435062"/>
+        </c:manualLayout>
+      </c:layout>
       <c:pie3DChart>
         <c:varyColors val="1"/>
         <c:ser>
@@ -5517,6 +5664,12 @@
           <c:dLbls>
             <c:dLbl>
               <c:idx val="0"/>
+              <c:layout>
+                <c:manualLayout>
+                  <c:x val="-7.8125000000000004E-4"/>
+                  <c:y val="-0.44531247260627022"/>
+                </c:manualLayout>
+              </c:layout>
               <c:spPr>
                 <a:noFill/>
                 <a:ln>
@@ -5956,6 +6109,17 @@
       </c:spPr>
     </c:backWall>
     <c:plotArea>
+      <c:layout>
+        <c:manualLayout>
+          <c:layoutTarget val="inner"/>
+          <c:xMode val="edge"/>
+          <c:yMode val="edge"/>
+          <c:x val="5.6250000000000001E-2"/>
+          <c:y val="8.8281121537824719E-2"/>
+          <c:w val="0.84062499999999996"/>
+          <c:h val="0.82343775692435062"/>
+        </c:manualLayout>
+      </c:layout>
       <c:pie3DChart>
         <c:varyColors val="1"/>
         <c:ser>
@@ -6075,6 +6239,12 @@
           <c:dLbls>
             <c:dLbl>
               <c:idx val="0"/>
+              <c:layout>
+                <c:manualLayout>
+                  <c:x val="-7.8125000000000004E-4"/>
+                  <c:y val="-0.44531247260627022"/>
+                </c:manualLayout>
+              </c:layout>
               <c:spPr>
                 <a:noFill/>
                 <a:ln>

--- a/templates/analysis-block.pptx
+++ b/templates/analysis-block.pptx
@@ -3361,8 +3361,8 @@
               <c:idx val="0"/>
               <c:layout>
                 <c:manualLayout>
-                  <c:x val="-0.22732149886822164"/>
-                  <c:y val="-0.35056475678901816"/>
+                  <c:x val="-7.8125000000000004E-4"/>
+                  <c:y val="-0.44531247260627022"/>
                 </c:manualLayout>
               </c:layout>
               <c:spPr>

--- a/templates/analysis-block.pptx
+++ b/templates/analysis-block.pptx
@@ -3234,8 +3234,8 @@
           <c:layoutTarget val="inner"/>
           <c:xMode val="edge"/>
           <c:yMode val="edge"/>
-          <c:x val="5.3125307548469641E-2"/>
-          <c:y val="9.4597632547498256E-2"/>
+          <c:x val="5.6250000000000001E-2"/>
+          <c:y val="8.8281121537824719E-2"/>
           <c:w val="0.84062499999999996"/>
           <c:h val="0.82343775692435062"/>
         </c:manualLayout>

--- a/templates/analysis-block.pptx
+++ b/templates/analysis-block.pptx
@@ -990,13 +990,13 @@
               </a:solidFill>
               <a:ln w="25400">
                 <a:solidFill>
-                  <a:schemeClr val="lt1"/>
+                  <a:srgbClr val="FFFF00"/>
                 </a:solidFill>
               </a:ln>
               <a:effectLst/>
               <a:sp3d contourW="25400">
                 <a:contourClr>
-                  <a:schemeClr val="lt1"/>
+                  <a:srgbClr val="FFFF00"/>
                 </a:contourClr>
               </a:sp3d>
             </c:spPr>
@@ -1015,13 +1015,13 @@
               </a:solidFill>
               <a:ln w="25400">
                 <a:solidFill>
-                  <a:schemeClr val="lt1"/>
+                  <a:srgbClr val="FFC000"/>
                 </a:solidFill>
               </a:ln>
               <a:effectLst/>
               <a:sp3d contourW="25400">
                 <a:contourClr>
-                  <a:schemeClr val="lt1"/>
+                  <a:srgbClr val="FFC000"/>
                 </a:contourClr>
               </a:sp3d>
             </c:spPr>
@@ -1040,13 +1040,13 @@
               </a:solidFill>
               <a:ln w="25400">
                 <a:solidFill>
-                  <a:schemeClr val="lt1"/>
+                  <a:srgbClr val="FF0000"/>
                 </a:solidFill>
               </a:ln>
               <a:effectLst/>
               <a:sp3d contourW="25400">
                 <a:contourClr>
-                  <a:schemeClr val="lt1"/>
+                  <a:srgbClr val="FF0000"/>
                 </a:contourClr>
               </a:sp3d>
             </c:spPr>
@@ -1259,13 +1259,13 @@
               </a:solidFill>
               <a:ln w="25400">
                 <a:solidFill>
-                  <a:schemeClr val="lt1"/>
+                  <a:schemeClr val="accent1"/>
                 </a:solidFill>
               </a:ln>
               <a:effectLst/>
               <a:sp3d contourW="25400">
                 <a:contourClr>
-                  <a:schemeClr val="lt1"/>
+                  <a:schemeClr val="accent1"/>
                 </a:contourClr>
               </a:sp3d>
             </c:spPr>
@@ -1284,13 +1284,13 @@
               </a:solidFill>
               <a:ln w="25400">
                 <a:solidFill>
-                  <a:schemeClr val="lt1"/>
+                  <a:schemeClr val="accent2"/>
                 </a:solidFill>
               </a:ln>
               <a:effectLst/>
               <a:sp3d contourW="25400">
                 <a:contourClr>
-                  <a:schemeClr val="lt1"/>
+                  <a:schemeClr val="accent2"/>
                 </a:contourClr>
               </a:sp3d>
             </c:spPr>
@@ -1309,13 +1309,13 @@
               </a:solidFill>
               <a:ln w="25400">
                 <a:solidFill>
-                  <a:schemeClr val="lt1"/>
+                  <a:schemeClr val="accent3"/>
                 </a:solidFill>
               </a:ln>
               <a:effectLst/>
               <a:sp3d contourW="25400">
                 <a:contourClr>
-                  <a:schemeClr val="lt1"/>
+                  <a:schemeClr val="accent3"/>
                 </a:contourClr>
               </a:sp3d>
             </c:spPr>
@@ -1334,13 +1334,13 @@
               </a:solidFill>
               <a:ln w="25400">
                 <a:solidFill>
-                  <a:schemeClr val="lt1"/>
+                  <a:schemeClr val="accent4"/>
                 </a:solidFill>
               </a:ln>
               <a:effectLst/>
               <a:sp3d contourW="25400">
                 <a:contourClr>
-                  <a:schemeClr val="lt1"/>
+                  <a:schemeClr val="accent4"/>
                 </a:contourClr>
               </a:sp3d>
             </c:spPr>
@@ -1565,13 +1565,13 @@
               </a:solidFill>
               <a:ln w="25400">
                 <a:solidFill>
-                  <a:schemeClr val="lt1"/>
+                  <a:srgbClr val="FFFF00"/>
                 </a:solidFill>
               </a:ln>
               <a:effectLst/>
               <a:sp3d contourW="25400">
                 <a:contourClr>
-                  <a:schemeClr val="lt1"/>
+                  <a:srgbClr val="FFFF00"/>
                 </a:contourClr>
               </a:sp3d>
             </c:spPr>
@@ -1590,13 +1590,13 @@
               </a:solidFill>
               <a:ln w="25400">
                 <a:solidFill>
-                  <a:schemeClr val="lt1"/>
+                  <a:srgbClr val="FFC000"/>
                 </a:solidFill>
               </a:ln>
               <a:effectLst/>
               <a:sp3d contourW="25400">
                 <a:contourClr>
-                  <a:schemeClr val="lt1"/>
+                  <a:srgbClr val="FFC000"/>
                 </a:contourClr>
               </a:sp3d>
             </c:spPr>
@@ -1615,13 +1615,13 @@
               </a:solidFill>
               <a:ln w="25400">
                 <a:solidFill>
-                  <a:schemeClr val="lt1"/>
+                  <a:srgbClr val="FF0000"/>
                 </a:solidFill>
               </a:ln>
               <a:effectLst/>
               <a:sp3d contourW="25400">
                 <a:contourClr>
-                  <a:schemeClr val="lt1"/>
+                  <a:srgbClr val="FF0000"/>
                 </a:contourClr>
               </a:sp3d>
             </c:spPr>
@@ -1834,13 +1834,13 @@
               </a:solidFill>
               <a:ln w="25400">
                 <a:solidFill>
-                  <a:schemeClr val="lt1"/>
+                  <a:schemeClr val="accent1"/>
                 </a:solidFill>
               </a:ln>
               <a:effectLst/>
               <a:sp3d contourW="25400">
                 <a:contourClr>
-                  <a:schemeClr val="lt1"/>
+                  <a:schemeClr val="accent1"/>
                 </a:contourClr>
               </a:sp3d>
             </c:spPr>
@@ -1859,13 +1859,13 @@
               </a:solidFill>
               <a:ln w="25400">
                 <a:solidFill>
-                  <a:schemeClr val="lt1"/>
+                  <a:schemeClr val="accent2"/>
                 </a:solidFill>
               </a:ln>
               <a:effectLst/>
               <a:sp3d contourW="25400">
                 <a:contourClr>
-                  <a:schemeClr val="lt1"/>
+                  <a:schemeClr val="accent2"/>
                 </a:contourClr>
               </a:sp3d>
             </c:spPr>
@@ -1884,13 +1884,13 @@
               </a:solidFill>
               <a:ln w="25400">
                 <a:solidFill>
-                  <a:schemeClr val="lt1"/>
+                  <a:schemeClr val="accent3"/>
                 </a:solidFill>
               </a:ln>
               <a:effectLst/>
               <a:sp3d contourW="25400">
                 <a:contourClr>
-                  <a:schemeClr val="lt1"/>
+                  <a:schemeClr val="accent3"/>
                 </a:contourClr>
               </a:sp3d>
             </c:spPr>
@@ -1909,13 +1909,13 @@
               </a:solidFill>
               <a:ln w="25400">
                 <a:solidFill>
-                  <a:schemeClr val="lt1"/>
+                  <a:schemeClr val="accent4"/>
                 </a:solidFill>
               </a:ln>
               <a:effectLst/>
               <a:sp3d contourW="25400">
                 <a:contourClr>
-                  <a:schemeClr val="lt1"/>
+                  <a:schemeClr val="accent4"/>
                 </a:contourClr>
               </a:sp3d>
             </c:spPr>
@@ -2140,13 +2140,13 @@
               </a:solidFill>
               <a:ln w="25400">
                 <a:solidFill>
-                  <a:schemeClr val="lt1"/>
+                  <a:srgbClr val="FFFF00"/>
                 </a:solidFill>
               </a:ln>
               <a:effectLst/>
               <a:sp3d contourW="25400">
                 <a:contourClr>
-                  <a:schemeClr val="lt1"/>
+                  <a:srgbClr val="FFFF00"/>
                 </a:contourClr>
               </a:sp3d>
             </c:spPr>
@@ -2165,13 +2165,13 @@
               </a:solidFill>
               <a:ln w="25400">
                 <a:solidFill>
-                  <a:schemeClr val="lt1"/>
+                  <a:srgbClr val="FFC000"/>
                 </a:solidFill>
               </a:ln>
               <a:effectLst/>
               <a:sp3d contourW="25400">
                 <a:contourClr>
-                  <a:schemeClr val="lt1"/>
+                  <a:srgbClr val="FFC000"/>
                 </a:contourClr>
               </a:sp3d>
             </c:spPr>
@@ -2190,13 +2190,13 @@
               </a:solidFill>
               <a:ln w="25400">
                 <a:solidFill>
-                  <a:schemeClr val="lt1"/>
+                  <a:srgbClr val="FF0000"/>
                 </a:solidFill>
               </a:ln>
               <a:effectLst/>
               <a:sp3d contourW="25400">
                 <a:contourClr>
-                  <a:schemeClr val="lt1"/>
+                  <a:srgbClr val="FF0000"/>
                 </a:contourClr>
               </a:sp3d>
             </c:spPr>
@@ -2409,13 +2409,13 @@
               </a:solidFill>
               <a:ln w="25400">
                 <a:solidFill>
-                  <a:schemeClr val="lt1"/>
+                  <a:schemeClr val="accent1"/>
                 </a:solidFill>
               </a:ln>
               <a:effectLst/>
               <a:sp3d contourW="25400">
                 <a:contourClr>
-                  <a:schemeClr val="lt1"/>
+                  <a:schemeClr val="accent1"/>
                 </a:contourClr>
               </a:sp3d>
             </c:spPr>
@@ -2434,13 +2434,13 @@
               </a:solidFill>
               <a:ln w="25400">
                 <a:solidFill>
-                  <a:schemeClr val="lt1"/>
+                  <a:schemeClr val="accent2"/>
                 </a:solidFill>
               </a:ln>
               <a:effectLst/>
               <a:sp3d contourW="25400">
                 <a:contourClr>
-                  <a:schemeClr val="lt1"/>
+                  <a:schemeClr val="accent2"/>
                 </a:contourClr>
               </a:sp3d>
             </c:spPr>
@@ -2459,13 +2459,13 @@
               </a:solidFill>
               <a:ln w="25400">
                 <a:solidFill>
-                  <a:schemeClr val="lt1"/>
+                  <a:schemeClr val="accent3"/>
                 </a:solidFill>
               </a:ln>
               <a:effectLst/>
               <a:sp3d contourW="25400">
                 <a:contourClr>
-                  <a:schemeClr val="lt1"/>
+                  <a:schemeClr val="accent3"/>
                 </a:contourClr>
               </a:sp3d>
             </c:spPr>
@@ -2484,13 +2484,13 @@
               </a:solidFill>
               <a:ln w="25400">
                 <a:solidFill>
-                  <a:schemeClr val="lt1"/>
+                  <a:schemeClr val="accent4"/>
                 </a:solidFill>
               </a:ln>
               <a:effectLst/>
               <a:sp3d contourW="25400">
                 <a:contourClr>
-                  <a:schemeClr val="lt1"/>
+                  <a:schemeClr val="accent4"/>
                 </a:contourClr>
               </a:sp3d>
             </c:spPr>
@@ -2715,13 +2715,13 @@
               </a:solidFill>
               <a:ln w="25400">
                 <a:solidFill>
-                  <a:schemeClr val="lt1"/>
+                  <a:srgbClr val="FFFF00"/>
                 </a:solidFill>
               </a:ln>
               <a:effectLst/>
               <a:sp3d contourW="25400">
                 <a:contourClr>
-                  <a:schemeClr val="lt1"/>
+                  <a:srgbClr val="FFFF00"/>
                 </a:contourClr>
               </a:sp3d>
             </c:spPr>
@@ -2740,13 +2740,13 @@
               </a:solidFill>
               <a:ln w="25400">
                 <a:solidFill>
-                  <a:schemeClr val="lt1"/>
+                  <a:srgbClr val="FFC000"/>
                 </a:solidFill>
               </a:ln>
               <a:effectLst/>
               <a:sp3d contourW="25400">
                 <a:contourClr>
-                  <a:schemeClr val="lt1"/>
+                  <a:srgbClr val="FFC000"/>
                 </a:contourClr>
               </a:sp3d>
             </c:spPr>
@@ -2765,13 +2765,13 @@
               </a:solidFill>
               <a:ln w="25400">
                 <a:solidFill>
-                  <a:schemeClr val="lt1"/>
+                  <a:srgbClr val="FF0000"/>
                 </a:solidFill>
               </a:ln>
               <a:effectLst/>
               <a:sp3d contourW="25400">
                 <a:contourClr>
-                  <a:schemeClr val="lt1"/>
+                  <a:srgbClr val="FF0000"/>
                 </a:contourClr>
               </a:sp3d>
             </c:spPr>
@@ -2984,13 +2984,13 @@
               </a:solidFill>
               <a:ln w="25400">
                 <a:solidFill>
-                  <a:schemeClr val="lt1"/>
+                  <a:schemeClr val="accent1"/>
                 </a:solidFill>
               </a:ln>
               <a:effectLst/>
               <a:sp3d contourW="25400">
                 <a:contourClr>
-                  <a:schemeClr val="lt1"/>
+                  <a:schemeClr val="accent1"/>
                 </a:contourClr>
               </a:sp3d>
             </c:spPr>
@@ -3009,13 +3009,13 @@
               </a:solidFill>
               <a:ln w="25400">
                 <a:solidFill>
-                  <a:schemeClr val="lt1"/>
+                  <a:schemeClr val="accent2"/>
                 </a:solidFill>
               </a:ln>
               <a:effectLst/>
               <a:sp3d contourW="25400">
                 <a:contourClr>
-                  <a:schemeClr val="lt1"/>
+                  <a:schemeClr val="accent2"/>
                 </a:contourClr>
               </a:sp3d>
             </c:spPr>
@@ -3034,13 +3034,13 @@
               </a:solidFill>
               <a:ln w="25400">
                 <a:solidFill>
-                  <a:schemeClr val="lt1"/>
+                  <a:schemeClr val="accent3"/>
                 </a:solidFill>
               </a:ln>
               <a:effectLst/>
               <a:sp3d contourW="25400">
                 <a:contourClr>
-                  <a:schemeClr val="lt1"/>
+                  <a:schemeClr val="accent3"/>
                 </a:contourClr>
               </a:sp3d>
             </c:spPr>
@@ -3059,13 +3059,13 @@
               </a:solidFill>
               <a:ln w="25400">
                 <a:solidFill>
-                  <a:schemeClr val="lt1"/>
+                  <a:schemeClr val="accent4"/>
                 </a:solidFill>
               </a:ln>
               <a:effectLst/>
               <a:sp3d contourW="25400">
                 <a:contourClr>
-                  <a:schemeClr val="lt1"/>
+                  <a:schemeClr val="accent4"/>
                 </a:contourClr>
               </a:sp3d>
             </c:spPr>
@@ -3290,13 +3290,13 @@
               </a:solidFill>
               <a:ln w="25400">
                 <a:solidFill>
-                  <a:schemeClr val="lt1"/>
+                  <a:srgbClr val="FFFF00"/>
                 </a:solidFill>
               </a:ln>
               <a:effectLst/>
               <a:sp3d contourW="25400">
                 <a:contourClr>
-                  <a:schemeClr val="lt1"/>
+                  <a:srgbClr val="FFFF00"/>
                 </a:contourClr>
               </a:sp3d>
             </c:spPr>
@@ -3315,13 +3315,13 @@
               </a:solidFill>
               <a:ln w="25400">
                 <a:solidFill>
-                  <a:schemeClr val="lt1"/>
+                  <a:srgbClr val="FFC000"/>
                 </a:solidFill>
               </a:ln>
               <a:effectLst/>
               <a:sp3d contourW="25400">
                 <a:contourClr>
-                  <a:schemeClr val="lt1"/>
+                  <a:srgbClr val="FFC000"/>
                 </a:contourClr>
               </a:sp3d>
             </c:spPr>
@@ -3340,13 +3340,13 @@
               </a:solidFill>
               <a:ln w="25400">
                 <a:solidFill>
-                  <a:schemeClr val="lt1"/>
+                  <a:srgbClr val="FF0000"/>
                 </a:solidFill>
               </a:ln>
               <a:effectLst/>
               <a:sp3d contourW="25400">
                 <a:contourClr>
-                  <a:schemeClr val="lt1"/>
+                  <a:srgbClr val="FF0000"/>
                 </a:contourClr>
               </a:sp3d>
             </c:spPr>
@@ -3564,13 +3564,13 @@
               </a:solidFill>
               <a:ln w="25400">
                 <a:solidFill>
-                  <a:schemeClr val="lt1"/>
+                  <a:schemeClr val="accent1"/>
                 </a:solidFill>
               </a:ln>
               <a:effectLst/>
               <a:sp3d contourW="25400">
                 <a:contourClr>
-                  <a:schemeClr val="lt1"/>
+                  <a:schemeClr val="accent1"/>
                 </a:contourClr>
               </a:sp3d>
             </c:spPr>
@@ -3589,13 +3589,13 @@
               </a:solidFill>
               <a:ln w="25400">
                 <a:solidFill>
-                  <a:schemeClr val="lt1"/>
+                  <a:schemeClr val="accent2"/>
                 </a:solidFill>
               </a:ln>
               <a:effectLst/>
               <a:sp3d contourW="25400">
                 <a:contourClr>
-                  <a:schemeClr val="lt1"/>
+                  <a:schemeClr val="accent2"/>
                 </a:contourClr>
               </a:sp3d>
             </c:spPr>
@@ -3614,13 +3614,13 @@
               </a:solidFill>
               <a:ln w="25400">
                 <a:solidFill>
-                  <a:schemeClr val="lt1"/>
+                  <a:schemeClr val="accent3"/>
                 </a:solidFill>
               </a:ln>
               <a:effectLst/>
               <a:sp3d contourW="25400">
                 <a:contourClr>
-                  <a:schemeClr val="lt1"/>
+                  <a:schemeClr val="accent3"/>
                 </a:contourClr>
               </a:sp3d>
             </c:spPr>
@@ -3639,13 +3639,13 @@
               </a:solidFill>
               <a:ln w="25400">
                 <a:solidFill>
-                  <a:schemeClr val="lt1"/>
+                  <a:schemeClr val="accent4"/>
                 </a:solidFill>
               </a:ln>
               <a:effectLst/>
               <a:sp3d contourW="25400">
                 <a:contourClr>
-                  <a:schemeClr val="lt1"/>
+                  <a:schemeClr val="accent4"/>
                 </a:contourClr>
               </a:sp3d>
             </c:spPr>
@@ -3870,13 +3870,13 @@
               </a:solidFill>
               <a:ln w="25400">
                 <a:solidFill>
-                  <a:schemeClr val="lt1"/>
+                  <a:srgbClr val="FFFF00"/>
                 </a:solidFill>
               </a:ln>
               <a:effectLst/>
               <a:sp3d contourW="25400">
                 <a:contourClr>
-                  <a:schemeClr val="lt1"/>
+                  <a:srgbClr val="FFFF00"/>
                 </a:contourClr>
               </a:sp3d>
             </c:spPr>
@@ -3895,13 +3895,13 @@
               </a:solidFill>
               <a:ln w="25400">
                 <a:solidFill>
-                  <a:schemeClr val="lt1"/>
+                  <a:srgbClr val="FFC000"/>
                 </a:solidFill>
               </a:ln>
               <a:effectLst/>
               <a:sp3d contourW="25400">
                 <a:contourClr>
-                  <a:schemeClr val="lt1"/>
+                  <a:srgbClr val="FFC000"/>
                 </a:contourClr>
               </a:sp3d>
             </c:spPr>
@@ -3920,13 +3920,13 @@
               </a:solidFill>
               <a:ln w="25400">
                 <a:solidFill>
-                  <a:schemeClr val="lt1"/>
+                  <a:srgbClr val="FF0000"/>
                 </a:solidFill>
               </a:ln>
               <a:effectLst/>
               <a:sp3d contourW="25400">
                 <a:contourClr>
-                  <a:schemeClr val="lt1"/>
+                  <a:srgbClr val="FF0000"/>
                 </a:contourClr>
               </a:sp3d>
             </c:spPr>
@@ -4139,13 +4139,13 @@
               </a:solidFill>
               <a:ln w="25400">
                 <a:solidFill>
-                  <a:schemeClr val="lt1"/>
+                  <a:schemeClr val="accent1"/>
                 </a:solidFill>
               </a:ln>
               <a:effectLst/>
               <a:sp3d contourW="25400">
                 <a:contourClr>
-                  <a:schemeClr val="lt1"/>
+                  <a:schemeClr val="accent1"/>
                 </a:contourClr>
               </a:sp3d>
             </c:spPr>
@@ -4164,13 +4164,13 @@
               </a:solidFill>
               <a:ln w="25400">
                 <a:solidFill>
-                  <a:schemeClr val="lt1"/>
+                  <a:schemeClr val="accent2"/>
                 </a:solidFill>
               </a:ln>
               <a:effectLst/>
               <a:sp3d contourW="25400">
                 <a:contourClr>
-                  <a:schemeClr val="lt1"/>
+                  <a:schemeClr val="accent2"/>
                 </a:contourClr>
               </a:sp3d>
             </c:spPr>
@@ -4189,13 +4189,13 @@
               </a:solidFill>
               <a:ln w="25400">
                 <a:solidFill>
-                  <a:schemeClr val="lt1"/>
+                  <a:schemeClr val="accent3"/>
                 </a:solidFill>
               </a:ln>
               <a:effectLst/>
               <a:sp3d contourW="25400">
                 <a:contourClr>
-                  <a:schemeClr val="lt1"/>
+                  <a:schemeClr val="accent3"/>
                 </a:contourClr>
               </a:sp3d>
             </c:spPr>
@@ -4214,13 +4214,13 @@
               </a:solidFill>
               <a:ln w="25400">
                 <a:solidFill>
-                  <a:schemeClr val="lt1"/>
+                  <a:schemeClr val="accent4"/>
                 </a:solidFill>
               </a:ln>
               <a:effectLst/>
               <a:sp3d contourW="25400">
                 <a:contourClr>
-                  <a:schemeClr val="lt1"/>
+                  <a:schemeClr val="accent4"/>
                 </a:contourClr>
               </a:sp3d>
             </c:spPr>
@@ -4445,13 +4445,13 @@
               </a:solidFill>
               <a:ln w="25400">
                 <a:solidFill>
-                  <a:schemeClr val="lt1"/>
+                  <a:srgbClr val="FFFF00"/>
                 </a:solidFill>
               </a:ln>
               <a:effectLst/>
               <a:sp3d contourW="25400">
                 <a:contourClr>
-                  <a:schemeClr val="lt1"/>
+                  <a:srgbClr val="FFFF00"/>
                 </a:contourClr>
               </a:sp3d>
             </c:spPr>
@@ -4470,13 +4470,13 @@
               </a:solidFill>
               <a:ln w="25400">
                 <a:solidFill>
-                  <a:schemeClr val="lt1"/>
+                  <a:srgbClr val="FFC000"/>
                 </a:solidFill>
               </a:ln>
               <a:effectLst/>
               <a:sp3d contourW="25400">
                 <a:contourClr>
-                  <a:schemeClr val="lt1"/>
+                  <a:srgbClr val="FFC000"/>
                 </a:contourClr>
               </a:sp3d>
             </c:spPr>
@@ -4495,13 +4495,13 @@
               </a:solidFill>
               <a:ln w="25400">
                 <a:solidFill>
-                  <a:schemeClr val="lt1"/>
+                  <a:srgbClr val="FF0000"/>
                 </a:solidFill>
               </a:ln>
               <a:effectLst/>
               <a:sp3d contourW="25400">
                 <a:contourClr>
-                  <a:schemeClr val="lt1"/>
+                  <a:srgbClr val="FF0000"/>
                 </a:contourClr>
               </a:sp3d>
             </c:spPr>
@@ -4714,13 +4714,13 @@
               </a:solidFill>
               <a:ln w="25400">
                 <a:solidFill>
-                  <a:schemeClr val="lt1"/>
+                  <a:schemeClr val="accent1"/>
                 </a:solidFill>
               </a:ln>
               <a:effectLst/>
               <a:sp3d contourW="25400">
                 <a:contourClr>
-                  <a:schemeClr val="lt1"/>
+                  <a:schemeClr val="accent1"/>
                 </a:contourClr>
               </a:sp3d>
             </c:spPr>
@@ -4739,13 +4739,13 @@
               </a:solidFill>
               <a:ln w="25400">
                 <a:solidFill>
-                  <a:schemeClr val="lt1"/>
+                  <a:schemeClr val="accent2"/>
                 </a:solidFill>
               </a:ln>
               <a:effectLst/>
               <a:sp3d contourW="25400">
                 <a:contourClr>
-                  <a:schemeClr val="lt1"/>
+                  <a:schemeClr val="accent2"/>
                 </a:contourClr>
               </a:sp3d>
             </c:spPr>
@@ -4764,13 +4764,13 @@
               </a:solidFill>
               <a:ln w="25400">
                 <a:solidFill>
-                  <a:schemeClr val="lt1"/>
+                  <a:schemeClr val="accent3"/>
                 </a:solidFill>
               </a:ln>
               <a:effectLst/>
               <a:sp3d contourW="25400">
                 <a:contourClr>
-                  <a:schemeClr val="lt1"/>
+                  <a:schemeClr val="accent3"/>
                 </a:contourClr>
               </a:sp3d>
             </c:spPr>
@@ -4789,13 +4789,13 @@
               </a:solidFill>
               <a:ln w="25400">
                 <a:solidFill>
-                  <a:schemeClr val="lt1"/>
+                  <a:schemeClr val="accent4"/>
                 </a:solidFill>
               </a:ln>
               <a:effectLst/>
               <a:sp3d contourW="25400">
                 <a:contourClr>
-                  <a:schemeClr val="lt1"/>
+                  <a:schemeClr val="accent4"/>
                 </a:contourClr>
               </a:sp3d>
             </c:spPr>
@@ -5020,13 +5020,13 @@
               </a:solidFill>
               <a:ln w="25400">
                 <a:solidFill>
-                  <a:schemeClr val="lt1"/>
+                  <a:srgbClr val="FFFF00"/>
                 </a:solidFill>
               </a:ln>
               <a:effectLst/>
               <a:sp3d contourW="25400">
                 <a:contourClr>
-                  <a:schemeClr val="lt1"/>
+                  <a:srgbClr val="FFFF00"/>
                 </a:contourClr>
               </a:sp3d>
             </c:spPr>
@@ -5045,13 +5045,13 @@
               </a:solidFill>
               <a:ln w="25400">
                 <a:solidFill>
-                  <a:schemeClr val="lt1"/>
+                  <a:srgbClr val="FFC000"/>
                 </a:solidFill>
               </a:ln>
               <a:effectLst/>
               <a:sp3d contourW="25400">
                 <a:contourClr>
-                  <a:schemeClr val="lt1"/>
+                  <a:srgbClr val="FFC000"/>
                 </a:contourClr>
               </a:sp3d>
             </c:spPr>
@@ -5070,13 +5070,13 @@
               </a:solidFill>
               <a:ln w="25400">
                 <a:solidFill>
-                  <a:schemeClr val="lt1"/>
+                  <a:srgbClr val="FF0000"/>
                 </a:solidFill>
               </a:ln>
               <a:effectLst/>
               <a:sp3d contourW="25400">
                 <a:contourClr>
-                  <a:schemeClr val="lt1"/>
+                  <a:srgbClr val="FF0000"/>
                 </a:contourClr>
               </a:sp3d>
             </c:spPr>
@@ -5289,13 +5289,13 @@
               </a:solidFill>
               <a:ln w="25400">
                 <a:solidFill>
-                  <a:schemeClr val="lt1"/>
+                  <a:schemeClr val="accent1"/>
                 </a:solidFill>
               </a:ln>
               <a:effectLst/>
               <a:sp3d contourW="25400">
                 <a:contourClr>
-                  <a:schemeClr val="lt1"/>
+                  <a:schemeClr val="accent1"/>
                 </a:contourClr>
               </a:sp3d>
             </c:spPr>
@@ -5314,13 +5314,13 @@
               </a:solidFill>
               <a:ln w="25400">
                 <a:solidFill>
-                  <a:schemeClr val="lt1"/>
+                  <a:schemeClr val="accent2"/>
                 </a:solidFill>
               </a:ln>
               <a:effectLst/>
               <a:sp3d contourW="25400">
                 <a:contourClr>
-                  <a:schemeClr val="lt1"/>
+                  <a:schemeClr val="accent2"/>
                 </a:contourClr>
               </a:sp3d>
             </c:spPr>
@@ -5339,13 +5339,13 @@
               </a:solidFill>
               <a:ln w="25400">
                 <a:solidFill>
-                  <a:schemeClr val="lt1"/>
+                  <a:schemeClr val="accent3"/>
                 </a:solidFill>
               </a:ln>
               <a:effectLst/>
               <a:sp3d contourW="25400">
                 <a:contourClr>
-                  <a:schemeClr val="lt1"/>
+                  <a:schemeClr val="accent3"/>
                 </a:contourClr>
               </a:sp3d>
             </c:spPr>
@@ -5364,13 +5364,13 @@
               </a:solidFill>
               <a:ln w="25400">
                 <a:solidFill>
-                  <a:schemeClr val="lt1"/>
+                  <a:schemeClr val="accent4"/>
                 </a:solidFill>
               </a:ln>
               <a:effectLst/>
               <a:sp3d contourW="25400">
                 <a:contourClr>
-                  <a:schemeClr val="lt1"/>
+                  <a:schemeClr val="accent4"/>
                 </a:contourClr>
               </a:sp3d>
             </c:spPr>
@@ -5595,13 +5595,13 @@
               </a:solidFill>
               <a:ln w="25400">
                 <a:solidFill>
-                  <a:schemeClr val="lt1"/>
+                  <a:srgbClr val="FFFF00"/>
                 </a:solidFill>
               </a:ln>
               <a:effectLst/>
               <a:sp3d contourW="25400">
                 <a:contourClr>
-                  <a:schemeClr val="lt1"/>
+                  <a:srgbClr val="FFFF00"/>
                 </a:contourClr>
               </a:sp3d>
             </c:spPr>
@@ -5620,13 +5620,13 @@
               </a:solidFill>
               <a:ln w="25400">
                 <a:solidFill>
-                  <a:schemeClr val="lt1"/>
+                  <a:srgbClr val="FFC000"/>
                 </a:solidFill>
               </a:ln>
               <a:effectLst/>
               <a:sp3d contourW="25400">
                 <a:contourClr>
-                  <a:schemeClr val="lt1"/>
+                  <a:srgbClr val="FFC000"/>
                 </a:contourClr>
               </a:sp3d>
             </c:spPr>
@@ -5645,13 +5645,13 @@
               </a:solidFill>
               <a:ln w="25400">
                 <a:solidFill>
-                  <a:schemeClr val="lt1"/>
+                  <a:srgbClr val="FF0000"/>
                 </a:solidFill>
               </a:ln>
               <a:effectLst/>
               <a:sp3d contourW="25400">
                 <a:contourClr>
-                  <a:schemeClr val="lt1"/>
+                  <a:srgbClr val="FF0000"/>
                 </a:contourClr>
               </a:sp3d>
             </c:spPr>
@@ -5864,13 +5864,13 @@
               </a:solidFill>
               <a:ln w="25400">
                 <a:solidFill>
-                  <a:schemeClr val="lt1"/>
+                  <a:schemeClr val="accent1"/>
                 </a:solidFill>
               </a:ln>
               <a:effectLst/>
               <a:sp3d contourW="25400">
                 <a:contourClr>
-                  <a:schemeClr val="lt1"/>
+                  <a:schemeClr val="accent1"/>
                 </a:contourClr>
               </a:sp3d>
             </c:spPr>
@@ -5889,13 +5889,13 @@
               </a:solidFill>
               <a:ln w="25400">
                 <a:solidFill>
-                  <a:schemeClr val="lt1"/>
+                  <a:schemeClr val="accent2"/>
                 </a:solidFill>
               </a:ln>
               <a:effectLst/>
               <a:sp3d contourW="25400">
                 <a:contourClr>
-                  <a:schemeClr val="lt1"/>
+                  <a:schemeClr val="accent2"/>
                 </a:contourClr>
               </a:sp3d>
             </c:spPr>
@@ -5914,13 +5914,13 @@
               </a:solidFill>
               <a:ln w="25400">
                 <a:solidFill>
-                  <a:schemeClr val="lt1"/>
+                  <a:schemeClr val="accent3"/>
                 </a:solidFill>
               </a:ln>
               <a:effectLst/>
               <a:sp3d contourW="25400">
                 <a:contourClr>
-                  <a:schemeClr val="lt1"/>
+                  <a:schemeClr val="accent3"/>
                 </a:contourClr>
               </a:sp3d>
             </c:spPr>
@@ -5939,13 +5939,13 @@
               </a:solidFill>
               <a:ln w="25400">
                 <a:solidFill>
-                  <a:schemeClr val="lt1"/>
+                  <a:schemeClr val="accent4"/>
                 </a:solidFill>
               </a:ln>
               <a:effectLst/>
               <a:sp3d contourW="25400">
                 <a:contourClr>
-                  <a:schemeClr val="lt1"/>
+                  <a:schemeClr val="accent4"/>
                 </a:contourClr>
               </a:sp3d>
             </c:spPr>
@@ -6170,13 +6170,13 @@
               </a:solidFill>
               <a:ln w="25400">
                 <a:solidFill>
-                  <a:schemeClr val="lt1"/>
+                  <a:srgbClr val="FFFF00"/>
                 </a:solidFill>
               </a:ln>
               <a:effectLst/>
               <a:sp3d contourW="25400">
                 <a:contourClr>
-                  <a:schemeClr val="lt1"/>
+                  <a:srgbClr val="FFFF00"/>
                 </a:contourClr>
               </a:sp3d>
             </c:spPr>
@@ -6195,13 +6195,13 @@
               </a:solidFill>
               <a:ln w="25400">
                 <a:solidFill>
-                  <a:schemeClr val="lt1"/>
+                  <a:srgbClr val="FFC000"/>
                 </a:solidFill>
               </a:ln>
               <a:effectLst/>
               <a:sp3d contourW="25400">
                 <a:contourClr>
-                  <a:schemeClr val="lt1"/>
+                  <a:srgbClr val="FFC000"/>
                 </a:contourClr>
               </a:sp3d>
             </c:spPr>
@@ -6220,13 +6220,13 @@
               </a:solidFill>
               <a:ln w="25400">
                 <a:solidFill>
-                  <a:schemeClr val="lt1"/>
+                  <a:srgbClr val="FF0000"/>
                 </a:solidFill>
               </a:ln>
               <a:effectLst/>
               <a:sp3d contourW="25400">
                 <a:contourClr>
-                  <a:schemeClr val="lt1"/>
+                  <a:srgbClr val="FF0000"/>
                 </a:contourClr>
               </a:sp3d>
             </c:spPr>
@@ -6439,13 +6439,13 @@
               </a:solidFill>
               <a:ln w="25400">
                 <a:solidFill>
-                  <a:schemeClr val="lt1"/>
+                  <a:schemeClr val="accent1"/>
                 </a:solidFill>
               </a:ln>
               <a:effectLst/>
               <a:sp3d contourW="25400">
                 <a:contourClr>
-                  <a:schemeClr val="lt1"/>
+                  <a:schemeClr val="accent1"/>
                 </a:contourClr>
               </a:sp3d>
             </c:spPr>
@@ -6464,13 +6464,13 @@
               </a:solidFill>
               <a:ln w="25400">
                 <a:solidFill>
-                  <a:schemeClr val="lt1"/>
+                  <a:schemeClr val="accent2"/>
                 </a:solidFill>
               </a:ln>
               <a:effectLst/>
               <a:sp3d contourW="25400">
                 <a:contourClr>
-                  <a:schemeClr val="lt1"/>
+                  <a:schemeClr val="accent2"/>
                 </a:contourClr>
               </a:sp3d>
             </c:spPr>
@@ -6489,13 +6489,13 @@
               </a:solidFill>
               <a:ln w="25400">
                 <a:solidFill>
-                  <a:schemeClr val="lt1"/>
+                  <a:schemeClr val="accent3"/>
                 </a:solidFill>
               </a:ln>
               <a:effectLst/>
               <a:sp3d contourW="25400">
                 <a:contourClr>
-                  <a:schemeClr val="lt1"/>
+                  <a:schemeClr val="accent3"/>
                 </a:contourClr>
               </a:sp3d>
             </c:spPr>
@@ -6514,13 +6514,13 @@
               </a:solidFill>
               <a:ln w="25400">
                 <a:solidFill>
-                  <a:schemeClr val="lt1"/>
+                  <a:schemeClr val="accent4"/>
                 </a:solidFill>
               </a:ln>
               <a:effectLst/>
               <a:sp3d contourW="25400">
                 <a:contourClr>
-                  <a:schemeClr val="lt1"/>
+                  <a:schemeClr val="accent4"/>
                 </a:contourClr>
               </a:sp3d>
             </c:spPr>

--- a/templates/analysis-block.pptx
+++ b/templates/analysis-block.pptx
@@ -38665,15 +38665,16 @@
           <a:bodyPr anchor="ctr"/>
           <a:lstStyle/>
           <a:p>
-            <a:pPr eaLnBrk="1" hangingPunct="1">
+            <a:pPr eaLnBrk="1" hangingPunct="1" algn="l">
               <a:defRPr/>
             </a:pPr>
             <a:r>
-              <a:rPr lang="fr-FR" dirty="0">
+              <a:rPr lang="fr-FR" dirty="0" sz="2400" b="1">
                 <a:solidFill>
                   <a:schemeClr val="tx1"/>
                 </a:solidFill>
                 <a:effectLst/>
+                <a:latin typeface="Calibri"/>
               </a:rPr>
               <a:t>Evaluation de la formation</a:t>
             </a:r>
@@ -38902,6 +38903,157 @@
           </a:p>
         </p:txBody>
       </p:sp>
+      <p:sp>
+        <p:nvSpPr>
+          <p:cNvPr id="56325" name="PIC_Bandeau_Line"/>
+          <p:cNvSpPr>
+            <a:spLocks noChangeShapeType="1"/>
+          </p:cNvSpPr>
+          <p:nvPr/>
+        </p:nvSpPr>
+        <p:spPr bwMode="auto">
+          <a:xfrm>
+            <a:off x="622300" y="687388"/>
+            <a:ext cx="10769600" cy="0"/>
+          </a:xfrm>
+          <a:prstGeom prst="line">
+            <a:avLst/>
+          </a:prstGeom>
+          <a:noFill/>
+          <a:ln w="19050">
+            <a:solidFill>
+              <a:srgbClr val="0070C0"/>
+            </a:solidFill>
+            <a:round/>
+            <a:headEnd/>
+            <a:tailEnd/>
+          </a:ln>
+        </p:spPr>
+        <p:txBody>
+          <a:bodyPr/>
+          <a:lstStyle/>
+          <a:p>
+            <a:endParaRPr lang="fr-FR"/>
+          </a:p>
+        </p:txBody>
+      </p:sp>
+      <p:sp>
+        <p:nvSpPr>
+          <p:cNvPr id="56326" name="PIC_Bandeau_Rect_Top"/>
+          <p:cNvSpPr>
+            <a:spLocks noChangeArrowheads="1"/>
+          </p:cNvSpPr>
+          <p:nvPr/>
+        </p:nvSpPr>
+        <p:spPr bwMode="auto">
+          <a:xfrm>
+            <a:off x="0" y="-9128"/>
+            <a:ext cx="152400" cy="2295128"/>
+          </a:xfrm>
+          <a:prstGeom prst="rect">
+            <a:avLst/>
+          </a:prstGeom>
+          <a:solidFill>
+            <a:srgbClr val="99CC00"/>
+          </a:solidFill>
+          <a:ln>
+            <a:noFill/>
+          </a:ln>
+        </p:spPr>
+        <p:txBody>
+          <a:bodyPr wrap="none" anchor="ctr"/>
+          <a:lstStyle/>
+          <a:p>
+            <a:endParaRPr lang="fr-FR"/>
+          </a:p>
+        </p:txBody>
+      </p:sp>
+      <p:sp>
+        <p:nvSpPr>
+          <p:cNvPr id="56327" name="PIC_Bandeau_Rect_Mid"/>
+          <p:cNvSpPr>
+            <a:spLocks noChangeArrowheads="1"/>
+          </p:cNvSpPr>
+          <p:nvPr/>
+        </p:nvSpPr>
+        <p:spPr bwMode="auto">
+          <a:xfrm>
+            <a:off x="0" y="2286000"/>
+            <a:ext cx="152400" cy="2286000"/>
+          </a:xfrm>
+          <a:prstGeom prst="rect">
+            <a:avLst/>
+          </a:prstGeom>
+          <a:solidFill>
+            <a:srgbClr val="0070C0"/>
+          </a:solidFill>
+          <a:ln>
+            <a:noFill/>
+          </a:ln>
+        </p:spPr>
+        <p:txBody>
+          <a:bodyPr wrap="none" anchor="ctr"/>
+          <a:lstStyle/>
+          <a:p>
+            <a:endParaRPr lang="fr-FR"/>
+          </a:p>
+        </p:txBody>
+      </p:sp>
+      <p:sp>
+        <p:nvSpPr>
+          <p:cNvPr id="56328" name="PIC_Bandeau_Rect_Bot"/>
+          <p:cNvSpPr>
+            <a:spLocks noChangeArrowheads="1"/>
+          </p:cNvSpPr>
+          <p:nvPr/>
+        </p:nvSpPr>
+        <p:spPr bwMode="auto">
+          <a:xfrm>
+            <a:off x="0" y="4560886"/>
+            <a:ext cx="152400" cy="2286000"/>
+          </a:xfrm>
+          <a:prstGeom prst="rect">
+            <a:avLst/>
+          </a:prstGeom>
+          <a:solidFill>
+            <a:srgbClr val="FF6600"/>
+          </a:solidFill>
+          <a:ln>
+            <a:noFill/>
+          </a:ln>
+        </p:spPr>
+        <p:txBody>
+          <a:bodyPr wrap="none" anchor="ctr"/>
+          <a:lstStyle/>
+          <a:p>
+            <a:endParaRPr lang="fr-FR"/>
+          </a:p>
+        </p:txBody>
+      </p:sp>
+      <p:pic>
+        <p:nvPicPr>
+          <p:cNvPr id="56329" name="PIC_Bandeau_Logo" descr="image.jpeg"/>
+          <p:cNvPicPr>
+            <a:picLocks noChangeAspect="1"/>
+          </p:cNvPicPr>
+          <p:nvPr/>
+        </p:nvPicPr>
+        <p:blipFill>
+          <a:blip r:embed="rId4"/>
+          <a:stretch>
+            <a:fillRect/>
+          </a:stretch>
+        </p:blipFill>
+        <p:spPr>
+          <a:xfrm>
+            <a:off x="11470314" y="20203"/>
+            <a:ext cx="721686" cy="720000"/>
+          </a:xfrm>
+          <a:prstGeom prst="rect">
+            <a:avLst/>
+          </a:prstGeom>
+        </p:spPr>
+      </p:pic>
     </p:spTree>
     <p:extLst>
       <p:ext uri="{BB962C8B-B14F-4D97-AF65-F5344CB8AC3E}">
@@ -39420,7 +39572,7 @@
             <a:avLst/>
           </a:prstGeom>
           <a:solidFill>
-            <a:srgbClr val="FF6600"/>
+            <a:srgbClr val="99CC00"/>
           </a:solidFill>
           <a:ln>
             <a:noFill/>
@@ -40038,7 +40190,7 @@
             <a:avLst/>
           </a:prstGeom>
           <a:solidFill>
-            <a:srgbClr val="FF6600"/>
+            <a:srgbClr val="99CC00"/>
           </a:solidFill>
           <a:ln>
             <a:noFill/>
@@ -40656,7 +40808,7 @@
             <a:avLst/>
           </a:prstGeom>
           <a:solidFill>
-            <a:srgbClr val="FF6600"/>
+            <a:srgbClr val="99CC00"/>
           </a:solidFill>
           <a:ln>
             <a:noFill/>
@@ -41274,7 +41426,7 @@
             <a:avLst/>
           </a:prstGeom>
           <a:solidFill>
-            <a:srgbClr val="FF6600"/>
+            <a:srgbClr val="99CC00"/>
           </a:solidFill>
           <a:ln>
             <a:noFill/>
@@ -41424,7 +41576,7 @@
           <a:bodyPr anchor="ctr"/>
           <a:lstStyle/>
           <a:p>
-            <a:pPr eaLnBrk="1" hangingPunct="1">
+            <a:pPr eaLnBrk="1" hangingPunct="1" algn="l">
               <a:defRPr/>
             </a:pPr>
             <a:r>
@@ -41606,7 +41758,7 @@
             <a:avLst/>
           </a:prstGeom>
           <a:solidFill>
-            <a:srgbClr val="FF6600"/>
+            <a:srgbClr val="99CC00"/>
           </a:solidFill>
           <a:ln>
             <a:noFill/>
@@ -41756,7 +41908,7 @@
           <a:bodyPr anchor="ctr"/>
           <a:lstStyle/>
           <a:p>
-            <a:pPr eaLnBrk="1" hangingPunct="1">
+            <a:pPr eaLnBrk="1" hangingPunct="1" algn="l">
               <a:defRPr/>
             </a:pPr>
             <a:r>
@@ -41908,7 +42060,7 @@
             <a:avLst/>
           </a:prstGeom>
           <a:solidFill>
-            <a:srgbClr val="FF6600"/>
+            <a:srgbClr val="99CC00"/>
           </a:solidFill>
           <a:ln>
             <a:noFill/>
@@ -42226,12 +42378,14 @@
             </a:lvl9pPr>
           </a:lstStyle>
           <a:p>
-            <a:r>
-              <a:rPr lang="fr-FR" dirty="0">
+            <a:pPr algn="l"/>
+            <a:r>
+              <a:rPr lang="fr-FR" dirty="0" sz="2400" b="1">
                 <a:solidFill>
                   <a:schemeClr val="tx1"/>
                 </a:solidFill>
                 <a:effectLst/>
+                <a:latin typeface="Calibri"/>
               </a:rPr>
               <a:t>Les questions de la fiche d’évaluation pour mémoire</a:t>
             </a:r>
@@ -42351,6 +42505,157 @@
           </a:prstGeom>
         </p:spPr>
       </p:pic>
+      <p:sp>
+        <p:nvSpPr>
+          <p:cNvPr id="7" name="PIC_Bandeau_Line"/>
+          <p:cNvSpPr>
+            <a:spLocks noChangeShapeType="1"/>
+          </p:cNvSpPr>
+          <p:nvPr/>
+        </p:nvSpPr>
+        <p:spPr bwMode="auto">
+          <a:xfrm>
+            <a:off x="622300" y="687388"/>
+            <a:ext cx="10769600" cy="0"/>
+          </a:xfrm>
+          <a:prstGeom prst="line">
+            <a:avLst/>
+          </a:prstGeom>
+          <a:noFill/>
+          <a:ln w="19050">
+            <a:solidFill>
+              <a:srgbClr val="0070C0"/>
+            </a:solidFill>
+            <a:round/>
+            <a:headEnd/>
+            <a:tailEnd/>
+          </a:ln>
+        </p:spPr>
+        <p:txBody>
+          <a:bodyPr/>
+          <a:lstStyle/>
+          <a:p>
+            <a:endParaRPr lang="fr-FR"/>
+          </a:p>
+        </p:txBody>
+      </p:sp>
+      <p:sp>
+        <p:nvSpPr>
+          <p:cNvPr id="8" name="PIC_Bandeau_Rect_Top"/>
+          <p:cNvSpPr>
+            <a:spLocks noChangeArrowheads="1"/>
+          </p:cNvSpPr>
+          <p:nvPr/>
+        </p:nvSpPr>
+        <p:spPr bwMode="auto">
+          <a:xfrm>
+            <a:off x="0" y="-9128"/>
+            <a:ext cx="152400" cy="2295128"/>
+          </a:xfrm>
+          <a:prstGeom prst="rect">
+            <a:avLst/>
+          </a:prstGeom>
+          <a:solidFill>
+            <a:srgbClr val="99CC00"/>
+          </a:solidFill>
+          <a:ln>
+            <a:noFill/>
+          </a:ln>
+        </p:spPr>
+        <p:txBody>
+          <a:bodyPr wrap="none" anchor="ctr"/>
+          <a:lstStyle/>
+          <a:p>
+            <a:endParaRPr lang="fr-FR"/>
+          </a:p>
+        </p:txBody>
+      </p:sp>
+      <p:sp>
+        <p:nvSpPr>
+          <p:cNvPr id="9" name="PIC_Bandeau_Rect_Mid"/>
+          <p:cNvSpPr>
+            <a:spLocks noChangeArrowheads="1"/>
+          </p:cNvSpPr>
+          <p:nvPr/>
+        </p:nvSpPr>
+        <p:spPr bwMode="auto">
+          <a:xfrm>
+            <a:off x="0" y="2286000"/>
+            <a:ext cx="152400" cy="2286000"/>
+          </a:xfrm>
+          <a:prstGeom prst="rect">
+            <a:avLst/>
+          </a:prstGeom>
+          <a:solidFill>
+            <a:srgbClr val="0070C0"/>
+          </a:solidFill>
+          <a:ln>
+            <a:noFill/>
+          </a:ln>
+        </p:spPr>
+        <p:txBody>
+          <a:bodyPr wrap="none" anchor="ctr"/>
+          <a:lstStyle/>
+          <a:p>
+            <a:endParaRPr lang="fr-FR"/>
+          </a:p>
+        </p:txBody>
+      </p:sp>
+      <p:sp>
+        <p:nvSpPr>
+          <p:cNvPr id="10" name="PIC_Bandeau_Rect_Bot"/>
+          <p:cNvSpPr>
+            <a:spLocks noChangeArrowheads="1"/>
+          </p:cNvSpPr>
+          <p:nvPr/>
+        </p:nvSpPr>
+        <p:spPr bwMode="auto">
+          <a:xfrm>
+            <a:off x="0" y="4560886"/>
+            <a:ext cx="152400" cy="2286000"/>
+          </a:xfrm>
+          <a:prstGeom prst="rect">
+            <a:avLst/>
+          </a:prstGeom>
+          <a:solidFill>
+            <a:srgbClr val="FF6600"/>
+          </a:solidFill>
+          <a:ln>
+            <a:noFill/>
+          </a:ln>
+        </p:spPr>
+        <p:txBody>
+          <a:bodyPr wrap="none" anchor="ctr"/>
+          <a:lstStyle/>
+          <a:p>
+            <a:endParaRPr lang="fr-FR"/>
+          </a:p>
+        </p:txBody>
+      </p:sp>
+      <p:pic>
+        <p:nvPicPr>
+          <p:cNvPr id="11" name="PIC_Bandeau_Logo" descr="image.jpeg"/>
+          <p:cNvPicPr>
+            <a:picLocks noChangeAspect="1"/>
+          </p:cNvPicPr>
+          <p:nvPr/>
+        </p:nvPicPr>
+        <p:blipFill>
+          <a:blip r:embed="rId4"/>
+          <a:stretch>
+            <a:fillRect/>
+          </a:stretch>
+        </p:blipFill>
+        <p:spPr>
+          <a:xfrm>
+            <a:off x="11470314" y="20203"/>
+            <a:ext cx="721686" cy="720000"/>
+          </a:xfrm>
+          <a:prstGeom prst="rect">
+            <a:avLst/>
+          </a:prstGeom>
+        </p:spPr>
+      </p:pic>
     </p:spTree>
     <p:extLst>
       <p:ext uri="{BB962C8B-B14F-4D97-AF65-F5344CB8AC3E}">
@@ -42526,6 +42831,157 @@
           <a:xfrm>
             <a:off x="5206538" y="442729"/>
             <a:ext cx="1778924" cy="1774767"/>
+          </a:xfrm>
+          <a:prstGeom prst="rect">
+            <a:avLst/>
+          </a:prstGeom>
+        </p:spPr>
+      </p:pic>
+      <p:sp>
+        <p:nvSpPr>
+          <p:cNvPr id="7" name="PIC_Bandeau_Line"/>
+          <p:cNvSpPr>
+            <a:spLocks noChangeShapeType="1"/>
+          </p:cNvSpPr>
+          <p:nvPr/>
+        </p:nvSpPr>
+        <p:spPr bwMode="auto">
+          <a:xfrm>
+            <a:off x="622300" y="687388"/>
+            <a:ext cx="10769600" cy="0"/>
+          </a:xfrm>
+          <a:prstGeom prst="line">
+            <a:avLst/>
+          </a:prstGeom>
+          <a:noFill/>
+          <a:ln w="19050">
+            <a:solidFill>
+              <a:srgbClr val="0070C0"/>
+            </a:solidFill>
+            <a:round/>
+            <a:headEnd/>
+            <a:tailEnd/>
+          </a:ln>
+        </p:spPr>
+        <p:txBody>
+          <a:bodyPr/>
+          <a:lstStyle/>
+          <a:p>
+            <a:endParaRPr lang="fr-FR"/>
+          </a:p>
+        </p:txBody>
+      </p:sp>
+      <p:sp>
+        <p:nvSpPr>
+          <p:cNvPr id="8" name="PIC_Bandeau_Rect_Top"/>
+          <p:cNvSpPr>
+            <a:spLocks noChangeArrowheads="1"/>
+          </p:cNvSpPr>
+          <p:nvPr/>
+        </p:nvSpPr>
+        <p:spPr bwMode="auto">
+          <a:xfrm>
+            <a:off x="0" y="-9128"/>
+            <a:ext cx="152400" cy="2295128"/>
+          </a:xfrm>
+          <a:prstGeom prst="rect">
+            <a:avLst/>
+          </a:prstGeom>
+          <a:solidFill>
+            <a:srgbClr val="99CC00"/>
+          </a:solidFill>
+          <a:ln>
+            <a:noFill/>
+          </a:ln>
+        </p:spPr>
+        <p:txBody>
+          <a:bodyPr wrap="none" anchor="ctr"/>
+          <a:lstStyle/>
+          <a:p>
+            <a:endParaRPr lang="fr-FR"/>
+          </a:p>
+        </p:txBody>
+      </p:sp>
+      <p:sp>
+        <p:nvSpPr>
+          <p:cNvPr id="9" name="PIC_Bandeau_Rect_Mid"/>
+          <p:cNvSpPr>
+            <a:spLocks noChangeArrowheads="1"/>
+          </p:cNvSpPr>
+          <p:nvPr/>
+        </p:nvSpPr>
+        <p:spPr bwMode="auto">
+          <a:xfrm>
+            <a:off x="0" y="2286000"/>
+            <a:ext cx="152400" cy="2286000"/>
+          </a:xfrm>
+          <a:prstGeom prst="rect">
+            <a:avLst/>
+          </a:prstGeom>
+          <a:solidFill>
+            <a:srgbClr val="0070C0"/>
+          </a:solidFill>
+          <a:ln>
+            <a:noFill/>
+          </a:ln>
+        </p:spPr>
+        <p:txBody>
+          <a:bodyPr wrap="none" anchor="ctr"/>
+          <a:lstStyle/>
+          <a:p>
+            <a:endParaRPr lang="fr-FR"/>
+          </a:p>
+        </p:txBody>
+      </p:sp>
+      <p:sp>
+        <p:nvSpPr>
+          <p:cNvPr id="10" name="PIC_Bandeau_Rect_Bot"/>
+          <p:cNvSpPr>
+            <a:spLocks noChangeArrowheads="1"/>
+          </p:cNvSpPr>
+          <p:nvPr/>
+        </p:nvSpPr>
+        <p:spPr bwMode="auto">
+          <a:xfrm>
+            <a:off x="0" y="4560886"/>
+            <a:ext cx="152400" cy="2286000"/>
+          </a:xfrm>
+          <a:prstGeom prst="rect">
+            <a:avLst/>
+          </a:prstGeom>
+          <a:solidFill>
+            <a:srgbClr val="FF6600"/>
+          </a:solidFill>
+          <a:ln>
+            <a:noFill/>
+          </a:ln>
+        </p:spPr>
+        <p:txBody>
+          <a:bodyPr wrap="none" anchor="ctr"/>
+          <a:lstStyle/>
+          <a:p>
+            <a:endParaRPr lang="fr-FR"/>
+          </a:p>
+        </p:txBody>
+      </p:sp>
+      <p:pic>
+        <p:nvPicPr>
+          <p:cNvPr id="11" name="PIC_Bandeau_Logo" descr="image.jpeg"/>
+          <p:cNvPicPr>
+            <a:picLocks noChangeAspect="1"/>
+          </p:cNvPicPr>
+          <p:nvPr/>
+        </p:nvPicPr>
+        <p:blipFill>
+          <a:blip r:embed="rId4"/>
+          <a:stretch>
+            <a:fillRect/>
+          </a:stretch>
+        </p:blipFill>
+        <p:spPr>
+          <a:xfrm>
+            <a:off x="11470314" y="20203"/>
+            <a:ext cx="721686" cy="720000"/>
           </a:xfrm>
           <a:prstGeom prst="rect">
             <a:avLst/>
@@ -43048,7 +43504,7 @@
             <a:avLst/>
           </a:prstGeom>
           <a:solidFill>
-            <a:srgbClr val="FF6600"/>
+            <a:srgbClr val="99CC00"/>
           </a:solidFill>
           <a:ln>
             <a:noFill/>
@@ -43650,7 +44106,7 @@
             <a:avLst/>
           </a:prstGeom>
           <a:solidFill>
-            <a:srgbClr val="FF6600"/>
+            <a:srgbClr val="99CC00"/>
           </a:solidFill>
           <a:ln>
             <a:noFill/>
@@ -44252,7 +44708,7 @@
             <a:avLst/>
           </a:prstGeom>
           <a:solidFill>
-            <a:srgbClr val="FF6600"/>
+            <a:srgbClr val="99CC00"/>
           </a:solidFill>
           <a:ln>
             <a:noFill/>
@@ -44787,71 +45243,6 @@
           </p:txBody>
         </p:sp>
       </p:grpSp>
-      <p:sp>
-        <p:nvSpPr>
-          <p:cNvPr id="6" name="ZoneTexte 5">
-            <a:extLst>
-              <a:ext uri="{FF2B5EF4-FFF2-40B4-BE49-F238E27FC236}">
-                <a16:creationId xmlns:a16="http://schemas.microsoft.com/office/drawing/2014/main" id="{ED09E395-9475-FB99-BA5E-3C53ED257480}"/>
-              </a:ext>
-            </a:extLst>
-          </p:cNvPr>
-          <p:cNvSpPr txBox="1"/>
-          <p:nvPr/>
-        </p:nvSpPr>
-        <p:spPr>
-          <a:xfrm>
-            <a:off x="465552" y="5187034"/>
-            <a:ext cx="8373648" cy="646331"/>
-          </a:xfrm>
-          <a:prstGeom prst="rect">
-            <a:avLst/>
-          </a:prstGeom>
-          <a:noFill/>
-        </p:spPr>
-        <p:txBody>
-          <a:bodyPr wrap="square" rtlCol="0">
-            <a:spAutoFit/>
-          </a:bodyPr>
-          <a:lstStyle/>
-          <a:p>
-            <a:r>
-              <a:rPr lang="fr-FR" b="1" dirty="0"/>
-              <a:t>Mes commentaires :</a:t>
-            </a:r>
-          </a:p>
-          <a:p>
-            <a:pPr marL="285750" indent="-285750" algn="l">
-              <a:buClr>
-                <a:srgbClr val="0070C0"/>
-              </a:buClr>
-              <a:buSzPct val="75000"/>
-              <a:buFont typeface="Wingdings" panose="05000000000000000000" pitchFamily="2" charset="2"/>
-              <a:buChar char="q"/>
-            </a:pPr>
-            <a:r>
-              <a:rPr lang="fr-FR" b="1" dirty="0">
-                <a:solidFill>
-                  <a:srgbClr val="202124"/>
-                </a:solidFill>
-                <a:effectLst/>
-                <a:latin typeface="+mj-lt"/>
-              </a:rPr>
-              <a:t>Patrice : </a:t>
-            </a:r>
-            <a:r>
-              <a:rPr lang="fr-FR" dirty="0">
-                <a:solidFill>
-                  <a:srgbClr val="202124"/>
-                </a:solidFill>
-                <a:effectLst/>
-                <a:latin typeface="+mj-lt"/>
-              </a:rPr>
-              <a:t>« concernant les assez dans les assiettes».  </a:t>
-            </a:r>
-          </a:p>
-        </p:txBody>
-      </p:sp>
       <p:graphicFrame>
         <p:nvGraphicFramePr>
           <p:cNvPr id="2" name="Graphique 1">
@@ -44931,7 +45322,7 @@
             <a:avLst/>
           </a:prstGeom>
           <a:solidFill>
-            <a:srgbClr val="FF6600"/>
+            <a:srgbClr val="99CC00"/>
           </a:solidFill>
           <a:ln>
             <a:noFill/>
@@ -45549,7 +45940,7 @@
             <a:avLst/>
           </a:prstGeom>
           <a:solidFill>
-            <a:srgbClr val="FF6600"/>
+            <a:srgbClr val="99CC00"/>
           </a:solidFill>
           <a:ln>
             <a:noFill/>
@@ -46167,7 +46558,7 @@
             <a:avLst/>
           </a:prstGeom>
           <a:solidFill>
-            <a:srgbClr val="FF6600"/>
+            <a:srgbClr val="99CC00"/>
           </a:solidFill>
           <a:ln>
             <a:noFill/>

--- a/templates/analysis-block.pptx
+++ b/templates/analysis-block.pptx
@@ -38903,157 +38903,6 @@
           </a:p>
         </p:txBody>
       </p:sp>
-      <p:sp>
-        <p:nvSpPr>
-          <p:cNvPr id="56325" name="PIC_Bandeau_Line"/>
-          <p:cNvSpPr>
-            <a:spLocks noChangeShapeType="1"/>
-          </p:cNvSpPr>
-          <p:nvPr/>
-        </p:nvSpPr>
-        <p:spPr bwMode="auto">
-          <a:xfrm>
-            <a:off x="622300" y="687388"/>
-            <a:ext cx="10769600" cy="0"/>
-          </a:xfrm>
-          <a:prstGeom prst="line">
-            <a:avLst/>
-          </a:prstGeom>
-          <a:noFill/>
-          <a:ln w="19050">
-            <a:solidFill>
-              <a:srgbClr val="0070C0"/>
-            </a:solidFill>
-            <a:round/>
-            <a:headEnd/>
-            <a:tailEnd/>
-          </a:ln>
-        </p:spPr>
-        <p:txBody>
-          <a:bodyPr/>
-          <a:lstStyle/>
-          <a:p>
-            <a:endParaRPr lang="fr-FR"/>
-          </a:p>
-        </p:txBody>
-      </p:sp>
-      <p:sp>
-        <p:nvSpPr>
-          <p:cNvPr id="56326" name="PIC_Bandeau_Rect_Top"/>
-          <p:cNvSpPr>
-            <a:spLocks noChangeArrowheads="1"/>
-          </p:cNvSpPr>
-          <p:nvPr/>
-        </p:nvSpPr>
-        <p:spPr bwMode="auto">
-          <a:xfrm>
-            <a:off x="0" y="-9128"/>
-            <a:ext cx="152400" cy="2295128"/>
-          </a:xfrm>
-          <a:prstGeom prst="rect">
-            <a:avLst/>
-          </a:prstGeom>
-          <a:solidFill>
-            <a:srgbClr val="99CC00"/>
-          </a:solidFill>
-          <a:ln>
-            <a:noFill/>
-          </a:ln>
-        </p:spPr>
-        <p:txBody>
-          <a:bodyPr wrap="none" anchor="ctr"/>
-          <a:lstStyle/>
-          <a:p>
-            <a:endParaRPr lang="fr-FR"/>
-          </a:p>
-        </p:txBody>
-      </p:sp>
-      <p:sp>
-        <p:nvSpPr>
-          <p:cNvPr id="56327" name="PIC_Bandeau_Rect_Mid"/>
-          <p:cNvSpPr>
-            <a:spLocks noChangeArrowheads="1"/>
-          </p:cNvSpPr>
-          <p:nvPr/>
-        </p:nvSpPr>
-        <p:spPr bwMode="auto">
-          <a:xfrm>
-            <a:off x="0" y="2286000"/>
-            <a:ext cx="152400" cy="2286000"/>
-          </a:xfrm>
-          <a:prstGeom prst="rect">
-            <a:avLst/>
-          </a:prstGeom>
-          <a:solidFill>
-            <a:srgbClr val="0070C0"/>
-          </a:solidFill>
-          <a:ln>
-            <a:noFill/>
-          </a:ln>
-        </p:spPr>
-        <p:txBody>
-          <a:bodyPr wrap="none" anchor="ctr"/>
-          <a:lstStyle/>
-          <a:p>
-            <a:endParaRPr lang="fr-FR"/>
-          </a:p>
-        </p:txBody>
-      </p:sp>
-      <p:sp>
-        <p:nvSpPr>
-          <p:cNvPr id="56328" name="PIC_Bandeau_Rect_Bot"/>
-          <p:cNvSpPr>
-            <a:spLocks noChangeArrowheads="1"/>
-          </p:cNvSpPr>
-          <p:nvPr/>
-        </p:nvSpPr>
-        <p:spPr bwMode="auto">
-          <a:xfrm>
-            <a:off x="0" y="4560886"/>
-            <a:ext cx="152400" cy="2286000"/>
-          </a:xfrm>
-          <a:prstGeom prst="rect">
-            <a:avLst/>
-          </a:prstGeom>
-          <a:solidFill>
-            <a:srgbClr val="FF6600"/>
-          </a:solidFill>
-          <a:ln>
-            <a:noFill/>
-          </a:ln>
-        </p:spPr>
-        <p:txBody>
-          <a:bodyPr wrap="none" anchor="ctr"/>
-          <a:lstStyle/>
-          <a:p>
-            <a:endParaRPr lang="fr-FR"/>
-          </a:p>
-        </p:txBody>
-      </p:sp>
-      <p:pic>
-        <p:nvPicPr>
-          <p:cNvPr id="56329" name="PIC_Bandeau_Logo" descr="image.jpeg"/>
-          <p:cNvPicPr>
-            <a:picLocks noChangeAspect="1"/>
-          </p:cNvPicPr>
-          <p:nvPr/>
-        </p:nvPicPr>
-        <p:blipFill>
-          <a:blip r:embed="rId4"/>
-          <a:stretch>
-            <a:fillRect/>
-          </a:stretch>
-        </p:blipFill>
-        <p:spPr>
-          <a:xfrm>
-            <a:off x="11470314" y="20203"/>
-            <a:ext cx="721686" cy="720000"/>
-          </a:xfrm>
-          <a:prstGeom prst="rect">
-            <a:avLst/>
-          </a:prstGeom>
-        </p:spPr>
-      </p:pic>
     </p:spTree>
     <p:extLst>
       <p:ext uri="{BB962C8B-B14F-4D97-AF65-F5344CB8AC3E}">
@@ -42505,157 +42354,6 @@
           </a:prstGeom>
         </p:spPr>
       </p:pic>
-      <p:sp>
-        <p:nvSpPr>
-          <p:cNvPr id="7" name="PIC_Bandeau_Line"/>
-          <p:cNvSpPr>
-            <a:spLocks noChangeShapeType="1"/>
-          </p:cNvSpPr>
-          <p:nvPr/>
-        </p:nvSpPr>
-        <p:spPr bwMode="auto">
-          <a:xfrm>
-            <a:off x="622300" y="687388"/>
-            <a:ext cx="10769600" cy="0"/>
-          </a:xfrm>
-          <a:prstGeom prst="line">
-            <a:avLst/>
-          </a:prstGeom>
-          <a:noFill/>
-          <a:ln w="19050">
-            <a:solidFill>
-              <a:srgbClr val="0070C0"/>
-            </a:solidFill>
-            <a:round/>
-            <a:headEnd/>
-            <a:tailEnd/>
-          </a:ln>
-        </p:spPr>
-        <p:txBody>
-          <a:bodyPr/>
-          <a:lstStyle/>
-          <a:p>
-            <a:endParaRPr lang="fr-FR"/>
-          </a:p>
-        </p:txBody>
-      </p:sp>
-      <p:sp>
-        <p:nvSpPr>
-          <p:cNvPr id="8" name="PIC_Bandeau_Rect_Top"/>
-          <p:cNvSpPr>
-            <a:spLocks noChangeArrowheads="1"/>
-          </p:cNvSpPr>
-          <p:nvPr/>
-        </p:nvSpPr>
-        <p:spPr bwMode="auto">
-          <a:xfrm>
-            <a:off x="0" y="-9128"/>
-            <a:ext cx="152400" cy="2295128"/>
-          </a:xfrm>
-          <a:prstGeom prst="rect">
-            <a:avLst/>
-          </a:prstGeom>
-          <a:solidFill>
-            <a:srgbClr val="99CC00"/>
-          </a:solidFill>
-          <a:ln>
-            <a:noFill/>
-          </a:ln>
-        </p:spPr>
-        <p:txBody>
-          <a:bodyPr wrap="none" anchor="ctr"/>
-          <a:lstStyle/>
-          <a:p>
-            <a:endParaRPr lang="fr-FR"/>
-          </a:p>
-        </p:txBody>
-      </p:sp>
-      <p:sp>
-        <p:nvSpPr>
-          <p:cNvPr id="9" name="PIC_Bandeau_Rect_Mid"/>
-          <p:cNvSpPr>
-            <a:spLocks noChangeArrowheads="1"/>
-          </p:cNvSpPr>
-          <p:nvPr/>
-        </p:nvSpPr>
-        <p:spPr bwMode="auto">
-          <a:xfrm>
-            <a:off x="0" y="2286000"/>
-            <a:ext cx="152400" cy="2286000"/>
-          </a:xfrm>
-          <a:prstGeom prst="rect">
-            <a:avLst/>
-          </a:prstGeom>
-          <a:solidFill>
-            <a:srgbClr val="0070C0"/>
-          </a:solidFill>
-          <a:ln>
-            <a:noFill/>
-          </a:ln>
-        </p:spPr>
-        <p:txBody>
-          <a:bodyPr wrap="none" anchor="ctr"/>
-          <a:lstStyle/>
-          <a:p>
-            <a:endParaRPr lang="fr-FR"/>
-          </a:p>
-        </p:txBody>
-      </p:sp>
-      <p:sp>
-        <p:nvSpPr>
-          <p:cNvPr id="10" name="PIC_Bandeau_Rect_Bot"/>
-          <p:cNvSpPr>
-            <a:spLocks noChangeArrowheads="1"/>
-          </p:cNvSpPr>
-          <p:nvPr/>
-        </p:nvSpPr>
-        <p:spPr bwMode="auto">
-          <a:xfrm>
-            <a:off x="0" y="4560886"/>
-            <a:ext cx="152400" cy="2286000"/>
-          </a:xfrm>
-          <a:prstGeom prst="rect">
-            <a:avLst/>
-          </a:prstGeom>
-          <a:solidFill>
-            <a:srgbClr val="FF6600"/>
-          </a:solidFill>
-          <a:ln>
-            <a:noFill/>
-          </a:ln>
-        </p:spPr>
-        <p:txBody>
-          <a:bodyPr wrap="none" anchor="ctr"/>
-          <a:lstStyle/>
-          <a:p>
-            <a:endParaRPr lang="fr-FR"/>
-          </a:p>
-        </p:txBody>
-      </p:sp>
-      <p:pic>
-        <p:nvPicPr>
-          <p:cNvPr id="11" name="PIC_Bandeau_Logo" descr="image.jpeg"/>
-          <p:cNvPicPr>
-            <a:picLocks noChangeAspect="1"/>
-          </p:cNvPicPr>
-          <p:nvPr/>
-        </p:nvPicPr>
-        <p:blipFill>
-          <a:blip r:embed="rId4"/>
-          <a:stretch>
-            <a:fillRect/>
-          </a:stretch>
-        </p:blipFill>
-        <p:spPr>
-          <a:xfrm>
-            <a:off x="11470314" y="20203"/>
-            <a:ext cx="721686" cy="720000"/>
-          </a:xfrm>
-          <a:prstGeom prst="rect">
-            <a:avLst/>
-          </a:prstGeom>
-        </p:spPr>
-      </p:pic>
     </p:spTree>
     <p:extLst>
       <p:ext uri="{BB962C8B-B14F-4D97-AF65-F5344CB8AC3E}">
@@ -42831,157 +42529,6 @@
           <a:xfrm>
             <a:off x="5206538" y="442729"/>
             <a:ext cx="1778924" cy="1774767"/>
-          </a:xfrm>
-          <a:prstGeom prst="rect">
-            <a:avLst/>
-          </a:prstGeom>
-        </p:spPr>
-      </p:pic>
-      <p:sp>
-        <p:nvSpPr>
-          <p:cNvPr id="7" name="PIC_Bandeau_Line"/>
-          <p:cNvSpPr>
-            <a:spLocks noChangeShapeType="1"/>
-          </p:cNvSpPr>
-          <p:nvPr/>
-        </p:nvSpPr>
-        <p:spPr bwMode="auto">
-          <a:xfrm>
-            <a:off x="622300" y="687388"/>
-            <a:ext cx="10769600" cy="0"/>
-          </a:xfrm>
-          <a:prstGeom prst="line">
-            <a:avLst/>
-          </a:prstGeom>
-          <a:noFill/>
-          <a:ln w="19050">
-            <a:solidFill>
-              <a:srgbClr val="0070C0"/>
-            </a:solidFill>
-            <a:round/>
-            <a:headEnd/>
-            <a:tailEnd/>
-          </a:ln>
-        </p:spPr>
-        <p:txBody>
-          <a:bodyPr/>
-          <a:lstStyle/>
-          <a:p>
-            <a:endParaRPr lang="fr-FR"/>
-          </a:p>
-        </p:txBody>
-      </p:sp>
-      <p:sp>
-        <p:nvSpPr>
-          <p:cNvPr id="8" name="PIC_Bandeau_Rect_Top"/>
-          <p:cNvSpPr>
-            <a:spLocks noChangeArrowheads="1"/>
-          </p:cNvSpPr>
-          <p:nvPr/>
-        </p:nvSpPr>
-        <p:spPr bwMode="auto">
-          <a:xfrm>
-            <a:off x="0" y="-9128"/>
-            <a:ext cx="152400" cy="2295128"/>
-          </a:xfrm>
-          <a:prstGeom prst="rect">
-            <a:avLst/>
-          </a:prstGeom>
-          <a:solidFill>
-            <a:srgbClr val="99CC00"/>
-          </a:solidFill>
-          <a:ln>
-            <a:noFill/>
-          </a:ln>
-        </p:spPr>
-        <p:txBody>
-          <a:bodyPr wrap="none" anchor="ctr"/>
-          <a:lstStyle/>
-          <a:p>
-            <a:endParaRPr lang="fr-FR"/>
-          </a:p>
-        </p:txBody>
-      </p:sp>
-      <p:sp>
-        <p:nvSpPr>
-          <p:cNvPr id="9" name="PIC_Bandeau_Rect_Mid"/>
-          <p:cNvSpPr>
-            <a:spLocks noChangeArrowheads="1"/>
-          </p:cNvSpPr>
-          <p:nvPr/>
-        </p:nvSpPr>
-        <p:spPr bwMode="auto">
-          <a:xfrm>
-            <a:off x="0" y="2286000"/>
-            <a:ext cx="152400" cy="2286000"/>
-          </a:xfrm>
-          <a:prstGeom prst="rect">
-            <a:avLst/>
-          </a:prstGeom>
-          <a:solidFill>
-            <a:srgbClr val="0070C0"/>
-          </a:solidFill>
-          <a:ln>
-            <a:noFill/>
-          </a:ln>
-        </p:spPr>
-        <p:txBody>
-          <a:bodyPr wrap="none" anchor="ctr"/>
-          <a:lstStyle/>
-          <a:p>
-            <a:endParaRPr lang="fr-FR"/>
-          </a:p>
-        </p:txBody>
-      </p:sp>
-      <p:sp>
-        <p:nvSpPr>
-          <p:cNvPr id="10" name="PIC_Bandeau_Rect_Bot"/>
-          <p:cNvSpPr>
-            <a:spLocks noChangeArrowheads="1"/>
-          </p:cNvSpPr>
-          <p:nvPr/>
-        </p:nvSpPr>
-        <p:spPr bwMode="auto">
-          <a:xfrm>
-            <a:off x="0" y="4560886"/>
-            <a:ext cx="152400" cy="2286000"/>
-          </a:xfrm>
-          <a:prstGeom prst="rect">
-            <a:avLst/>
-          </a:prstGeom>
-          <a:solidFill>
-            <a:srgbClr val="FF6600"/>
-          </a:solidFill>
-          <a:ln>
-            <a:noFill/>
-          </a:ln>
-        </p:spPr>
-        <p:txBody>
-          <a:bodyPr wrap="none" anchor="ctr"/>
-          <a:lstStyle/>
-          <a:p>
-            <a:endParaRPr lang="fr-FR"/>
-          </a:p>
-        </p:txBody>
-      </p:sp>
-      <p:pic>
-        <p:nvPicPr>
-          <p:cNvPr id="11" name="PIC_Bandeau_Logo" descr="image.jpeg"/>
-          <p:cNvPicPr>
-            <a:picLocks noChangeAspect="1"/>
-          </p:cNvPicPr>
-          <p:nvPr/>
-        </p:nvPicPr>
-        <p:blipFill>
-          <a:blip r:embed="rId4"/>
-          <a:stretch>
-            <a:fillRect/>
-          </a:stretch>
-        </p:blipFill>
-        <p:spPr>
-          <a:xfrm>
-            <a:off x="11470314" y="20203"/>
-            <a:ext cx="721686" cy="720000"/>
           </a:xfrm>
           <a:prstGeom prst="rect">
             <a:avLst/>

--- a/templates/analysis-block.pptx
+++ b/templates/analysis-block.pptx
@@ -38903,6 +38903,157 @@
           </a:p>
         </p:txBody>
       </p:sp>
+      <p:sp>
+        <p:nvSpPr>
+          <p:cNvPr id="56325" name="PIC_Bandeau_Line"/>
+          <p:cNvSpPr>
+            <a:spLocks noChangeShapeType="1"/>
+          </p:cNvSpPr>
+          <p:nvPr/>
+        </p:nvSpPr>
+        <p:spPr bwMode="auto">
+          <a:xfrm>
+            <a:off x="622300" y="687388"/>
+            <a:ext cx="10769600" cy="0"/>
+          </a:xfrm>
+          <a:prstGeom prst="line">
+            <a:avLst/>
+          </a:prstGeom>
+          <a:noFill/>
+          <a:ln w="19050">
+            <a:solidFill>
+              <a:srgbClr val="0070C0"/>
+            </a:solidFill>
+            <a:round/>
+            <a:headEnd/>
+            <a:tailEnd/>
+          </a:ln>
+        </p:spPr>
+        <p:txBody>
+          <a:bodyPr/>
+          <a:lstStyle/>
+          <a:p>
+            <a:endParaRPr lang="fr-FR"/>
+          </a:p>
+        </p:txBody>
+      </p:sp>
+      <p:sp>
+        <p:nvSpPr>
+          <p:cNvPr id="56326" name="PIC_Bandeau_Rect_Top"/>
+          <p:cNvSpPr>
+            <a:spLocks noChangeArrowheads="1"/>
+          </p:cNvSpPr>
+          <p:nvPr/>
+        </p:nvSpPr>
+        <p:spPr bwMode="auto">
+          <a:xfrm>
+            <a:off x="0" y="-9128"/>
+            <a:ext cx="152400" cy="2295128"/>
+          </a:xfrm>
+          <a:prstGeom prst="rect">
+            <a:avLst/>
+          </a:prstGeom>
+          <a:solidFill>
+            <a:srgbClr val="99CC00"/>
+          </a:solidFill>
+          <a:ln>
+            <a:noFill/>
+          </a:ln>
+        </p:spPr>
+        <p:txBody>
+          <a:bodyPr wrap="none" anchor="ctr"/>
+          <a:lstStyle/>
+          <a:p>
+            <a:endParaRPr lang="fr-FR"/>
+          </a:p>
+        </p:txBody>
+      </p:sp>
+      <p:sp>
+        <p:nvSpPr>
+          <p:cNvPr id="56327" name="PIC_Bandeau_Rect_Mid"/>
+          <p:cNvSpPr>
+            <a:spLocks noChangeArrowheads="1"/>
+          </p:cNvSpPr>
+          <p:nvPr/>
+        </p:nvSpPr>
+        <p:spPr bwMode="auto">
+          <a:xfrm>
+            <a:off x="0" y="2286000"/>
+            <a:ext cx="152400" cy="2286000"/>
+          </a:xfrm>
+          <a:prstGeom prst="rect">
+            <a:avLst/>
+          </a:prstGeom>
+          <a:solidFill>
+            <a:srgbClr val="0070C0"/>
+          </a:solidFill>
+          <a:ln>
+            <a:noFill/>
+          </a:ln>
+        </p:spPr>
+        <p:txBody>
+          <a:bodyPr wrap="none" anchor="ctr"/>
+          <a:lstStyle/>
+          <a:p>
+            <a:endParaRPr lang="fr-FR"/>
+          </a:p>
+        </p:txBody>
+      </p:sp>
+      <p:sp>
+        <p:nvSpPr>
+          <p:cNvPr id="56328" name="PIC_Bandeau_Rect_Bot"/>
+          <p:cNvSpPr>
+            <a:spLocks noChangeArrowheads="1"/>
+          </p:cNvSpPr>
+          <p:nvPr/>
+        </p:nvSpPr>
+        <p:spPr bwMode="auto">
+          <a:xfrm>
+            <a:off x="0" y="4560886"/>
+            <a:ext cx="152400" cy="2286000"/>
+          </a:xfrm>
+          <a:prstGeom prst="rect">
+            <a:avLst/>
+          </a:prstGeom>
+          <a:solidFill>
+            <a:srgbClr val="FF6600"/>
+          </a:solidFill>
+          <a:ln>
+            <a:noFill/>
+          </a:ln>
+        </p:spPr>
+        <p:txBody>
+          <a:bodyPr wrap="none" anchor="ctr"/>
+          <a:lstStyle/>
+          <a:p>
+            <a:endParaRPr lang="fr-FR"/>
+          </a:p>
+        </p:txBody>
+      </p:sp>
+      <p:pic>
+        <p:nvPicPr>
+          <p:cNvPr id="56329" name="PIC_Bandeau_Logo" descr="image.jpeg"/>
+          <p:cNvPicPr>
+            <a:picLocks noChangeAspect="1"/>
+          </p:cNvPicPr>
+          <p:nvPr/>
+        </p:nvPicPr>
+        <p:blipFill>
+          <a:blip r:embed="rId4"/>
+          <a:stretch>
+            <a:fillRect/>
+          </a:stretch>
+        </p:blipFill>
+        <p:spPr>
+          <a:xfrm>
+            <a:off x="11470314" y="20203"/>
+            <a:ext cx="721686" cy="720000"/>
+          </a:xfrm>
+          <a:prstGeom prst="rect">
+            <a:avLst/>
+          </a:prstGeom>
+        </p:spPr>
+      </p:pic>
     </p:spTree>
     <p:extLst>
       <p:ext uri="{BB962C8B-B14F-4D97-AF65-F5344CB8AC3E}">
@@ -42348,6 +42499,157 @@
           <a:xfrm>
             <a:off x="537328" y="785862"/>
             <a:ext cx="9782125" cy="5992819"/>
+          </a:xfrm>
+          <a:prstGeom prst="rect">
+            <a:avLst/>
+          </a:prstGeom>
+        </p:spPr>
+      </p:pic>
+      <p:sp>
+        <p:nvSpPr>
+          <p:cNvPr id="7" name="PIC_Bandeau_Line"/>
+          <p:cNvSpPr>
+            <a:spLocks noChangeShapeType="1"/>
+          </p:cNvSpPr>
+          <p:nvPr/>
+        </p:nvSpPr>
+        <p:spPr bwMode="auto">
+          <a:xfrm>
+            <a:off x="622300" y="687388"/>
+            <a:ext cx="10769600" cy="0"/>
+          </a:xfrm>
+          <a:prstGeom prst="line">
+            <a:avLst/>
+          </a:prstGeom>
+          <a:noFill/>
+          <a:ln w="19050">
+            <a:solidFill>
+              <a:srgbClr val="0070C0"/>
+            </a:solidFill>
+            <a:round/>
+            <a:headEnd/>
+            <a:tailEnd/>
+          </a:ln>
+        </p:spPr>
+        <p:txBody>
+          <a:bodyPr/>
+          <a:lstStyle/>
+          <a:p>
+            <a:endParaRPr lang="fr-FR"/>
+          </a:p>
+        </p:txBody>
+      </p:sp>
+      <p:sp>
+        <p:nvSpPr>
+          <p:cNvPr id="8" name="PIC_Bandeau_Rect_Top"/>
+          <p:cNvSpPr>
+            <a:spLocks noChangeArrowheads="1"/>
+          </p:cNvSpPr>
+          <p:nvPr/>
+        </p:nvSpPr>
+        <p:spPr bwMode="auto">
+          <a:xfrm>
+            <a:off x="0" y="-9128"/>
+            <a:ext cx="152400" cy="2295128"/>
+          </a:xfrm>
+          <a:prstGeom prst="rect">
+            <a:avLst/>
+          </a:prstGeom>
+          <a:solidFill>
+            <a:srgbClr val="99CC00"/>
+          </a:solidFill>
+          <a:ln>
+            <a:noFill/>
+          </a:ln>
+        </p:spPr>
+        <p:txBody>
+          <a:bodyPr wrap="none" anchor="ctr"/>
+          <a:lstStyle/>
+          <a:p>
+            <a:endParaRPr lang="fr-FR"/>
+          </a:p>
+        </p:txBody>
+      </p:sp>
+      <p:sp>
+        <p:nvSpPr>
+          <p:cNvPr id="9" name="PIC_Bandeau_Rect_Mid"/>
+          <p:cNvSpPr>
+            <a:spLocks noChangeArrowheads="1"/>
+          </p:cNvSpPr>
+          <p:nvPr/>
+        </p:nvSpPr>
+        <p:spPr bwMode="auto">
+          <a:xfrm>
+            <a:off x="0" y="2286000"/>
+            <a:ext cx="152400" cy="2286000"/>
+          </a:xfrm>
+          <a:prstGeom prst="rect">
+            <a:avLst/>
+          </a:prstGeom>
+          <a:solidFill>
+            <a:srgbClr val="0070C0"/>
+          </a:solidFill>
+          <a:ln>
+            <a:noFill/>
+          </a:ln>
+        </p:spPr>
+        <p:txBody>
+          <a:bodyPr wrap="none" anchor="ctr"/>
+          <a:lstStyle/>
+          <a:p>
+            <a:endParaRPr lang="fr-FR"/>
+          </a:p>
+        </p:txBody>
+      </p:sp>
+      <p:sp>
+        <p:nvSpPr>
+          <p:cNvPr id="10" name="PIC_Bandeau_Rect_Bot"/>
+          <p:cNvSpPr>
+            <a:spLocks noChangeArrowheads="1"/>
+          </p:cNvSpPr>
+          <p:nvPr/>
+        </p:nvSpPr>
+        <p:spPr bwMode="auto">
+          <a:xfrm>
+            <a:off x="0" y="4560886"/>
+            <a:ext cx="152400" cy="2286000"/>
+          </a:xfrm>
+          <a:prstGeom prst="rect">
+            <a:avLst/>
+          </a:prstGeom>
+          <a:solidFill>
+            <a:srgbClr val="FF6600"/>
+          </a:solidFill>
+          <a:ln>
+            <a:noFill/>
+          </a:ln>
+        </p:spPr>
+        <p:txBody>
+          <a:bodyPr wrap="none" anchor="ctr"/>
+          <a:lstStyle/>
+          <a:p>
+            <a:endParaRPr lang="fr-FR"/>
+          </a:p>
+        </p:txBody>
+      </p:sp>
+      <p:pic>
+        <p:nvPicPr>
+          <p:cNvPr id="11" name="PIC_Bandeau_Logo" descr="image.jpeg"/>
+          <p:cNvPicPr>
+            <a:picLocks noChangeAspect="1"/>
+          </p:cNvPicPr>
+          <p:nvPr/>
+        </p:nvPicPr>
+        <p:blipFill>
+          <a:blip r:embed="rId4"/>
+          <a:stretch>
+            <a:fillRect/>
+          </a:stretch>
+        </p:blipFill>
+        <p:spPr>
+          <a:xfrm>
+            <a:off x="11470314" y="20203"/>
+            <a:ext cx="721686" cy="720000"/>
           </a:xfrm>
           <a:prstGeom prst="rect">
             <a:avLst/>

--- a/templates/analysis-block.pptx
+++ b/templates/analysis-block.pptx
@@ -38708,6 +38708,8 @@
               <a:buClr>
                 <a:srgbClr val="0070C0"/>
               </a:buClr>
+              <a:buFont typeface="Wingdings" pitchFamily="2" charset="2"/>
+              <a:buChar char="q"/>
             </a:pPr>
             <a:r>
               <a:rPr lang="fr-FR" sz="1600" dirty="0"/>
@@ -38722,6 +38724,8 @@
               <a:buClr>
                 <a:srgbClr val="0070C0"/>
               </a:buClr>
+              <a:buFont typeface="Wingdings" pitchFamily="2" charset="2"/>
+              <a:buChar char="q"/>
             </a:pPr>
             <a:endParaRPr lang="fr-FR" sz="1600" dirty="0"/>
           </a:p>
@@ -38733,6 +38737,8 @@
               <a:buClr>
                 <a:srgbClr val="0070C0"/>
               </a:buClr>
+              <a:buFont typeface="Wingdings" pitchFamily="2" charset="2"/>
+              <a:buChar char="q"/>
             </a:pPr>
             <a:r>
               <a:rPr lang="fr-FR" sz="1600" dirty="0"/>
@@ -38747,6 +38753,8 @@
               <a:buClr>
                 <a:srgbClr val="0070C0"/>
               </a:buClr>
+              <a:buFont typeface="Wingdings" pitchFamily="2" charset="2"/>
+              <a:buChar char="q"/>
             </a:pPr>
             <a:endParaRPr lang="fr-FR" sz="1600" dirty="0"/>
           </a:p>
@@ -38758,6 +38766,8 @@
               <a:buClr>
                 <a:srgbClr val="0070C0"/>
               </a:buClr>
+              <a:buFont typeface="Wingdings" pitchFamily="2" charset="2"/>
+              <a:buChar char="q"/>
             </a:pPr>
             <a:r>
               <a:rPr lang="fr-FR" sz="1600" dirty="0"/>
@@ -38772,6 +38782,8 @@
               <a:buClr>
                 <a:srgbClr val="0070C0"/>
               </a:buClr>
+              <a:buFont typeface="Wingdings" pitchFamily="2" charset="2"/>
+              <a:buChar char="q"/>
             </a:pPr>
             <a:endParaRPr lang="fr-FR" sz="1600" dirty="0"/>
           </a:p>
@@ -38783,6 +38795,8 @@
               <a:buClr>
                 <a:srgbClr val="0070C0"/>
               </a:buClr>
+              <a:buFont typeface="Wingdings" pitchFamily="2" charset="2"/>
+              <a:buChar char="q"/>
             </a:pPr>
             <a:r>
               <a:rPr lang="fr-FR" sz="1600" dirty="0"/>
@@ -38797,6 +38811,8 @@
               <a:buClr>
                 <a:srgbClr val="0070C0"/>
               </a:buClr>
+              <a:buFont typeface="Wingdings" pitchFamily="2" charset="2"/>
+              <a:buChar char="q"/>
             </a:pPr>
             <a:endParaRPr lang="fr-FR" sz="1600" dirty="0"/>
           </a:p>
@@ -38808,6 +38824,8 @@
               <a:buClr>
                 <a:srgbClr val="0070C0"/>
               </a:buClr>
+              <a:buFont typeface="Wingdings" pitchFamily="2" charset="2"/>
+              <a:buChar char="q"/>
             </a:pPr>
             <a:r>
               <a:rPr lang="fr-FR" sz="1600" dirty="0"/>

--- a/templates/analysis-block.pptx
+++ b/templates/analysis-block.pptx
@@ -1236,167 +1236,6 @@
             </c:ext>
           </c:extLst>
         </c:ser>
-        <c:ser>
-          <c:idx val="1"/>
-          <c:order val="1"/>
-          <c:tx>
-            <c:strRef>
-              <c:f>Feuil1!$C$1</c:f>
-              <c:strCache>
-                <c:ptCount val="1"/>
-                <c:pt idx="0">
-                  <c:v>Colonne1</c:v>
-                </c:pt>
-              </c:strCache>
-            </c:strRef>
-          </c:tx>
-          <c:dPt>
-            <c:idx val="0"/>
-            <c:bubble3D val="0"/>
-            <c:spPr>
-              <a:solidFill>
-                <a:schemeClr val="accent1"/>
-              </a:solidFill>
-              <a:ln w="25400">
-                <a:solidFill>
-                  <a:schemeClr val="accent1"/>
-                </a:solidFill>
-              </a:ln>
-              <a:effectLst/>
-              <a:sp3d contourW="25400">
-                <a:contourClr>
-                  <a:schemeClr val="accent1"/>
-                </a:contourClr>
-              </a:sp3d>
-            </c:spPr>
-            <c:extLst>
-              <c:ext xmlns:c16="http://schemas.microsoft.com/office/drawing/2014/chart" uri="{C3380CC4-5D6E-409C-BE32-E72D297353CC}">
-                <c16:uniqueId val="{0000000A-9D0C-4361-958B-3CCA0F0D895B}"/>
-              </c:ext>
-            </c:extLst>
-          </c:dPt>
-          <c:dPt>
-            <c:idx val="1"/>
-            <c:bubble3D val="0"/>
-            <c:spPr>
-              <a:solidFill>
-                <a:schemeClr val="accent2"/>
-              </a:solidFill>
-              <a:ln w="25400">
-                <a:solidFill>
-                  <a:schemeClr val="accent2"/>
-                </a:solidFill>
-              </a:ln>
-              <a:effectLst/>
-              <a:sp3d contourW="25400">
-                <a:contourClr>
-                  <a:schemeClr val="accent2"/>
-                </a:contourClr>
-              </a:sp3d>
-            </c:spPr>
-            <c:extLst>
-              <c:ext xmlns:c16="http://schemas.microsoft.com/office/drawing/2014/chart" uri="{C3380CC4-5D6E-409C-BE32-E72D297353CC}">
-                <c16:uniqueId val="{0000000C-9D0C-4361-958B-3CCA0F0D895B}"/>
-              </c:ext>
-            </c:extLst>
-          </c:dPt>
-          <c:dPt>
-            <c:idx val="2"/>
-            <c:bubble3D val="0"/>
-            <c:spPr>
-              <a:solidFill>
-                <a:schemeClr val="accent3"/>
-              </a:solidFill>
-              <a:ln w="25400">
-                <a:solidFill>
-                  <a:schemeClr val="accent3"/>
-                </a:solidFill>
-              </a:ln>
-              <a:effectLst/>
-              <a:sp3d contourW="25400">
-                <a:contourClr>
-                  <a:schemeClr val="accent3"/>
-                </a:contourClr>
-              </a:sp3d>
-            </c:spPr>
-            <c:extLst>
-              <c:ext xmlns:c16="http://schemas.microsoft.com/office/drawing/2014/chart" uri="{C3380CC4-5D6E-409C-BE32-E72D297353CC}">
-                <c16:uniqueId val="{0000000E-9D0C-4361-958B-3CCA0F0D895B}"/>
-              </c:ext>
-            </c:extLst>
-          </c:dPt>
-          <c:dPt>
-            <c:idx val="3"/>
-            <c:bubble3D val="0"/>
-            <c:spPr>
-              <a:solidFill>
-                <a:schemeClr val="accent4"/>
-              </a:solidFill>
-              <a:ln w="25400">
-                <a:solidFill>
-                  <a:schemeClr val="accent4"/>
-                </a:solidFill>
-              </a:ln>
-              <a:effectLst/>
-              <a:sp3d contourW="25400">
-                <a:contourClr>
-                  <a:schemeClr val="accent4"/>
-                </a:contourClr>
-              </a:sp3d>
-            </c:spPr>
-            <c:extLst>
-              <c:ext xmlns:c16="http://schemas.microsoft.com/office/drawing/2014/chart" uri="{C3380CC4-5D6E-409C-BE32-E72D297353CC}">
-                <c16:uniqueId val="{00000010-9D0C-4361-958B-3CCA0F0D895B}"/>
-              </c:ext>
-            </c:extLst>
-          </c:dPt>
-          <c:cat>
-            <c:strRef>
-              <c:f>Feuil1!$A$2:$A$5</c:f>
-              <c:strCache>
-                <c:ptCount val="4"/>
-                <c:pt idx="0">
-                  <c:v>Très satisfait</c:v>
-                </c:pt>
-                <c:pt idx="1">
-                  <c:v>Satisfait</c:v>
-                </c:pt>
-                <c:pt idx="2">
-                  <c:v>Déçu</c:v>
-                </c:pt>
-                <c:pt idx="3">
-                  <c:v>Très déçu</c:v>
-                </c:pt>
-              </c:strCache>
-            </c:strRef>
-          </c:cat>
-          <c:val>
-            <c:numRef>
-              <c:f>Feuil1!$C$2:$C$5</c:f>
-              <c:numCache>
-                <c:formatCode>0%</c:formatCode>
-                <c:ptCount val="4"/>
-                <c:pt idx="0">
-                  <c:v>1</c:v>
-                </c:pt>
-                <c:pt idx="1">
-                  <c:v>0</c:v>
-                </c:pt>
-                <c:pt idx="2">
-                  <c:v>0</c:v>
-                </c:pt>
-                <c:pt idx="3">
-                  <c:v>0</c:v>
-                </c:pt>
-              </c:numCache>
-            </c:numRef>
-          </c:val>
-          <c:extLst>
-            <c:ext xmlns:c16="http://schemas.microsoft.com/office/drawing/2014/chart" uri="{C3380CC4-5D6E-409C-BE32-E72D297353CC}">
-              <c16:uniqueId val="{00000011-9D0C-4361-958B-3CCA0F0D895B}"/>
-            </c:ext>
-          </c:extLst>
-        </c:ser>
         <c:dLbls>
           <c:showLegendKey val="0"/>
           <c:showVal val="0"/>
@@ -1808,167 +1647,6 @@
           <c:extLst>
             <c:ext xmlns:c16="http://schemas.microsoft.com/office/drawing/2014/chart" uri="{C3380CC4-5D6E-409C-BE32-E72D297353CC}">
               <c16:uniqueId val="{00000008-A87B-4736-9D0B-01A7FBC7041C}"/>
-            </c:ext>
-          </c:extLst>
-        </c:ser>
-        <c:ser>
-          <c:idx val="1"/>
-          <c:order val="1"/>
-          <c:tx>
-            <c:strRef>
-              <c:f>Feuil1!$C$1</c:f>
-              <c:strCache>
-                <c:ptCount val="1"/>
-                <c:pt idx="0">
-                  <c:v>Colonne1</c:v>
-                </c:pt>
-              </c:strCache>
-            </c:strRef>
-          </c:tx>
-          <c:dPt>
-            <c:idx val="0"/>
-            <c:bubble3D val="0"/>
-            <c:spPr>
-              <a:solidFill>
-                <a:schemeClr val="accent1"/>
-              </a:solidFill>
-              <a:ln w="25400">
-                <a:solidFill>
-                  <a:schemeClr val="accent1"/>
-                </a:solidFill>
-              </a:ln>
-              <a:effectLst/>
-              <a:sp3d contourW="25400">
-                <a:contourClr>
-                  <a:schemeClr val="accent1"/>
-                </a:contourClr>
-              </a:sp3d>
-            </c:spPr>
-            <c:extLst>
-              <c:ext xmlns:c16="http://schemas.microsoft.com/office/drawing/2014/chart" uri="{C3380CC4-5D6E-409C-BE32-E72D297353CC}">
-                <c16:uniqueId val="{0000000A-A87B-4736-9D0B-01A7FBC7041C}"/>
-              </c:ext>
-            </c:extLst>
-          </c:dPt>
-          <c:dPt>
-            <c:idx val="1"/>
-            <c:bubble3D val="0"/>
-            <c:spPr>
-              <a:solidFill>
-                <a:schemeClr val="accent2"/>
-              </a:solidFill>
-              <a:ln w="25400">
-                <a:solidFill>
-                  <a:schemeClr val="accent2"/>
-                </a:solidFill>
-              </a:ln>
-              <a:effectLst/>
-              <a:sp3d contourW="25400">
-                <a:contourClr>
-                  <a:schemeClr val="accent2"/>
-                </a:contourClr>
-              </a:sp3d>
-            </c:spPr>
-            <c:extLst>
-              <c:ext xmlns:c16="http://schemas.microsoft.com/office/drawing/2014/chart" uri="{C3380CC4-5D6E-409C-BE32-E72D297353CC}">
-                <c16:uniqueId val="{0000000C-A87B-4736-9D0B-01A7FBC7041C}"/>
-              </c:ext>
-            </c:extLst>
-          </c:dPt>
-          <c:dPt>
-            <c:idx val="2"/>
-            <c:bubble3D val="0"/>
-            <c:spPr>
-              <a:solidFill>
-                <a:schemeClr val="accent3"/>
-              </a:solidFill>
-              <a:ln w="25400">
-                <a:solidFill>
-                  <a:schemeClr val="accent3"/>
-                </a:solidFill>
-              </a:ln>
-              <a:effectLst/>
-              <a:sp3d contourW="25400">
-                <a:contourClr>
-                  <a:schemeClr val="accent3"/>
-                </a:contourClr>
-              </a:sp3d>
-            </c:spPr>
-            <c:extLst>
-              <c:ext xmlns:c16="http://schemas.microsoft.com/office/drawing/2014/chart" uri="{C3380CC4-5D6E-409C-BE32-E72D297353CC}">
-                <c16:uniqueId val="{0000000E-A87B-4736-9D0B-01A7FBC7041C}"/>
-              </c:ext>
-            </c:extLst>
-          </c:dPt>
-          <c:dPt>
-            <c:idx val="3"/>
-            <c:bubble3D val="0"/>
-            <c:spPr>
-              <a:solidFill>
-                <a:schemeClr val="accent4"/>
-              </a:solidFill>
-              <a:ln w="25400">
-                <a:solidFill>
-                  <a:schemeClr val="accent4"/>
-                </a:solidFill>
-              </a:ln>
-              <a:effectLst/>
-              <a:sp3d contourW="25400">
-                <a:contourClr>
-                  <a:schemeClr val="accent4"/>
-                </a:contourClr>
-              </a:sp3d>
-            </c:spPr>
-            <c:extLst>
-              <c:ext xmlns:c16="http://schemas.microsoft.com/office/drawing/2014/chart" uri="{C3380CC4-5D6E-409C-BE32-E72D297353CC}">
-                <c16:uniqueId val="{00000010-A87B-4736-9D0B-01A7FBC7041C}"/>
-              </c:ext>
-            </c:extLst>
-          </c:dPt>
-          <c:cat>
-            <c:strRef>
-              <c:f>Feuil1!$A$2:$A$5</c:f>
-              <c:strCache>
-                <c:ptCount val="4"/>
-                <c:pt idx="0">
-                  <c:v>Très satisfait</c:v>
-                </c:pt>
-                <c:pt idx="1">
-                  <c:v>Satisfait</c:v>
-                </c:pt>
-                <c:pt idx="2">
-                  <c:v>Déçu</c:v>
-                </c:pt>
-                <c:pt idx="3">
-                  <c:v>Très déçu</c:v>
-                </c:pt>
-              </c:strCache>
-            </c:strRef>
-          </c:cat>
-          <c:val>
-            <c:numRef>
-              <c:f>Feuil1!$C$2:$C$5</c:f>
-              <c:numCache>
-                <c:formatCode>0%</c:formatCode>
-                <c:ptCount val="4"/>
-                <c:pt idx="0">
-                  <c:v>1</c:v>
-                </c:pt>
-                <c:pt idx="1">
-                  <c:v>0</c:v>
-                </c:pt>
-                <c:pt idx="2">
-                  <c:v>0</c:v>
-                </c:pt>
-                <c:pt idx="3">
-                  <c:v>0</c:v>
-                </c:pt>
-              </c:numCache>
-            </c:numRef>
-          </c:val>
-          <c:extLst>
-            <c:ext xmlns:c16="http://schemas.microsoft.com/office/drawing/2014/chart" uri="{C3380CC4-5D6E-409C-BE32-E72D297353CC}">
-              <c16:uniqueId val="{00000011-A87B-4736-9D0B-01A7FBC7041C}"/>
             </c:ext>
           </c:extLst>
         </c:ser>
@@ -2386,167 +2064,6 @@
             </c:ext>
           </c:extLst>
         </c:ser>
-        <c:ser>
-          <c:idx val="1"/>
-          <c:order val="1"/>
-          <c:tx>
-            <c:strRef>
-              <c:f>Feuil1!$C$1</c:f>
-              <c:strCache>
-                <c:ptCount val="1"/>
-                <c:pt idx="0">
-                  <c:v>Colonne1</c:v>
-                </c:pt>
-              </c:strCache>
-            </c:strRef>
-          </c:tx>
-          <c:dPt>
-            <c:idx val="0"/>
-            <c:bubble3D val="0"/>
-            <c:spPr>
-              <a:solidFill>
-                <a:schemeClr val="accent1"/>
-              </a:solidFill>
-              <a:ln w="25400">
-                <a:solidFill>
-                  <a:schemeClr val="accent1"/>
-                </a:solidFill>
-              </a:ln>
-              <a:effectLst/>
-              <a:sp3d contourW="25400">
-                <a:contourClr>
-                  <a:schemeClr val="accent1"/>
-                </a:contourClr>
-              </a:sp3d>
-            </c:spPr>
-            <c:extLst>
-              <c:ext xmlns:c16="http://schemas.microsoft.com/office/drawing/2014/chart" uri="{C3380CC4-5D6E-409C-BE32-E72D297353CC}">
-                <c16:uniqueId val="{0000000A-84D3-4823-A7F7-5F793F2F85DD}"/>
-              </c:ext>
-            </c:extLst>
-          </c:dPt>
-          <c:dPt>
-            <c:idx val="1"/>
-            <c:bubble3D val="0"/>
-            <c:spPr>
-              <a:solidFill>
-                <a:schemeClr val="accent2"/>
-              </a:solidFill>
-              <a:ln w="25400">
-                <a:solidFill>
-                  <a:schemeClr val="accent2"/>
-                </a:solidFill>
-              </a:ln>
-              <a:effectLst/>
-              <a:sp3d contourW="25400">
-                <a:contourClr>
-                  <a:schemeClr val="accent2"/>
-                </a:contourClr>
-              </a:sp3d>
-            </c:spPr>
-            <c:extLst>
-              <c:ext xmlns:c16="http://schemas.microsoft.com/office/drawing/2014/chart" uri="{C3380CC4-5D6E-409C-BE32-E72D297353CC}">
-                <c16:uniqueId val="{0000000C-84D3-4823-A7F7-5F793F2F85DD}"/>
-              </c:ext>
-            </c:extLst>
-          </c:dPt>
-          <c:dPt>
-            <c:idx val="2"/>
-            <c:bubble3D val="0"/>
-            <c:spPr>
-              <a:solidFill>
-                <a:schemeClr val="accent3"/>
-              </a:solidFill>
-              <a:ln w="25400">
-                <a:solidFill>
-                  <a:schemeClr val="accent3"/>
-                </a:solidFill>
-              </a:ln>
-              <a:effectLst/>
-              <a:sp3d contourW="25400">
-                <a:contourClr>
-                  <a:schemeClr val="accent3"/>
-                </a:contourClr>
-              </a:sp3d>
-            </c:spPr>
-            <c:extLst>
-              <c:ext xmlns:c16="http://schemas.microsoft.com/office/drawing/2014/chart" uri="{C3380CC4-5D6E-409C-BE32-E72D297353CC}">
-                <c16:uniqueId val="{0000000E-84D3-4823-A7F7-5F793F2F85DD}"/>
-              </c:ext>
-            </c:extLst>
-          </c:dPt>
-          <c:dPt>
-            <c:idx val="3"/>
-            <c:bubble3D val="0"/>
-            <c:spPr>
-              <a:solidFill>
-                <a:schemeClr val="accent4"/>
-              </a:solidFill>
-              <a:ln w="25400">
-                <a:solidFill>
-                  <a:schemeClr val="accent4"/>
-                </a:solidFill>
-              </a:ln>
-              <a:effectLst/>
-              <a:sp3d contourW="25400">
-                <a:contourClr>
-                  <a:schemeClr val="accent4"/>
-                </a:contourClr>
-              </a:sp3d>
-            </c:spPr>
-            <c:extLst>
-              <c:ext xmlns:c16="http://schemas.microsoft.com/office/drawing/2014/chart" uri="{C3380CC4-5D6E-409C-BE32-E72D297353CC}">
-                <c16:uniqueId val="{00000010-84D3-4823-A7F7-5F793F2F85DD}"/>
-              </c:ext>
-            </c:extLst>
-          </c:dPt>
-          <c:cat>
-            <c:strRef>
-              <c:f>Feuil1!$A$2:$A$5</c:f>
-              <c:strCache>
-                <c:ptCount val="4"/>
-                <c:pt idx="0">
-                  <c:v>Très satisfait</c:v>
-                </c:pt>
-                <c:pt idx="1">
-                  <c:v>Satisfait</c:v>
-                </c:pt>
-                <c:pt idx="2">
-                  <c:v>Déçu</c:v>
-                </c:pt>
-                <c:pt idx="3">
-                  <c:v>Très déçu</c:v>
-                </c:pt>
-              </c:strCache>
-            </c:strRef>
-          </c:cat>
-          <c:val>
-            <c:numRef>
-              <c:f>Feuil1!$C$2:$C$5</c:f>
-              <c:numCache>
-                <c:formatCode>0%</c:formatCode>
-                <c:ptCount val="4"/>
-                <c:pt idx="0">
-                  <c:v>1</c:v>
-                </c:pt>
-                <c:pt idx="1">
-                  <c:v>0</c:v>
-                </c:pt>
-                <c:pt idx="2">
-                  <c:v>0</c:v>
-                </c:pt>
-                <c:pt idx="3">
-                  <c:v>0</c:v>
-                </c:pt>
-              </c:numCache>
-            </c:numRef>
-          </c:val>
-          <c:extLst>
-            <c:ext xmlns:c16="http://schemas.microsoft.com/office/drawing/2014/chart" uri="{C3380CC4-5D6E-409C-BE32-E72D297353CC}">
-              <c16:uniqueId val="{00000011-84D3-4823-A7F7-5F793F2F85DD}"/>
-            </c:ext>
-          </c:extLst>
-        </c:ser>
         <c:dLbls>
           <c:showLegendKey val="0"/>
           <c:showVal val="0"/>
@@ -2958,167 +2475,6 @@
           <c:extLst>
             <c:ext xmlns:c16="http://schemas.microsoft.com/office/drawing/2014/chart" uri="{C3380CC4-5D6E-409C-BE32-E72D297353CC}">
               <c16:uniqueId val="{00000008-160F-4C39-A970-CAF924597A92}"/>
-            </c:ext>
-          </c:extLst>
-        </c:ser>
-        <c:ser>
-          <c:idx val="1"/>
-          <c:order val="1"/>
-          <c:tx>
-            <c:strRef>
-              <c:f>Feuil1!$C$1</c:f>
-              <c:strCache>
-                <c:ptCount val="1"/>
-                <c:pt idx="0">
-                  <c:v>Colonne1</c:v>
-                </c:pt>
-              </c:strCache>
-            </c:strRef>
-          </c:tx>
-          <c:dPt>
-            <c:idx val="0"/>
-            <c:bubble3D val="0"/>
-            <c:spPr>
-              <a:solidFill>
-                <a:schemeClr val="accent1"/>
-              </a:solidFill>
-              <a:ln w="25400">
-                <a:solidFill>
-                  <a:schemeClr val="accent1"/>
-                </a:solidFill>
-              </a:ln>
-              <a:effectLst/>
-              <a:sp3d contourW="25400">
-                <a:contourClr>
-                  <a:schemeClr val="accent1"/>
-                </a:contourClr>
-              </a:sp3d>
-            </c:spPr>
-            <c:extLst>
-              <c:ext xmlns:c16="http://schemas.microsoft.com/office/drawing/2014/chart" uri="{C3380CC4-5D6E-409C-BE32-E72D297353CC}">
-                <c16:uniqueId val="{0000000A-160F-4C39-A970-CAF924597A92}"/>
-              </c:ext>
-            </c:extLst>
-          </c:dPt>
-          <c:dPt>
-            <c:idx val="1"/>
-            <c:bubble3D val="0"/>
-            <c:spPr>
-              <a:solidFill>
-                <a:schemeClr val="accent2"/>
-              </a:solidFill>
-              <a:ln w="25400">
-                <a:solidFill>
-                  <a:schemeClr val="accent2"/>
-                </a:solidFill>
-              </a:ln>
-              <a:effectLst/>
-              <a:sp3d contourW="25400">
-                <a:contourClr>
-                  <a:schemeClr val="accent2"/>
-                </a:contourClr>
-              </a:sp3d>
-            </c:spPr>
-            <c:extLst>
-              <c:ext xmlns:c16="http://schemas.microsoft.com/office/drawing/2014/chart" uri="{C3380CC4-5D6E-409C-BE32-E72D297353CC}">
-                <c16:uniqueId val="{0000000C-160F-4C39-A970-CAF924597A92}"/>
-              </c:ext>
-            </c:extLst>
-          </c:dPt>
-          <c:dPt>
-            <c:idx val="2"/>
-            <c:bubble3D val="0"/>
-            <c:spPr>
-              <a:solidFill>
-                <a:schemeClr val="accent3"/>
-              </a:solidFill>
-              <a:ln w="25400">
-                <a:solidFill>
-                  <a:schemeClr val="accent3"/>
-                </a:solidFill>
-              </a:ln>
-              <a:effectLst/>
-              <a:sp3d contourW="25400">
-                <a:contourClr>
-                  <a:schemeClr val="accent3"/>
-                </a:contourClr>
-              </a:sp3d>
-            </c:spPr>
-            <c:extLst>
-              <c:ext xmlns:c16="http://schemas.microsoft.com/office/drawing/2014/chart" uri="{C3380CC4-5D6E-409C-BE32-E72D297353CC}">
-                <c16:uniqueId val="{0000000E-160F-4C39-A970-CAF924597A92}"/>
-              </c:ext>
-            </c:extLst>
-          </c:dPt>
-          <c:dPt>
-            <c:idx val="3"/>
-            <c:bubble3D val="0"/>
-            <c:spPr>
-              <a:solidFill>
-                <a:schemeClr val="accent4"/>
-              </a:solidFill>
-              <a:ln w="25400">
-                <a:solidFill>
-                  <a:schemeClr val="accent4"/>
-                </a:solidFill>
-              </a:ln>
-              <a:effectLst/>
-              <a:sp3d contourW="25400">
-                <a:contourClr>
-                  <a:schemeClr val="accent4"/>
-                </a:contourClr>
-              </a:sp3d>
-            </c:spPr>
-            <c:extLst>
-              <c:ext xmlns:c16="http://schemas.microsoft.com/office/drawing/2014/chart" uri="{C3380CC4-5D6E-409C-BE32-E72D297353CC}">
-                <c16:uniqueId val="{00000010-160F-4C39-A970-CAF924597A92}"/>
-              </c:ext>
-            </c:extLst>
-          </c:dPt>
-          <c:cat>
-            <c:strRef>
-              <c:f>Feuil1!$A$2:$A$5</c:f>
-              <c:strCache>
-                <c:ptCount val="4"/>
-                <c:pt idx="0">
-                  <c:v>Très satisfait</c:v>
-                </c:pt>
-                <c:pt idx="1">
-                  <c:v>Satisfait</c:v>
-                </c:pt>
-                <c:pt idx="2">
-                  <c:v>Déçu</c:v>
-                </c:pt>
-                <c:pt idx="3">
-                  <c:v>Très déçu</c:v>
-                </c:pt>
-              </c:strCache>
-            </c:strRef>
-          </c:cat>
-          <c:val>
-            <c:numRef>
-              <c:f>Feuil1!$C$2:$C$5</c:f>
-              <c:numCache>
-                <c:formatCode>0%</c:formatCode>
-                <c:ptCount val="4"/>
-                <c:pt idx="0">
-                  <c:v>1</c:v>
-                </c:pt>
-                <c:pt idx="1">
-                  <c:v>0</c:v>
-                </c:pt>
-                <c:pt idx="2">
-                  <c:v>0</c:v>
-                </c:pt>
-                <c:pt idx="3">
-                  <c:v>0</c:v>
-                </c:pt>
-              </c:numCache>
-            </c:numRef>
-          </c:val>
-          <c:extLst>
-            <c:ext xmlns:c16="http://schemas.microsoft.com/office/drawing/2014/chart" uri="{C3380CC4-5D6E-409C-BE32-E72D297353CC}">
-              <c16:uniqueId val="{00000011-160F-4C39-A970-CAF924597A92}"/>
             </c:ext>
           </c:extLst>
         </c:ser>
@@ -3541,167 +2897,6 @@
             </c:ext>
           </c:extLst>
         </c:ser>
-        <c:ser>
-          <c:idx val="1"/>
-          <c:order val="1"/>
-          <c:tx>
-            <c:strRef>
-              <c:f>Feuil1!$C$1</c:f>
-              <c:strCache>
-                <c:ptCount val="1"/>
-                <c:pt idx="0">
-                  <c:v>Colonne1</c:v>
-                </c:pt>
-              </c:strCache>
-            </c:strRef>
-          </c:tx>
-          <c:dPt>
-            <c:idx val="0"/>
-            <c:bubble3D val="0"/>
-            <c:spPr>
-              <a:solidFill>
-                <a:schemeClr val="accent1"/>
-              </a:solidFill>
-              <a:ln w="25400">
-                <a:solidFill>
-                  <a:schemeClr val="accent1"/>
-                </a:solidFill>
-              </a:ln>
-              <a:effectLst/>
-              <a:sp3d contourW="25400">
-                <a:contourClr>
-                  <a:schemeClr val="accent1"/>
-                </a:contourClr>
-              </a:sp3d>
-            </c:spPr>
-            <c:extLst>
-              <c:ext xmlns:c16="http://schemas.microsoft.com/office/drawing/2014/chart" uri="{C3380CC4-5D6E-409C-BE32-E72D297353CC}">
-                <c16:uniqueId val="{0000000A-5060-4FFE-B29A-568213ABA5B2}"/>
-              </c:ext>
-            </c:extLst>
-          </c:dPt>
-          <c:dPt>
-            <c:idx val="1"/>
-            <c:bubble3D val="0"/>
-            <c:spPr>
-              <a:solidFill>
-                <a:schemeClr val="accent2"/>
-              </a:solidFill>
-              <a:ln w="25400">
-                <a:solidFill>
-                  <a:schemeClr val="accent2"/>
-                </a:solidFill>
-              </a:ln>
-              <a:effectLst/>
-              <a:sp3d contourW="25400">
-                <a:contourClr>
-                  <a:schemeClr val="accent2"/>
-                </a:contourClr>
-              </a:sp3d>
-            </c:spPr>
-            <c:extLst>
-              <c:ext xmlns:c16="http://schemas.microsoft.com/office/drawing/2014/chart" uri="{C3380CC4-5D6E-409C-BE32-E72D297353CC}">
-                <c16:uniqueId val="{0000000C-5060-4FFE-B29A-568213ABA5B2}"/>
-              </c:ext>
-            </c:extLst>
-          </c:dPt>
-          <c:dPt>
-            <c:idx val="2"/>
-            <c:bubble3D val="0"/>
-            <c:spPr>
-              <a:solidFill>
-                <a:schemeClr val="accent3"/>
-              </a:solidFill>
-              <a:ln w="25400">
-                <a:solidFill>
-                  <a:schemeClr val="accent3"/>
-                </a:solidFill>
-              </a:ln>
-              <a:effectLst/>
-              <a:sp3d contourW="25400">
-                <a:contourClr>
-                  <a:schemeClr val="accent3"/>
-                </a:contourClr>
-              </a:sp3d>
-            </c:spPr>
-            <c:extLst>
-              <c:ext xmlns:c16="http://schemas.microsoft.com/office/drawing/2014/chart" uri="{C3380CC4-5D6E-409C-BE32-E72D297353CC}">
-                <c16:uniqueId val="{0000000E-5060-4FFE-B29A-568213ABA5B2}"/>
-              </c:ext>
-            </c:extLst>
-          </c:dPt>
-          <c:dPt>
-            <c:idx val="3"/>
-            <c:bubble3D val="0"/>
-            <c:spPr>
-              <a:solidFill>
-                <a:schemeClr val="accent4"/>
-              </a:solidFill>
-              <a:ln w="25400">
-                <a:solidFill>
-                  <a:schemeClr val="accent4"/>
-                </a:solidFill>
-              </a:ln>
-              <a:effectLst/>
-              <a:sp3d contourW="25400">
-                <a:contourClr>
-                  <a:schemeClr val="accent4"/>
-                </a:contourClr>
-              </a:sp3d>
-            </c:spPr>
-            <c:extLst>
-              <c:ext xmlns:c16="http://schemas.microsoft.com/office/drawing/2014/chart" uri="{C3380CC4-5D6E-409C-BE32-E72D297353CC}">
-                <c16:uniqueId val="{00000010-5060-4FFE-B29A-568213ABA5B2}"/>
-              </c:ext>
-            </c:extLst>
-          </c:dPt>
-          <c:cat>
-            <c:strRef>
-              <c:f>Feuil1!$A$2:$A$5</c:f>
-              <c:strCache>
-                <c:ptCount val="4"/>
-                <c:pt idx="0">
-                  <c:v>Très satisfait</c:v>
-                </c:pt>
-                <c:pt idx="1">
-                  <c:v>Satisfait</c:v>
-                </c:pt>
-                <c:pt idx="2">
-                  <c:v>Déçu</c:v>
-                </c:pt>
-                <c:pt idx="3">
-                  <c:v>Très déçu</c:v>
-                </c:pt>
-              </c:strCache>
-            </c:strRef>
-          </c:cat>
-          <c:val>
-            <c:numRef>
-              <c:f>Feuil1!$C$2:$C$5</c:f>
-              <c:numCache>
-                <c:formatCode>0%</c:formatCode>
-                <c:ptCount val="4"/>
-                <c:pt idx="0">
-                  <c:v>0.83333333333333337</c:v>
-                </c:pt>
-                <c:pt idx="1">
-                  <c:v>0.16666666666666666</c:v>
-                </c:pt>
-                <c:pt idx="2">
-                  <c:v>0</c:v>
-                </c:pt>
-                <c:pt idx="3">
-                  <c:v>0</c:v>
-                </c:pt>
-              </c:numCache>
-            </c:numRef>
-          </c:val>
-          <c:extLst>
-            <c:ext xmlns:c16="http://schemas.microsoft.com/office/drawing/2014/chart" uri="{C3380CC4-5D6E-409C-BE32-E72D297353CC}">
-              <c16:uniqueId val="{00000011-5060-4FFE-B29A-568213ABA5B2}"/>
-            </c:ext>
-          </c:extLst>
-        </c:ser>
         <c:dLbls>
           <c:showLegendKey val="0"/>
           <c:showVal val="0"/>
@@ -4113,167 +3308,6 @@
           <c:extLst>
             <c:ext xmlns:c16="http://schemas.microsoft.com/office/drawing/2014/chart" uri="{C3380CC4-5D6E-409C-BE32-E72D297353CC}">
               <c16:uniqueId val="{00000008-E4E3-40D3-B027-977F596632D7}"/>
-            </c:ext>
-          </c:extLst>
-        </c:ser>
-        <c:ser>
-          <c:idx val="1"/>
-          <c:order val="1"/>
-          <c:tx>
-            <c:strRef>
-              <c:f>Feuil1!$C$1</c:f>
-              <c:strCache>
-                <c:ptCount val="1"/>
-                <c:pt idx="0">
-                  <c:v>Colonne1</c:v>
-                </c:pt>
-              </c:strCache>
-            </c:strRef>
-          </c:tx>
-          <c:dPt>
-            <c:idx val="0"/>
-            <c:bubble3D val="0"/>
-            <c:spPr>
-              <a:solidFill>
-                <a:schemeClr val="accent1"/>
-              </a:solidFill>
-              <a:ln w="25400">
-                <a:solidFill>
-                  <a:schemeClr val="accent1"/>
-                </a:solidFill>
-              </a:ln>
-              <a:effectLst/>
-              <a:sp3d contourW="25400">
-                <a:contourClr>
-                  <a:schemeClr val="accent1"/>
-                </a:contourClr>
-              </a:sp3d>
-            </c:spPr>
-            <c:extLst>
-              <c:ext xmlns:c16="http://schemas.microsoft.com/office/drawing/2014/chart" uri="{C3380CC4-5D6E-409C-BE32-E72D297353CC}">
-                <c16:uniqueId val="{0000000A-E4E3-40D3-B027-977F596632D7}"/>
-              </c:ext>
-            </c:extLst>
-          </c:dPt>
-          <c:dPt>
-            <c:idx val="1"/>
-            <c:bubble3D val="0"/>
-            <c:spPr>
-              <a:solidFill>
-                <a:schemeClr val="accent2"/>
-              </a:solidFill>
-              <a:ln w="25400">
-                <a:solidFill>
-                  <a:schemeClr val="accent2"/>
-                </a:solidFill>
-              </a:ln>
-              <a:effectLst/>
-              <a:sp3d contourW="25400">
-                <a:contourClr>
-                  <a:schemeClr val="accent2"/>
-                </a:contourClr>
-              </a:sp3d>
-            </c:spPr>
-            <c:extLst>
-              <c:ext xmlns:c16="http://schemas.microsoft.com/office/drawing/2014/chart" uri="{C3380CC4-5D6E-409C-BE32-E72D297353CC}">
-                <c16:uniqueId val="{0000000C-E4E3-40D3-B027-977F596632D7}"/>
-              </c:ext>
-            </c:extLst>
-          </c:dPt>
-          <c:dPt>
-            <c:idx val="2"/>
-            <c:bubble3D val="0"/>
-            <c:spPr>
-              <a:solidFill>
-                <a:schemeClr val="accent3"/>
-              </a:solidFill>
-              <a:ln w="25400">
-                <a:solidFill>
-                  <a:schemeClr val="accent3"/>
-                </a:solidFill>
-              </a:ln>
-              <a:effectLst/>
-              <a:sp3d contourW="25400">
-                <a:contourClr>
-                  <a:schemeClr val="accent3"/>
-                </a:contourClr>
-              </a:sp3d>
-            </c:spPr>
-            <c:extLst>
-              <c:ext xmlns:c16="http://schemas.microsoft.com/office/drawing/2014/chart" uri="{C3380CC4-5D6E-409C-BE32-E72D297353CC}">
-                <c16:uniqueId val="{0000000E-E4E3-40D3-B027-977F596632D7}"/>
-              </c:ext>
-            </c:extLst>
-          </c:dPt>
-          <c:dPt>
-            <c:idx val="3"/>
-            <c:bubble3D val="0"/>
-            <c:spPr>
-              <a:solidFill>
-                <a:schemeClr val="accent4"/>
-              </a:solidFill>
-              <a:ln w="25400">
-                <a:solidFill>
-                  <a:schemeClr val="accent4"/>
-                </a:solidFill>
-              </a:ln>
-              <a:effectLst/>
-              <a:sp3d contourW="25400">
-                <a:contourClr>
-                  <a:schemeClr val="accent4"/>
-                </a:contourClr>
-              </a:sp3d>
-            </c:spPr>
-            <c:extLst>
-              <c:ext xmlns:c16="http://schemas.microsoft.com/office/drawing/2014/chart" uri="{C3380CC4-5D6E-409C-BE32-E72D297353CC}">
-                <c16:uniqueId val="{00000010-E4E3-40D3-B027-977F596632D7}"/>
-              </c:ext>
-            </c:extLst>
-          </c:dPt>
-          <c:cat>
-            <c:strRef>
-              <c:f>Feuil1!$A$2:$A$5</c:f>
-              <c:strCache>
-                <c:ptCount val="4"/>
-                <c:pt idx="0">
-                  <c:v>Très satisfait</c:v>
-                </c:pt>
-                <c:pt idx="1">
-                  <c:v>Satisfait</c:v>
-                </c:pt>
-                <c:pt idx="2">
-                  <c:v>Déçu</c:v>
-                </c:pt>
-                <c:pt idx="3">
-                  <c:v>Très déçu</c:v>
-                </c:pt>
-              </c:strCache>
-            </c:strRef>
-          </c:cat>
-          <c:val>
-            <c:numRef>
-              <c:f>Feuil1!$C$2:$C$5</c:f>
-              <c:numCache>
-                <c:formatCode>0%</c:formatCode>
-                <c:ptCount val="4"/>
-                <c:pt idx="0">
-                  <c:v>1</c:v>
-                </c:pt>
-                <c:pt idx="1">
-                  <c:v>0</c:v>
-                </c:pt>
-                <c:pt idx="2">
-                  <c:v>0</c:v>
-                </c:pt>
-                <c:pt idx="3">
-                  <c:v>0</c:v>
-                </c:pt>
-              </c:numCache>
-            </c:numRef>
-          </c:val>
-          <c:extLst>
-            <c:ext xmlns:c16="http://schemas.microsoft.com/office/drawing/2014/chart" uri="{C3380CC4-5D6E-409C-BE32-E72D297353CC}">
-              <c16:uniqueId val="{00000011-E4E3-40D3-B027-977F596632D7}"/>
             </c:ext>
           </c:extLst>
         </c:ser>
@@ -4691,167 +3725,6 @@
             </c:ext>
           </c:extLst>
         </c:ser>
-        <c:ser>
-          <c:idx val="1"/>
-          <c:order val="1"/>
-          <c:tx>
-            <c:strRef>
-              <c:f>Feuil1!$C$1</c:f>
-              <c:strCache>
-                <c:ptCount val="1"/>
-                <c:pt idx="0">
-                  <c:v>Colonne1</c:v>
-                </c:pt>
-              </c:strCache>
-            </c:strRef>
-          </c:tx>
-          <c:dPt>
-            <c:idx val="0"/>
-            <c:bubble3D val="0"/>
-            <c:spPr>
-              <a:solidFill>
-                <a:schemeClr val="accent1"/>
-              </a:solidFill>
-              <a:ln w="25400">
-                <a:solidFill>
-                  <a:schemeClr val="accent1"/>
-                </a:solidFill>
-              </a:ln>
-              <a:effectLst/>
-              <a:sp3d contourW="25400">
-                <a:contourClr>
-                  <a:schemeClr val="accent1"/>
-                </a:contourClr>
-              </a:sp3d>
-            </c:spPr>
-            <c:extLst>
-              <c:ext xmlns:c16="http://schemas.microsoft.com/office/drawing/2014/chart" uri="{C3380CC4-5D6E-409C-BE32-E72D297353CC}">
-                <c16:uniqueId val="{0000000A-C591-4A6E-9EC0-8184EFFC900B}"/>
-              </c:ext>
-            </c:extLst>
-          </c:dPt>
-          <c:dPt>
-            <c:idx val="1"/>
-            <c:bubble3D val="0"/>
-            <c:spPr>
-              <a:solidFill>
-                <a:schemeClr val="accent2"/>
-              </a:solidFill>
-              <a:ln w="25400">
-                <a:solidFill>
-                  <a:schemeClr val="accent2"/>
-                </a:solidFill>
-              </a:ln>
-              <a:effectLst/>
-              <a:sp3d contourW="25400">
-                <a:contourClr>
-                  <a:schemeClr val="accent2"/>
-                </a:contourClr>
-              </a:sp3d>
-            </c:spPr>
-            <c:extLst>
-              <c:ext xmlns:c16="http://schemas.microsoft.com/office/drawing/2014/chart" uri="{C3380CC4-5D6E-409C-BE32-E72D297353CC}">
-                <c16:uniqueId val="{0000000C-C591-4A6E-9EC0-8184EFFC900B}"/>
-              </c:ext>
-            </c:extLst>
-          </c:dPt>
-          <c:dPt>
-            <c:idx val="2"/>
-            <c:bubble3D val="0"/>
-            <c:spPr>
-              <a:solidFill>
-                <a:schemeClr val="accent3"/>
-              </a:solidFill>
-              <a:ln w="25400">
-                <a:solidFill>
-                  <a:schemeClr val="accent3"/>
-                </a:solidFill>
-              </a:ln>
-              <a:effectLst/>
-              <a:sp3d contourW="25400">
-                <a:contourClr>
-                  <a:schemeClr val="accent3"/>
-                </a:contourClr>
-              </a:sp3d>
-            </c:spPr>
-            <c:extLst>
-              <c:ext xmlns:c16="http://schemas.microsoft.com/office/drawing/2014/chart" uri="{C3380CC4-5D6E-409C-BE32-E72D297353CC}">
-                <c16:uniqueId val="{0000000E-C591-4A6E-9EC0-8184EFFC900B}"/>
-              </c:ext>
-            </c:extLst>
-          </c:dPt>
-          <c:dPt>
-            <c:idx val="3"/>
-            <c:bubble3D val="0"/>
-            <c:spPr>
-              <a:solidFill>
-                <a:schemeClr val="accent4"/>
-              </a:solidFill>
-              <a:ln w="25400">
-                <a:solidFill>
-                  <a:schemeClr val="accent4"/>
-                </a:solidFill>
-              </a:ln>
-              <a:effectLst/>
-              <a:sp3d contourW="25400">
-                <a:contourClr>
-                  <a:schemeClr val="accent4"/>
-                </a:contourClr>
-              </a:sp3d>
-            </c:spPr>
-            <c:extLst>
-              <c:ext xmlns:c16="http://schemas.microsoft.com/office/drawing/2014/chart" uri="{C3380CC4-5D6E-409C-BE32-E72D297353CC}">
-                <c16:uniqueId val="{00000010-C591-4A6E-9EC0-8184EFFC900B}"/>
-              </c:ext>
-            </c:extLst>
-          </c:dPt>
-          <c:cat>
-            <c:strRef>
-              <c:f>Feuil1!$A$2:$A$5</c:f>
-              <c:strCache>
-                <c:ptCount val="4"/>
-                <c:pt idx="0">
-                  <c:v>Très satisfait</c:v>
-                </c:pt>
-                <c:pt idx="1">
-                  <c:v>Satisfait</c:v>
-                </c:pt>
-                <c:pt idx="2">
-                  <c:v>Déçu</c:v>
-                </c:pt>
-                <c:pt idx="3">
-                  <c:v>Très déçu</c:v>
-                </c:pt>
-              </c:strCache>
-            </c:strRef>
-          </c:cat>
-          <c:val>
-            <c:numRef>
-              <c:f>Feuil1!$C$2:$C$5</c:f>
-              <c:numCache>
-                <c:formatCode>0%</c:formatCode>
-                <c:ptCount val="4"/>
-                <c:pt idx="0">
-                  <c:v>1</c:v>
-                </c:pt>
-                <c:pt idx="1">
-                  <c:v>0</c:v>
-                </c:pt>
-                <c:pt idx="2">
-                  <c:v>0</c:v>
-                </c:pt>
-                <c:pt idx="3">
-                  <c:v>0</c:v>
-                </c:pt>
-              </c:numCache>
-            </c:numRef>
-          </c:val>
-          <c:extLst>
-            <c:ext xmlns:c16="http://schemas.microsoft.com/office/drawing/2014/chart" uri="{C3380CC4-5D6E-409C-BE32-E72D297353CC}">
-              <c16:uniqueId val="{00000011-C591-4A6E-9EC0-8184EFFC900B}"/>
-            </c:ext>
-          </c:extLst>
-        </c:ser>
         <c:dLbls>
           <c:showLegendKey val="0"/>
           <c:showVal val="0"/>
@@ -5263,167 +4136,6 @@
           <c:extLst>
             <c:ext xmlns:c16="http://schemas.microsoft.com/office/drawing/2014/chart" uri="{C3380CC4-5D6E-409C-BE32-E72D297353CC}">
               <c16:uniqueId val="{00000008-C03F-448F-9BFD-6014A675D769}"/>
-            </c:ext>
-          </c:extLst>
-        </c:ser>
-        <c:ser>
-          <c:idx val="1"/>
-          <c:order val="1"/>
-          <c:tx>
-            <c:strRef>
-              <c:f>Feuil1!$C$1</c:f>
-              <c:strCache>
-                <c:ptCount val="1"/>
-                <c:pt idx="0">
-                  <c:v>Colonne1</c:v>
-                </c:pt>
-              </c:strCache>
-            </c:strRef>
-          </c:tx>
-          <c:dPt>
-            <c:idx val="0"/>
-            <c:bubble3D val="0"/>
-            <c:spPr>
-              <a:solidFill>
-                <a:schemeClr val="accent1"/>
-              </a:solidFill>
-              <a:ln w="25400">
-                <a:solidFill>
-                  <a:schemeClr val="accent1"/>
-                </a:solidFill>
-              </a:ln>
-              <a:effectLst/>
-              <a:sp3d contourW="25400">
-                <a:contourClr>
-                  <a:schemeClr val="accent1"/>
-                </a:contourClr>
-              </a:sp3d>
-            </c:spPr>
-            <c:extLst>
-              <c:ext xmlns:c16="http://schemas.microsoft.com/office/drawing/2014/chart" uri="{C3380CC4-5D6E-409C-BE32-E72D297353CC}">
-                <c16:uniqueId val="{0000000A-C03F-448F-9BFD-6014A675D769}"/>
-              </c:ext>
-            </c:extLst>
-          </c:dPt>
-          <c:dPt>
-            <c:idx val="1"/>
-            <c:bubble3D val="0"/>
-            <c:spPr>
-              <a:solidFill>
-                <a:schemeClr val="accent2"/>
-              </a:solidFill>
-              <a:ln w="25400">
-                <a:solidFill>
-                  <a:schemeClr val="accent2"/>
-                </a:solidFill>
-              </a:ln>
-              <a:effectLst/>
-              <a:sp3d contourW="25400">
-                <a:contourClr>
-                  <a:schemeClr val="accent2"/>
-                </a:contourClr>
-              </a:sp3d>
-            </c:spPr>
-            <c:extLst>
-              <c:ext xmlns:c16="http://schemas.microsoft.com/office/drawing/2014/chart" uri="{C3380CC4-5D6E-409C-BE32-E72D297353CC}">
-                <c16:uniqueId val="{0000000C-C03F-448F-9BFD-6014A675D769}"/>
-              </c:ext>
-            </c:extLst>
-          </c:dPt>
-          <c:dPt>
-            <c:idx val="2"/>
-            <c:bubble3D val="0"/>
-            <c:spPr>
-              <a:solidFill>
-                <a:schemeClr val="accent3"/>
-              </a:solidFill>
-              <a:ln w="25400">
-                <a:solidFill>
-                  <a:schemeClr val="accent3"/>
-                </a:solidFill>
-              </a:ln>
-              <a:effectLst/>
-              <a:sp3d contourW="25400">
-                <a:contourClr>
-                  <a:schemeClr val="accent3"/>
-                </a:contourClr>
-              </a:sp3d>
-            </c:spPr>
-            <c:extLst>
-              <c:ext xmlns:c16="http://schemas.microsoft.com/office/drawing/2014/chart" uri="{C3380CC4-5D6E-409C-BE32-E72D297353CC}">
-                <c16:uniqueId val="{0000000E-C03F-448F-9BFD-6014A675D769}"/>
-              </c:ext>
-            </c:extLst>
-          </c:dPt>
-          <c:dPt>
-            <c:idx val="3"/>
-            <c:bubble3D val="0"/>
-            <c:spPr>
-              <a:solidFill>
-                <a:schemeClr val="accent4"/>
-              </a:solidFill>
-              <a:ln w="25400">
-                <a:solidFill>
-                  <a:schemeClr val="accent4"/>
-                </a:solidFill>
-              </a:ln>
-              <a:effectLst/>
-              <a:sp3d contourW="25400">
-                <a:contourClr>
-                  <a:schemeClr val="accent4"/>
-                </a:contourClr>
-              </a:sp3d>
-            </c:spPr>
-            <c:extLst>
-              <c:ext xmlns:c16="http://schemas.microsoft.com/office/drawing/2014/chart" uri="{C3380CC4-5D6E-409C-BE32-E72D297353CC}">
-                <c16:uniqueId val="{00000010-C03F-448F-9BFD-6014A675D769}"/>
-              </c:ext>
-            </c:extLst>
-          </c:dPt>
-          <c:cat>
-            <c:strRef>
-              <c:f>Feuil1!$A$2:$A$5</c:f>
-              <c:strCache>
-                <c:ptCount val="4"/>
-                <c:pt idx="0">
-                  <c:v>Très satisfait</c:v>
-                </c:pt>
-                <c:pt idx="1">
-                  <c:v>Satisfait</c:v>
-                </c:pt>
-                <c:pt idx="2">
-                  <c:v>Déçu</c:v>
-                </c:pt>
-                <c:pt idx="3">
-                  <c:v>Très déçu</c:v>
-                </c:pt>
-              </c:strCache>
-            </c:strRef>
-          </c:cat>
-          <c:val>
-            <c:numRef>
-              <c:f>Feuil1!$C$2:$C$5</c:f>
-              <c:numCache>
-                <c:formatCode>0%</c:formatCode>
-                <c:ptCount val="4"/>
-                <c:pt idx="0">
-                  <c:v>1</c:v>
-                </c:pt>
-                <c:pt idx="1">
-                  <c:v>0</c:v>
-                </c:pt>
-                <c:pt idx="2">
-                  <c:v>0</c:v>
-                </c:pt>
-                <c:pt idx="3">
-                  <c:v>0</c:v>
-                </c:pt>
-              </c:numCache>
-            </c:numRef>
-          </c:val>
-          <c:extLst>
-            <c:ext xmlns:c16="http://schemas.microsoft.com/office/drawing/2014/chart" uri="{C3380CC4-5D6E-409C-BE32-E72D297353CC}">
-              <c16:uniqueId val="{00000011-C03F-448F-9BFD-6014A675D769}"/>
             </c:ext>
           </c:extLst>
         </c:ser>
@@ -5841,167 +4553,6 @@
             </c:ext>
           </c:extLst>
         </c:ser>
-        <c:ser>
-          <c:idx val="1"/>
-          <c:order val="1"/>
-          <c:tx>
-            <c:strRef>
-              <c:f>Feuil1!$C$1</c:f>
-              <c:strCache>
-                <c:ptCount val="1"/>
-                <c:pt idx="0">
-                  <c:v>Colonne1</c:v>
-                </c:pt>
-              </c:strCache>
-            </c:strRef>
-          </c:tx>
-          <c:dPt>
-            <c:idx val="0"/>
-            <c:bubble3D val="0"/>
-            <c:spPr>
-              <a:solidFill>
-                <a:schemeClr val="accent1"/>
-              </a:solidFill>
-              <a:ln w="25400">
-                <a:solidFill>
-                  <a:schemeClr val="accent1"/>
-                </a:solidFill>
-              </a:ln>
-              <a:effectLst/>
-              <a:sp3d contourW="25400">
-                <a:contourClr>
-                  <a:schemeClr val="accent1"/>
-                </a:contourClr>
-              </a:sp3d>
-            </c:spPr>
-            <c:extLst>
-              <c:ext xmlns:c16="http://schemas.microsoft.com/office/drawing/2014/chart" uri="{C3380CC4-5D6E-409C-BE32-E72D297353CC}">
-                <c16:uniqueId val="{0000000A-935E-4232-ADE2-A27325A7FD3A}"/>
-              </c:ext>
-            </c:extLst>
-          </c:dPt>
-          <c:dPt>
-            <c:idx val="1"/>
-            <c:bubble3D val="0"/>
-            <c:spPr>
-              <a:solidFill>
-                <a:schemeClr val="accent2"/>
-              </a:solidFill>
-              <a:ln w="25400">
-                <a:solidFill>
-                  <a:schemeClr val="accent2"/>
-                </a:solidFill>
-              </a:ln>
-              <a:effectLst/>
-              <a:sp3d contourW="25400">
-                <a:contourClr>
-                  <a:schemeClr val="accent2"/>
-                </a:contourClr>
-              </a:sp3d>
-            </c:spPr>
-            <c:extLst>
-              <c:ext xmlns:c16="http://schemas.microsoft.com/office/drawing/2014/chart" uri="{C3380CC4-5D6E-409C-BE32-E72D297353CC}">
-                <c16:uniqueId val="{0000000C-935E-4232-ADE2-A27325A7FD3A}"/>
-              </c:ext>
-            </c:extLst>
-          </c:dPt>
-          <c:dPt>
-            <c:idx val="2"/>
-            <c:bubble3D val="0"/>
-            <c:spPr>
-              <a:solidFill>
-                <a:schemeClr val="accent3"/>
-              </a:solidFill>
-              <a:ln w="25400">
-                <a:solidFill>
-                  <a:schemeClr val="accent3"/>
-                </a:solidFill>
-              </a:ln>
-              <a:effectLst/>
-              <a:sp3d contourW="25400">
-                <a:contourClr>
-                  <a:schemeClr val="accent3"/>
-                </a:contourClr>
-              </a:sp3d>
-            </c:spPr>
-            <c:extLst>
-              <c:ext xmlns:c16="http://schemas.microsoft.com/office/drawing/2014/chart" uri="{C3380CC4-5D6E-409C-BE32-E72D297353CC}">
-                <c16:uniqueId val="{0000000E-935E-4232-ADE2-A27325A7FD3A}"/>
-              </c:ext>
-            </c:extLst>
-          </c:dPt>
-          <c:dPt>
-            <c:idx val="3"/>
-            <c:bubble3D val="0"/>
-            <c:spPr>
-              <a:solidFill>
-                <a:schemeClr val="accent4"/>
-              </a:solidFill>
-              <a:ln w="25400">
-                <a:solidFill>
-                  <a:schemeClr val="accent4"/>
-                </a:solidFill>
-              </a:ln>
-              <a:effectLst/>
-              <a:sp3d contourW="25400">
-                <a:contourClr>
-                  <a:schemeClr val="accent4"/>
-                </a:contourClr>
-              </a:sp3d>
-            </c:spPr>
-            <c:extLst>
-              <c:ext xmlns:c16="http://schemas.microsoft.com/office/drawing/2014/chart" uri="{C3380CC4-5D6E-409C-BE32-E72D297353CC}">
-                <c16:uniqueId val="{00000010-935E-4232-ADE2-A27325A7FD3A}"/>
-              </c:ext>
-            </c:extLst>
-          </c:dPt>
-          <c:cat>
-            <c:strRef>
-              <c:f>Feuil1!$A$2:$A$5</c:f>
-              <c:strCache>
-                <c:ptCount val="4"/>
-                <c:pt idx="0">
-                  <c:v>Très satisfait</c:v>
-                </c:pt>
-                <c:pt idx="1">
-                  <c:v>Satisfait</c:v>
-                </c:pt>
-                <c:pt idx="2">
-                  <c:v>Déçu</c:v>
-                </c:pt>
-                <c:pt idx="3">
-                  <c:v>Très déçu</c:v>
-                </c:pt>
-              </c:strCache>
-            </c:strRef>
-          </c:cat>
-          <c:val>
-            <c:numRef>
-              <c:f>Feuil1!$C$2:$C$5</c:f>
-              <c:numCache>
-                <c:formatCode>0%</c:formatCode>
-                <c:ptCount val="4"/>
-                <c:pt idx="0">
-                  <c:v>1</c:v>
-                </c:pt>
-                <c:pt idx="1">
-                  <c:v>0</c:v>
-                </c:pt>
-                <c:pt idx="2">
-                  <c:v>0</c:v>
-                </c:pt>
-                <c:pt idx="3">
-                  <c:v>0</c:v>
-                </c:pt>
-              </c:numCache>
-            </c:numRef>
-          </c:val>
-          <c:extLst>
-            <c:ext xmlns:c16="http://schemas.microsoft.com/office/drawing/2014/chart" uri="{C3380CC4-5D6E-409C-BE32-E72D297353CC}">
-              <c16:uniqueId val="{00000011-935E-4232-ADE2-A27325A7FD3A}"/>
-            </c:ext>
-          </c:extLst>
-        </c:ser>
         <c:dLbls>
           <c:showLegendKey val="0"/>
           <c:showVal val="0"/>
@@ -6413,167 +4964,6 @@
           <c:extLst>
             <c:ext xmlns:c16="http://schemas.microsoft.com/office/drawing/2014/chart" uri="{C3380CC4-5D6E-409C-BE32-E72D297353CC}">
               <c16:uniqueId val="{00000008-2C01-43C4-8781-6E18E562C4A9}"/>
-            </c:ext>
-          </c:extLst>
-        </c:ser>
-        <c:ser>
-          <c:idx val="1"/>
-          <c:order val="1"/>
-          <c:tx>
-            <c:strRef>
-              <c:f>Feuil1!$C$1</c:f>
-              <c:strCache>
-                <c:ptCount val="1"/>
-                <c:pt idx="0">
-                  <c:v>Colonne1</c:v>
-                </c:pt>
-              </c:strCache>
-            </c:strRef>
-          </c:tx>
-          <c:dPt>
-            <c:idx val="0"/>
-            <c:bubble3D val="0"/>
-            <c:spPr>
-              <a:solidFill>
-                <a:schemeClr val="accent1"/>
-              </a:solidFill>
-              <a:ln w="25400">
-                <a:solidFill>
-                  <a:schemeClr val="accent1"/>
-                </a:solidFill>
-              </a:ln>
-              <a:effectLst/>
-              <a:sp3d contourW="25400">
-                <a:contourClr>
-                  <a:schemeClr val="accent1"/>
-                </a:contourClr>
-              </a:sp3d>
-            </c:spPr>
-            <c:extLst>
-              <c:ext xmlns:c16="http://schemas.microsoft.com/office/drawing/2014/chart" uri="{C3380CC4-5D6E-409C-BE32-E72D297353CC}">
-                <c16:uniqueId val="{0000000A-2C01-43C4-8781-6E18E562C4A9}"/>
-              </c:ext>
-            </c:extLst>
-          </c:dPt>
-          <c:dPt>
-            <c:idx val="1"/>
-            <c:bubble3D val="0"/>
-            <c:spPr>
-              <a:solidFill>
-                <a:schemeClr val="accent2"/>
-              </a:solidFill>
-              <a:ln w="25400">
-                <a:solidFill>
-                  <a:schemeClr val="accent2"/>
-                </a:solidFill>
-              </a:ln>
-              <a:effectLst/>
-              <a:sp3d contourW="25400">
-                <a:contourClr>
-                  <a:schemeClr val="accent2"/>
-                </a:contourClr>
-              </a:sp3d>
-            </c:spPr>
-            <c:extLst>
-              <c:ext xmlns:c16="http://schemas.microsoft.com/office/drawing/2014/chart" uri="{C3380CC4-5D6E-409C-BE32-E72D297353CC}">
-                <c16:uniqueId val="{0000000C-2C01-43C4-8781-6E18E562C4A9}"/>
-              </c:ext>
-            </c:extLst>
-          </c:dPt>
-          <c:dPt>
-            <c:idx val="2"/>
-            <c:bubble3D val="0"/>
-            <c:spPr>
-              <a:solidFill>
-                <a:schemeClr val="accent3"/>
-              </a:solidFill>
-              <a:ln w="25400">
-                <a:solidFill>
-                  <a:schemeClr val="accent3"/>
-                </a:solidFill>
-              </a:ln>
-              <a:effectLst/>
-              <a:sp3d contourW="25400">
-                <a:contourClr>
-                  <a:schemeClr val="accent3"/>
-                </a:contourClr>
-              </a:sp3d>
-            </c:spPr>
-            <c:extLst>
-              <c:ext xmlns:c16="http://schemas.microsoft.com/office/drawing/2014/chart" uri="{C3380CC4-5D6E-409C-BE32-E72D297353CC}">
-                <c16:uniqueId val="{0000000E-2C01-43C4-8781-6E18E562C4A9}"/>
-              </c:ext>
-            </c:extLst>
-          </c:dPt>
-          <c:dPt>
-            <c:idx val="3"/>
-            <c:bubble3D val="0"/>
-            <c:spPr>
-              <a:solidFill>
-                <a:schemeClr val="accent4"/>
-              </a:solidFill>
-              <a:ln w="25400">
-                <a:solidFill>
-                  <a:schemeClr val="accent4"/>
-                </a:solidFill>
-              </a:ln>
-              <a:effectLst/>
-              <a:sp3d contourW="25400">
-                <a:contourClr>
-                  <a:schemeClr val="accent4"/>
-                </a:contourClr>
-              </a:sp3d>
-            </c:spPr>
-            <c:extLst>
-              <c:ext xmlns:c16="http://schemas.microsoft.com/office/drawing/2014/chart" uri="{C3380CC4-5D6E-409C-BE32-E72D297353CC}">
-                <c16:uniqueId val="{00000010-2C01-43C4-8781-6E18E562C4A9}"/>
-              </c:ext>
-            </c:extLst>
-          </c:dPt>
-          <c:cat>
-            <c:strRef>
-              <c:f>Feuil1!$A$2:$A$5</c:f>
-              <c:strCache>
-                <c:ptCount val="4"/>
-                <c:pt idx="0">
-                  <c:v>Très satisfait</c:v>
-                </c:pt>
-                <c:pt idx="1">
-                  <c:v>Satisfait</c:v>
-                </c:pt>
-                <c:pt idx="2">
-                  <c:v>Déçu</c:v>
-                </c:pt>
-                <c:pt idx="3">
-                  <c:v>Très déçu</c:v>
-                </c:pt>
-              </c:strCache>
-            </c:strRef>
-          </c:cat>
-          <c:val>
-            <c:numRef>
-              <c:f>Feuil1!$C$2:$C$5</c:f>
-              <c:numCache>
-                <c:formatCode>0%</c:formatCode>
-                <c:ptCount val="4"/>
-                <c:pt idx="0">
-                  <c:v>1</c:v>
-                </c:pt>
-                <c:pt idx="1">
-                  <c:v>0</c:v>
-                </c:pt>
-                <c:pt idx="2">
-                  <c:v>0</c:v>
-                </c:pt>
-                <c:pt idx="3">
-                  <c:v>0</c:v>
-                </c:pt>
-              </c:numCache>
-            </c:numRef>
-          </c:val>
-          <c:extLst>
-            <c:ext xmlns:c16="http://schemas.microsoft.com/office/drawing/2014/chart" uri="{C3380CC4-5D6E-409C-BE32-E72D297353CC}">
-              <c16:uniqueId val="{00000011-2C01-43C4-8781-6E18E562C4A9}"/>
             </c:ext>
           </c:extLst>
         </c:ser>
